--- a/odevzdani/cviceni-05-review-ready/prezentace.pptx
+++ b/odevzdani/cviceni-05-review-ready/prezentace.pptx
@@ -4028,7 +4028,7 @@
               </a:defRPr>
             </a:pPr>
             <a:r>
-              <a:t>ROCKS</a:t>
+              <a:t>PULSE</a:t>
             </a:r>
           </a:p>
         </p:txBody>
@@ -4070,7 +4070,7 @@
               </a:defRPr>
             </a:pPr>
             <a:r>
-              <a:t>FESTIVAL / 2026</a:t>
+              <a:t>FEST / 2027</a:t>
             </a:r>
           </a:p>
         </p:txBody>
@@ -4403,7 +4403,7 @@
               </a:defRPr>
             </a:pPr>
             <a:r>
-              <a:t>2026</a:t>
+              <a:t>2027</a:t>
             </a:r>
           </a:p>
         </p:txBody>
@@ -4754,7 +4754,7 @@
               </a:defRPr>
             </a:pPr>
             <a:r>
-              <a:t>ROCKS</a:t>
+              <a:t>PULSE</a:t>
             </a:r>
           </a:p>
         </p:txBody>
@@ -4796,7 +4796,7 @@
               </a:defRPr>
             </a:pPr>
             <a:r>
-              <a:t>FESTIVAL / 2026</a:t>
+              <a:t>FEST / 2027</a:t>
             </a:r>
           </a:p>
         </p:txBody>
@@ -5764,7 +5764,7 @@
               </a:defRPr>
             </a:pPr>
             <a:r>
-              <a:t>ROCKS</a:t>
+              <a:t>PULSE</a:t>
             </a:r>
           </a:p>
         </p:txBody>
@@ -5806,7 +5806,7 @@
               </a:defRPr>
             </a:pPr>
             <a:r>
-              <a:t>FESTIVAL / 2026</a:t>
+              <a:t>FEST / 2027</a:t>
             </a:r>
           </a:p>
         </p:txBody>
@@ -6389,7 +6389,7 @@
               </a:defRPr>
             </a:pPr>
             <a:r>
-              <a:t>Neon → Neon Wave → detail →</a:t>
+              <a:t>Atlas → Atlas Motel → detail →</a:t>
             </a:r>
           </a:p>
           <a:p>
@@ -6896,7 +6896,7 @@
               </a:defRPr>
             </a:pPr>
             <a:r>
-              <a:t>ROCKS</a:t>
+              <a:t>PULSE</a:t>
             </a:r>
           </a:p>
         </p:txBody>
@@ -6938,7 +6938,7 @@
               </a:defRPr>
             </a:pPr>
             <a:r>
-              <a:t>FESTIVAL / 2026</a:t>
+              <a:t>FEST / 2027</a:t>
             </a:r>
           </a:p>
         </p:txBody>
@@ -7827,7 +7827,7 @@
               </a:defRPr>
             </a:pPr>
             <a:r>
-              <a:t>ROCKS</a:t>
+              <a:t>PULSE</a:t>
             </a:r>
           </a:p>
         </p:txBody>
@@ -7869,7 +7869,7 @@
               </a:defRPr>
             </a:pPr>
             <a:r>
-              <a:t>FESTIVAL / 2026</a:t>
+              <a:t>FEST / 2027</a:t>
             </a:r>
           </a:p>
         </p:txBody>
@@ -8758,7 +8758,7 @@
               </a:defRPr>
             </a:pPr>
             <a:r>
-              <a:t>ROCKS</a:t>
+              <a:t>PULSE</a:t>
             </a:r>
           </a:p>
         </p:txBody>
@@ -8800,7 +8800,7 @@
               </a:defRPr>
             </a:pPr>
             <a:r>
-              <a:t>FESTIVAL / 2026</a:t>
+              <a:t>FEST / 2027</a:t>
             </a:r>
           </a:p>
         </p:txBody>

--- a/odevzdani/cviceni-05-review-ready/prezentace.pptx
+++ b/odevzdani/cviceni-05-review-ready/prezentace.pptx
@@ -577,7 +577,7 @@
           <a:lstStyle/>
           <a:p>
             <a:r>
-              <a:t>Web obsahuje všechny hlavní obsahové části, takže hodnocení nemusí stát na prázdných zástupných stránkách. K dispozici je šedesát interpretů a vystoupení během tří dnů na třech scénách. Vyhledávání a filtry mají skutečný datový podklad. Doplňkové cesty zahrnují lokalitu, jazykovou volbu a objednávku. Čísla dokazují rozsah obsahu, nikoli automaticky kvalitu UX. Proto předáváme konkrétní scénáře, očekávané výsledky a známé limity, aby review nezůstalo u obecného dojmu z grafiky.</a:t>
+              <a:t>Web obsahuje všechny hlavní obsahové části, takže hodnocení nemusí stát na prázdných zástupných stránkách. K dispozici je šedesát interpretů a programových položek během tří dnů na třech scénách. Vyhledávání a filtry mají skutečný datový podklad. Doplňkové cesty zahrnují lokalitu, jazykovou volbu a objednávku. Čísla dokazují rozsah obsahu, nikoli automaticky kvalitu UX. Proto předáváme konkrétní scénáře, očekávané výsledky a známé limity, aby review nezůstalo u obecného dojmu z grafiky.</a:t>
             </a:r>
           </a:p>
         </p:txBody>
@@ -787,7 +787,7 @@
           <a:lstStyle/>
           <a:p>
             <a:r>
-              <a:t>Je důležité nehodnotit klientský školní projekt jako produkční ticketing. Účty a obsazenost se nešíří mezi zařízeními, PDF se stahuje místně a e-mail se automaticky neposílá. Mapa je doplněk závislý na připojení. Známé jsou také limity ověření: nemáme plný audit se čtečkou, všechna fyzická zařízení ani doložený výzkum s návštěvníky. Tyto informace neomlouvají chyby v základních scénářích, ale dávají reviewerům správný kontext a brání zavádějícím závěrům.</a:t>
+              <a:t>Je důležité nehodnotit klientský školní projekt jako produkční ticketing. Účty a obsazenost se nešíří mezi zařízeními, PDF se stahuje místně a e-mail se automaticky neposílá. Mapa je doplněk závislý na připojení. Známé jsou také limity ověření: nemáme plný audit se čtečkou, všechna fyzická zařízení ani doložený výzkum s návštěvníky. Tyto informace neomlouvají chyby v základních scénářích, ale dávají reviewerům správný kontext a brání zavádějícím závěrům. Skuteční interpreti jsou návrh bez potvrzené účasti. Noisia nevystupuje živě. Aktuálně používáme 41 skutečných fotografií umělců s autorstvím a licencemi, 19 typografických náhrad a historickou fotografii areálu z roku 2018. Datum snímku je viditelné, takže jej nezaměňujeme za současný stav nebo instalaci pro rok 2027.</a:t>
             </a:r>
           </a:p>
         </p:txBody>
@@ -4077,50 +4077,7 @@
       </p:sp>
       <p:sp>
         <p:nvSpPr>
-          <p:cNvPr id="7" name="Rectangle 6"/>
-          <p:cNvSpPr/>
-          <p:nvPr/>
-        </p:nvSpPr>
-        <p:spPr>
-          <a:xfrm>
-            <a:off x="2266950" y="463550"/>
-            <a:ext cx="115570" cy="561340"/>
-          </a:xfrm>
-          <a:prstGeom prst="rect">
-            <a:avLst/>
-          </a:prstGeom>
-          <a:solidFill>
-            <a:srgbClr val="F4F0E7"/>
-          </a:solidFill>
-          <a:ln>
-            <a:noFill/>
-          </a:ln>
-        </p:spPr>
-        <p:style>
-          <a:lnRef idx="1">
-            <a:schemeClr val="accent1"/>
-          </a:lnRef>
-          <a:fillRef idx="3">
-            <a:schemeClr val="accent1"/>
-          </a:fillRef>
-          <a:effectRef idx="2">
-            <a:schemeClr val="accent1"/>
-          </a:effectRef>
-          <a:fontRef idx="minor">
-            <a:schemeClr val="lt1"/>
-          </a:fontRef>
-        </p:style>
-        <p:txBody>
-          <a:bodyPr rtlCol="0" anchor="ctr"/>
-          <a:lstStyle/>
-          <a:p>
-            <a:pPr algn="ctr"/>
-          </a:p>
-        </p:txBody>
-      </p:sp>
-      <p:sp>
-        <p:nvSpPr>
-          <p:cNvPr id="8" name="TextBox 7"/>
+          <p:cNvPr id="7" name="TextBox 6"/>
           <p:cNvSpPr txBox="1"/>
           <p:nvPr/>
         </p:nvSpPr>
@@ -4162,7 +4119,7 @@
       </p:sp>
       <p:sp>
         <p:nvSpPr>
-          <p:cNvPr id="9" name="TextBox 8"/>
+          <p:cNvPr id="8" name="TextBox 7"/>
           <p:cNvSpPr txBox="1"/>
           <p:nvPr/>
         </p:nvSpPr>
@@ -4223,7 +4180,7 @@
       </p:sp>
       <p:sp>
         <p:nvSpPr>
-          <p:cNvPr id="10" name="TextBox 9"/>
+          <p:cNvPr id="9" name="TextBox 8"/>
           <p:cNvSpPr txBox="1"/>
           <p:nvPr/>
         </p:nvSpPr>
@@ -4284,7 +4241,7 @@
       </p:sp>
       <p:sp>
         <p:nvSpPr>
-          <p:cNvPr id="11" name="TextBox 10"/>
+          <p:cNvPr id="10" name="TextBox 9"/>
           <p:cNvSpPr txBox="1"/>
           <p:nvPr/>
         </p:nvSpPr>
@@ -4326,7 +4283,7 @@
       </p:sp>
       <p:sp>
         <p:nvSpPr>
-          <p:cNvPr id="12" name="TextBox 11"/>
+          <p:cNvPr id="11" name="TextBox 10"/>
           <p:cNvSpPr txBox="1"/>
           <p:nvPr/>
         </p:nvSpPr>
@@ -4368,7 +4325,7 @@
       </p:sp>
       <p:sp>
         <p:nvSpPr>
-          <p:cNvPr id="13" name="TextBox 12"/>
+          <p:cNvPr id="12" name="TextBox 11"/>
           <p:cNvSpPr txBox="1"/>
           <p:nvPr/>
         </p:nvSpPr>
@@ -4410,7 +4367,7 @@
       </p:sp>
       <p:sp>
         <p:nvSpPr>
-          <p:cNvPr id="14" name="TextBox 13"/>
+          <p:cNvPr id="13" name="TextBox 12"/>
           <p:cNvSpPr txBox="1"/>
           <p:nvPr/>
         </p:nvSpPr>
@@ -4471,7 +4428,7 @@
       </p:sp>
       <p:sp>
         <p:nvSpPr>
-          <p:cNvPr id="15" name="TextBox 14"/>
+          <p:cNvPr id="14" name="TextBox 13"/>
           <p:cNvSpPr txBox="1"/>
           <p:nvPr/>
         </p:nvSpPr>
@@ -4532,7 +4489,7 @@
       </p:sp>
       <p:sp>
         <p:nvSpPr>
-          <p:cNvPr id="16" name="TextBox 15"/>
+          <p:cNvPr id="15" name="TextBox 14"/>
           <p:cNvSpPr txBox="1"/>
           <p:nvPr/>
         </p:nvSpPr>
@@ -4574,7 +4531,7 @@
       </p:sp>
       <p:sp>
         <p:nvSpPr>
-          <p:cNvPr id="17" name="TextBox 16"/>
+          <p:cNvPr id="16" name="TextBox 15"/>
           <p:cNvSpPr txBox="1"/>
           <p:nvPr/>
         </p:nvSpPr>
@@ -4803,14 +4760,141 @@
       </p:sp>
       <p:sp>
         <p:nvSpPr>
-          <p:cNvPr id="6" name="Rectangle 5"/>
+          <p:cNvPr id="6" name="TextBox 5"/>
+          <p:cNvSpPr txBox="1"/>
+          <p:nvPr/>
+        </p:nvSpPr>
+        <p:spPr>
+          <a:xfrm>
+            <a:off x="5588000" y="533400"/>
+            <a:ext cx="6070600" cy="220979"/>
+          </a:xfrm>
+          <a:prstGeom prst="rect">
+            <a:avLst/>
+          </a:prstGeom>
+          <a:noFill/>
+        </p:spPr>
+        <p:txBody>
+          <a:bodyPr wrap="none" lIns="0" rIns="0" tIns="0" bIns="0">
+            <a:spAutoFit/>
+          </a:bodyPr>
+          <a:lstStyle/>
+          <a:p>
+            <a:pPr>
+              <a:lnSpc>
+                <a:spcPts val="1240"/>
+              </a:lnSpc>
+              <a:spcAft>
+                <a:spcPts val="0"/>
+              </a:spcAft>
+              <a:defRPr sz="1000" b="1">
+                <a:solidFill>
+                  <a:srgbClr val="68635B"/>
+                </a:solidFill>
+                <a:latin typeface="Arial"/>
+              </a:defRPr>
+            </a:pPr>
+            <a:r>
+              <a:t>ROZSAH PŘEDÁNÍ</a:t>
+            </a:r>
+          </a:p>
+        </p:txBody>
+      </p:sp>
+      <p:sp>
+        <p:nvSpPr>
+          <p:cNvPr id="7" name="Rectangle 6"/>
           <p:cNvSpPr/>
           <p:nvPr/>
         </p:nvSpPr>
         <p:spPr>
           <a:xfrm>
-            <a:off x="1866900" y="368300"/>
-            <a:ext cx="88900" cy="431800"/>
+            <a:off x="533400" y="1155700"/>
+            <a:ext cx="11125200" cy="25400"/>
+          </a:xfrm>
+          <a:prstGeom prst="rect">
+            <a:avLst/>
+          </a:prstGeom>
+          <a:solidFill>
+            <a:srgbClr val="181817"/>
+          </a:solidFill>
+          <a:ln>
+            <a:noFill/>
+          </a:ln>
+        </p:spPr>
+        <p:style>
+          <a:lnRef idx="1">
+            <a:schemeClr val="accent1"/>
+          </a:lnRef>
+          <a:fillRef idx="3">
+            <a:schemeClr val="accent1"/>
+          </a:fillRef>
+          <a:effectRef idx="2">
+            <a:schemeClr val="accent1"/>
+          </a:effectRef>
+          <a:fontRef idx="minor">
+            <a:schemeClr val="lt1"/>
+          </a:fontRef>
+        </p:style>
+        <p:txBody>
+          <a:bodyPr rtlCol="0" anchor="ctr"/>
+          <a:lstStyle/>
+          <a:p>
+            <a:pPr algn="ctr"/>
+          </a:p>
+        </p:txBody>
+      </p:sp>
+      <p:sp>
+        <p:nvSpPr>
+          <p:cNvPr id="8" name="TextBox 7"/>
+          <p:cNvSpPr txBox="1"/>
+          <p:nvPr/>
+        </p:nvSpPr>
+        <p:spPr>
+          <a:xfrm>
+            <a:off x="508000" y="1422400"/>
+            <a:ext cx="11176000" cy="1079500"/>
+          </a:xfrm>
+          <a:prstGeom prst="rect">
+            <a:avLst/>
+          </a:prstGeom>
+          <a:noFill/>
+        </p:spPr>
+        <p:txBody>
+          <a:bodyPr wrap="none" lIns="0" rIns="0" tIns="0" bIns="0">
+            <a:spAutoFit/>
+          </a:bodyPr>
+          <a:lstStyle/>
+          <a:p>
+            <a:pPr>
+              <a:lnSpc>
+                <a:spcPts val="3740"/>
+              </a:lnSpc>
+              <a:spcAft>
+                <a:spcPts val="0"/>
+              </a:spcAft>
+              <a:defRPr sz="3400" b="1">
+                <a:solidFill>
+                  <a:srgbClr val="181817"/>
+                </a:solidFill>
+                <a:latin typeface="Arial"/>
+              </a:defRPr>
+            </a:pPr>
+            <a:r>
+              <a:t>Obsah pro skutečný průchod.</a:t>
+            </a:r>
+          </a:p>
+        </p:txBody>
+      </p:sp>
+      <p:sp>
+        <p:nvSpPr>
+          <p:cNvPr id="9" name="Rectangle 8"/>
+          <p:cNvSpPr/>
+          <p:nvPr/>
+        </p:nvSpPr>
+        <p:spPr>
+          <a:xfrm>
+            <a:off x="533400" y="2794000"/>
+            <a:ext cx="2552700" cy="2095500"/>
           </a:xfrm>
           <a:prstGeom prst="rect">
             <a:avLst/>
@@ -4846,14 +4930,14 @@
       </p:sp>
       <p:sp>
         <p:nvSpPr>
-          <p:cNvPr id="7" name="TextBox 6"/>
+          <p:cNvPr id="10" name="TextBox 9"/>
           <p:cNvSpPr txBox="1"/>
           <p:nvPr/>
         </p:nvSpPr>
         <p:spPr>
           <a:xfrm>
-            <a:off x="5588000" y="533400"/>
-            <a:ext cx="6070600" cy="220979"/>
+            <a:off x="762000" y="2921000"/>
+            <a:ext cx="2133600" cy="1102868"/>
           </a:xfrm>
           <a:prstGeom prst="rect">
             <a:avLst/>
@@ -4868,77 +4952,34 @@
           <a:p>
             <a:pPr>
               <a:lnSpc>
-                <a:spcPts val="1240"/>
-              </a:lnSpc>
-              <a:spcAft>
-                <a:spcPts val="0"/>
-              </a:spcAft>
-              <a:defRPr sz="1000" b="1">
-                <a:solidFill>
-                  <a:srgbClr val="68635B"/>
-                </a:solidFill>
-                <a:latin typeface="Arial"/>
-              </a:defRPr>
-            </a:pPr>
-            <a:r>
-              <a:t>ROZSAH PŘEDÁNÍ</a:t>
-            </a:r>
-          </a:p>
-        </p:txBody>
-      </p:sp>
-      <p:sp>
-        <p:nvSpPr>
-          <p:cNvPr id="8" name="Rectangle 7"/>
-          <p:cNvSpPr/>
-          <p:nvPr/>
-        </p:nvSpPr>
-        <p:spPr>
-          <a:xfrm>
-            <a:off x="533400" y="1155700"/>
-            <a:ext cx="11125200" cy="25400"/>
-          </a:xfrm>
-          <a:prstGeom prst="rect">
-            <a:avLst/>
-          </a:prstGeom>
-          <a:solidFill>
-            <a:srgbClr val="181817"/>
-          </a:solidFill>
-          <a:ln>
-            <a:noFill/>
-          </a:ln>
-        </p:spPr>
-        <p:style>
-          <a:lnRef idx="1">
-            <a:schemeClr val="accent1"/>
-          </a:lnRef>
-          <a:fillRef idx="3">
-            <a:schemeClr val="accent1"/>
-          </a:fillRef>
-          <a:effectRef idx="2">
-            <a:schemeClr val="accent1"/>
-          </a:effectRef>
-          <a:fontRef idx="minor">
-            <a:schemeClr val="lt1"/>
-          </a:fontRef>
-        </p:style>
-        <p:txBody>
-          <a:bodyPr rtlCol="0" anchor="ctr"/>
-          <a:lstStyle/>
-          <a:p>
-            <a:pPr algn="ctr"/>
-          </a:p>
-        </p:txBody>
-      </p:sp>
-      <p:sp>
-        <p:nvSpPr>
-          <p:cNvPr id="9" name="TextBox 8"/>
+                <a:spcPts val="8184"/>
+              </a:lnSpc>
+              <a:spcAft>
+                <a:spcPts val="0"/>
+              </a:spcAft>
+              <a:defRPr sz="6600" b="1">
+                <a:solidFill>
+                  <a:srgbClr val="181817"/>
+                </a:solidFill>
+                <a:latin typeface="Arial"/>
+              </a:defRPr>
+            </a:pPr>
+            <a:r>
+              <a:t>3</a:t>
+            </a:r>
+          </a:p>
+        </p:txBody>
+      </p:sp>
+      <p:sp>
+        <p:nvSpPr>
+          <p:cNvPr id="11" name="TextBox 10"/>
           <p:cNvSpPr txBox="1"/>
           <p:nvPr/>
         </p:nvSpPr>
         <p:spPr>
           <a:xfrm>
-            <a:off x="508000" y="1422400"/>
-            <a:ext cx="11176000" cy="1079500"/>
+            <a:off x="762000" y="4165600"/>
+            <a:ext cx="2133600" cy="252476"/>
           </a:xfrm>
           <a:prstGeom prst="rect">
             <a:avLst/>
@@ -4953,12 +4994,12 @@
           <a:p>
             <a:pPr>
               <a:lnSpc>
-                <a:spcPts val="3740"/>
-              </a:lnSpc>
-              <a:spcAft>
-                <a:spcPts val="0"/>
-              </a:spcAft>
-              <a:defRPr sz="3400" b="1">
+                <a:spcPts val="1488"/>
+              </a:lnSpc>
+              <a:spcAft>
+                <a:spcPts val="0"/>
+              </a:spcAft>
+              <a:defRPr sz="1200" b="1">
                 <a:solidFill>
                   <a:srgbClr val="181817"/>
                 </a:solidFill>
@@ -4966,133 +5007,6 @@
               </a:defRPr>
             </a:pPr>
             <a:r>
-              <a:t>Obsah pro skutečný průchod.</a:t>
-            </a:r>
-          </a:p>
-        </p:txBody>
-      </p:sp>
-      <p:sp>
-        <p:nvSpPr>
-          <p:cNvPr id="10" name="Rectangle 9"/>
-          <p:cNvSpPr/>
-          <p:nvPr/>
-        </p:nvSpPr>
-        <p:spPr>
-          <a:xfrm>
-            <a:off x="533400" y="2794000"/>
-            <a:ext cx="2552700" cy="2095500"/>
-          </a:xfrm>
-          <a:prstGeom prst="rect">
-            <a:avLst/>
-          </a:prstGeom>
-          <a:solidFill>
-            <a:srgbClr val="F45E2B"/>
-          </a:solidFill>
-          <a:ln>
-            <a:noFill/>
-          </a:ln>
-        </p:spPr>
-        <p:style>
-          <a:lnRef idx="1">
-            <a:schemeClr val="accent1"/>
-          </a:lnRef>
-          <a:fillRef idx="3">
-            <a:schemeClr val="accent1"/>
-          </a:fillRef>
-          <a:effectRef idx="2">
-            <a:schemeClr val="accent1"/>
-          </a:effectRef>
-          <a:fontRef idx="minor">
-            <a:schemeClr val="lt1"/>
-          </a:fontRef>
-        </p:style>
-        <p:txBody>
-          <a:bodyPr rtlCol="0" anchor="ctr"/>
-          <a:lstStyle/>
-          <a:p>
-            <a:pPr algn="ctr"/>
-          </a:p>
-        </p:txBody>
-      </p:sp>
-      <p:sp>
-        <p:nvSpPr>
-          <p:cNvPr id="11" name="TextBox 10"/>
-          <p:cNvSpPr txBox="1"/>
-          <p:nvPr/>
-        </p:nvSpPr>
-        <p:spPr>
-          <a:xfrm>
-            <a:off x="762000" y="2921000"/>
-            <a:ext cx="2133600" cy="1102868"/>
-          </a:xfrm>
-          <a:prstGeom prst="rect">
-            <a:avLst/>
-          </a:prstGeom>
-          <a:noFill/>
-        </p:spPr>
-        <p:txBody>
-          <a:bodyPr wrap="none" lIns="0" rIns="0" tIns="0" bIns="0">
-            <a:spAutoFit/>
-          </a:bodyPr>
-          <a:lstStyle/>
-          <a:p>
-            <a:pPr>
-              <a:lnSpc>
-                <a:spcPts val="8184"/>
-              </a:lnSpc>
-              <a:spcAft>
-                <a:spcPts val="0"/>
-              </a:spcAft>
-              <a:defRPr sz="6600" b="1">
-                <a:solidFill>
-                  <a:srgbClr val="181817"/>
-                </a:solidFill>
-                <a:latin typeface="Arial"/>
-              </a:defRPr>
-            </a:pPr>
-            <a:r>
-              <a:t>3</a:t>
-            </a:r>
-          </a:p>
-        </p:txBody>
-      </p:sp>
-      <p:sp>
-        <p:nvSpPr>
-          <p:cNvPr id="12" name="TextBox 11"/>
-          <p:cNvSpPr txBox="1"/>
-          <p:nvPr/>
-        </p:nvSpPr>
-        <p:spPr>
-          <a:xfrm>
-            <a:off x="762000" y="4165600"/>
-            <a:ext cx="2133600" cy="252476"/>
-          </a:xfrm>
-          <a:prstGeom prst="rect">
-            <a:avLst/>
-          </a:prstGeom>
-          <a:noFill/>
-        </p:spPr>
-        <p:txBody>
-          <a:bodyPr wrap="none" lIns="0" rIns="0" tIns="0" bIns="0">
-            <a:spAutoFit/>
-          </a:bodyPr>
-          <a:lstStyle/>
-          <a:p>
-            <a:pPr>
-              <a:lnSpc>
-                <a:spcPts val="1488"/>
-              </a:lnSpc>
-              <a:spcAft>
-                <a:spcPts val="0"/>
-              </a:spcAft>
-              <a:defRPr sz="1200" b="1">
-                <a:solidFill>
-                  <a:srgbClr val="181817"/>
-                </a:solidFill>
-                <a:latin typeface="Arial"/>
-              </a:defRPr>
-            </a:pPr>
-            <a:r>
               <a:t>dny programu</a:t>
             </a:r>
           </a:p>
@@ -5100,7 +5014,7 @@
       </p:sp>
       <p:sp>
         <p:nvSpPr>
-          <p:cNvPr id="13" name="Rectangle 12"/>
+          <p:cNvPr id="12" name="Rectangle 11"/>
           <p:cNvSpPr/>
           <p:nvPr/>
         </p:nvSpPr>
@@ -5143,7 +5057,7 @@
       </p:sp>
       <p:sp>
         <p:nvSpPr>
-          <p:cNvPr id="14" name="TextBox 13"/>
+          <p:cNvPr id="13" name="TextBox 12"/>
           <p:cNvSpPr txBox="1"/>
           <p:nvPr/>
         </p:nvSpPr>
@@ -5185,7 +5099,7 @@
       </p:sp>
       <p:sp>
         <p:nvSpPr>
-          <p:cNvPr id="15" name="TextBox 14"/>
+          <p:cNvPr id="14" name="TextBox 13"/>
           <p:cNvSpPr txBox="1"/>
           <p:nvPr/>
         </p:nvSpPr>
@@ -5227,7 +5141,7 @@
       </p:sp>
       <p:sp>
         <p:nvSpPr>
-          <p:cNvPr id="16" name="Rectangle 15"/>
+          <p:cNvPr id="15" name="Rectangle 14"/>
           <p:cNvSpPr/>
           <p:nvPr/>
         </p:nvSpPr>
@@ -5270,7 +5184,7 @@
       </p:sp>
       <p:sp>
         <p:nvSpPr>
-          <p:cNvPr id="17" name="TextBox 16"/>
+          <p:cNvPr id="16" name="TextBox 15"/>
           <p:cNvSpPr txBox="1"/>
           <p:nvPr/>
         </p:nvSpPr>
@@ -5312,7 +5226,7 @@
       </p:sp>
       <p:sp>
         <p:nvSpPr>
-          <p:cNvPr id="18" name="TextBox 17"/>
+          <p:cNvPr id="17" name="TextBox 16"/>
           <p:cNvSpPr txBox="1"/>
           <p:nvPr/>
         </p:nvSpPr>
@@ -5354,7 +5268,7 @@
       </p:sp>
       <p:sp>
         <p:nvSpPr>
-          <p:cNvPr id="19" name="Rectangle 18"/>
+          <p:cNvPr id="18" name="Rectangle 17"/>
           <p:cNvSpPr/>
           <p:nvPr/>
         </p:nvSpPr>
@@ -5397,7 +5311,7 @@
       </p:sp>
       <p:sp>
         <p:nvSpPr>
-          <p:cNvPr id="20" name="TextBox 19"/>
+          <p:cNvPr id="19" name="TextBox 18"/>
           <p:cNvSpPr txBox="1"/>
           <p:nvPr/>
         </p:nvSpPr>
@@ -5439,7 +5353,7 @@
       </p:sp>
       <p:sp>
         <p:nvSpPr>
-          <p:cNvPr id="21" name="TextBox 20"/>
+          <p:cNvPr id="20" name="TextBox 19"/>
           <p:cNvSpPr txBox="1"/>
           <p:nvPr/>
         </p:nvSpPr>
@@ -5474,14 +5388,14 @@
               </a:defRPr>
             </a:pPr>
             <a:r>
-              <a:t>vystoupení</a:t>
-            </a:r>
-          </a:p>
-        </p:txBody>
-      </p:sp>
-      <p:sp>
-        <p:nvSpPr>
-          <p:cNvPr id="22" name="TextBox 21"/>
+              <a:t>programových položek</a:t>
+            </a:r>
+          </a:p>
+        </p:txBody>
+      </p:sp>
+      <p:sp>
+        <p:nvSpPr>
+          <p:cNvPr id="21" name="TextBox 20"/>
           <p:cNvSpPr txBox="1"/>
           <p:nvPr/>
         </p:nvSpPr>
@@ -5542,7 +5456,7 @@
       </p:sp>
       <p:sp>
         <p:nvSpPr>
-          <p:cNvPr id="23" name="TextBox 22"/>
+          <p:cNvPr id="22" name="TextBox 21"/>
           <p:cNvSpPr txBox="1"/>
           <p:nvPr/>
         </p:nvSpPr>
@@ -5584,7 +5498,7 @@
       </p:sp>
       <p:sp>
         <p:nvSpPr>
-          <p:cNvPr id="24" name="TextBox 23"/>
+          <p:cNvPr id="23" name="TextBox 22"/>
           <p:cNvSpPr txBox="1"/>
           <p:nvPr/>
         </p:nvSpPr>
@@ -5813,14 +5727,184 @@
       </p:sp>
       <p:sp>
         <p:nvSpPr>
-          <p:cNvPr id="6" name="Rectangle 5"/>
+          <p:cNvPr id="6" name="TextBox 5"/>
+          <p:cNvSpPr txBox="1"/>
+          <p:nvPr/>
+        </p:nvSpPr>
+        <p:spPr>
+          <a:xfrm>
+            <a:off x="5588000" y="533400"/>
+            <a:ext cx="6070600" cy="220979"/>
+          </a:xfrm>
+          <a:prstGeom prst="rect">
+            <a:avLst/>
+          </a:prstGeom>
+          <a:noFill/>
+        </p:spPr>
+        <p:txBody>
+          <a:bodyPr wrap="none" lIns="0" rIns="0" tIns="0" bIns="0">
+            <a:spAutoFit/>
+          </a:bodyPr>
+          <a:lstStyle/>
+          <a:p>
+            <a:pPr>
+              <a:lnSpc>
+                <a:spcPts val="1240"/>
+              </a:lnSpc>
+              <a:spcAft>
+                <a:spcPts val="0"/>
+              </a:spcAft>
+              <a:defRPr sz="1000" b="1">
+                <a:solidFill>
+                  <a:srgbClr val="68635B"/>
+                </a:solidFill>
+                <a:latin typeface="Arial"/>
+              </a:defRPr>
+            </a:pPr>
+            <a:r>
+              <a:t>PROSÍME PROJÍT A ZAZNAMENAT</a:t>
+            </a:r>
+          </a:p>
+        </p:txBody>
+      </p:sp>
+      <p:sp>
+        <p:nvSpPr>
+          <p:cNvPr id="7" name="Rectangle 6"/>
           <p:cNvSpPr/>
           <p:nvPr/>
         </p:nvSpPr>
         <p:spPr>
           <a:xfrm>
-            <a:off x="1866900" y="368300"/>
-            <a:ext cx="88900" cy="431800"/>
+            <a:off x="533400" y="1155700"/>
+            <a:ext cx="11125200" cy="25400"/>
+          </a:xfrm>
+          <a:prstGeom prst="rect">
+            <a:avLst/>
+          </a:prstGeom>
+          <a:solidFill>
+            <a:srgbClr val="181817"/>
+          </a:solidFill>
+          <a:ln>
+            <a:noFill/>
+          </a:ln>
+        </p:spPr>
+        <p:style>
+          <a:lnRef idx="1">
+            <a:schemeClr val="accent1"/>
+          </a:lnRef>
+          <a:fillRef idx="3">
+            <a:schemeClr val="accent1"/>
+          </a:fillRef>
+          <a:effectRef idx="2">
+            <a:schemeClr val="accent1"/>
+          </a:effectRef>
+          <a:fontRef idx="minor">
+            <a:schemeClr val="lt1"/>
+          </a:fontRef>
+        </p:style>
+        <p:txBody>
+          <a:bodyPr rtlCol="0" anchor="ctr"/>
+          <a:lstStyle/>
+          <a:p>
+            <a:pPr algn="ctr"/>
+          </a:p>
+        </p:txBody>
+      </p:sp>
+      <p:sp>
+        <p:nvSpPr>
+          <p:cNvPr id="8" name="TextBox 7"/>
+          <p:cNvSpPr txBox="1"/>
+          <p:nvPr/>
+        </p:nvSpPr>
+        <p:spPr>
+          <a:xfrm>
+            <a:off x="508000" y="1422400"/>
+            <a:ext cx="11176000" cy="1079500"/>
+          </a:xfrm>
+          <a:prstGeom prst="rect">
+            <a:avLst/>
+          </a:prstGeom>
+          <a:noFill/>
+        </p:spPr>
+        <p:txBody>
+          <a:bodyPr wrap="none" lIns="0" rIns="0" tIns="0" bIns="0">
+            <a:spAutoFit/>
+          </a:bodyPr>
+          <a:lstStyle/>
+          <a:p>
+            <a:pPr>
+              <a:lnSpc>
+                <a:spcPts val="3740"/>
+              </a:lnSpc>
+              <a:spcAft>
+                <a:spcPts val="0"/>
+              </a:spcAft>
+              <a:defRPr sz="3400" b="1">
+                <a:solidFill>
+                  <a:srgbClr val="181817"/>
+                </a:solidFill>
+                <a:latin typeface="Arial"/>
+              </a:defRPr>
+            </a:pPr>
+            <a:r>
+              <a:t>Tři úkoly pro hodnotící tým.</a:t>
+            </a:r>
+          </a:p>
+        </p:txBody>
+      </p:sp>
+      <p:sp>
+        <p:nvSpPr>
+          <p:cNvPr id="9" name="Rectangle 8"/>
+          <p:cNvSpPr/>
+          <p:nvPr/>
+        </p:nvSpPr>
+        <p:spPr>
+          <a:xfrm>
+            <a:off x="533400" y="2768600"/>
+            <a:ext cx="3556000" cy="2603500"/>
+          </a:xfrm>
+          <a:prstGeom prst="rect">
+            <a:avLst/>
+          </a:prstGeom>
+          <a:solidFill>
+            <a:srgbClr val="181817"/>
+          </a:solidFill>
+          <a:ln>
+            <a:noFill/>
+          </a:ln>
+        </p:spPr>
+        <p:style>
+          <a:lnRef idx="1">
+            <a:schemeClr val="accent1"/>
+          </a:lnRef>
+          <a:fillRef idx="3">
+            <a:schemeClr val="accent1"/>
+          </a:fillRef>
+          <a:effectRef idx="2">
+            <a:schemeClr val="accent1"/>
+          </a:effectRef>
+          <a:fontRef idx="minor">
+            <a:schemeClr val="lt1"/>
+          </a:fontRef>
+        </p:style>
+        <p:txBody>
+          <a:bodyPr rtlCol="0" anchor="ctr"/>
+          <a:lstStyle/>
+          <a:p>
+            <a:pPr algn="ctr"/>
+          </a:p>
+        </p:txBody>
+      </p:sp>
+      <p:sp>
+        <p:nvSpPr>
+          <p:cNvPr id="10" name="Rectangle 9"/>
+          <p:cNvSpPr/>
+          <p:nvPr/>
+        </p:nvSpPr>
+        <p:spPr>
+          <a:xfrm>
+            <a:off x="533400" y="2768600"/>
+            <a:ext cx="3556000" cy="76200"/>
           </a:xfrm>
           <a:prstGeom prst="rect">
             <a:avLst/>
@@ -5856,14 +5940,14 @@
       </p:sp>
       <p:sp>
         <p:nvSpPr>
-          <p:cNvPr id="7" name="TextBox 6"/>
+          <p:cNvPr id="11" name="TextBox 10"/>
           <p:cNvSpPr txBox="1"/>
           <p:nvPr/>
         </p:nvSpPr>
         <p:spPr>
           <a:xfrm>
-            <a:off x="5588000" y="533400"/>
-            <a:ext cx="6070600" cy="220979"/>
+            <a:off x="749300" y="3035300"/>
+            <a:ext cx="3124200" cy="685800"/>
           </a:xfrm>
           <a:prstGeom prst="rect">
             <a:avLst/>
@@ -5878,40 +5962,155 @@
           <a:p>
             <a:pPr>
               <a:lnSpc>
-                <a:spcPts val="1240"/>
-              </a:lnSpc>
-              <a:spcAft>
-                <a:spcPts val="0"/>
-              </a:spcAft>
-              <a:defRPr sz="1000" b="1">
-                <a:solidFill>
-                  <a:srgbClr val="68635B"/>
-                </a:solidFill>
-                <a:latin typeface="Arial"/>
-              </a:defRPr>
-            </a:pPr>
-            <a:r>
-              <a:t>PROSÍME PROJÍT A ZAZNAMENAT</a:t>
-            </a:r>
-          </a:p>
-        </p:txBody>
-      </p:sp>
-      <p:sp>
-        <p:nvSpPr>
-          <p:cNvPr id="8" name="Rectangle 7"/>
+                <a:spcPts val="2200"/>
+              </a:lnSpc>
+              <a:spcAft>
+                <a:spcPts val="0"/>
+              </a:spcAft>
+              <a:defRPr sz="2000" b="1">
+                <a:solidFill>
+                  <a:srgbClr val="F4F0E7"/>
+                </a:solidFill>
+                <a:latin typeface="Arial"/>
+              </a:defRPr>
+            </a:pPr>
+            <a:r>
+              <a:t>S1 / Program</a:t>
+            </a:r>
+          </a:p>
+        </p:txBody>
+      </p:sp>
+      <p:sp>
+        <p:nvSpPr>
+          <p:cNvPr id="12" name="TextBox 11"/>
+          <p:cNvSpPr txBox="1"/>
+          <p:nvPr/>
+        </p:nvSpPr>
+        <p:spPr>
+          <a:xfrm>
+            <a:off x="749300" y="3733800"/>
+            <a:ext cx="3124200" cy="1511300"/>
+          </a:xfrm>
+          <a:prstGeom prst="rect">
+            <a:avLst/>
+          </a:prstGeom>
+          <a:noFill/>
+        </p:spPr>
+        <p:txBody>
+          <a:bodyPr wrap="none" lIns="0" rIns="0" tIns="0" bIns="0">
+            <a:spAutoFit/>
+          </a:bodyPr>
+          <a:lstStyle/>
+          <a:p>
+            <a:pPr>
+              <a:lnSpc>
+                <a:spcPts val="1689"/>
+              </a:lnSpc>
+              <a:spcAft>
+                <a:spcPts val="0"/>
+              </a:spcAft>
+              <a:defRPr sz="1420" b="0">
+                <a:solidFill>
+                  <a:srgbClr val="F4F0E7"/>
+                </a:solidFill>
+                <a:latin typeface="Arial"/>
+              </a:defRPr>
+            </a:pPr>
+            <a:r>
+              <a:t>Den 1 + River Stage → uložit</a:t>
+            </a:r>
+          </a:p>
+          <a:p>
+            <a:pPr>
+              <a:lnSpc>
+                <a:spcPts val="1689"/>
+              </a:lnSpc>
+              <a:spcAft>
+                <a:spcPts val="0"/>
+              </a:spcAft>
+              <a:defRPr sz="1420" b="0">
+                <a:solidFill>
+                  <a:srgbClr val="F4F0E7"/>
+                </a:solidFill>
+                <a:latin typeface="Arial"/>
+              </a:defRPr>
+            </a:pPr>
+            <a:r>
+              <a:t>koncert → osobní program →</a:t>
+            </a:r>
+          </a:p>
+          <a:p>
+            <a:pPr>
+              <a:lnSpc>
+                <a:spcPts val="1689"/>
+              </a:lnSpc>
+              <a:spcAft>
+                <a:spcPts val="0"/>
+              </a:spcAft>
+              <a:defRPr sz="1420" b="0">
+                <a:solidFill>
+                  <a:srgbClr val="F4F0E7"/>
+                </a:solidFill>
+                <a:latin typeface="Arial"/>
+              </a:defRPr>
+            </a:pPr>
+            <a:r>
+              <a:t>obnovit.</a:t>
+            </a:r>
+          </a:p>
+          <a:p>
+            <a:pPr>
+              <a:lnSpc>
+                <a:spcPts val="1689"/>
+              </a:lnSpc>
+              <a:spcAft>
+                <a:spcPts val="0"/>
+              </a:spcAft>
+              <a:defRPr sz="1420" b="0">
+                <a:solidFill>
+                  <a:srgbClr val="F4F0E7"/>
+                </a:solidFill>
+                <a:latin typeface="Arial"/>
+              </a:defRPr>
+            </a:pPr>
+          </a:p>
+          <a:p>
+            <a:pPr>
+              <a:lnSpc>
+                <a:spcPts val="1689"/>
+              </a:lnSpc>
+              <a:spcAft>
+                <a:spcPts val="0"/>
+              </a:spcAft>
+              <a:defRPr sz="1420" b="0">
+                <a:solidFill>
+                  <a:srgbClr val="F4F0E7"/>
+                </a:solidFill>
+                <a:latin typeface="Arial"/>
+              </a:defRPr>
+            </a:pPr>
+            <a:r>
+              <a:t>Sedí filtr a zůstal výběr?</a:t>
+            </a:r>
+          </a:p>
+        </p:txBody>
+      </p:sp>
+      <p:sp>
+        <p:nvSpPr>
+          <p:cNvPr id="13" name="Rectangle 12"/>
           <p:cNvSpPr/>
           <p:nvPr/>
         </p:nvSpPr>
         <p:spPr>
           <a:xfrm>
-            <a:off x="533400" y="1155700"/>
-            <a:ext cx="11125200" cy="25400"/>
+            <a:off x="4318000" y="2768600"/>
+            <a:ext cx="3556000" cy="2603500"/>
           </a:xfrm>
           <a:prstGeom prst="rect">
             <a:avLst/>
           </a:prstGeom>
           <a:solidFill>
-            <a:srgbClr val="181817"/>
+            <a:srgbClr val="E7E0D5"/>
           </a:solidFill>
           <a:ln>
             <a:noFill/>
@@ -5941,98 +6140,13 @@
       </p:sp>
       <p:sp>
         <p:nvSpPr>
-          <p:cNvPr id="9" name="TextBox 8"/>
-          <p:cNvSpPr txBox="1"/>
-          <p:nvPr/>
-        </p:nvSpPr>
-        <p:spPr>
-          <a:xfrm>
-            <a:off x="508000" y="1422400"/>
-            <a:ext cx="11176000" cy="1079500"/>
-          </a:xfrm>
-          <a:prstGeom prst="rect">
-            <a:avLst/>
-          </a:prstGeom>
-          <a:noFill/>
-        </p:spPr>
-        <p:txBody>
-          <a:bodyPr wrap="none" lIns="0" rIns="0" tIns="0" bIns="0">
-            <a:spAutoFit/>
-          </a:bodyPr>
-          <a:lstStyle/>
-          <a:p>
-            <a:pPr>
-              <a:lnSpc>
-                <a:spcPts val="3740"/>
-              </a:lnSpc>
-              <a:spcAft>
-                <a:spcPts val="0"/>
-              </a:spcAft>
-              <a:defRPr sz="3400" b="1">
-                <a:solidFill>
-                  <a:srgbClr val="181817"/>
-                </a:solidFill>
-                <a:latin typeface="Arial"/>
-              </a:defRPr>
-            </a:pPr>
-            <a:r>
-              <a:t>Tři úkoly pro hodnotící tým.</a:t>
-            </a:r>
-          </a:p>
-        </p:txBody>
-      </p:sp>
-      <p:sp>
-        <p:nvSpPr>
-          <p:cNvPr id="10" name="Rectangle 9"/>
+          <p:cNvPr id="14" name="Rectangle 13"/>
           <p:cNvSpPr/>
           <p:nvPr/>
         </p:nvSpPr>
         <p:spPr>
           <a:xfrm>
-            <a:off x="533400" y="2768600"/>
-            <a:ext cx="3556000" cy="2603500"/>
-          </a:xfrm>
-          <a:prstGeom prst="rect">
-            <a:avLst/>
-          </a:prstGeom>
-          <a:solidFill>
-            <a:srgbClr val="181817"/>
-          </a:solidFill>
-          <a:ln>
-            <a:noFill/>
-          </a:ln>
-        </p:spPr>
-        <p:style>
-          <a:lnRef idx="1">
-            <a:schemeClr val="accent1"/>
-          </a:lnRef>
-          <a:fillRef idx="3">
-            <a:schemeClr val="accent1"/>
-          </a:fillRef>
-          <a:effectRef idx="2">
-            <a:schemeClr val="accent1"/>
-          </a:effectRef>
-          <a:fontRef idx="minor">
-            <a:schemeClr val="lt1"/>
-          </a:fontRef>
-        </p:style>
-        <p:txBody>
-          <a:bodyPr rtlCol="0" anchor="ctr"/>
-          <a:lstStyle/>
-          <a:p>
-            <a:pPr algn="ctr"/>
-          </a:p>
-        </p:txBody>
-      </p:sp>
-      <p:sp>
-        <p:nvSpPr>
-          <p:cNvPr id="11" name="Rectangle 10"/>
-          <p:cNvSpPr/>
-          <p:nvPr/>
-        </p:nvSpPr>
-        <p:spPr>
-          <a:xfrm>
-            <a:off x="533400" y="2768600"/>
+            <a:off x="4318000" y="2768600"/>
             <a:ext cx="3556000" cy="76200"/>
           </a:xfrm>
           <a:prstGeom prst="rect">
@@ -6069,13 +6183,13 @@
       </p:sp>
       <p:sp>
         <p:nvSpPr>
-          <p:cNvPr id="12" name="TextBox 11"/>
+          <p:cNvPr id="15" name="TextBox 14"/>
           <p:cNvSpPr txBox="1"/>
           <p:nvPr/>
         </p:nvSpPr>
         <p:spPr>
           <a:xfrm>
-            <a:off x="749300" y="3035300"/>
+            <a:off x="4533900" y="3035300"/>
             <a:ext cx="3124200" cy="685800"/>
           </a:xfrm>
           <a:prstGeom prst="rect">
@@ -6098,26 +6212,26 @@
               </a:spcAft>
               <a:defRPr sz="2000" b="1">
                 <a:solidFill>
-                  <a:srgbClr val="F4F0E7"/>
-                </a:solidFill>
-                <a:latin typeface="Arial"/>
-              </a:defRPr>
-            </a:pPr>
-            <a:r>
-              <a:t>S1 / Program</a:t>
-            </a:r>
-          </a:p>
-        </p:txBody>
-      </p:sp>
-      <p:sp>
-        <p:nvSpPr>
-          <p:cNvPr id="13" name="TextBox 12"/>
+                  <a:srgbClr val="181817"/>
+                </a:solidFill>
+                <a:latin typeface="Arial"/>
+              </a:defRPr>
+            </a:pPr>
+            <a:r>
+              <a:t>S2 / Interpret</a:t>
+            </a:r>
+          </a:p>
+        </p:txBody>
+      </p:sp>
+      <p:sp>
+        <p:nvSpPr>
+          <p:cNvPr id="16" name="TextBox 15"/>
           <p:cNvSpPr txBox="1"/>
           <p:nvPr/>
         </p:nvSpPr>
         <p:spPr>
           <a:xfrm>
-            <a:off x="749300" y="3733800"/>
+            <a:off x="4533900" y="3733800"/>
             <a:ext cx="3124200" cy="1511300"/>
           </a:xfrm>
           <a:prstGeom prst="rect">
@@ -6140,13 +6254,13 @@
               </a:spcAft>
               <a:defRPr sz="1420" b="0">
                 <a:solidFill>
-                  <a:srgbClr val="F4F0E7"/>
-                </a:solidFill>
-                <a:latin typeface="Arial"/>
-              </a:defRPr>
-            </a:pPr>
-            <a:r>
-              <a:t>Den 1 + River Stage → uložit</a:t>
+                  <a:srgbClr val="181817"/>
+                </a:solidFill>
+                <a:latin typeface="Arial"/>
+              </a:defRPr>
+            </a:pPr>
+            <a:r>
+              <a:t>DARKZY → DARKZY → detail →</a:t>
             </a:r>
           </a:p>
           <a:p>
@@ -6159,13 +6273,13 @@
               </a:spcAft>
               <a:defRPr sz="1420" b="0">
                 <a:solidFill>
-                  <a:srgbClr val="F4F0E7"/>
-                </a:solidFill>
-                <a:latin typeface="Arial"/>
-              </a:defRPr>
-            </a:pPr>
-            <a:r>
-              <a:t>koncert → osobní program →</a:t>
+                  <a:srgbClr val="181817"/>
+                </a:solidFill>
+                <a:latin typeface="Arial"/>
+              </a:defRPr>
+            </a:pPr>
+            <a:r>
+              <a:t>související koncert.</a:t>
             </a:r>
           </a:p>
           <a:p>
@@ -6178,14 +6292,11 @@
               </a:spcAft>
               <a:defRPr sz="1420" b="0">
                 <a:solidFill>
-                  <a:srgbClr val="F4F0E7"/>
-                </a:solidFill>
-                <a:latin typeface="Arial"/>
-              </a:defRPr>
-            </a:pPr>
-            <a:r>
-              <a:t>obnovit.</a:t>
-            </a:r>
+                  <a:srgbClr val="181817"/>
+                </a:solidFill>
+                <a:latin typeface="Arial"/>
+              </a:defRPr>
+            </a:pPr>
           </a:p>
           <a:p>
             <a:pPr>
@@ -6197,42 +6308,26 @@
               </a:spcAft>
               <a:defRPr sz="1420" b="0">
                 <a:solidFill>
-                  <a:srgbClr val="F4F0E7"/>
-                </a:solidFill>
-                <a:latin typeface="Arial"/>
-              </a:defRPr>
-            </a:pPr>
-          </a:p>
-          <a:p>
-            <a:pPr>
-              <a:lnSpc>
-                <a:spcPts val="1689"/>
-              </a:lnSpc>
-              <a:spcAft>
-                <a:spcPts val="0"/>
-              </a:spcAft>
-              <a:defRPr sz="1420" b="0">
-                <a:solidFill>
-                  <a:srgbClr val="F4F0E7"/>
-                </a:solidFill>
-                <a:latin typeface="Arial"/>
-              </a:defRPr>
-            </a:pPr>
-            <a:r>
-              <a:t>Sedí filtr a zůstal výběr?</a:t>
-            </a:r>
-          </a:p>
-        </p:txBody>
-      </p:sp>
-      <p:sp>
-        <p:nvSpPr>
-          <p:cNvPr id="14" name="Rectangle 13"/>
+                  <a:srgbClr val="181817"/>
+                </a:solidFill>
+                <a:latin typeface="Arial"/>
+              </a:defRPr>
+            </a:pPr>
+            <a:r>
+              <a:t>Je jasný datum, čas a scéna?</a:t>
+            </a:r>
+          </a:p>
+        </p:txBody>
+      </p:sp>
+      <p:sp>
+        <p:nvSpPr>
+          <p:cNvPr id="17" name="Rectangle 16"/>
           <p:cNvSpPr/>
           <p:nvPr/>
         </p:nvSpPr>
         <p:spPr>
           <a:xfrm>
-            <a:off x="4318000" y="2768600"/>
+            <a:off x="8102600" y="2768600"/>
             <a:ext cx="3556000" cy="2603500"/>
           </a:xfrm>
           <a:prstGeom prst="rect">
@@ -6269,13 +6364,13 @@
       </p:sp>
       <p:sp>
         <p:nvSpPr>
-          <p:cNvPr id="15" name="Rectangle 14"/>
+          <p:cNvPr id="18" name="Rectangle 17"/>
           <p:cNvSpPr/>
           <p:nvPr/>
         </p:nvSpPr>
         <p:spPr>
           <a:xfrm>
-            <a:off x="4318000" y="2768600"/>
+            <a:off x="8102600" y="2768600"/>
             <a:ext cx="3556000" cy="76200"/>
           </a:xfrm>
           <a:prstGeom prst="rect">
@@ -6312,13 +6407,13 @@
       </p:sp>
       <p:sp>
         <p:nvSpPr>
-          <p:cNvPr id="16" name="TextBox 15"/>
+          <p:cNvPr id="19" name="TextBox 18"/>
           <p:cNvSpPr txBox="1"/>
           <p:nvPr/>
         </p:nvSpPr>
         <p:spPr>
           <a:xfrm>
-            <a:off x="4533900" y="3035300"/>
+            <a:off x="8318500" y="3035300"/>
             <a:ext cx="3124200" cy="685800"/>
           </a:xfrm>
           <a:prstGeom prst="rect">
@@ -6347,20 +6442,20 @@
               </a:defRPr>
             </a:pPr>
             <a:r>
-              <a:t>S2 / Interpret</a:t>
-            </a:r>
-          </a:p>
-        </p:txBody>
-      </p:sp>
-      <p:sp>
-        <p:nvSpPr>
-          <p:cNvPr id="17" name="TextBox 16"/>
+              <a:t>S3 / PDF</a:t>
+            </a:r>
+          </a:p>
+        </p:txBody>
+      </p:sp>
+      <p:sp>
+        <p:nvSpPr>
+          <p:cNvPr id="20" name="TextBox 19"/>
           <p:cNvSpPr txBox="1"/>
           <p:nvPr/>
         </p:nvSpPr>
         <p:spPr>
           <a:xfrm>
-            <a:off x="4533900" y="3733800"/>
+            <a:off x="8318500" y="3733800"/>
             <a:ext cx="3124200" cy="1511300"/>
           </a:xfrm>
           <a:prstGeom prst="rect">
@@ -6389,7 +6484,7 @@
               </a:defRPr>
             </a:pPr>
             <a:r>
-              <a:t>Atlas → Atlas Motel → detail →</a:t>
+              <a:t>Množství nebo místa → promo →</a:t>
             </a:r>
           </a:p>
           <a:p>
@@ -6408,7 +6503,7 @@
               </a:defRPr>
             </a:pPr>
             <a:r>
-              <a:t>související koncert.</a:t>
+              <a:t>údaje → zkušební platba → PDF.</a:t>
             </a:r>
           </a:p>
           <a:p>
@@ -6443,107 +6538,21 @@
               </a:defRPr>
             </a:pPr>
             <a:r>
-              <a:t>Je jasný datum, čas a scéna?</a:t>
-            </a:r>
-          </a:p>
-        </p:txBody>
-      </p:sp>
-      <p:sp>
-        <p:nvSpPr>
-          <p:cNvPr id="18" name="Rectangle 17"/>
-          <p:cNvSpPr/>
-          <p:nvPr/>
-        </p:nvSpPr>
-        <p:spPr>
-          <a:xfrm>
-            <a:off x="8102600" y="2768600"/>
-            <a:ext cx="3556000" cy="2603500"/>
-          </a:xfrm>
-          <a:prstGeom prst="rect">
-            <a:avLst/>
-          </a:prstGeom>
-          <a:solidFill>
-            <a:srgbClr val="E7E0D5"/>
-          </a:solidFill>
-          <a:ln>
-            <a:noFill/>
-          </a:ln>
-        </p:spPr>
-        <p:style>
-          <a:lnRef idx="1">
-            <a:schemeClr val="accent1"/>
-          </a:lnRef>
-          <a:fillRef idx="3">
-            <a:schemeClr val="accent1"/>
-          </a:fillRef>
-          <a:effectRef idx="2">
-            <a:schemeClr val="accent1"/>
-          </a:effectRef>
-          <a:fontRef idx="minor">
-            <a:schemeClr val="lt1"/>
-          </a:fontRef>
-        </p:style>
-        <p:txBody>
-          <a:bodyPr rtlCol="0" anchor="ctr"/>
-          <a:lstStyle/>
-          <a:p>
-            <a:pPr algn="ctr"/>
-          </a:p>
-        </p:txBody>
-      </p:sp>
-      <p:sp>
-        <p:nvSpPr>
-          <p:cNvPr id="19" name="Rectangle 18"/>
-          <p:cNvSpPr/>
-          <p:nvPr/>
-        </p:nvSpPr>
-        <p:spPr>
-          <a:xfrm>
-            <a:off x="8102600" y="2768600"/>
-            <a:ext cx="3556000" cy="76200"/>
-          </a:xfrm>
-          <a:prstGeom prst="rect">
-            <a:avLst/>
-          </a:prstGeom>
-          <a:solidFill>
-            <a:srgbClr val="F45E2B"/>
-          </a:solidFill>
-          <a:ln>
-            <a:noFill/>
-          </a:ln>
-        </p:spPr>
-        <p:style>
-          <a:lnRef idx="1">
-            <a:schemeClr val="accent1"/>
-          </a:lnRef>
-          <a:fillRef idx="3">
-            <a:schemeClr val="accent1"/>
-          </a:fillRef>
-          <a:effectRef idx="2">
-            <a:schemeClr val="accent1"/>
-          </a:effectRef>
-          <a:fontRef idx="minor">
-            <a:schemeClr val="lt1"/>
-          </a:fontRef>
-        </p:style>
-        <p:txBody>
-          <a:bodyPr rtlCol="0" anchor="ctr"/>
-          <a:lstStyle/>
-          <a:p>
-            <a:pPr algn="ctr"/>
-          </a:p>
-        </p:txBody>
-      </p:sp>
-      <p:sp>
-        <p:nvSpPr>
-          <p:cNvPr id="20" name="TextBox 19"/>
+              <a:t>Sedí součet, sleva a ID?</a:t>
+            </a:r>
+          </a:p>
+        </p:txBody>
+      </p:sp>
+      <p:sp>
+        <p:nvSpPr>
+          <p:cNvPr id="21" name="TextBox 20"/>
           <p:cNvSpPr txBox="1"/>
           <p:nvPr/>
         </p:nvSpPr>
         <p:spPr>
           <a:xfrm>
-            <a:off x="8318500" y="3035300"/>
-            <a:ext cx="3124200" cy="685800"/>
+            <a:off x="533400" y="6413500"/>
+            <a:ext cx="10033000" cy="181610"/>
           </a:xfrm>
           <a:prstGeom prst="rect">
             <a:avLst/>
@@ -6558,116 +6567,20 @@
           <a:p>
             <a:pPr>
               <a:lnSpc>
-                <a:spcPts val="2200"/>
-              </a:lnSpc>
-              <a:spcAft>
-                <a:spcPts val="0"/>
-              </a:spcAft>
-              <a:defRPr sz="2000" b="1">
-                <a:solidFill>
-                  <a:srgbClr val="181817"/>
-                </a:solidFill>
-                <a:latin typeface="Arial"/>
-              </a:defRPr>
-            </a:pPr>
-            <a:r>
-              <a:t>S3 / PDF</a:t>
-            </a:r>
-          </a:p>
-        </p:txBody>
-      </p:sp>
-      <p:sp>
-        <p:nvSpPr>
-          <p:cNvPr id="21" name="TextBox 20"/>
-          <p:cNvSpPr txBox="1"/>
-          <p:nvPr/>
-        </p:nvSpPr>
-        <p:spPr>
-          <a:xfrm>
-            <a:off x="8318500" y="3733800"/>
-            <a:ext cx="3124200" cy="1511300"/>
-          </a:xfrm>
-          <a:prstGeom prst="rect">
-            <a:avLst/>
-          </a:prstGeom>
-          <a:noFill/>
-        </p:spPr>
-        <p:txBody>
-          <a:bodyPr wrap="none" lIns="0" rIns="0" tIns="0" bIns="0">
-            <a:spAutoFit/>
-          </a:bodyPr>
-          <a:lstStyle/>
-          <a:p>
-            <a:pPr>
-              <a:lnSpc>
-                <a:spcPts val="1689"/>
-              </a:lnSpc>
-              <a:spcAft>
-                <a:spcPts val="0"/>
-              </a:spcAft>
-              <a:defRPr sz="1420" b="0">
-                <a:solidFill>
-                  <a:srgbClr val="181817"/>
-                </a:solidFill>
-                <a:latin typeface="Arial"/>
-              </a:defRPr>
-            </a:pPr>
-            <a:r>
-              <a:t>Tarif nebo místa → košík → host →</a:t>
-            </a:r>
-          </a:p>
-          <a:p>
-            <a:pPr>
-              <a:lnSpc>
-                <a:spcPts val="1689"/>
-              </a:lnSpc>
-              <a:spcAft>
-                <a:spcPts val="0"/>
-              </a:spcAft>
-              <a:defRPr sz="1420" b="0">
-                <a:solidFill>
-                  <a:srgbClr val="181817"/>
-                </a:solidFill>
-                <a:latin typeface="Arial"/>
-              </a:defRPr>
-            </a:pPr>
-            <a:r>
-              <a:t>dokončení → PDF.</a:t>
-            </a:r>
-          </a:p>
-          <a:p>
-            <a:pPr>
-              <a:lnSpc>
-                <a:spcPts val="1689"/>
-              </a:lnSpc>
-              <a:spcAft>
-                <a:spcPts val="0"/>
-              </a:spcAft>
-              <a:defRPr sz="1420" b="0">
-                <a:solidFill>
-                  <a:srgbClr val="181817"/>
-                </a:solidFill>
-                <a:latin typeface="Arial"/>
-              </a:defRPr>
-            </a:pPr>
-          </a:p>
-          <a:p>
-            <a:pPr>
-              <a:lnSpc>
-                <a:spcPts val="1689"/>
-              </a:lnSpc>
-              <a:spcAft>
-                <a:spcPts val="0"/>
-              </a:spcAft>
-              <a:defRPr sz="1420" b="0">
-                <a:solidFill>
-                  <a:srgbClr val="181817"/>
-                </a:solidFill>
-                <a:latin typeface="Arial"/>
-              </a:defRPr>
-            </a:pPr>
-            <a:r>
-              <a:t>Sedí cena, údaje a ID?</a:t>
+                <a:spcPts val="930"/>
+              </a:lnSpc>
+              <a:spcAft>
+                <a:spcPts val="0"/>
+              </a:spcAft>
+              <a:defRPr sz="750" b="0">
+                <a:solidFill>
+                  <a:srgbClr val="68635B"/>
+                </a:solidFill>
+                <a:latin typeface="Arial"/>
+              </a:defRPr>
+            </a:pPr>
+            <a:r>
+              <a:t>DODATEČNĚ PŘIPRAVENÝ PODKLAD K MILNÍKU</a:t>
             </a:r>
           </a:p>
         </p:txBody>
@@ -6675,48 +6588,6 @@
       <p:sp>
         <p:nvSpPr>
           <p:cNvPr id="22" name="TextBox 21"/>
-          <p:cNvSpPr txBox="1"/>
-          <p:nvPr/>
-        </p:nvSpPr>
-        <p:spPr>
-          <a:xfrm>
-            <a:off x="533400" y="6413500"/>
-            <a:ext cx="10033000" cy="181610"/>
-          </a:xfrm>
-          <a:prstGeom prst="rect">
-            <a:avLst/>
-          </a:prstGeom>
-          <a:noFill/>
-        </p:spPr>
-        <p:txBody>
-          <a:bodyPr wrap="none" lIns="0" rIns="0" tIns="0" bIns="0">
-            <a:spAutoFit/>
-          </a:bodyPr>
-          <a:lstStyle/>
-          <a:p>
-            <a:pPr>
-              <a:lnSpc>
-                <a:spcPts val="930"/>
-              </a:lnSpc>
-              <a:spcAft>
-                <a:spcPts val="0"/>
-              </a:spcAft>
-              <a:defRPr sz="750" b="0">
-                <a:solidFill>
-                  <a:srgbClr val="68635B"/>
-                </a:solidFill>
-                <a:latin typeface="Arial"/>
-              </a:defRPr>
-            </a:pPr>
-            <a:r>
-              <a:t>DODATEČNĚ PŘIPRAVENÝ PODKLAD K MILNÍKU</a:t>
-            </a:r>
-          </a:p>
-        </p:txBody>
-      </p:sp>
-      <p:sp>
-        <p:nvSpPr>
-          <p:cNvPr id="23" name="TextBox 22"/>
           <p:cNvSpPr txBox="1"/>
           <p:nvPr/>
         </p:nvSpPr>
@@ -6945,14 +6816,184 @@
       </p:sp>
       <p:sp>
         <p:nvSpPr>
-          <p:cNvPr id="6" name="Rectangle 5"/>
+          <p:cNvPr id="6" name="TextBox 5"/>
+          <p:cNvSpPr txBox="1"/>
+          <p:nvPr/>
+        </p:nvSpPr>
+        <p:spPr>
+          <a:xfrm>
+            <a:off x="5588000" y="533400"/>
+            <a:ext cx="6070600" cy="220979"/>
+          </a:xfrm>
+          <a:prstGeom prst="rect">
+            <a:avLst/>
+          </a:prstGeom>
+          <a:noFill/>
+        </p:spPr>
+        <p:txBody>
+          <a:bodyPr wrap="none" lIns="0" rIns="0" tIns="0" bIns="0">
+            <a:spAutoFit/>
+          </a:bodyPr>
+          <a:lstStyle/>
+          <a:p>
+            <a:pPr>
+              <a:lnSpc>
+                <a:spcPts val="1240"/>
+              </a:lnSpc>
+              <a:spcAft>
+                <a:spcPts val="0"/>
+              </a:spcAft>
+              <a:defRPr sz="1000" b="1">
+                <a:solidFill>
+                  <a:srgbClr val="68635B"/>
+                </a:solidFill>
+                <a:latin typeface="Arial"/>
+              </a:defRPr>
+            </a:pPr>
+            <a:r>
+              <a:t>DŮKAZY PŘILOŽENÉ K WEBU</a:t>
+            </a:r>
+          </a:p>
+        </p:txBody>
+      </p:sp>
+      <p:sp>
+        <p:nvSpPr>
+          <p:cNvPr id="7" name="Rectangle 6"/>
           <p:cNvSpPr/>
           <p:nvPr/>
         </p:nvSpPr>
         <p:spPr>
           <a:xfrm>
-            <a:off x="1866900" y="368300"/>
-            <a:ext cx="88900" cy="431800"/>
+            <a:off x="533400" y="1155700"/>
+            <a:ext cx="11125200" cy="25400"/>
+          </a:xfrm>
+          <a:prstGeom prst="rect">
+            <a:avLst/>
+          </a:prstGeom>
+          <a:solidFill>
+            <a:srgbClr val="181817"/>
+          </a:solidFill>
+          <a:ln>
+            <a:noFill/>
+          </a:ln>
+        </p:spPr>
+        <p:style>
+          <a:lnRef idx="1">
+            <a:schemeClr val="accent1"/>
+          </a:lnRef>
+          <a:fillRef idx="3">
+            <a:schemeClr val="accent1"/>
+          </a:fillRef>
+          <a:effectRef idx="2">
+            <a:schemeClr val="accent1"/>
+          </a:effectRef>
+          <a:fontRef idx="minor">
+            <a:schemeClr val="lt1"/>
+          </a:fontRef>
+        </p:style>
+        <p:txBody>
+          <a:bodyPr rtlCol="0" anchor="ctr"/>
+          <a:lstStyle/>
+          <a:p>
+            <a:pPr algn="ctr"/>
+          </a:p>
+        </p:txBody>
+      </p:sp>
+      <p:sp>
+        <p:nvSpPr>
+          <p:cNvPr id="8" name="TextBox 7"/>
+          <p:cNvSpPr txBox="1"/>
+          <p:nvPr/>
+        </p:nvSpPr>
+        <p:spPr>
+          <a:xfrm>
+            <a:off x="508000" y="1422400"/>
+            <a:ext cx="11176000" cy="1079500"/>
+          </a:xfrm>
+          <a:prstGeom prst="rect">
+            <a:avLst/>
+          </a:prstGeom>
+          <a:noFill/>
+        </p:spPr>
+        <p:txBody>
+          <a:bodyPr wrap="none" lIns="0" rIns="0" tIns="0" bIns="0">
+            <a:spAutoFit/>
+          </a:bodyPr>
+          <a:lstStyle/>
+          <a:p>
+            <a:pPr>
+              <a:lnSpc>
+                <a:spcPts val="3740"/>
+              </a:lnSpc>
+              <a:spcAft>
+                <a:spcPts val="0"/>
+              </a:spcAft>
+              <a:defRPr sz="3400" b="1">
+                <a:solidFill>
+                  <a:srgbClr val="181817"/>
+                </a:solidFill>
+                <a:latin typeface="Arial"/>
+              </a:defRPr>
+            </a:pPr>
+            <a:r>
+              <a:t>Co už kontrolujeme sami?</a:t>
+            </a:r>
+          </a:p>
+        </p:txBody>
+      </p:sp>
+      <p:sp>
+        <p:nvSpPr>
+          <p:cNvPr id="9" name="Rectangle 8"/>
+          <p:cNvSpPr/>
+          <p:nvPr/>
+        </p:nvSpPr>
+        <p:spPr>
+          <a:xfrm>
+            <a:off x="533400" y="2768600"/>
+            <a:ext cx="5448300" cy="2603500"/>
+          </a:xfrm>
+          <a:prstGeom prst="rect">
+            <a:avLst/>
+          </a:prstGeom>
+          <a:solidFill>
+            <a:srgbClr val="181817"/>
+          </a:solidFill>
+          <a:ln>
+            <a:noFill/>
+          </a:ln>
+        </p:spPr>
+        <p:style>
+          <a:lnRef idx="1">
+            <a:schemeClr val="accent1"/>
+          </a:lnRef>
+          <a:fillRef idx="3">
+            <a:schemeClr val="accent1"/>
+          </a:fillRef>
+          <a:effectRef idx="2">
+            <a:schemeClr val="accent1"/>
+          </a:effectRef>
+          <a:fontRef idx="minor">
+            <a:schemeClr val="lt1"/>
+          </a:fontRef>
+        </p:style>
+        <p:txBody>
+          <a:bodyPr rtlCol="0" anchor="ctr"/>
+          <a:lstStyle/>
+          <a:p>
+            <a:pPr algn="ctr"/>
+          </a:p>
+        </p:txBody>
+      </p:sp>
+      <p:sp>
+        <p:nvSpPr>
+          <p:cNvPr id="10" name="Rectangle 9"/>
+          <p:cNvSpPr/>
+          <p:nvPr/>
+        </p:nvSpPr>
+        <p:spPr>
+          <a:xfrm>
+            <a:off x="533400" y="2768600"/>
+            <a:ext cx="5448300" cy="76200"/>
           </a:xfrm>
           <a:prstGeom prst="rect">
             <a:avLst/>
@@ -6988,14 +7029,14 @@
       </p:sp>
       <p:sp>
         <p:nvSpPr>
-          <p:cNvPr id="7" name="TextBox 6"/>
+          <p:cNvPr id="11" name="TextBox 10"/>
           <p:cNvSpPr txBox="1"/>
           <p:nvPr/>
         </p:nvSpPr>
         <p:spPr>
           <a:xfrm>
-            <a:off x="5588000" y="533400"/>
-            <a:ext cx="6070600" cy="220979"/>
+            <a:off x="749300" y="3035300"/>
+            <a:ext cx="5016500" cy="685800"/>
           </a:xfrm>
           <a:prstGeom prst="rect">
             <a:avLst/>
@@ -7010,40 +7051,136 @@
           <a:p>
             <a:pPr>
               <a:lnSpc>
-                <a:spcPts val="1240"/>
-              </a:lnSpc>
-              <a:spcAft>
-                <a:spcPts val="0"/>
-              </a:spcAft>
-              <a:defRPr sz="1000" b="1">
-                <a:solidFill>
-                  <a:srgbClr val="68635B"/>
-                </a:solidFill>
-                <a:latin typeface="Arial"/>
-              </a:defRPr>
-            </a:pPr>
-            <a:r>
-              <a:t>DŮKAZY PŘILOŽENÉ K WEBU</a:t>
-            </a:r>
-          </a:p>
-        </p:txBody>
-      </p:sp>
-      <p:sp>
-        <p:nvSpPr>
-          <p:cNvPr id="8" name="Rectangle 7"/>
+                <a:spcPts val="2200"/>
+              </a:lnSpc>
+              <a:spcAft>
+                <a:spcPts val="0"/>
+              </a:spcAft>
+              <a:defRPr sz="2000" b="1">
+                <a:solidFill>
+                  <a:srgbClr val="F4F0E7"/>
+                </a:solidFill>
+                <a:latin typeface="Arial"/>
+              </a:defRPr>
+            </a:pPr>
+            <a:r>
+              <a:t>Data a chování</a:t>
+            </a:r>
+          </a:p>
+        </p:txBody>
+      </p:sp>
+      <p:sp>
+        <p:nvSpPr>
+          <p:cNvPr id="12" name="TextBox 11"/>
+          <p:cNvSpPr txBox="1"/>
+          <p:nvPr/>
+        </p:nvSpPr>
+        <p:spPr>
+          <a:xfrm>
+            <a:off x="749300" y="3733800"/>
+            <a:ext cx="5016500" cy="1511300"/>
+          </a:xfrm>
+          <a:prstGeom prst="rect">
+            <a:avLst/>
+          </a:prstGeom>
+          <a:noFill/>
+        </p:spPr>
+        <p:txBody>
+          <a:bodyPr wrap="none" lIns="0" rIns="0" tIns="0" bIns="0">
+            <a:spAutoFit/>
+          </a:bodyPr>
+          <a:lstStyle/>
+          <a:p>
+            <a:pPr>
+              <a:lnSpc>
+                <a:spcPts val="1689"/>
+              </a:lnSpc>
+              <a:spcAft>
+                <a:spcPts val="0"/>
+              </a:spcAft>
+              <a:defRPr sz="1420" b="0">
+                <a:solidFill>
+                  <a:srgbClr val="F4F0E7"/>
+                </a:solidFill>
+                <a:latin typeface="Arial"/>
+              </a:defRPr>
+            </a:pPr>
+            <a:r>
+              <a:t>XML reference a shoda exportu. Hledání, program,</a:t>
+            </a:r>
+          </a:p>
+          <a:p>
+            <a:pPr>
+              <a:lnSpc>
+                <a:spcPts val="1689"/>
+              </a:lnSpc>
+              <a:spcAft>
+                <a:spcPts val="0"/>
+              </a:spcAft>
+              <a:defRPr sz="1420" b="0">
+                <a:solidFill>
+                  <a:srgbClr val="F4F0E7"/>
+                </a:solidFill>
+                <a:latin typeface="Arial"/>
+              </a:defRPr>
+            </a:pPr>
+            <a:r>
+              <a:t>úložiště, košík a PDF.</a:t>
+            </a:r>
+          </a:p>
+          <a:p>
+            <a:pPr>
+              <a:lnSpc>
+                <a:spcPts val="1689"/>
+              </a:lnSpc>
+              <a:spcAft>
+                <a:spcPts val="0"/>
+              </a:spcAft>
+              <a:defRPr sz="1420" b="0">
+                <a:solidFill>
+                  <a:srgbClr val="F4F0E7"/>
+                </a:solidFill>
+                <a:latin typeface="Arial"/>
+              </a:defRPr>
+            </a:pPr>
+          </a:p>
+          <a:p>
+            <a:pPr>
+              <a:lnSpc>
+                <a:spcPts val="1689"/>
+              </a:lnSpc>
+              <a:spcAft>
+                <a:spcPts val="0"/>
+              </a:spcAft>
+              <a:defRPr sz="1420" b="0">
+                <a:solidFill>
+                  <a:srgbClr val="F4F0E7"/>
+                </a:solidFill>
+                <a:latin typeface="Arial"/>
+              </a:defRPr>
+            </a:pPr>
+            <a:r>
+              <a:t>Výsledek v validation_report.md.</a:t>
+            </a:r>
+          </a:p>
+        </p:txBody>
+      </p:sp>
+      <p:sp>
+        <p:nvSpPr>
+          <p:cNvPr id="13" name="Rectangle 12"/>
           <p:cNvSpPr/>
           <p:nvPr/>
         </p:nvSpPr>
         <p:spPr>
           <a:xfrm>
-            <a:off x="533400" y="1155700"/>
-            <a:ext cx="11125200" cy="25400"/>
+            <a:off x="6210300" y="2768600"/>
+            <a:ext cx="5448300" cy="2603500"/>
           </a:xfrm>
           <a:prstGeom prst="rect">
             <a:avLst/>
           </a:prstGeom>
           <a:solidFill>
-            <a:srgbClr val="181817"/>
+            <a:srgbClr val="E7E0D5"/>
           </a:solidFill>
           <a:ln>
             <a:noFill/>
@@ -7073,98 +7210,13 @@
       </p:sp>
       <p:sp>
         <p:nvSpPr>
-          <p:cNvPr id="9" name="TextBox 8"/>
-          <p:cNvSpPr txBox="1"/>
-          <p:nvPr/>
-        </p:nvSpPr>
-        <p:spPr>
-          <a:xfrm>
-            <a:off x="508000" y="1422400"/>
-            <a:ext cx="11176000" cy="1079500"/>
-          </a:xfrm>
-          <a:prstGeom prst="rect">
-            <a:avLst/>
-          </a:prstGeom>
-          <a:noFill/>
-        </p:spPr>
-        <p:txBody>
-          <a:bodyPr wrap="none" lIns="0" rIns="0" tIns="0" bIns="0">
-            <a:spAutoFit/>
-          </a:bodyPr>
-          <a:lstStyle/>
-          <a:p>
-            <a:pPr>
-              <a:lnSpc>
-                <a:spcPts val="3740"/>
-              </a:lnSpc>
-              <a:spcAft>
-                <a:spcPts val="0"/>
-              </a:spcAft>
-              <a:defRPr sz="3400" b="1">
-                <a:solidFill>
-                  <a:srgbClr val="181817"/>
-                </a:solidFill>
-                <a:latin typeface="Arial"/>
-              </a:defRPr>
-            </a:pPr>
-            <a:r>
-              <a:t>Co už kontrolujeme sami?</a:t>
-            </a:r>
-          </a:p>
-        </p:txBody>
-      </p:sp>
-      <p:sp>
-        <p:nvSpPr>
-          <p:cNvPr id="10" name="Rectangle 9"/>
+          <p:cNvPr id="14" name="Rectangle 13"/>
           <p:cNvSpPr/>
           <p:nvPr/>
         </p:nvSpPr>
         <p:spPr>
           <a:xfrm>
-            <a:off x="533400" y="2768600"/>
-            <a:ext cx="5448300" cy="2603500"/>
-          </a:xfrm>
-          <a:prstGeom prst="rect">
-            <a:avLst/>
-          </a:prstGeom>
-          <a:solidFill>
-            <a:srgbClr val="181817"/>
-          </a:solidFill>
-          <a:ln>
-            <a:noFill/>
-          </a:ln>
-        </p:spPr>
-        <p:style>
-          <a:lnRef idx="1">
-            <a:schemeClr val="accent1"/>
-          </a:lnRef>
-          <a:fillRef idx="3">
-            <a:schemeClr val="accent1"/>
-          </a:fillRef>
-          <a:effectRef idx="2">
-            <a:schemeClr val="accent1"/>
-          </a:effectRef>
-          <a:fontRef idx="minor">
-            <a:schemeClr val="lt1"/>
-          </a:fontRef>
-        </p:style>
-        <p:txBody>
-          <a:bodyPr rtlCol="0" anchor="ctr"/>
-          <a:lstStyle/>
-          <a:p>
-            <a:pPr algn="ctr"/>
-          </a:p>
-        </p:txBody>
-      </p:sp>
-      <p:sp>
-        <p:nvSpPr>
-          <p:cNvPr id="11" name="Rectangle 10"/>
-          <p:cNvSpPr/>
-          <p:nvPr/>
-        </p:nvSpPr>
-        <p:spPr>
-          <a:xfrm>
-            <a:off x="533400" y="2768600"/>
+            <a:off x="6210300" y="2768600"/>
             <a:ext cx="5448300" cy="76200"/>
           </a:xfrm>
           <a:prstGeom prst="rect">
@@ -7201,13 +7253,13 @@
       </p:sp>
       <p:sp>
         <p:nvSpPr>
-          <p:cNvPr id="12" name="TextBox 11"/>
+          <p:cNvPr id="15" name="TextBox 14"/>
           <p:cNvSpPr txBox="1"/>
           <p:nvPr/>
         </p:nvSpPr>
         <p:spPr>
           <a:xfrm>
-            <a:off x="749300" y="3035300"/>
+            <a:off x="6426200" y="3035300"/>
             <a:ext cx="5016500" cy="685800"/>
           </a:xfrm>
           <a:prstGeom prst="rect">
@@ -7230,26 +7282,26 @@
               </a:spcAft>
               <a:defRPr sz="2000" b="1">
                 <a:solidFill>
-                  <a:srgbClr val="F4F0E7"/>
-                </a:solidFill>
-                <a:latin typeface="Arial"/>
-              </a:defRPr>
-            </a:pPr>
-            <a:r>
-              <a:t>Data a chování</a:t>
-            </a:r>
-          </a:p>
-        </p:txBody>
-      </p:sp>
-      <p:sp>
-        <p:nvSpPr>
-          <p:cNvPr id="13" name="TextBox 12"/>
+                  <a:srgbClr val="181817"/>
+                </a:solidFill>
+                <a:latin typeface="Arial"/>
+              </a:defRPr>
+            </a:pPr>
+            <a:r>
+              <a:t>Mobil i desktop</a:t>
+            </a:r>
+          </a:p>
+        </p:txBody>
+      </p:sp>
+      <p:sp>
+        <p:nvSpPr>
+          <p:cNvPr id="16" name="TextBox 15"/>
           <p:cNvSpPr txBox="1"/>
           <p:nvPr/>
         </p:nvSpPr>
         <p:spPr>
           <a:xfrm>
-            <a:off x="749300" y="3733800"/>
+            <a:off x="6426200" y="3733800"/>
             <a:ext cx="5016500" cy="1511300"/>
           </a:xfrm>
           <a:prstGeom prst="rect">
@@ -7272,13 +7324,13 @@
               </a:spcAft>
               <a:defRPr sz="1420" b="0">
                 <a:solidFill>
-                  <a:srgbClr val="F4F0E7"/>
-                </a:solidFill>
-                <a:latin typeface="Arial"/>
-              </a:defRPr>
-            </a:pPr>
-            <a:r>
-              <a:t>XML reference a shoda exportu. Hledání, program,</a:t>
+                  <a:srgbClr val="181817"/>
+                </a:solidFill>
+                <a:latin typeface="Arial"/>
+              </a:defRPr>
+            </a:pPr>
+            <a:r>
+              <a:t>Přetékání, navigace, dlouhé názvy a vyplněné</a:t>
             </a:r>
           </a:p>
           <a:p>
@@ -7291,13 +7343,13 @@
               </a:spcAft>
               <a:defRPr sz="1420" b="0">
                 <a:solidFill>
-                  <a:srgbClr val="F4F0E7"/>
-                </a:solidFill>
-                <a:latin typeface="Arial"/>
-              </a:defRPr>
-            </a:pPr>
-            <a:r>
-              <a:t>úložiště, košík a PDF.</a:t>
+                  <a:srgbClr val="181817"/>
+                </a:solidFill>
+                <a:latin typeface="Arial"/>
+              </a:defRPr>
+            </a:pPr>
+            <a:r>
+              <a:t>formuláře.</a:t>
             </a:r>
           </a:p>
           <a:p>
@@ -7310,7 +7362,7 @@
               </a:spcAft>
               <a:defRPr sz="1420" b="0">
                 <a:solidFill>
-                  <a:srgbClr val="F4F0E7"/>
+                  <a:srgbClr val="181817"/>
                 </a:solidFill>
                 <a:latin typeface="Arial"/>
               </a:defRPr>
@@ -7326,113 +7378,27 @@
               </a:spcAft>
               <a:defRPr sz="1420" b="0">
                 <a:solidFill>
-                  <a:srgbClr val="F4F0E7"/>
-                </a:solidFill>
-                <a:latin typeface="Arial"/>
-              </a:defRPr>
-            </a:pPr>
-            <a:r>
-              <a:t>Výsledek v validation_report.md.</a:t>
-            </a:r>
-          </a:p>
-        </p:txBody>
-      </p:sp>
-      <p:sp>
-        <p:nvSpPr>
-          <p:cNvPr id="14" name="Rectangle 13"/>
-          <p:cNvSpPr/>
-          <p:nvPr/>
-        </p:nvSpPr>
-        <p:spPr>
-          <a:xfrm>
-            <a:off x="6210300" y="2768600"/>
-            <a:ext cx="5448300" cy="2603500"/>
-          </a:xfrm>
-          <a:prstGeom prst="rect">
-            <a:avLst/>
-          </a:prstGeom>
-          <a:solidFill>
-            <a:srgbClr val="E7E0D5"/>
-          </a:solidFill>
-          <a:ln>
-            <a:noFill/>
-          </a:ln>
-        </p:spPr>
-        <p:style>
-          <a:lnRef idx="1">
-            <a:schemeClr val="accent1"/>
-          </a:lnRef>
-          <a:fillRef idx="3">
-            <a:schemeClr val="accent1"/>
-          </a:fillRef>
-          <a:effectRef idx="2">
-            <a:schemeClr val="accent1"/>
-          </a:effectRef>
-          <a:fontRef idx="minor">
-            <a:schemeClr val="lt1"/>
-          </a:fontRef>
-        </p:style>
-        <p:txBody>
-          <a:bodyPr rtlCol="0" anchor="ctr"/>
-          <a:lstStyle/>
-          <a:p>
-            <a:pPr algn="ctr"/>
-          </a:p>
-        </p:txBody>
-      </p:sp>
-      <p:sp>
-        <p:nvSpPr>
-          <p:cNvPr id="15" name="Rectangle 14"/>
-          <p:cNvSpPr/>
-          <p:nvPr/>
-        </p:nvSpPr>
-        <p:spPr>
-          <a:xfrm>
-            <a:off x="6210300" y="2768600"/>
-            <a:ext cx="5448300" cy="76200"/>
-          </a:xfrm>
-          <a:prstGeom prst="rect">
-            <a:avLst/>
-          </a:prstGeom>
-          <a:solidFill>
-            <a:srgbClr val="F45E2B"/>
-          </a:solidFill>
-          <a:ln>
-            <a:noFill/>
-          </a:ln>
-        </p:spPr>
-        <p:style>
-          <a:lnRef idx="1">
-            <a:schemeClr val="accent1"/>
-          </a:lnRef>
-          <a:fillRef idx="3">
-            <a:schemeClr val="accent1"/>
-          </a:fillRef>
-          <a:effectRef idx="2">
-            <a:schemeClr val="accent1"/>
-          </a:effectRef>
-          <a:fontRef idx="minor">
-            <a:schemeClr val="lt1"/>
-          </a:fontRef>
-        </p:style>
-        <p:txBody>
-          <a:bodyPr rtlCol="0" anchor="ctr"/>
-          <a:lstStyle/>
-          <a:p>
-            <a:pPr algn="ctr"/>
-          </a:p>
-        </p:txBody>
-      </p:sp>
-      <p:sp>
-        <p:nvSpPr>
-          <p:cNvPr id="16" name="TextBox 15"/>
+                  <a:srgbClr val="181817"/>
+                </a:solidFill>
+                <a:latin typeface="Arial"/>
+              </a:defRPr>
+            </a:pPr>
+            <a:r>
+              <a:t>Klávesnice a stavové změny.</a:t>
+            </a:r>
+          </a:p>
+        </p:txBody>
+      </p:sp>
+      <p:sp>
+        <p:nvSpPr>
+          <p:cNvPr id="17" name="TextBox 16"/>
           <p:cNvSpPr txBox="1"/>
           <p:nvPr/>
         </p:nvSpPr>
         <p:spPr>
           <a:xfrm>
-            <a:off x="6426200" y="3035300"/>
-            <a:ext cx="5016500" cy="685800"/>
+            <a:off x="533400" y="5676900"/>
+            <a:ext cx="11125200" cy="546100"/>
           </a:xfrm>
           <a:prstGeom prst="rect">
             <a:avLst/>
@@ -7447,34 +7413,34 @@
           <a:p>
             <a:pPr>
               <a:lnSpc>
-                <a:spcPts val="2200"/>
-              </a:lnSpc>
-              <a:spcAft>
-                <a:spcPts val="0"/>
-              </a:spcAft>
-              <a:defRPr sz="2000" b="1">
-                <a:solidFill>
-                  <a:srgbClr val="181817"/>
-                </a:solidFill>
-                <a:latin typeface="Arial"/>
-              </a:defRPr>
-            </a:pPr>
-            <a:r>
-              <a:t>Mobil i desktop</a:t>
-            </a:r>
-          </a:p>
-        </p:txBody>
-      </p:sp>
-      <p:sp>
-        <p:nvSpPr>
-          <p:cNvPr id="17" name="TextBox 16"/>
+                <a:spcPts val="1583"/>
+              </a:lnSpc>
+              <a:spcAft>
+                <a:spcPts val="0"/>
+              </a:spcAft>
+              <a:defRPr sz="1320" b="0">
+                <a:solidFill>
+                  <a:srgbClr val="68635B"/>
+                </a:solidFill>
+                <a:latin typeface="Arial"/>
+              </a:defRPr>
+            </a:pPr>
+            <a:r>
+              <a:t>Automatické testy nenahrazují nezávislé expertní hodnocení použitelnosti.</a:t>
+            </a:r>
+          </a:p>
+        </p:txBody>
+      </p:sp>
+      <p:sp>
+        <p:nvSpPr>
+          <p:cNvPr id="18" name="TextBox 17"/>
           <p:cNvSpPr txBox="1"/>
           <p:nvPr/>
         </p:nvSpPr>
         <p:spPr>
           <a:xfrm>
-            <a:off x="6426200" y="3733800"/>
-            <a:ext cx="5016500" cy="1511300"/>
+            <a:off x="533400" y="6413500"/>
+            <a:ext cx="10033000" cy="181610"/>
           </a:xfrm>
           <a:prstGeom prst="rect">
             <a:avLst/>
@@ -7489,108 +7455,12 @@
           <a:p>
             <a:pPr>
               <a:lnSpc>
-                <a:spcPts val="1689"/>
-              </a:lnSpc>
-              <a:spcAft>
-                <a:spcPts val="0"/>
-              </a:spcAft>
-              <a:defRPr sz="1420" b="0">
-                <a:solidFill>
-                  <a:srgbClr val="181817"/>
-                </a:solidFill>
-                <a:latin typeface="Arial"/>
-              </a:defRPr>
-            </a:pPr>
-            <a:r>
-              <a:t>Přetékání, navigace, dlouhé názvy a vyplněné</a:t>
-            </a:r>
-          </a:p>
-          <a:p>
-            <a:pPr>
-              <a:lnSpc>
-                <a:spcPts val="1689"/>
-              </a:lnSpc>
-              <a:spcAft>
-                <a:spcPts val="0"/>
-              </a:spcAft>
-              <a:defRPr sz="1420" b="0">
-                <a:solidFill>
-                  <a:srgbClr val="181817"/>
-                </a:solidFill>
-                <a:latin typeface="Arial"/>
-              </a:defRPr>
-            </a:pPr>
-            <a:r>
-              <a:t>formuláře.</a:t>
-            </a:r>
-          </a:p>
-          <a:p>
-            <a:pPr>
-              <a:lnSpc>
-                <a:spcPts val="1689"/>
-              </a:lnSpc>
-              <a:spcAft>
-                <a:spcPts val="0"/>
-              </a:spcAft>
-              <a:defRPr sz="1420" b="0">
-                <a:solidFill>
-                  <a:srgbClr val="181817"/>
-                </a:solidFill>
-                <a:latin typeface="Arial"/>
-              </a:defRPr>
-            </a:pPr>
-          </a:p>
-          <a:p>
-            <a:pPr>
-              <a:lnSpc>
-                <a:spcPts val="1689"/>
-              </a:lnSpc>
-              <a:spcAft>
-                <a:spcPts val="0"/>
-              </a:spcAft>
-              <a:defRPr sz="1420" b="0">
-                <a:solidFill>
-                  <a:srgbClr val="181817"/>
-                </a:solidFill>
-                <a:latin typeface="Arial"/>
-              </a:defRPr>
-            </a:pPr>
-            <a:r>
-              <a:t>Klávesnice a stavové změny.</a:t>
-            </a:r>
-          </a:p>
-        </p:txBody>
-      </p:sp>
-      <p:sp>
-        <p:nvSpPr>
-          <p:cNvPr id="18" name="TextBox 17"/>
-          <p:cNvSpPr txBox="1"/>
-          <p:nvPr/>
-        </p:nvSpPr>
-        <p:spPr>
-          <a:xfrm>
-            <a:off x="533400" y="5676900"/>
-            <a:ext cx="11125200" cy="546100"/>
-          </a:xfrm>
-          <a:prstGeom prst="rect">
-            <a:avLst/>
-          </a:prstGeom>
-          <a:noFill/>
-        </p:spPr>
-        <p:txBody>
-          <a:bodyPr wrap="none" lIns="0" rIns="0" tIns="0" bIns="0">
-            <a:spAutoFit/>
-          </a:bodyPr>
-          <a:lstStyle/>
-          <a:p>
-            <a:pPr>
-              <a:lnSpc>
-                <a:spcPts val="1583"/>
-              </a:lnSpc>
-              <a:spcAft>
-                <a:spcPts val="0"/>
-              </a:spcAft>
-              <a:defRPr sz="1320" b="0">
+                <a:spcPts val="930"/>
+              </a:lnSpc>
+              <a:spcAft>
+                <a:spcPts val="0"/>
+              </a:spcAft>
+              <a:defRPr sz="750" b="0">
                 <a:solidFill>
                   <a:srgbClr val="68635B"/>
                 </a:solidFill>
@@ -7598,7 +7468,7 @@
               </a:defRPr>
             </a:pPr>
             <a:r>
-              <a:t>Automatické testy nenahrazují nezávislé expertní hodnocení použitelnosti.</a:t>
+              <a:t>DODATEČNĚ PŘIPRAVENÝ PODKLAD K MILNÍKU</a:t>
             </a:r>
           </a:p>
         </p:txBody>
@@ -7606,48 +7476,6 @@
       <p:sp>
         <p:nvSpPr>
           <p:cNvPr id="19" name="TextBox 18"/>
-          <p:cNvSpPr txBox="1"/>
-          <p:nvPr/>
-        </p:nvSpPr>
-        <p:spPr>
-          <a:xfrm>
-            <a:off x="533400" y="6413500"/>
-            <a:ext cx="10033000" cy="181610"/>
-          </a:xfrm>
-          <a:prstGeom prst="rect">
-            <a:avLst/>
-          </a:prstGeom>
-          <a:noFill/>
-        </p:spPr>
-        <p:txBody>
-          <a:bodyPr wrap="none" lIns="0" rIns="0" tIns="0" bIns="0">
-            <a:spAutoFit/>
-          </a:bodyPr>
-          <a:lstStyle/>
-          <a:p>
-            <a:pPr>
-              <a:lnSpc>
-                <a:spcPts val="930"/>
-              </a:lnSpc>
-              <a:spcAft>
-                <a:spcPts val="0"/>
-              </a:spcAft>
-              <a:defRPr sz="750" b="0">
-                <a:solidFill>
-                  <a:srgbClr val="68635B"/>
-                </a:solidFill>
-                <a:latin typeface="Arial"/>
-              </a:defRPr>
-            </a:pPr>
-            <a:r>
-              <a:t>DODATEČNĚ PŘIPRAVENÝ PODKLAD K MILNÍKU</a:t>
-            </a:r>
-          </a:p>
-        </p:txBody>
-      </p:sp>
-      <p:sp>
-        <p:nvSpPr>
-          <p:cNvPr id="20" name="TextBox 19"/>
           <p:cNvSpPr txBox="1"/>
           <p:nvPr/>
         </p:nvSpPr>
@@ -7876,14 +7704,184 @@
       </p:sp>
       <p:sp>
         <p:nvSpPr>
-          <p:cNvPr id="6" name="Rectangle 5"/>
+          <p:cNvPr id="6" name="TextBox 5"/>
+          <p:cNvSpPr txBox="1"/>
+          <p:nvPr/>
+        </p:nvSpPr>
+        <p:spPr>
+          <a:xfrm>
+            <a:off x="5588000" y="533400"/>
+            <a:ext cx="6070600" cy="220979"/>
+          </a:xfrm>
+          <a:prstGeom prst="rect">
+            <a:avLst/>
+          </a:prstGeom>
+          <a:noFill/>
+        </p:spPr>
+        <p:txBody>
+          <a:bodyPr wrap="none" lIns="0" rIns="0" tIns="0" bIns="0">
+            <a:spAutoFit/>
+          </a:bodyPr>
+          <a:lstStyle/>
+          <a:p>
+            <a:pPr>
+              <a:lnSpc>
+                <a:spcPts val="1240"/>
+              </a:lnSpc>
+              <a:spcAft>
+                <a:spcPts val="0"/>
+              </a:spcAft>
+              <a:defRPr sz="1000" b="1">
+                <a:solidFill>
+                  <a:srgbClr val="68635B"/>
+                </a:solidFill>
+                <a:latin typeface="Arial"/>
+              </a:defRPr>
+            </a:pPr>
+            <a:r>
+              <a:t>CO REVIEWER POTŘEBUJE VĚDĚT</a:t>
+            </a:r>
+          </a:p>
+        </p:txBody>
+      </p:sp>
+      <p:sp>
+        <p:nvSpPr>
+          <p:cNvPr id="7" name="Rectangle 6"/>
           <p:cNvSpPr/>
           <p:nvPr/>
         </p:nvSpPr>
         <p:spPr>
           <a:xfrm>
-            <a:off x="1866900" y="368300"/>
-            <a:ext cx="88900" cy="431800"/>
+            <a:off x="533400" y="1155700"/>
+            <a:ext cx="11125200" cy="25400"/>
+          </a:xfrm>
+          <a:prstGeom prst="rect">
+            <a:avLst/>
+          </a:prstGeom>
+          <a:solidFill>
+            <a:srgbClr val="181817"/>
+          </a:solidFill>
+          <a:ln>
+            <a:noFill/>
+          </a:ln>
+        </p:spPr>
+        <p:style>
+          <a:lnRef idx="1">
+            <a:schemeClr val="accent1"/>
+          </a:lnRef>
+          <a:fillRef idx="3">
+            <a:schemeClr val="accent1"/>
+          </a:fillRef>
+          <a:effectRef idx="2">
+            <a:schemeClr val="accent1"/>
+          </a:effectRef>
+          <a:fontRef idx="minor">
+            <a:schemeClr val="lt1"/>
+          </a:fontRef>
+        </p:style>
+        <p:txBody>
+          <a:bodyPr rtlCol="0" anchor="ctr"/>
+          <a:lstStyle/>
+          <a:p>
+            <a:pPr algn="ctr"/>
+          </a:p>
+        </p:txBody>
+      </p:sp>
+      <p:sp>
+        <p:nvSpPr>
+          <p:cNvPr id="8" name="TextBox 7"/>
+          <p:cNvSpPr txBox="1"/>
+          <p:nvPr/>
+        </p:nvSpPr>
+        <p:spPr>
+          <a:xfrm>
+            <a:off x="508000" y="1422400"/>
+            <a:ext cx="11176000" cy="1079500"/>
+          </a:xfrm>
+          <a:prstGeom prst="rect">
+            <a:avLst/>
+          </a:prstGeom>
+          <a:noFill/>
+        </p:spPr>
+        <p:txBody>
+          <a:bodyPr wrap="none" lIns="0" rIns="0" tIns="0" bIns="0">
+            <a:spAutoFit/>
+          </a:bodyPr>
+          <a:lstStyle/>
+          <a:p>
+            <a:pPr>
+              <a:lnSpc>
+                <a:spcPts val="3740"/>
+              </a:lnSpc>
+              <a:spcAft>
+                <a:spcPts val="0"/>
+              </a:spcAft>
+              <a:defRPr sz="3400" b="1">
+                <a:solidFill>
+                  <a:srgbClr val="181817"/>
+                </a:solidFill>
+                <a:latin typeface="Arial"/>
+              </a:defRPr>
+            </a:pPr>
+            <a:r>
+              <a:t>Známé hranice jsou součást předání.</a:t>
+            </a:r>
+          </a:p>
+        </p:txBody>
+      </p:sp>
+      <p:sp>
+        <p:nvSpPr>
+          <p:cNvPr id="9" name="Rectangle 8"/>
+          <p:cNvSpPr/>
+          <p:nvPr/>
+        </p:nvSpPr>
+        <p:spPr>
+          <a:xfrm>
+            <a:off x="533400" y="2768600"/>
+            <a:ext cx="5448300" cy="2603500"/>
+          </a:xfrm>
+          <a:prstGeom prst="rect">
+            <a:avLst/>
+          </a:prstGeom>
+          <a:solidFill>
+            <a:srgbClr val="181817"/>
+          </a:solidFill>
+          <a:ln>
+            <a:noFill/>
+          </a:ln>
+        </p:spPr>
+        <p:style>
+          <a:lnRef idx="1">
+            <a:schemeClr val="accent1"/>
+          </a:lnRef>
+          <a:fillRef idx="3">
+            <a:schemeClr val="accent1"/>
+          </a:fillRef>
+          <a:effectRef idx="2">
+            <a:schemeClr val="accent1"/>
+          </a:effectRef>
+          <a:fontRef idx="minor">
+            <a:schemeClr val="lt1"/>
+          </a:fontRef>
+        </p:style>
+        <p:txBody>
+          <a:bodyPr rtlCol="0" anchor="ctr"/>
+          <a:lstStyle/>
+          <a:p>
+            <a:pPr algn="ctr"/>
+          </a:p>
+        </p:txBody>
+      </p:sp>
+      <p:sp>
+        <p:nvSpPr>
+          <p:cNvPr id="10" name="Rectangle 9"/>
+          <p:cNvSpPr/>
+          <p:nvPr/>
+        </p:nvSpPr>
+        <p:spPr>
+          <a:xfrm>
+            <a:off x="533400" y="2768600"/>
+            <a:ext cx="5448300" cy="76200"/>
           </a:xfrm>
           <a:prstGeom prst="rect">
             <a:avLst/>
@@ -7919,14 +7917,14 @@
       </p:sp>
       <p:sp>
         <p:nvSpPr>
-          <p:cNvPr id="7" name="TextBox 6"/>
+          <p:cNvPr id="11" name="TextBox 10"/>
           <p:cNvSpPr txBox="1"/>
           <p:nvPr/>
         </p:nvSpPr>
         <p:spPr>
           <a:xfrm>
-            <a:off x="5588000" y="533400"/>
-            <a:ext cx="6070600" cy="220979"/>
+            <a:off x="749300" y="3035300"/>
+            <a:ext cx="5016500" cy="685800"/>
           </a:xfrm>
           <a:prstGeom prst="rect">
             <a:avLst/>
@@ -7941,40 +7939,136 @@
           <a:p>
             <a:pPr>
               <a:lnSpc>
-                <a:spcPts val="1240"/>
-              </a:lnSpc>
-              <a:spcAft>
-                <a:spcPts val="0"/>
-              </a:spcAft>
-              <a:defRPr sz="1000" b="1">
-                <a:solidFill>
-                  <a:srgbClr val="68635B"/>
-                </a:solidFill>
-                <a:latin typeface="Arial"/>
-              </a:defRPr>
-            </a:pPr>
-            <a:r>
-              <a:t>CO REVIEWER POTŘEBUJE VĚDĚT</a:t>
-            </a:r>
-          </a:p>
-        </p:txBody>
-      </p:sp>
-      <p:sp>
-        <p:nvSpPr>
-          <p:cNvPr id="8" name="Rectangle 7"/>
+                <a:spcPts val="2200"/>
+              </a:lnSpc>
+              <a:spcAft>
+                <a:spcPts val="0"/>
+              </a:spcAft>
+              <a:defRPr sz="2000" b="1">
+                <a:solidFill>
+                  <a:srgbClr val="F4F0E7"/>
+                </a:solidFill>
+                <a:latin typeface="Arial"/>
+              </a:defRPr>
+            </a:pPr>
+            <a:r>
+              <a:t>Klientské řešení</a:t>
+            </a:r>
+          </a:p>
+        </p:txBody>
+      </p:sp>
+      <p:sp>
+        <p:nvSpPr>
+          <p:cNvPr id="12" name="TextBox 11"/>
+          <p:cNvSpPr txBox="1"/>
+          <p:nvPr/>
+        </p:nvSpPr>
+        <p:spPr>
+          <a:xfrm>
+            <a:off x="749300" y="3733800"/>
+            <a:ext cx="5016500" cy="1511300"/>
+          </a:xfrm>
+          <a:prstGeom prst="rect">
+            <a:avLst/>
+          </a:prstGeom>
+          <a:noFill/>
+        </p:spPr>
+        <p:txBody>
+          <a:bodyPr wrap="none" lIns="0" rIns="0" tIns="0" bIns="0">
+            <a:spAutoFit/>
+          </a:bodyPr>
+          <a:lstStyle/>
+          <a:p>
+            <a:pPr>
+              <a:lnSpc>
+                <a:spcPts val="1689"/>
+              </a:lnSpc>
+              <a:spcAft>
+                <a:spcPts val="0"/>
+              </a:spcAft>
+              <a:defRPr sz="1420" b="0">
+                <a:solidFill>
+                  <a:srgbClr val="F4F0E7"/>
+                </a:solidFill>
+                <a:latin typeface="Arial"/>
+              </a:defRPr>
+            </a:pPr>
+            <a:r>
+              <a:t>Účty, výběr i obsazenost jsou v jednom prohlížeči.</a:t>
+            </a:r>
+          </a:p>
+          <a:p>
+            <a:pPr>
+              <a:lnSpc>
+                <a:spcPts val="1689"/>
+              </a:lnSpc>
+              <a:spcAft>
+                <a:spcPts val="0"/>
+              </a:spcAft>
+              <a:defRPr sz="1420" b="0">
+                <a:solidFill>
+                  <a:srgbClr val="F4F0E7"/>
+                </a:solidFill>
+                <a:latin typeface="Arial"/>
+              </a:defRPr>
+            </a:pPr>
+          </a:p>
+          <a:p>
+            <a:pPr>
+              <a:lnSpc>
+                <a:spcPts val="1689"/>
+              </a:lnSpc>
+              <a:spcAft>
+                <a:spcPts val="0"/>
+              </a:spcAft>
+              <a:defRPr sz="1420" b="0">
+                <a:solidFill>
+                  <a:srgbClr val="F4F0E7"/>
+                </a:solidFill>
+                <a:latin typeface="Arial"/>
+              </a:defRPr>
+            </a:pPr>
+            <a:r>
+              <a:t>Není sdílený backend, skutečná platba ani automatický</a:t>
+            </a:r>
+          </a:p>
+          <a:p>
+            <a:pPr>
+              <a:lnSpc>
+                <a:spcPts val="1689"/>
+              </a:lnSpc>
+              <a:spcAft>
+                <a:spcPts val="0"/>
+              </a:spcAft>
+              <a:defRPr sz="1420" b="0">
+                <a:solidFill>
+                  <a:srgbClr val="F4F0E7"/>
+                </a:solidFill>
+                <a:latin typeface="Arial"/>
+              </a:defRPr>
+            </a:pPr>
+            <a:r>
+              <a:t>e-mail.</a:t>
+            </a:r>
+          </a:p>
+        </p:txBody>
+      </p:sp>
+      <p:sp>
+        <p:nvSpPr>
+          <p:cNvPr id="13" name="Rectangle 12"/>
           <p:cNvSpPr/>
           <p:nvPr/>
         </p:nvSpPr>
         <p:spPr>
           <a:xfrm>
-            <a:off x="533400" y="1155700"/>
-            <a:ext cx="11125200" cy="25400"/>
+            <a:off x="6210300" y="2768600"/>
+            <a:ext cx="5448300" cy="2603500"/>
           </a:xfrm>
           <a:prstGeom prst="rect">
             <a:avLst/>
           </a:prstGeom>
           <a:solidFill>
-            <a:srgbClr val="181817"/>
+            <a:srgbClr val="E7E0D5"/>
           </a:solidFill>
           <a:ln>
             <a:noFill/>
@@ -8004,98 +8098,13 @@
       </p:sp>
       <p:sp>
         <p:nvSpPr>
-          <p:cNvPr id="9" name="TextBox 8"/>
-          <p:cNvSpPr txBox="1"/>
-          <p:nvPr/>
-        </p:nvSpPr>
-        <p:spPr>
-          <a:xfrm>
-            <a:off x="508000" y="1422400"/>
-            <a:ext cx="11176000" cy="1079500"/>
-          </a:xfrm>
-          <a:prstGeom prst="rect">
-            <a:avLst/>
-          </a:prstGeom>
-          <a:noFill/>
-        </p:spPr>
-        <p:txBody>
-          <a:bodyPr wrap="none" lIns="0" rIns="0" tIns="0" bIns="0">
-            <a:spAutoFit/>
-          </a:bodyPr>
-          <a:lstStyle/>
-          <a:p>
-            <a:pPr>
-              <a:lnSpc>
-                <a:spcPts val="3740"/>
-              </a:lnSpc>
-              <a:spcAft>
-                <a:spcPts val="0"/>
-              </a:spcAft>
-              <a:defRPr sz="3400" b="1">
-                <a:solidFill>
-                  <a:srgbClr val="181817"/>
-                </a:solidFill>
-                <a:latin typeface="Arial"/>
-              </a:defRPr>
-            </a:pPr>
-            <a:r>
-              <a:t>Známé hranice jsou součást předání.</a:t>
-            </a:r>
-          </a:p>
-        </p:txBody>
-      </p:sp>
-      <p:sp>
-        <p:nvSpPr>
-          <p:cNvPr id="10" name="Rectangle 9"/>
+          <p:cNvPr id="14" name="Rectangle 13"/>
           <p:cNvSpPr/>
           <p:nvPr/>
         </p:nvSpPr>
         <p:spPr>
           <a:xfrm>
-            <a:off x="533400" y="2768600"/>
-            <a:ext cx="5448300" cy="2603500"/>
-          </a:xfrm>
-          <a:prstGeom prst="rect">
-            <a:avLst/>
-          </a:prstGeom>
-          <a:solidFill>
-            <a:srgbClr val="181817"/>
-          </a:solidFill>
-          <a:ln>
-            <a:noFill/>
-          </a:ln>
-        </p:spPr>
-        <p:style>
-          <a:lnRef idx="1">
-            <a:schemeClr val="accent1"/>
-          </a:lnRef>
-          <a:fillRef idx="3">
-            <a:schemeClr val="accent1"/>
-          </a:fillRef>
-          <a:effectRef idx="2">
-            <a:schemeClr val="accent1"/>
-          </a:effectRef>
-          <a:fontRef idx="minor">
-            <a:schemeClr val="lt1"/>
-          </a:fontRef>
-        </p:style>
-        <p:txBody>
-          <a:bodyPr rtlCol="0" anchor="ctr"/>
-          <a:lstStyle/>
-          <a:p>
-            <a:pPr algn="ctr"/>
-          </a:p>
-        </p:txBody>
-      </p:sp>
-      <p:sp>
-        <p:nvSpPr>
-          <p:cNvPr id="11" name="Rectangle 10"/>
-          <p:cNvSpPr/>
-          <p:nvPr/>
-        </p:nvSpPr>
-        <p:spPr>
-          <a:xfrm>
-            <a:off x="533400" y="2768600"/>
+            <a:off x="6210300" y="2768600"/>
             <a:ext cx="5448300" cy="76200"/>
           </a:xfrm>
           <a:prstGeom prst="rect">
@@ -8132,13 +8141,13 @@
       </p:sp>
       <p:sp>
         <p:nvSpPr>
-          <p:cNvPr id="12" name="TextBox 11"/>
+          <p:cNvPr id="15" name="TextBox 14"/>
           <p:cNvSpPr txBox="1"/>
           <p:nvPr/>
         </p:nvSpPr>
         <p:spPr>
           <a:xfrm>
-            <a:off x="749300" y="3035300"/>
+            <a:off x="6426200" y="3035300"/>
             <a:ext cx="5016500" cy="685800"/>
           </a:xfrm>
           <a:prstGeom prst="rect">
@@ -8161,26 +8170,26 @@
               </a:spcAft>
               <a:defRPr sz="2000" b="1">
                 <a:solidFill>
-                  <a:srgbClr val="F4F0E7"/>
-                </a:solidFill>
-                <a:latin typeface="Arial"/>
-              </a:defRPr>
-            </a:pPr>
-            <a:r>
-              <a:t>Klientské řešení</a:t>
-            </a:r>
-          </a:p>
-        </p:txBody>
-      </p:sp>
-      <p:sp>
-        <p:nvSpPr>
-          <p:cNvPr id="13" name="TextBox 12"/>
+                  <a:srgbClr val="181817"/>
+                </a:solidFill>
+                <a:latin typeface="Arial"/>
+              </a:defRPr>
+            </a:pPr>
+            <a:r>
+              <a:t>Dosud nedoloženo</a:t>
+            </a:r>
+          </a:p>
+        </p:txBody>
+      </p:sp>
+      <p:sp>
+        <p:nvSpPr>
+          <p:cNvPr id="16" name="TextBox 15"/>
           <p:cNvSpPr txBox="1"/>
           <p:nvPr/>
         </p:nvSpPr>
         <p:spPr>
           <a:xfrm>
-            <a:off x="749300" y="3733800"/>
+            <a:off x="6426200" y="3733800"/>
             <a:ext cx="5016500" cy="1511300"/>
           </a:xfrm>
           <a:prstGeom prst="rect">
@@ -8203,13 +8212,13 @@
               </a:spcAft>
               <a:defRPr sz="1420" b="0">
                 <a:solidFill>
-                  <a:srgbClr val="F4F0E7"/>
-                </a:solidFill>
-                <a:latin typeface="Arial"/>
-              </a:defRPr>
-            </a:pPr>
-            <a:r>
-              <a:t>Účty, výběr i obsazenost jsou v jednom prohlížeči.</a:t>
+                  <a:srgbClr val="181817"/>
+                </a:solidFill>
+                <a:latin typeface="Arial"/>
+              </a:defRPr>
+            </a:pPr>
+            <a:r>
+              <a:t>Plný audit WCAG, fyzické telefony, všechny prohlížeče</a:t>
             </a:r>
           </a:p>
           <a:p>
@@ -8222,11 +8231,14 @@
               </a:spcAft>
               <a:defRPr sz="1420" b="0">
                 <a:solidFill>
-                  <a:srgbClr val="F4F0E7"/>
-                </a:solidFill>
-                <a:latin typeface="Arial"/>
-              </a:defRPr>
-            </a:pPr>
+                  <a:srgbClr val="181817"/>
+                </a:solidFill>
+                <a:latin typeface="Arial"/>
+              </a:defRPr>
+            </a:pPr>
+            <a:r>
+              <a:t>a reálný uživatelský výzkum.</a:t>
+            </a:r>
           </a:p>
           <a:p>
             <a:pPr>
@@ -8238,14 +8250,11 @@
               </a:spcAft>
               <a:defRPr sz="1420" b="0">
                 <a:solidFill>
-                  <a:srgbClr val="F4F0E7"/>
-                </a:solidFill>
-                <a:latin typeface="Arial"/>
-              </a:defRPr>
-            </a:pPr>
-            <a:r>
-              <a:t>Není sdílený backend, skutečná platba ani automatický</a:t>
-            </a:r>
+                  <a:srgbClr val="181817"/>
+                </a:solidFill>
+                <a:latin typeface="Arial"/>
+              </a:defRPr>
+            </a:pPr>
           </a:p>
           <a:p>
             <a:pPr>
@@ -8257,113 +8266,27 @@
               </a:spcAft>
               <a:defRPr sz="1420" b="0">
                 <a:solidFill>
-                  <a:srgbClr val="F4F0E7"/>
-                </a:solidFill>
-                <a:latin typeface="Arial"/>
-              </a:defRPr>
-            </a:pPr>
-            <a:r>
-              <a:t>e-mail.</a:t>
-            </a:r>
-          </a:p>
-        </p:txBody>
-      </p:sp>
-      <p:sp>
-        <p:nvSpPr>
-          <p:cNvPr id="14" name="Rectangle 13"/>
-          <p:cNvSpPr/>
-          <p:nvPr/>
-        </p:nvSpPr>
-        <p:spPr>
-          <a:xfrm>
-            <a:off x="6210300" y="2768600"/>
-            <a:ext cx="5448300" cy="2603500"/>
-          </a:xfrm>
-          <a:prstGeom prst="rect">
-            <a:avLst/>
-          </a:prstGeom>
-          <a:solidFill>
-            <a:srgbClr val="E7E0D5"/>
-          </a:solidFill>
-          <a:ln>
-            <a:noFill/>
-          </a:ln>
-        </p:spPr>
-        <p:style>
-          <a:lnRef idx="1">
-            <a:schemeClr val="accent1"/>
-          </a:lnRef>
-          <a:fillRef idx="3">
-            <a:schemeClr val="accent1"/>
-          </a:fillRef>
-          <a:effectRef idx="2">
-            <a:schemeClr val="accent1"/>
-          </a:effectRef>
-          <a:fontRef idx="minor">
-            <a:schemeClr val="lt1"/>
-          </a:fontRef>
-        </p:style>
-        <p:txBody>
-          <a:bodyPr rtlCol="0" anchor="ctr"/>
-          <a:lstStyle/>
-          <a:p>
-            <a:pPr algn="ctr"/>
-          </a:p>
-        </p:txBody>
-      </p:sp>
-      <p:sp>
-        <p:nvSpPr>
-          <p:cNvPr id="15" name="Rectangle 14"/>
-          <p:cNvSpPr/>
-          <p:nvPr/>
-        </p:nvSpPr>
-        <p:spPr>
-          <a:xfrm>
-            <a:off x="6210300" y="2768600"/>
-            <a:ext cx="5448300" cy="76200"/>
-          </a:xfrm>
-          <a:prstGeom prst="rect">
-            <a:avLst/>
-          </a:prstGeom>
-          <a:solidFill>
-            <a:srgbClr val="F45E2B"/>
-          </a:solidFill>
-          <a:ln>
-            <a:noFill/>
-          </a:ln>
-        </p:spPr>
-        <p:style>
-          <a:lnRef idx="1">
-            <a:schemeClr val="accent1"/>
-          </a:lnRef>
-          <a:fillRef idx="3">
-            <a:schemeClr val="accent1"/>
-          </a:fillRef>
-          <a:effectRef idx="2">
-            <a:schemeClr val="accent1"/>
-          </a:effectRef>
-          <a:fontRef idx="minor">
-            <a:schemeClr val="lt1"/>
-          </a:fontRef>
-        </p:style>
-        <p:txBody>
-          <a:bodyPr rtlCol="0" anchor="ctr"/>
-          <a:lstStyle/>
-          <a:p>
-            <a:pPr algn="ctr"/>
-          </a:p>
-        </p:txBody>
-      </p:sp>
-      <p:sp>
-        <p:nvSpPr>
-          <p:cNvPr id="16" name="TextBox 15"/>
+                  <a:srgbClr val="181817"/>
+                </a:solidFill>
+                <a:latin typeface="Arial"/>
+              </a:defRPr>
+            </a:pPr>
+            <a:r>
+              <a:t>Externí mapa potřebuje síť.</a:t>
+            </a:r>
+          </a:p>
+        </p:txBody>
+      </p:sp>
+      <p:sp>
+        <p:nvSpPr>
+          <p:cNvPr id="17" name="TextBox 16"/>
           <p:cNvSpPr txBox="1"/>
           <p:nvPr/>
         </p:nvSpPr>
         <p:spPr>
           <a:xfrm>
-            <a:off x="6426200" y="3035300"/>
-            <a:ext cx="5016500" cy="685800"/>
+            <a:off x="533400" y="5676900"/>
+            <a:ext cx="11125200" cy="546100"/>
           </a:xfrm>
           <a:prstGeom prst="rect">
             <a:avLst/>
@@ -8378,34 +8301,34 @@
           <a:p>
             <a:pPr>
               <a:lnSpc>
-                <a:spcPts val="2200"/>
-              </a:lnSpc>
-              <a:spcAft>
-                <a:spcPts val="0"/>
-              </a:spcAft>
-              <a:defRPr sz="2000" b="1">
-                <a:solidFill>
-                  <a:srgbClr val="181817"/>
-                </a:solidFill>
-                <a:latin typeface="Arial"/>
-              </a:defRPr>
-            </a:pPr>
-            <a:r>
-              <a:t>Dosud nedoloženo</a:t>
-            </a:r>
-          </a:p>
-        </p:txBody>
-      </p:sp>
-      <p:sp>
-        <p:nvSpPr>
-          <p:cNvPr id="17" name="TextBox 16"/>
+                <a:spcPts val="1583"/>
+              </a:lnSpc>
+              <a:spcAft>
+                <a:spcPts val="0"/>
+              </a:spcAft>
+              <a:defRPr sz="1320" b="0">
+                <a:solidFill>
+                  <a:srgbClr val="68635B"/>
+                </a:solidFill>
+                <a:latin typeface="Arial"/>
+              </a:defRPr>
+            </a:pPr>
+            <a:r>
+              <a:t>Fiktivní festival není ověřený skutečný pořadatel nebo reálný prodej.</a:t>
+            </a:r>
+          </a:p>
+        </p:txBody>
+      </p:sp>
+      <p:sp>
+        <p:nvSpPr>
+          <p:cNvPr id="18" name="TextBox 17"/>
           <p:cNvSpPr txBox="1"/>
           <p:nvPr/>
         </p:nvSpPr>
         <p:spPr>
           <a:xfrm>
-            <a:off x="6426200" y="3733800"/>
-            <a:ext cx="5016500" cy="1511300"/>
+            <a:off x="533400" y="6413500"/>
+            <a:ext cx="10033000" cy="181610"/>
           </a:xfrm>
           <a:prstGeom prst="rect">
             <a:avLst/>
@@ -8420,108 +8343,12 @@
           <a:p>
             <a:pPr>
               <a:lnSpc>
-                <a:spcPts val="1689"/>
-              </a:lnSpc>
-              <a:spcAft>
-                <a:spcPts val="0"/>
-              </a:spcAft>
-              <a:defRPr sz="1420" b="0">
-                <a:solidFill>
-                  <a:srgbClr val="181817"/>
-                </a:solidFill>
-                <a:latin typeface="Arial"/>
-              </a:defRPr>
-            </a:pPr>
-            <a:r>
-              <a:t>Plný audit WCAG, fyzické telefony, všechny prohlížeče</a:t>
-            </a:r>
-          </a:p>
-          <a:p>
-            <a:pPr>
-              <a:lnSpc>
-                <a:spcPts val="1689"/>
-              </a:lnSpc>
-              <a:spcAft>
-                <a:spcPts val="0"/>
-              </a:spcAft>
-              <a:defRPr sz="1420" b="0">
-                <a:solidFill>
-                  <a:srgbClr val="181817"/>
-                </a:solidFill>
-                <a:latin typeface="Arial"/>
-              </a:defRPr>
-            </a:pPr>
-            <a:r>
-              <a:t>a reálný uživatelský výzkum.</a:t>
-            </a:r>
-          </a:p>
-          <a:p>
-            <a:pPr>
-              <a:lnSpc>
-                <a:spcPts val="1689"/>
-              </a:lnSpc>
-              <a:spcAft>
-                <a:spcPts val="0"/>
-              </a:spcAft>
-              <a:defRPr sz="1420" b="0">
-                <a:solidFill>
-                  <a:srgbClr val="181817"/>
-                </a:solidFill>
-                <a:latin typeface="Arial"/>
-              </a:defRPr>
-            </a:pPr>
-          </a:p>
-          <a:p>
-            <a:pPr>
-              <a:lnSpc>
-                <a:spcPts val="1689"/>
-              </a:lnSpc>
-              <a:spcAft>
-                <a:spcPts val="0"/>
-              </a:spcAft>
-              <a:defRPr sz="1420" b="0">
-                <a:solidFill>
-                  <a:srgbClr val="181817"/>
-                </a:solidFill>
-                <a:latin typeface="Arial"/>
-              </a:defRPr>
-            </a:pPr>
-            <a:r>
-              <a:t>Externí mapa potřebuje síť.</a:t>
-            </a:r>
-          </a:p>
-        </p:txBody>
-      </p:sp>
-      <p:sp>
-        <p:nvSpPr>
-          <p:cNvPr id="18" name="TextBox 17"/>
-          <p:cNvSpPr txBox="1"/>
-          <p:nvPr/>
-        </p:nvSpPr>
-        <p:spPr>
-          <a:xfrm>
-            <a:off x="533400" y="5676900"/>
-            <a:ext cx="11125200" cy="546100"/>
-          </a:xfrm>
-          <a:prstGeom prst="rect">
-            <a:avLst/>
-          </a:prstGeom>
-          <a:noFill/>
-        </p:spPr>
-        <p:txBody>
-          <a:bodyPr wrap="none" lIns="0" rIns="0" tIns="0" bIns="0">
-            <a:spAutoFit/>
-          </a:bodyPr>
-          <a:lstStyle/>
-          <a:p>
-            <a:pPr>
-              <a:lnSpc>
-                <a:spcPts val="1583"/>
-              </a:lnSpc>
-              <a:spcAft>
-                <a:spcPts val="0"/>
-              </a:spcAft>
-              <a:defRPr sz="1320" b="0">
+                <a:spcPts val="930"/>
+              </a:lnSpc>
+              <a:spcAft>
+                <a:spcPts val="0"/>
+              </a:spcAft>
+              <a:defRPr sz="750" b="0">
                 <a:solidFill>
                   <a:srgbClr val="68635B"/>
                 </a:solidFill>
@@ -8529,7 +8356,7 @@
               </a:defRPr>
             </a:pPr>
             <a:r>
-              <a:t>Fiktivní festival není ověřený skutečný pořadatel nebo reálný prodej.</a:t>
+              <a:t>DODATEČNĚ PŘIPRAVENÝ PODKLAD K MILNÍKU</a:t>
             </a:r>
           </a:p>
         </p:txBody>
@@ -8537,48 +8364,6 @@
       <p:sp>
         <p:nvSpPr>
           <p:cNvPr id="19" name="TextBox 18"/>
-          <p:cNvSpPr txBox="1"/>
-          <p:nvPr/>
-        </p:nvSpPr>
-        <p:spPr>
-          <a:xfrm>
-            <a:off x="533400" y="6413500"/>
-            <a:ext cx="10033000" cy="181610"/>
-          </a:xfrm>
-          <a:prstGeom prst="rect">
-            <a:avLst/>
-          </a:prstGeom>
-          <a:noFill/>
-        </p:spPr>
-        <p:txBody>
-          <a:bodyPr wrap="none" lIns="0" rIns="0" tIns="0" bIns="0">
-            <a:spAutoFit/>
-          </a:bodyPr>
-          <a:lstStyle/>
-          <a:p>
-            <a:pPr>
-              <a:lnSpc>
-                <a:spcPts val="930"/>
-              </a:lnSpc>
-              <a:spcAft>
-                <a:spcPts val="0"/>
-              </a:spcAft>
-              <a:defRPr sz="750" b="0">
-                <a:solidFill>
-                  <a:srgbClr val="68635B"/>
-                </a:solidFill>
-                <a:latin typeface="Arial"/>
-              </a:defRPr>
-            </a:pPr>
-            <a:r>
-              <a:t>DODATEČNĚ PŘIPRAVENÝ PODKLAD K MILNÍKU</a:t>
-            </a:r>
-          </a:p>
-        </p:txBody>
-      </p:sp>
-      <p:sp>
-        <p:nvSpPr>
-          <p:cNvPr id="20" name="TextBox 19"/>
           <p:cNvSpPr txBox="1"/>
           <p:nvPr/>
         </p:nvSpPr>
@@ -8807,14 +8592,184 @@
       </p:sp>
       <p:sp>
         <p:nvSpPr>
-          <p:cNvPr id="6" name="Rectangle 5"/>
+          <p:cNvPr id="6" name="TextBox 5"/>
+          <p:cNvSpPr txBox="1"/>
+          <p:nvPr/>
+        </p:nvSpPr>
+        <p:spPr>
+          <a:xfrm>
+            <a:off x="5588000" y="533400"/>
+            <a:ext cx="6070600" cy="220979"/>
+          </a:xfrm>
+          <a:prstGeom prst="rect">
+            <a:avLst/>
+          </a:prstGeom>
+          <a:noFill/>
+        </p:spPr>
+        <p:txBody>
+          <a:bodyPr wrap="none" lIns="0" rIns="0" tIns="0" bIns="0">
+            <a:spAutoFit/>
+          </a:bodyPr>
+          <a:lstStyle/>
+          <a:p>
+            <a:pPr>
+              <a:lnSpc>
+                <a:spcPts val="1240"/>
+              </a:lnSpc>
+              <a:spcAft>
+                <a:spcPts val="0"/>
+              </a:spcAft>
+              <a:defRPr sz="1000" b="1">
+                <a:solidFill>
+                  <a:srgbClr val="68635B"/>
+                </a:solidFill>
+                <a:latin typeface="Arial"/>
+              </a:defRPr>
+            </a:pPr>
+            <a:r>
+              <a:t>CROSS-REVIEW A POUŽITÍ AI</a:t>
+            </a:r>
+          </a:p>
+        </p:txBody>
+      </p:sp>
+      <p:sp>
+        <p:nvSpPr>
+          <p:cNvPr id="7" name="Rectangle 6"/>
           <p:cNvSpPr/>
           <p:nvPr/>
         </p:nvSpPr>
         <p:spPr>
           <a:xfrm>
-            <a:off x="1866900" y="368300"/>
-            <a:ext cx="88900" cy="431800"/>
+            <a:off x="533400" y="1155700"/>
+            <a:ext cx="11125200" cy="25400"/>
+          </a:xfrm>
+          <a:prstGeom prst="rect">
+            <a:avLst/>
+          </a:prstGeom>
+          <a:solidFill>
+            <a:srgbClr val="181817"/>
+          </a:solidFill>
+          <a:ln>
+            <a:noFill/>
+          </a:ln>
+        </p:spPr>
+        <p:style>
+          <a:lnRef idx="1">
+            <a:schemeClr val="accent1"/>
+          </a:lnRef>
+          <a:fillRef idx="3">
+            <a:schemeClr val="accent1"/>
+          </a:fillRef>
+          <a:effectRef idx="2">
+            <a:schemeClr val="accent1"/>
+          </a:effectRef>
+          <a:fontRef idx="minor">
+            <a:schemeClr val="lt1"/>
+          </a:fontRef>
+        </p:style>
+        <p:txBody>
+          <a:bodyPr rtlCol="0" anchor="ctr"/>
+          <a:lstStyle/>
+          <a:p>
+            <a:pPr algn="ctr"/>
+          </a:p>
+        </p:txBody>
+      </p:sp>
+      <p:sp>
+        <p:nvSpPr>
+          <p:cNvPr id="8" name="TextBox 7"/>
+          <p:cNvSpPr txBox="1"/>
+          <p:nvPr/>
+        </p:nvSpPr>
+        <p:spPr>
+          <a:xfrm>
+            <a:off x="508000" y="1422400"/>
+            <a:ext cx="11176000" cy="1079500"/>
+          </a:xfrm>
+          <a:prstGeom prst="rect">
+            <a:avLst/>
+          </a:prstGeom>
+          <a:noFill/>
+        </p:spPr>
+        <p:txBody>
+          <a:bodyPr wrap="none" lIns="0" rIns="0" tIns="0" bIns="0">
+            <a:spAutoFit/>
+          </a:bodyPr>
+          <a:lstStyle/>
+          <a:p>
+            <a:pPr>
+              <a:lnSpc>
+                <a:spcPts val="3740"/>
+              </a:lnSpc>
+              <a:spcAft>
+                <a:spcPts val="0"/>
+              </a:spcAft>
+              <a:defRPr sz="3400" b="1">
+                <a:solidFill>
+                  <a:srgbClr val="181817"/>
+                </a:solidFill>
+                <a:latin typeface="Arial"/>
+              </a:defRPr>
+            </a:pPr>
+            <a:r>
+              <a:t>Nález musí jít zopakovat.</a:t>
+            </a:r>
+          </a:p>
+        </p:txBody>
+      </p:sp>
+      <p:sp>
+        <p:nvSpPr>
+          <p:cNvPr id="9" name="Rectangle 8"/>
+          <p:cNvSpPr/>
+          <p:nvPr/>
+        </p:nvSpPr>
+        <p:spPr>
+          <a:xfrm>
+            <a:off x="533400" y="2768600"/>
+            <a:ext cx="5448300" cy="2603500"/>
+          </a:xfrm>
+          <a:prstGeom prst="rect">
+            <a:avLst/>
+          </a:prstGeom>
+          <a:solidFill>
+            <a:srgbClr val="181817"/>
+          </a:solidFill>
+          <a:ln>
+            <a:noFill/>
+          </a:ln>
+        </p:spPr>
+        <p:style>
+          <a:lnRef idx="1">
+            <a:schemeClr val="accent1"/>
+          </a:lnRef>
+          <a:fillRef idx="3">
+            <a:schemeClr val="accent1"/>
+          </a:fillRef>
+          <a:effectRef idx="2">
+            <a:schemeClr val="accent1"/>
+          </a:effectRef>
+          <a:fontRef idx="minor">
+            <a:schemeClr val="lt1"/>
+          </a:fontRef>
+        </p:style>
+        <p:txBody>
+          <a:bodyPr rtlCol="0" anchor="ctr"/>
+          <a:lstStyle/>
+          <a:p>
+            <a:pPr algn="ctr"/>
+          </a:p>
+        </p:txBody>
+      </p:sp>
+      <p:sp>
+        <p:nvSpPr>
+          <p:cNvPr id="10" name="Rectangle 9"/>
+          <p:cNvSpPr/>
+          <p:nvPr/>
+        </p:nvSpPr>
+        <p:spPr>
+          <a:xfrm>
+            <a:off x="533400" y="2768600"/>
+            <a:ext cx="5448300" cy="76200"/>
           </a:xfrm>
           <a:prstGeom prst="rect">
             <a:avLst/>
@@ -8850,14 +8805,14 @@
       </p:sp>
       <p:sp>
         <p:nvSpPr>
-          <p:cNvPr id="7" name="TextBox 6"/>
+          <p:cNvPr id="11" name="TextBox 10"/>
           <p:cNvSpPr txBox="1"/>
           <p:nvPr/>
         </p:nvSpPr>
         <p:spPr>
           <a:xfrm>
-            <a:off x="5588000" y="533400"/>
-            <a:ext cx="6070600" cy="220979"/>
+            <a:off x="749300" y="3035300"/>
+            <a:ext cx="5016500" cy="685800"/>
           </a:xfrm>
           <a:prstGeom prst="rect">
             <a:avLst/>
@@ -8872,40 +8827,117 @@
           <a:p>
             <a:pPr>
               <a:lnSpc>
-                <a:spcPts val="1240"/>
-              </a:lnSpc>
-              <a:spcAft>
-                <a:spcPts val="0"/>
-              </a:spcAft>
-              <a:defRPr sz="1000" b="1">
-                <a:solidFill>
-                  <a:srgbClr val="68635B"/>
-                </a:solidFill>
-                <a:latin typeface="Arial"/>
-              </a:defRPr>
-            </a:pPr>
-            <a:r>
-              <a:t>CROSS-REVIEW A POUŽITÍ AI</a:t>
-            </a:r>
-          </a:p>
-        </p:txBody>
-      </p:sp>
-      <p:sp>
-        <p:nvSpPr>
-          <p:cNvPr id="8" name="Rectangle 7"/>
+                <a:spcPts val="2200"/>
+              </a:lnSpc>
+              <a:spcAft>
+                <a:spcPts val="0"/>
+              </a:spcAft>
+              <a:defRPr sz="2000" b="1">
+                <a:solidFill>
+                  <a:srgbClr val="F4F0E7"/>
+                </a:solidFill>
+                <a:latin typeface="Arial"/>
+              </a:defRPr>
+            </a:pPr>
+            <a:r>
+              <a:t>Od reviewerů</a:t>
+            </a:r>
+          </a:p>
+        </p:txBody>
+      </p:sp>
+      <p:sp>
+        <p:nvSpPr>
+          <p:cNvPr id="12" name="TextBox 11"/>
+          <p:cNvSpPr txBox="1"/>
+          <p:nvPr/>
+        </p:nvSpPr>
+        <p:spPr>
+          <a:xfrm>
+            <a:off x="749300" y="3733800"/>
+            <a:ext cx="5016500" cy="1511300"/>
+          </a:xfrm>
+          <a:prstGeom prst="rect">
+            <a:avLst/>
+          </a:prstGeom>
+          <a:noFill/>
+        </p:spPr>
+        <p:txBody>
+          <a:bodyPr wrap="none" lIns="0" rIns="0" tIns="0" bIns="0">
+            <a:spAutoFit/>
+          </a:bodyPr>
+          <a:lstStyle/>
+          <a:p>
+            <a:pPr>
+              <a:lnSpc>
+                <a:spcPts val="1689"/>
+              </a:lnSpc>
+              <a:spcAft>
+                <a:spcPts val="0"/>
+              </a:spcAft>
+              <a:defRPr sz="1420" b="0">
+                <a:solidFill>
+                  <a:srgbClr val="F4F0E7"/>
+                </a:solidFill>
+                <a:latin typeface="Arial"/>
+              </a:defRPr>
+            </a:pPr>
+            <a:r>
+              <a:t>Stránka + kroky + očekávání + skutečnost + důkaz.</a:t>
+            </a:r>
+          </a:p>
+          <a:p>
+            <a:pPr>
+              <a:lnSpc>
+                <a:spcPts val="1689"/>
+              </a:lnSpc>
+              <a:spcAft>
+                <a:spcPts val="0"/>
+              </a:spcAft>
+              <a:defRPr sz="1420" b="0">
+                <a:solidFill>
+                  <a:srgbClr val="F4F0E7"/>
+                </a:solidFill>
+                <a:latin typeface="Arial"/>
+              </a:defRPr>
+            </a:pPr>
+          </a:p>
+          <a:p>
+            <a:pPr>
+              <a:lnSpc>
+                <a:spcPts val="1689"/>
+              </a:lnSpc>
+              <a:spcAft>
+                <a:spcPts val="0"/>
+              </a:spcAft>
+              <a:defRPr sz="1420" b="0">
+                <a:solidFill>
+                  <a:srgbClr val="F4F0E7"/>
+                </a:solidFill>
+                <a:latin typeface="Arial"/>
+              </a:defRPr>
+            </a:pPr>
+            <a:r>
+              <a:t>Metoda, závažnost, dopad a konkrétní doporučení.</a:t>
+            </a:r>
+          </a:p>
+        </p:txBody>
+      </p:sp>
+      <p:sp>
+        <p:nvSpPr>
+          <p:cNvPr id="13" name="Rectangle 12"/>
           <p:cNvSpPr/>
           <p:nvPr/>
         </p:nvSpPr>
         <p:spPr>
           <a:xfrm>
-            <a:off x="533400" y="1155700"/>
-            <a:ext cx="11125200" cy="25400"/>
+            <a:off x="6210300" y="2768600"/>
+            <a:ext cx="5448300" cy="2603500"/>
           </a:xfrm>
           <a:prstGeom prst="rect">
             <a:avLst/>
           </a:prstGeom>
           <a:solidFill>
-            <a:srgbClr val="181817"/>
+            <a:srgbClr val="E7E0D5"/>
           </a:solidFill>
           <a:ln>
             <a:noFill/>
@@ -8935,98 +8967,13 @@
       </p:sp>
       <p:sp>
         <p:nvSpPr>
-          <p:cNvPr id="9" name="TextBox 8"/>
-          <p:cNvSpPr txBox="1"/>
-          <p:nvPr/>
-        </p:nvSpPr>
-        <p:spPr>
-          <a:xfrm>
-            <a:off x="508000" y="1422400"/>
-            <a:ext cx="11176000" cy="1079500"/>
-          </a:xfrm>
-          <a:prstGeom prst="rect">
-            <a:avLst/>
-          </a:prstGeom>
-          <a:noFill/>
-        </p:spPr>
-        <p:txBody>
-          <a:bodyPr wrap="none" lIns="0" rIns="0" tIns="0" bIns="0">
-            <a:spAutoFit/>
-          </a:bodyPr>
-          <a:lstStyle/>
-          <a:p>
-            <a:pPr>
-              <a:lnSpc>
-                <a:spcPts val="3740"/>
-              </a:lnSpc>
-              <a:spcAft>
-                <a:spcPts val="0"/>
-              </a:spcAft>
-              <a:defRPr sz="3400" b="1">
-                <a:solidFill>
-                  <a:srgbClr val="181817"/>
-                </a:solidFill>
-                <a:latin typeface="Arial"/>
-              </a:defRPr>
-            </a:pPr>
-            <a:r>
-              <a:t>Nález musí jít zopakovat.</a:t>
-            </a:r>
-          </a:p>
-        </p:txBody>
-      </p:sp>
-      <p:sp>
-        <p:nvSpPr>
-          <p:cNvPr id="10" name="Rectangle 9"/>
+          <p:cNvPr id="14" name="Rectangle 13"/>
           <p:cNvSpPr/>
           <p:nvPr/>
         </p:nvSpPr>
         <p:spPr>
           <a:xfrm>
-            <a:off x="533400" y="2768600"/>
-            <a:ext cx="5448300" cy="2603500"/>
-          </a:xfrm>
-          <a:prstGeom prst="rect">
-            <a:avLst/>
-          </a:prstGeom>
-          <a:solidFill>
-            <a:srgbClr val="181817"/>
-          </a:solidFill>
-          <a:ln>
-            <a:noFill/>
-          </a:ln>
-        </p:spPr>
-        <p:style>
-          <a:lnRef idx="1">
-            <a:schemeClr val="accent1"/>
-          </a:lnRef>
-          <a:fillRef idx="3">
-            <a:schemeClr val="accent1"/>
-          </a:fillRef>
-          <a:effectRef idx="2">
-            <a:schemeClr val="accent1"/>
-          </a:effectRef>
-          <a:fontRef idx="minor">
-            <a:schemeClr val="lt1"/>
-          </a:fontRef>
-        </p:style>
-        <p:txBody>
-          <a:bodyPr rtlCol="0" anchor="ctr"/>
-          <a:lstStyle/>
-          <a:p>
-            <a:pPr algn="ctr"/>
-          </a:p>
-        </p:txBody>
-      </p:sp>
-      <p:sp>
-        <p:nvSpPr>
-          <p:cNvPr id="11" name="Rectangle 10"/>
-          <p:cNvSpPr/>
-          <p:nvPr/>
-        </p:nvSpPr>
-        <p:spPr>
-          <a:xfrm>
-            <a:off x="533400" y="2768600"/>
+            <a:off x="6210300" y="2768600"/>
             <a:ext cx="5448300" cy="76200"/>
           </a:xfrm>
           <a:prstGeom prst="rect">
@@ -9063,13 +9010,13 @@
       </p:sp>
       <p:sp>
         <p:nvSpPr>
-          <p:cNvPr id="12" name="TextBox 11"/>
+          <p:cNvPr id="15" name="TextBox 14"/>
           <p:cNvSpPr txBox="1"/>
           <p:nvPr/>
         </p:nvSpPr>
         <p:spPr>
           <a:xfrm>
-            <a:off x="749300" y="3035300"/>
+            <a:off x="6426200" y="3035300"/>
             <a:ext cx="5016500" cy="685800"/>
           </a:xfrm>
           <a:prstGeom prst="rect">
@@ -9092,26 +9039,26 @@
               </a:spcAft>
               <a:defRPr sz="2000" b="1">
                 <a:solidFill>
-                  <a:srgbClr val="F4F0E7"/>
-                </a:solidFill>
-                <a:latin typeface="Arial"/>
-              </a:defRPr>
-            </a:pPr>
-            <a:r>
-              <a:t>Od reviewerů</a:t>
-            </a:r>
-          </a:p>
-        </p:txBody>
-      </p:sp>
-      <p:sp>
-        <p:nvSpPr>
-          <p:cNvPr id="13" name="TextBox 12"/>
+                  <a:srgbClr val="181817"/>
+                </a:solidFill>
+                <a:latin typeface="Arial"/>
+              </a:defRPr>
+            </a:pPr>
+            <a:r>
+              <a:t>Naše odpovědnost</a:t>
+            </a:r>
+          </a:p>
+        </p:txBody>
+      </p:sp>
+      <p:sp>
+        <p:nvSpPr>
+          <p:cNvPr id="16" name="TextBox 15"/>
           <p:cNvSpPr txBox="1"/>
           <p:nvPr/>
         </p:nvSpPr>
         <p:spPr>
           <a:xfrm>
-            <a:off x="749300" y="3733800"/>
+            <a:off x="6426200" y="3733800"/>
             <a:ext cx="5016500" cy="1511300"/>
           </a:xfrm>
           <a:prstGeom prst="rect">
@@ -9134,13 +9081,13 @@
               </a:spcAft>
               <a:defRPr sz="1420" b="0">
                 <a:solidFill>
-                  <a:srgbClr val="F4F0E7"/>
-                </a:solidFill>
-                <a:latin typeface="Arial"/>
-              </a:defRPr>
-            </a:pPr>
-            <a:r>
-              <a:t>Stránka + kroky + očekávání + skutečnost + důkaz.</a:t>
+                  <a:srgbClr val="181817"/>
+                </a:solidFill>
+                <a:latin typeface="Arial"/>
+              </a:defRPr>
+            </a:pPr>
+            <a:r>
+              <a:t>AI pomohla připravit web i kontroly.</a:t>
             </a:r>
           </a:p>
           <a:p>
@@ -9153,7 +9100,7 @@
               </a:spcAft>
               <a:defRPr sz="1420" b="0">
                 <a:solidFill>
-                  <a:srgbClr val="F4F0E7"/>
+                  <a:srgbClr val="181817"/>
                 </a:solidFill>
                 <a:latin typeface="Arial"/>
               </a:defRPr>
@@ -9169,113 +9116,27 @@
               </a:spcAft>
               <a:defRPr sz="1420" b="0">
                 <a:solidFill>
-                  <a:srgbClr val="F4F0E7"/>
-                </a:solidFill>
-                <a:latin typeface="Arial"/>
-              </a:defRPr>
-            </a:pPr>
-            <a:r>
-              <a:t>Metoda, závažnost, dopad a konkrétní doporučení.</a:t>
-            </a:r>
-          </a:p>
-        </p:txBody>
-      </p:sp>
-      <p:sp>
-        <p:nvSpPr>
-          <p:cNvPr id="14" name="Rectangle 13"/>
-          <p:cNvSpPr/>
-          <p:nvPr/>
-        </p:nvSpPr>
-        <p:spPr>
-          <a:xfrm>
-            <a:off x="6210300" y="2768600"/>
-            <a:ext cx="5448300" cy="2603500"/>
-          </a:xfrm>
-          <a:prstGeom prst="rect">
-            <a:avLst/>
-          </a:prstGeom>
-          <a:solidFill>
-            <a:srgbClr val="E7E0D5"/>
-          </a:solidFill>
-          <a:ln>
-            <a:noFill/>
-          </a:ln>
-        </p:spPr>
-        <p:style>
-          <a:lnRef idx="1">
-            <a:schemeClr val="accent1"/>
-          </a:lnRef>
-          <a:fillRef idx="3">
-            <a:schemeClr val="accent1"/>
-          </a:fillRef>
-          <a:effectRef idx="2">
-            <a:schemeClr val="accent1"/>
-          </a:effectRef>
-          <a:fontRef idx="minor">
-            <a:schemeClr val="lt1"/>
-          </a:fontRef>
-        </p:style>
-        <p:txBody>
-          <a:bodyPr rtlCol="0" anchor="ctr"/>
-          <a:lstStyle/>
-          <a:p>
-            <a:pPr algn="ctr"/>
-          </a:p>
-        </p:txBody>
-      </p:sp>
-      <p:sp>
-        <p:nvSpPr>
-          <p:cNvPr id="15" name="Rectangle 14"/>
-          <p:cNvSpPr/>
-          <p:nvPr/>
-        </p:nvSpPr>
-        <p:spPr>
-          <a:xfrm>
-            <a:off x="6210300" y="2768600"/>
-            <a:ext cx="5448300" cy="76200"/>
-          </a:xfrm>
-          <a:prstGeom prst="rect">
-            <a:avLst/>
-          </a:prstGeom>
-          <a:solidFill>
-            <a:srgbClr val="F45E2B"/>
-          </a:solidFill>
-          <a:ln>
-            <a:noFill/>
-          </a:ln>
-        </p:spPr>
-        <p:style>
-          <a:lnRef idx="1">
-            <a:schemeClr val="accent1"/>
-          </a:lnRef>
-          <a:fillRef idx="3">
-            <a:schemeClr val="accent1"/>
-          </a:fillRef>
-          <a:effectRef idx="2">
-            <a:schemeClr val="accent1"/>
-          </a:effectRef>
-          <a:fontRef idx="minor">
-            <a:schemeClr val="lt1"/>
-          </a:fontRef>
-        </p:style>
-        <p:txBody>
-          <a:bodyPr rtlCol="0" anchor="ctr"/>
-          <a:lstStyle/>
-          <a:p>
-            <a:pPr algn="ctr"/>
-          </a:p>
-        </p:txBody>
-      </p:sp>
-      <p:sp>
-        <p:nvSpPr>
-          <p:cNvPr id="16" name="TextBox 15"/>
+                  <a:srgbClr val="181817"/>
+                </a:solidFill>
+                <a:latin typeface="Arial"/>
+              </a:defRPr>
+            </a:pPr>
+            <a:r>
+              <a:t>Každý přijatý nález tým ověří; změnu a důvod zapíše.</a:t>
+            </a:r>
+          </a:p>
+        </p:txBody>
+      </p:sp>
+      <p:sp>
+        <p:nvSpPr>
+          <p:cNvPr id="17" name="TextBox 16"/>
           <p:cNvSpPr txBox="1"/>
           <p:nvPr/>
         </p:nvSpPr>
         <p:spPr>
           <a:xfrm>
-            <a:off x="6426200" y="3035300"/>
-            <a:ext cx="5016500" cy="685800"/>
+            <a:off x="533400" y="5676900"/>
+            <a:ext cx="11125200" cy="546100"/>
           </a:xfrm>
           <a:prstGeom prst="rect">
             <a:avLst/>
@@ -9290,34 +9151,34 @@
           <a:p>
             <a:pPr>
               <a:lnSpc>
-                <a:spcPts val="2200"/>
-              </a:lnSpc>
-              <a:spcAft>
-                <a:spcPts val="0"/>
-              </a:spcAft>
-              <a:defRPr sz="2000" b="1">
-                <a:solidFill>
-                  <a:srgbClr val="181817"/>
-                </a:solidFill>
-                <a:latin typeface="Arial"/>
-              </a:defRPr>
-            </a:pPr>
-            <a:r>
-              <a:t>Naše odpovědnost</a:t>
-            </a:r>
-          </a:p>
-        </p:txBody>
-      </p:sp>
-      <p:sp>
-        <p:nvSpPr>
-          <p:cNvPr id="17" name="TextBox 16"/>
+                <a:spcPts val="1583"/>
+              </a:lnSpc>
+              <a:spcAft>
+                <a:spcPts val="0"/>
+              </a:spcAft>
+              <a:defRPr sz="1320" b="0">
+                <a:solidFill>
+                  <a:srgbClr val="68635B"/>
+                </a:solidFill>
+                <a:latin typeface="Arial"/>
+              </a:defRPr>
+            </a:pPr>
+            <a:r>
+              <a:t>Skutečné přijaté review zatím chybí; není nahrazeno vymyšlenými nálezy.</a:t>
+            </a:r>
+          </a:p>
+        </p:txBody>
+      </p:sp>
+      <p:sp>
+        <p:nvSpPr>
+          <p:cNvPr id="18" name="TextBox 17"/>
           <p:cNvSpPr txBox="1"/>
           <p:nvPr/>
         </p:nvSpPr>
         <p:spPr>
           <a:xfrm>
-            <a:off x="6426200" y="3733800"/>
-            <a:ext cx="5016500" cy="1511300"/>
+            <a:off x="533400" y="6413500"/>
+            <a:ext cx="10033000" cy="181610"/>
           </a:xfrm>
           <a:prstGeom prst="rect">
             <a:avLst/>
@@ -9332,89 +9193,12 @@
           <a:p>
             <a:pPr>
               <a:lnSpc>
-                <a:spcPts val="1689"/>
-              </a:lnSpc>
-              <a:spcAft>
-                <a:spcPts val="0"/>
-              </a:spcAft>
-              <a:defRPr sz="1420" b="0">
-                <a:solidFill>
-                  <a:srgbClr val="181817"/>
-                </a:solidFill>
-                <a:latin typeface="Arial"/>
-              </a:defRPr>
-            </a:pPr>
-            <a:r>
-              <a:t>AI pomohla připravit web i kontroly.</a:t>
-            </a:r>
-          </a:p>
-          <a:p>
-            <a:pPr>
-              <a:lnSpc>
-                <a:spcPts val="1689"/>
-              </a:lnSpc>
-              <a:spcAft>
-                <a:spcPts val="0"/>
-              </a:spcAft>
-              <a:defRPr sz="1420" b="0">
-                <a:solidFill>
-                  <a:srgbClr val="181817"/>
-                </a:solidFill>
-                <a:latin typeface="Arial"/>
-              </a:defRPr>
-            </a:pPr>
-          </a:p>
-          <a:p>
-            <a:pPr>
-              <a:lnSpc>
-                <a:spcPts val="1689"/>
-              </a:lnSpc>
-              <a:spcAft>
-                <a:spcPts val="0"/>
-              </a:spcAft>
-              <a:defRPr sz="1420" b="0">
-                <a:solidFill>
-                  <a:srgbClr val="181817"/>
-                </a:solidFill>
-                <a:latin typeface="Arial"/>
-              </a:defRPr>
-            </a:pPr>
-            <a:r>
-              <a:t>Každý přijatý nález tým ověří; změnu a důvod zapíše.</a:t>
-            </a:r>
-          </a:p>
-        </p:txBody>
-      </p:sp>
-      <p:sp>
-        <p:nvSpPr>
-          <p:cNvPr id="18" name="TextBox 17"/>
-          <p:cNvSpPr txBox="1"/>
-          <p:nvPr/>
-        </p:nvSpPr>
-        <p:spPr>
-          <a:xfrm>
-            <a:off x="533400" y="5676900"/>
-            <a:ext cx="11125200" cy="546100"/>
-          </a:xfrm>
-          <a:prstGeom prst="rect">
-            <a:avLst/>
-          </a:prstGeom>
-          <a:noFill/>
-        </p:spPr>
-        <p:txBody>
-          <a:bodyPr wrap="none" lIns="0" rIns="0" tIns="0" bIns="0">
-            <a:spAutoFit/>
-          </a:bodyPr>
-          <a:lstStyle/>
-          <a:p>
-            <a:pPr>
-              <a:lnSpc>
-                <a:spcPts val="1583"/>
-              </a:lnSpc>
-              <a:spcAft>
-                <a:spcPts val="0"/>
-              </a:spcAft>
-              <a:defRPr sz="1320" b="0">
+                <a:spcPts val="930"/>
+              </a:lnSpc>
+              <a:spcAft>
+                <a:spcPts val="0"/>
+              </a:spcAft>
+              <a:defRPr sz="750" b="0">
                 <a:solidFill>
                   <a:srgbClr val="68635B"/>
                 </a:solidFill>
@@ -9422,7 +9206,7 @@
               </a:defRPr>
             </a:pPr>
             <a:r>
-              <a:t>Skutečné přijaté review zatím chybí; není nahrazeno vymyšlenými nálezy.</a:t>
+              <a:t>DODATEČNĚ PŘIPRAVENÝ PODKLAD K MILNÍKU</a:t>
             </a:r>
           </a:p>
         </p:txBody>
@@ -9430,48 +9214,6 @@
       <p:sp>
         <p:nvSpPr>
           <p:cNvPr id="19" name="TextBox 18"/>
-          <p:cNvSpPr txBox="1"/>
-          <p:nvPr/>
-        </p:nvSpPr>
-        <p:spPr>
-          <a:xfrm>
-            <a:off x="533400" y="6413500"/>
-            <a:ext cx="10033000" cy="181610"/>
-          </a:xfrm>
-          <a:prstGeom prst="rect">
-            <a:avLst/>
-          </a:prstGeom>
-          <a:noFill/>
-        </p:spPr>
-        <p:txBody>
-          <a:bodyPr wrap="none" lIns="0" rIns="0" tIns="0" bIns="0">
-            <a:spAutoFit/>
-          </a:bodyPr>
-          <a:lstStyle/>
-          <a:p>
-            <a:pPr>
-              <a:lnSpc>
-                <a:spcPts val="930"/>
-              </a:lnSpc>
-              <a:spcAft>
-                <a:spcPts val="0"/>
-              </a:spcAft>
-              <a:defRPr sz="750" b="0">
-                <a:solidFill>
-                  <a:srgbClr val="68635B"/>
-                </a:solidFill>
-                <a:latin typeface="Arial"/>
-              </a:defRPr>
-            </a:pPr>
-            <a:r>
-              <a:t>DODATEČNĚ PŘIPRAVENÝ PODKLAD K MILNÍKU</a:t>
-            </a:r>
-          </a:p>
-        </p:txBody>
-      </p:sp>
-      <p:sp>
-        <p:nvSpPr>
-          <p:cNvPr id="20" name="TextBox 19"/>
           <p:cNvSpPr txBox="1"/>
           <p:nvPr/>
         </p:nvSpPr>

--- a/odevzdani/cviceni-05-review-ready/prezentace.pptx
+++ b/odevzdani/cviceni-05-review-ready/prezentace.pptx
@@ -647,7 +647,7 @@
           <a:lstStyle/>
           <a:p>
             <a:r>
-              <a:t>Hodnotitelům doporučujeme nejprve plánování programu. Důkazem není kliknutí na tlačítko, ale správně omezený seznam a zachování oblíbeného po obnovení. Druhý úkol sleduje cestu od části názvu interpreta k času jeho koncertu. Třetí úkol kontroluje porozumění tarifům, košík a výstup PDF. Použijte smyšlené údaje, protože nejde o skutečný nákup. U každého úkolu zaznamenejte, kde vznikla nejistota, co se očekávalo a co rozhraní udělalo ve skutečnosti.</a:t>
+              <a:t>Revieweři nejprve projdou plánování programu a hledání interpreta. Ve třetím scénáři zvolí první a třetí srpen a sami vyberou VIP sedadlo. V košíku přidají stan pro dvě osoby a promo PULSE10. Zkontrolují, že sleva snížila pouze vstupenky, ne kemp, a že DPH už je v ceně. PDF musí zachovat obě nesousedící data a obsahovat campingový voucher. Po nákupu se stejné sedadlo nesmí blokovat ve druhém dni jen kvůli tomuto nákupu. Použijí smyšlené kontakty a zkušební platbu.</a:t>
             </a:r>
           </a:p>
         </p:txBody>
@@ -787,7 +787,7 @@
           <a:lstStyle/>
           <a:p>
             <a:r>
-              <a:t>Je důležité nehodnotit klientský školní projekt jako produkční ticketing. Účty a obsazenost se nešíří mezi zařízeními, PDF se stahuje místně a e-mail se automaticky neposílá. Mapa je doplněk závislý na připojení. Známé jsou také limity ověření: nemáme plný audit se čtečkou, všechna fyzická zařízení ani doložený výzkum s návštěvníky. Tyto informace neomlouvají chyby v základních scénářích, ale dávají reviewerům správný kontext a brání zavádějícím závěrům. Skuteční interpreti jsou návrh bez potvrzené účasti. Noisia nevystupuje živě. Aktuálně používáme 41 skutečných fotografií umělců s autorstvím a licencemi, 19 typografických náhrad a historickou fotografii areálu z roku 2018. Datum snímku je viditelné, takže jej nezaměňujeme za současný stav nebo instalaci pro rok 2027.</a:t>
+              <a:t>Klientské účty a dostupnost zůstávají jen ve stejném prohlížeči, e-mail se automaticky neodesílá. Nový offline plánek funguje bez Googlu, externí mapa až po souhlasu. Skutečné fotografie mají ověřený zdroj a licenci; Hedex a AC Slater jsou CC BY-NC-SA a nejsou určeny pro automatický přenos do komerčního projektu. Historický úvodní snímek není dokladem stavu roku 2027. Nové fotografie rekonstrukce, dopravy a náramku mají přesná data a vysvětlení. Automatické kontroly nenahrazují plný audit WCAG nebo testy s návštěvníky.</a:t>
             </a:r>
           </a:p>
         </p:txBody>
@@ -857,7 +857,7 @@
           <a:lstStyle/>
           <a:p>
             <a:r>
-              <a:t>Prosíme o nálezy s přesnými kroky, důkazem a vysvětlením dopadu. Závažnost odvozujte od toho, zda problém blokuje cíl, způsobuje opakované chyby nebo jde o drobnost. Použít lze Nielsenovy heuristiky a kognitivní průchod; vlastní vizuální preference samy o sobě nejsou závada. AI může pomoci strukturovat záznam, ale každý problém musí člověk reprodukovat. Po přijetí review zapíšeme rozhodnutí a provedenou změnu do dokumentace. Zatím žádné skutečné review od druhého týmu poskytnuto nebylo.</a:t>
+              <a:t>Prosíme o nálezy s přesnými kroky, důkazem a vysvětlením dopadu. Závažnost odvozujte od toho, zda problém blokuje cíl, způsobuje opakované chyby nebo jde o drobnost. Použít lze Nielsenovy heuristiky a kognitivní průchod; vlastní vizuální preference samy o sobě nejsou závada. AI může pomoci strukturovat záznam, ale každý problém musí člověk reprodukovat. Po přijetí review zapíšeme rozhodnutí a provedenou změnu do dokumentace. Zatím žádné skutečné review od druhého týmu poskytnuto nebylo. Poslední změny pocházejí z audiozpětné vazby zadavatele, což není cross-review od přiděleného jiného týmu.</a:t>
             </a:r>
           </a:p>
         </p:txBody>
@@ -5430,7 +5430,7 @@
               </a:defRPr>
             </a:pPr>
             <a:r>
-              <a:t>Hledání · filtry · osobní program · CZ / EN</a:t>
+              <a:t>Filtry · osobní program · CZ / EN · offline plánek</a:t>
             </a:r>
           </a:p>
           <a:p>
@@ -5449,7 +5449,7 @@
               </a:defRPr>
             </a:pPr>
             <a:r>
-              <a:t>Vstupenky · košík · účet · historie · PDF</a:t>
+              <a:t>1/2/3 dny · sedadla / stání · kemp · profil · PDF</a:t>
             </a:r>
           </a:p>
         </p:txBody>
@@ -6442,7 +6442,7 @@
               </a:defRPr>
             </a:pPr>
             <a:r>
-              <a:t>S3 / PDF</a:t>
+              <a:t>S3 / 1. + 3. srpna</a:t>
             </a:r>
           </a:p>
         </p:txBody>
@@ -6484,7 +6484,7 @@
               </a:defRPr>
             </a:pPr>
             <a:r>
-              <a:t>Množství nebo místa → promo →</a:t>
+              <a:t>Dva dny → vlastní VIP sedadlo →</a:t>
             </a:r>
           </a:p>
           <a:p>
@@ -6503,7 +6503,7 @@
               </a:defRPr>
             </a:pPr>
             <a:r>
-              <a:t>údaje → zkušební platba → PDF.</a:t>
+              <a:t>stan pro 2 → PULSE10 → PDF.</a:t>
             </a:r>
           </a:p>
           <a:p>
@@ -6538,7 +6538,7 @@
               </a:defRPr>
             </a:pPr>
             <a:r>
-              <a:t>Sedí součet, sleva a ID?</a:t>
+              <a:t>Sedí dny, sleva, kemp i DPH?</a:t>
             </a:r>
           </a:p>
         </p:txBody>
@@ -8176,7 +8176,7 @@
               </a:defRPr>
             </a:pPr>
             <a:r>
-              <a:t>Dosud nedoloženo</a:t>
+              <a:t>Fotografie a ověření</a:t>
             </a:r>
           </a:p>
         </p:txBody>
@@ -8218,7 +8218,7 @@
               </a:defRPr>
             </a:pPr>
             <a:r>
-              <a:t>Plný audit WCAG, fyzické telefony, všechny prohlížeče</a:t>
+              <a:t>42 fotografií + 18 vlastních plakátů; kredity na vlastní</a:t>
             </a:r>
           </a:p>
           <a:p>
@@ -8237,7 +8237,7 @@
               </a:defRPr>
             </a:pPr>
             <a:r>
-              <a:t>a reálný uživatelský výzkum.</a:t>
+              <a:t>stránce.</a:t>
             </a:r>
           </a:p>
           <a:p>
@@ -8272,7 +8272,26 @@
               </a:defRPr>
             </a:pPr>
             <a:r>
-              <a:t>Externí mapa potřebuje síť.</a:t>
+              <a:t>Dvě NC-SA fotografie jen pro nekomerční školní</a:t>
+            </a:r>
+          </a:p>
+          <a:p>
+            <a:pPr>
+              <a:lnSpc>
+                <a:spcPts val="1689"/>
+              </a:lnSpc>
+              <a:spcAft>
+                <a:spcPts val="0"/>
+              </a:spcAft>
+              <a:defRPr sz="1420" b="0">
+                <a:solidFill>
+                  <a:srgbClr val="181817"/>
+                </a:solidFill>
+                <a:latin typeface="Arial"/>
+              </a:defRPr>
+            </a:pPr>
+            <a:r>
+              <a:t>použití.</a:t>
             </a:r>
           </a:p>
         </p:txBody>

--- a/odevzdani/cviceni-05-review-ready/prezentace.pptx
+++ b/odevzdani/cviceni-05-review-ready/prezentace.pptx
@@ -507,7 +507,7 @@
           <a:lstStyle/>
           <a:p>
             <a:r>
-              <a:t>Předáváme současnou review-ready verzi druhému týmu. Balíček obsahuje web, specifikaci, data a progress popisující stav i omezení. Materiál je připraven dodatečně ze současné implementace a nevydáváme jej za historicky doložené odevzdání. Reviewer nemusí instalovat framework ani server. Naším cílem je, aby mohl nezávisle projít klíčové úkoly a zaznamenat reprodukovatelné nálezy. Dnes nepředstavujeme výsledky cizího hodnocení; ty zatím nebyly poskytnuty.</a:t>
+              <a:t>[30 s] Předáváme web, specifikaci a popis scénářů tak, aby jiný tým mohl samostatně provést hodnocení. Oproti návrhu už jsou dostupné všechny hlavní části, obě jazykové varianty a lokální objednávka s PDF. Podklady cvičení čtyři a pět vycházejí ze stejné současné verze: skutečné historické snapshoty nebyly poskytnuty. Netvrdíme tedy neexistující časový vývoj. Nyní ukážeme obsah balíčku, dva hlavní průchody a přesně vymezené limity.</a:t>
             </a:r>
           </a:p>
         </p:txBody>
@@ -577,7 +577,7 @@
           <a:lstStyle/>
           <a:p>
             <a:r>
-              <a:t>Web obsahuje všechny hlavní obsahové části, takže hodnocení nemusí stát na prázdných zástupných stránkách. K dispozici je šedesát interpretů a programových položek během tří dnů na třech scénách. Vyhledávání a filtry mají skutečný datový podklad. Doplňkové cesty zahrnují lokalitu, jazykovou volbu a objednávku. Čísla dokazují rozsah obsahu, nikoli automaticky kvalitu UX. Proto předáváme konkrétní scénáře, očekávané výsledky a známé limity, aby review nezůstalo u obecného dojmu z grafiky.</a:t>
+              <a:t>[35 s] Hodnotitel nepotřebuje náš vývojový počítač. Rozbalí web a otevře index.html; data i knihovny jsou přibalené. Ve specifikaci najde cílové skupiny a očekávané výsledky scénářů. Důležitá rozhodnutí zůstávají stejná: klientské řešení, jednotný datový zdroj a účet jako volitelná cesta. Pro každý nález potřebujeme přesnou stránku a kroky, aby šel nezávisle zopakovat. Prohlídka screenshotů sama nestačí k ověření funkčního hledání, uloženého programu nebo objednávky.</a:t>
             </a:r>
           </a:p>
         </p:txBody>
@@ -647,7 +647,7 @@
           <a:lstStyle/>
           <a:p>
             <a:r>
-              <a:t>Revieweři nejprve projdou plánování programu a hledání interpreta. Ve třetím scénáři zvolí první a třetí srpen a sami vyberou VIP sedadlo. V košíku přidají stan pro dvě osoby a promo PULSE10. Zkontrolují, že sleva snížila pouze vstupenky, ne kemp, a že DPH už je v ceně. PDF musí zachovat obě nesousedící data a obsahovat campingový voucher. Po nákupu se stejné sedadlo nesmí blokovat ve druhém dni jen kvůli tomuto nákupu. Použijí smyšlené kontakty a zkušební platbu.</a:t>
+              <a:t>[45 s včetně ukázky] Hodnotitel postupuje podle tohoto krátkého scénáře. Nejprve ověří, že oba filtry působí společně a ukazují jen očekávané akce. Po uložení koncertu zobrazí osobní program a obnoví stránku. Výběr se má zachovat. Stejný průchod doporučujeme na mobilní šířce i desktopu a alespoň jednou klávesnicí. Když něco nefunguje, má záznam obsahovat původní stav, kroky, očekávání, skutečný výsledek a důkaz. Pouhý obecný dojem není reprodukovatelný nález.</a:t>
             </a:r>
           </a:p>
         </p:txBody>
@@ -717,7 +717,7 @@
           <a:lstStyle/>
           <a:p>
             <a:r>
-              <a:t>Vlastní kontroly mají reviewerům ušetřit čas na základních chybách. Datový validátor ověřuje reference a odvozený export, browserové testy důležité interakce a různé šířky. Zvlášť kontrolujeme vyplněný košík a výsledný PDF dokument. Aktuální záznam je přiložen, včetně limitů. Automatický test ovšem nepozná každou nejasnou formulaci ani nevhodné pořadí informací. Právě proto potřebujeme nezávislé expertní hodnocení a skutečný průchod uživatelskými scénáři druhého týmu.</a:t>
+              <a:t>[45 s včetně ukázky] U druhého scénáře je cílem zjistit termín známého interpreta. Hledáme DARKZY, otevřeme detail a navazující program. Porovnáme údaje se specifikací a daty. Dále zkusíme neexistující dotaz a zavření dialogu klávesou Escape. Hledání v biografiích je záměr: například dotaz David může najít i interpreta uvedeného vlastním jménem v popisu. To není chyba podobnosti jmen. Výsledky mají vysvětlit nalezený objekt a nabídnout smysluplný přechod, nikoli zobrazit pouze bezkontextový seznam.</a:t>
             </a:r>
           </a:p>
         </p:txBody>
@@ -787,7 +787,7 @@
           <a:lstStyle/>
           <a:p>
             <a:r>
-              <a:t>Klientské účty a dostupnost zůstávají jen ve stejném prohlížeči, e-mail se automaticky neodesílá. Nový offline plánek funguje bez Googlu, externí mapa až po souhlasu. Skutečné fotografie mají ověřený zdroj a licenci; Hedex a AC Slater jsou CC BY-NC-SA a nejsou určeny pro automatický přenos do komerčního projektu. Historický úvodní snímek není dokladem stavu roku 2027. Nové fotografie rekonstrukce, dopravy a náramku mají přesná data a vysvětlení. Automatické kontroly nenahrazují plný audit WCAG nebo testy s návštěvníky.</a:t>
+              <a:t>[40 s] Aktuální provedené kontroly jsou v validation_report.md. Rozlišujeme datovou správnost, automatizovaný průchod a uživatelskou srozumitelnost. Lokální stav není sdílená databáze a není přenosný mezi zařízeními. Přímé file otevření blokuje politika zdejšího testovacího prostředí; zdejší testy proto používají vývojový statický server. To není runtime požadavek odevzdaného webu. Skutečnou účast interpretů ani oficiální areál netvrdíme. Nebyl proveden úplný audit WCAG, test všech prohlížečů ani výzkum s návštěvníky.</a:t>
             </a:r>
           </a:p>
         </p:txBody>
@@ -857,7 +857,7 @@
           <a:lstStyle/>
           <a:p>
             <a:r>
-              <a:t>Prosíme o nálezy s přesnými kroky, důkazem a vysvětlením dopadu. Závažnost odvozujte od toho, zda problém blokuje cíl, způsobuje opakované chyby nebo jde o drobnost. Použít lze Nielsenovy heuristiky a kognitivní průchod; vlastní vizuální preference samy o sobě nejsou závada. AI může pomoci strukturovat záznam, ale každý problém musí člověk reprodukovat. Po přijetí review zapíšeme rozhodnutí a provedenou změnu do dokumentace. Zatím žádné skutečné review od druhého týmu poskytnuto nebylo. Poslední změny pocházejí z audiozpětné vazby zadavatele, což není cross-review od přiděleného jiného týmu.</a:t>
+              <a:t>[40 s] AI výstupy neodevzdáváme bez kontroly. Přijali jsme strukturu dat a propojené scénáře, upravili součty a mobilní stavy a odmítli vytvoření vlastního backendu. Konkrétní ověření tvoří porovnání dat, browserové akce a čtení výsledného PDF. Jiný tým má použít alespoň dvě formalizované metody, například Nielsenovy heuristiky a kognitivní průchod. U každého nálezu chceme závažnost, způsob objevení, zdůvodnění a návrh úpravy. Přijaté externí review nebylo dodáno; technické testy za ně nevydáváme. Předaný validační report uvádí úspěšné technické průchody a samostatně jejich omezení.</a:t>
             </a:r>
           </a:p>
         </p:txBody>
@@ -3878,7 +3878,7 @@
             <a:avLst/>
           </a:prstGeom>
           <a:solidFill>
-            <a:srgbClr val="181817"/>
+            <a:srgbClr val="FFFFFF"/>
           </a:solidFill>
           <a:ln>
             <a:noFill/>
@@ -3914,14 +3914,14 @@
         </p:nvSpPr>
         <p:spPr>
           <a:xfrm>
-            <a:off x="8851900" y="0"/>
-            <a:ext cx="3340100" cy="6858000"/>
+            <a:off x="711200" y="609600"/>
+            <a:ext cx="76200" cy="381000"/>
           </a:xfrm>
           <a:prstGeom prst="rect">
             <a:avLst/>
           </a:prstGeom>
           <a:solidFill>
-            <a:srgbClr val="F45E2B"/>
+            <a:srgbClr val="E55024"/>
           </a:solidFill>
           <a:ln>
             <a:noFill/>
@@ -3957,8 +3957,8 @@
         </p:nvSpPr>
         <p:spPr>
           <a:xfrm>
-            <a:off x="533400" y="381000"/>
-            <a:ext cx="2476500" cy="350113"/>
+            <a:off x="977900" y="647700"/>
+            <a:ext cx="10502900" cy="317500"/>
           </a:xfrm>
           <a:prstGeom prst="rect">
             <a:avLst/>
@@ -3967,26 +3967,26 @@
         </p:spPr>
         <p:txBody>
           <a:bodyPr wrap="none" lIns="0" rIns="0" tIns="0" bIns="0">
-            <a:spAutoFit/>
+            <a:noAutofit/>
           </a:bodyPr>
           <a:lstStyle/>
           <a:p>
             <a:pPr>
               <a:lnSpc>
-                <a:spcPts val="2256"/>
+                <a:spcPts val="2360"/>
               </a:lnSpc>
               <a:spcAft>
                 <a:spcPts val="0"/>
               </a:spcAft>
-              <a:defRPr sz="1820" b="1">
+              <a:defRPr sz="2000" b="1">
                 <a:solidFill>
-                  <a:srgbClr val="F4F0E7"/>
+                  <a:srgbClr val="191B20"/>
                 </a:solidFill>
                 <a:latin typeface="Arial"/>
               </a:defRPr>
             </a:pPr>
             <a:r>
-              <a:t>PRAGUE</a:t>
+              <a:t>PRAGUE PULSE FEST</a:t>
             </a:r>
           </a:p>
         </p:txBody>
@@ -3999,8 +3999,8 @@
         </p:nvSpPr>
         <p:spPr>
           <a:xfrm>
-            <a:off x="533400" y="628650"/>
-            <a:ext cx="2476500" cy="513892"/>
+            <a:off x="711200" y="1600200"/>
+            <a:ext cx="10769600" cy="241300"/>
           </a:xfrm>
           <a:prstGeom prst="rect">
             <a:avLst/>
@@ -4009,26 +4009,26 @@
         </p:spPr>
         <p:txBody>
           <a:bodyPr wrap="none" lIns="0" rIns="0" tIns="0" bIns="0">
-            <a:spAutoFit/>
+            <a:noAutofit/>
           </a:bodyPr>
           <a:lstStyle/>
           <a:p>
             <a:pPr>
               <a:lnSpc>
-                <a:spcPts val="3546"/>
+                <a:spcPts val="1652"/>
               </a:lnSpc>
               <a:spcAft>
                 <a:spcPts val="0"/>
               </a:spcAft>
-              <a:defRPr sz="2860" b="1">
+              <a:defRPr sz="1400" b="1">
                 <a:solidFill>
-                  <a:srgbClr val="F4F0E7"/>
+                  <a:srgbClr val="E55024"/>
                 </a:solidFill>
                 <a:latin typeface="Arial"/>
               </a:defRPr>
             </a:pPr>
             <a:r>
-              <a:t>PULSE</a:t>
+              <a:t>CVIČENÍ 05</a:t>
             </a:r>
           </a:p>
         </p:txBody>
@@ -4041,8 +4041,8 @@
         </p:nvSpPr>
         <p:spPr>
           <a:xfrm>
-            <a:off x="533400" y="1041400"/>
-            <a:ext cx="2641600" cy="196570"/>
+            <a:off x="685800" y="2146300"/>
+            <a:ext cx="10795000" cy="1816100"/>
           </a:xfrm>
           <a:prstGeom prst="rect">
             <a:avLst/>
@@ -4051,26 +4051,26 @@
         </p:spPr>
         <p:txBody>
           <a:bodyPr wrap="none" lIns="0" rIns="0" tIns="0" bIns="0">
-            <a:spAutoFit/>
+            <a:noAutofit/>
           </a:bodyPr>
           <a:lstStyle/>
           <a:p>
             <a:pPr>
               <a:lnSpc>
-                <a:spcPts val="1047"/>
+                <a:spcPts val="5376"/>
               </a:lnSpc>
               <a:spcAft>
                 <a:spcPts val="0"/>
               </a:spcAft>
-              <a:defRPr sz="845" b="1">
+              <a:defRPr sz="4800" b="1">
                 <a:solidFill>
-                  <a:srgbClr val="F4F0E7"/>
+                  <a:srgbClr val="191B20"/>
                 </a:solidFill>
                 <a:latin typeface="Arial"/>
               </a:defRPr>
             </a:pPr>
             <a:r>
-              <a:t>FEST / 2027</a:t>
+              <a:t>Web připravený pro review</a:t>
             </a:r>
           </a:p>
         </p:txBody>
@@ -4083,8 +4083,8 @@
         </p:nvSpPr>
         <p:spPr>
           <a:xfrm>
-            <a:off x="533400" y="1536700"/>
-            <a:ext cx="7874000" cy="236728"/>
+            <a:off x="711200" y="4191000"/>
+            <a:ext cx="10769600" cy="1016000"/>
           </a:xfrm>
           <a:prstGeom prst="rect">
             <a:avLst/>
@@ -4093,162 +4093,186 @@
         </p:spPr>
         <p:txBody>
           <a:bodyPr wrap="none" lIns="0" rIns="0" tIns="0" bIns="0">
-            <a:spAutoFit/>
+            <a:noAutofit/>
           </a:bodyPr>
           <a:lstStyle/>
           <a:p>
             <a:pPr>
               <a:lnSpc>
-                <a:spcPts val="1364"/>
+                <a:spcPts val="2713"/>
               </a:lnSpc>
               <a:spcAft>
                 <a:spcPts val="0"/>
               </a:spcAft>
-              <a:defRPr sz="1100" b="1">
+              <a:defRPr sz="2300" b="0">
                 <a:solidFill>
-                  <a:srgbClr val="F4F0E7"/>
+                  <a:srgbClr val="626773"/>
                 </a:solidFill>
                 <a:latin typeface="Arial"/>
               </a:defRPr>
             </a:pPr>
             <a:r>
-              <a:t>CVIČENÍ 05 / REVIEW-READY</a:t>
-            </a:r>
-          </a:p>
-        </p:txBody>
-      </p:sp>
-      <p:sp>
-        <p:nvSpPr>
-          <p:cNvPr id="8" name="TextBox 7"/>
-          <p:cNvSpPr txBox="1"/>
-          <p:nvPr/>
-        </p:nvSpPr>
-        <p:spPr>
-          <a:xfrm>
-            <a:off x="482600" y="2133600"/>
-            <a:ext cx="8001000" cy="2095500"/>
-          </a:xfrm>
-          <a:prstGeom prst="rect">
-            <a:avLst/>
-          </a:prstGeom>
-          <a:noFill/>
-        </p:spPr>
-        <p:txBody>
-          <a:bodyPr wrap="none" lIns="0" rIns="0" tIns="0" bIns="0">
-            <a:spAutoFit/>
-          </a:bodyPr>
-          <a:lstStyle/>
+              <a:t>Prague Pulse Fest · 1.–3. srpna 2027</a:t>
+            </a:r>
+          </a:p>
           <a:p>
             <a:pPr>
               <a:lnSpc>
-                <a:spcPts val="5830"/>
+                <a:spcPts val="2713"/>
               </a:lnSpc>
               <a:spcAft>
                 <a:spcPts val="0"/>
               </a:spcAft>
-              <a:defRPr sz="5500" b="1">
+              <a:defRPr sz="2300" b="0">
                 <a:solidFill>
-                  <a:srgbClr val="F4F0E7"/>
+                  <a:srgbClr val="626773"/>
                 </a:solidFill>
                 <a:latin typeface="Arial"/>
               </a:defRPr>
             </a:pPr>
             <a:r>
-              <a:t>Připraveno</a:t>
-            </a:r>
-          </a:p>
+              <a:t>Výstaviště Praha · fiktivní festival</a:t>
+            </a:r>
+          </a:p>
+        </p:txBody>
+      </p:sp>
+      <p:sp>
+        <p:nvSpPr>
+          <p:cNvPr id="8" name="TextBox 7"/>
+          <p:cNvSpPr txBox="1"/>
+          <p:nvPr/>
+        </p:nvSpPr>
+        <p:spPr>
+          <a:xfrm>
+            <a:off x="711200" y="5600700"/>
+            <a:ext cx="10769600" cy="304800"/>
+          </a:xfrm>
+          <a:prstGeom prst="rect">
+            <a:avLst/>
+          </a:prstGeom>
+          <a:noFill/>
+        </p:spPr>
+        <p:txBody>
+          <a:bodyPr wrap="none" lIns="0" rIns="0" tIns="0" bIns="0">
+            <a:noAutofit/>
+          </a:bodyPr>
+          <a:lstStyle/>
           <a:p>
             <a:pPr>
               <a:lnSpc>
-                <a:spcPts val="5830"/>
-              </a:lnSpc>
-              <a:spcAft>
-                <a:spcPts val="0"/>
-              </a:spcAft>
-              <a:defRPr sz="5500" b="1">
-                <a:solidFill>
-                  <a:srgbClr val="F4F0E7"/>
-                </a:solidFill>
-                <a:latin typeface="Arial"/>
-              </a:defRPr>
-            </a:pPr>
-            <a:r>
-              <a:t>ke kontrole.</a:t>
-            </a:r>
-          </a:p>
-        </p:txBody>
-      </p:sp>
-      <p:sp>
-        <p:nvSpPr>
-          <p:cNvPr id="9" name="TextBox 8"/>
-          <p:cNvSpPr txBox="1"/>
-          <p:nvPr/>
-        </p:nvSpPr>
-        <p:spPr>
-          <a:xfrm>
-            <a:off x="533400" y="4724400"/>
-            <a:ext cx="7747000" cy="1104900"/>
-          </a:xfrm>
-          <a:prstGeom prst="rect">
-            <a:avLst/>
-          </a:prstGeom>
-          <a:noFill/>
-        </p:spPr>
-        <p:txBody>
-          <a:bodyPr wrap="none" lIns="0" rIns="0" tIns="0" bIns="0">
-            <a:spAutoFit/>
-          </a:bodyPr>
-          <a:lstStyle/>
-          <a:p>
-            <a:pPr>
-              <a:lnSpc>
-                <a:spcPts val="2356"/>
+                <a:spcPts val="2242"/>
               </a:lnSpc>
               <a:spcAft>
                 <a:spcPts val="0"/>
               </a:spcAft>
               <a:defRPr sz="1900" b="0">
                 <a:solidFill>
-                  <a:srgbClr val="F4F0E7"/>
+                  <a:srgbClr val="191B20"/>
                 </a:solidFill>
                 <a:latin typeface="Arial"/>
               </a:defRPr>
             </a:pPr>
             <a:r>
-              <a:t>Spustitelný web + specifikace + data.</a:t>
-            </a:r>
-          </a:p>
+              <a:t>Michal Ladra · Matěj Mlejnek · Jan Martínek</a:t>
+            </a:r>
+          </a:p>
+        </p:txBody>
+      </p:sp>
+      <p:sp>
+        <p:nvSpPr>
+          <p:cNvPr id="9" name="Rectangle 8"/>
+          <p:cNvSpPr/>
+          <p:nvPr/>
+        </p:nvSpPr>
+        <p:spPr>
+          <a:xfrm>
+            <a:off x="711200" y="6248400"/>
+            <a:ext cx="10769600" cy="12700"/>
+          </a:xfrm>
+          <a:prstGeom prst="rect">
+            <a:avLst/>
+          </a:prstGeom>
+          <a:solidFill>
+            <a:srgbClr val="DFE2E7"/>
+          </a:solidFill>
+          <a:ln>
+            <a:noFill/>
+          </a:ln>
+        </p:spPr>
+        <p:style>
+          <a:lnRef idx="1">
+            <a:schemeClr val="accent1"/>
+          </a:lnRef>
+          <a:fillRef idx="3">
+            <a:schemeClr val="accent1"/>
+          </a:fillRef>
+          <a:effectRef idx="2">
+            <a:schemeClr val="accent1"/>
+          </a:effectRef>
+          <a:fontRef idx="minor">
+            <a:schemeClr val="lt1"/>
+          </a:fontRef>
+        </p:style>
+        <p:txBody>
+          <a:bodyPr rtlCol="0" anchor="ctr"/>
+          <a:lstStyle/>
+          <a:p>
+            <a:pPr algn="ctr"/>
+          </a:p>
+        </p:txBody>
+      </p:sp>
+      <p:sp>
+        <p:nvSpPr>
+          <p:cNvPr id="10" name="TextBox 9"/>
+          <p:cNvSpPr txBox="1"/>
+          <p:nvPr/>
+        </p:nvSpPr>
+        <p:spPr>
+          <a:xfrm>
+            <a:off x="711200" y="6438900"/>
+            <a:ext cx="9652000" cy="203200"/>
+          </a:xfrm>
+          <a:prstGeom prst="rect">
+            <a:avLst/>
+          </a:prstGeom>
+          <a:noFill/>
+        </p:spPr>
+        <p:txBody>
+          <a:bodyPr wrap="none" lIns="0" rIns="0" tIns="0" bIns="0">
+            <a:noAutofit/>
+          </a:bodyPr>
+          <a:lstStyle/>
           <a:p>
             <a:pPr>
               <a:lnSpc>
-                <a:spcPts val="2356"/>
+                <a:spcPts val="1297"/>
               </a:lnSpc>
               <a:spcAft>
                 <a:spcPts val="0"/>
               </a:spcAft>
-              <a:defRPr sz="1900" b="0">
+              <a:defRPr sz="1100" b="0">
                 <a:solidFill>
-                  <a:srgbClr val="F4F0E7"/>
+                  <a:srgbClr val="626773"/>
                 </a:solidFill>
                 <a:latin typeface="Arial"/>
               </a:defRPr>
             </a:pPr>
             <a:r>
-              <a:t>Přesné scénáře pro hodnotící tým.</a:t>
-            </a:r>
-          </a:p>
-        </p:txBody>
-      </p:sp>
-      <p:sp>
-        <p:nvSpPr>
-          <p:cNvPr id="10" name="TextBox 9"/>
+              <a:t>Prague Pulse Fest · Výstaviště Praha · 2027</a:t>
+            </a:r>
+          </a:p>
+        </p:txBody>
+      </p:sp>
+      <p:sp>
+        <p:nvSpPr>
+          <p:cNvPr id="11" name="TextBox 10"/>
           <p:cNvSpPr txBox="1"/>
           <p:nvPr/>
         </p:nvSpPr>
         <p:spPr>
           <a:xfrm>
-            <a:off x="9220200" y="889000"/>
-            <a:ext cx="2667000" cy="961135"/>
+            <a:off x="10807700" y="6413500"/>
+            <a:ext cx="673100" cy="215900"/>
           </a:xfrm>
           <a:prstGeom prst="rect">
             <a:avLst/>
@@ -4257,316 +4281,26 @@
         </p:spPr>
         <p:txBody>
           <a:bodyPr wrap="none" lIns="0" rIns="0" tIns="0" bIns="0">
-            <a:spAutoFit/>
+            <a:noAutofit/>
           </a:bodyPr>
           <a:lstStyle/>
           <a:p>
             <a:pPr>
               <a:lnSpc>
-                <a:spcPts val="7067"/>
+                <a:spcPts val="1416"/>
               </a:lnSpc>
               <a:spcAft>
                 <a:spcPts val="0"/>
               </a:spcAft>
-              <a:defRPr sz="5700" b="1">
+              <a:defRPr sz="1200" b="0">
                 <a:solidFill>
-                  <a:srgbClr val="181817"/>
+                  <a:srgbClr val="626773"/>
                 </a:solidFill>
                 <a:latin typeface="Arial"/>
               </a:defRPr>
             </a:pPr>
             <a:r>
-              <a:t>1—3</a:t>
-            </a:r>
-          </a:p>
-        </p:txBody>
-      </p:sp>
-      <p:sp>
-        <p:nvSpPr>
-          <p:cNvPr id="11" name="TextBox 10"/>
-          <p:cNvSpPr txBox="1"/>
-          <p:nvPr/>
-        </p:nvSpPr>
-        <p:spPr>
-          <a:xfrm>
-            <a:off x="9220200" y="1765300"/>
-            <a:ext cx="2667000" cy="551688"/>
-          </a:xfrm>
-          <a:prstGeom prst="rect">
-            <a:avLst/>
-          </a:prstGeom>
-          <a:noFill/>
-        </p:spPr>
-        <p:txBody>
-          <a:bodyPr wrap="none" lIns="0" rIns="0" tIns="0" bIns="0">
-            <a:spAutoFit/>
-          </a:bodyPr>
-          <a:lstStyle/>
-          <a:p>
-            <a:pPr>
-              <a:lnSpc>
-                <a:spcPts val="3844"/>
-              </a:lnSpc>
-              <a:spcAft>
-                <a:spcPts val="0"/>
-              </a:spcAft>
-              <a:defRPr sz="3100" b="1">
-                <a:solidFill>
-                  <a:srgbClr val="181817"/>
-                </a:solidFill>
-                <a:latin typeface="Arial"/>
-              </a:defRPr>
-            </a:pPr>
-            <a:r>
-              <a:t>SRPEN</a:t>
-            </a:r>
-          </a:p>
-        </p:txBody>
-      </p:sp>
-      <p:sp>
-        <p:nvSpPr>
-          <p:cNvPr id="12" name="TextBox 11"/>
-          <p:cNvSpPr txBox="1"/>
-          <p:nvPr/>
-        </p:nvSpPr>
-        <p:spPr>
-          <a:xfrm>
-            <a:off x="9220200" y="2247900"/>
-            <a:ext cx="2667000" cy="724916"/>
-          </a:xfrm>
-          <a:prstGeom prst="rect">
-            <a:avLst/>
-          </a:prstGeom>
-          <a:noFill/>
-        </p:spPr>
-        <p:txBody>
-          <a:bodyPr wrap="none" lIns="0" rIns="0" tIns="0" bIns="0">
-            <a:spAutoFit/>
-          </a:bodyPr>
-          <a:lstStyle/>
-          <a:p>
-            <a:pPr>
-              <a:lnSpc>
-                <a:spcPts val="5208"/>
-              </a:lnSpc>
-              <a:spcAft>
-                <a:spcPts val="0"/>
-              </a:spcAft>
-              <a:defRPr sz="4200" b="1">
-                <a:solidFill>
-                  <a:srgbClr val="181817"/>
-                </a:solidFill>
-                <a:latin typeface="Arial"/>
-              </a:defRPr>
-            </a:pPr>
-            <a:r>
-              <a:t>2027</a:t>
-            </a:r>
-          </a:p>
-        </p:txBody>
-      </p:sp>
-      <p:sp>
-        <p:nvSpPr>
-          <p:cNvPr id="13" name="TextBox 12"/>
-          <p:cNvSpPr txBox="1"/>
-          <p:nvPr/>
-        </p:nvSpPr>
-        <p:spPr>
-          <a:xfrm>
-            <a:off x="9220200" y="3619500"/>
-            <a:ext cx="2540000" cy="598932"/>
-          </a:xfrm>
-          <a:prstGeom prst="rect">
-            <a:avLst/>
-          </a:prstGeom>
-          <a:noFill/>
-        </p:spPr>
-        <p:txBody>
-          <a:bodyPr wrap="none" lIns="0" rIns="0" tIns="0" bIns="0">
-            <a:spAutoFit/>
-          </a:bodyPr>
-          <a:lstStyle/>
-          <a:p>
-            <a:pPr>
-              <a:lnSpc>
-                <a:spcPts val="2108"/>
-              </a:lnSpc>
-              <a:spcAft>
-                <a:spcPts val="0"/>
-              </a:spcAft>
-              <a:defRPr sz="1700" b="1">
-                <a:solidFill>
-                  <a:srgbClr val="181817"/>
-                </a:solidFill>
-                <a:latin typeface="Arial"/>
-              </a:defRPr>
-            </a:pPr>
-            <a:r>
-              <a:t>PRAHA</a:t>
-            </a:r>
-          </a:p>
-          <a:p>
-            <a:pPr>
-              <a:lnSpc>
-                <a:spcPts val="2108"/>
-              </a:lnSpc>
-              <a:spcAft>
-                <a:spcPts val="0"/>
-              </a:spcAft>
-              <a:defRPr sz="1700" b="1">
-                <a:solidFill>
-                  <a:srgbClr val="181817"/>
-                </a:solidFill>
-                <a:latin typeface="Arial"/>
-              </a:defRPr>
-            </a:pPr>
-            <a:r>
-              <a:t>VLTAVA PARK</a:t>
-            </a:r>
-          </a:p>
-        </p:txBody>
-      </p:sp>
-      <p:sp>
-        <p:nvSpPr>
-          <p:cNvPr id="14" name="TextBox 13"/>
-          <p:cNvSpPr txBox="1"/>
-          <p:nvPr/>
-        </p:nvSpPr>
-        <p:spPr>
-          <a:xfrm>
-            <a:off x="9220200" y="5054600"/>
-            <a:ext cx="2540000" cy="882396"/>
-          </a:xfrm>
-          <a:prstGeom prst="rect">
-            <a:avLst/>
-          </a:prstGeom>
-          <a:noFill/>
-        </p:spPr>
-        <p:txBody>
-          <a:bodyPr wrap="none" lIns="0" rIns="0" tIns="0" bIns="0">
-            <a:spAutoFit/>
-          </a:bodyPr>
-          <a:lstStyle/>
-          <a:p>
-            <a:pPr>
-              <a:lnSpc>
-                <a:spcPts val="3224"/>
-              </a:lnSpc>
-              <a:spcAft>
-                <a:spcPts val="0"/>
-              </a:spcAft>
-              <a:defRPr sz="2600" b="1">
-                <a:solidFill>
-                  <a:srgbClr val="181817"/>
-                </a:solidFill>
-                <a:latin typeface="Arial"/>
-              </a:defRPr>
-            </a:pPr>
-            <a:r>
-              <a:t>CVIČENÍ</a:t>
-            </a:r>
-          </a:p>
-          <a:p>
-            <a:pPr>
-              <a:lnSpc>
-                <a:spcPts val="3224"/>
-              </a:lnSpc>
-              <a:spcAft>
-                <a:spcPts val="0"/>
-              </a:spcAft>
-              <a:defRPr sz="2600" b="1">
-                <a:solidFill>
-                  <a:srgbClr val="181817"/>
-                </a:solidFill>
-                <a:latin typeface="Arial"/>
-              </a:defRPr>
-            </a:pPr>
-            <a:r>
-              <a:t>05</a:t>
-            </a:r>
-          </a:p>
-        </p:txBody>
-      </p:sp>
-      <p:sp>
-        <p:nvSpPr>
-          <p:cNvPr id="15" name="TextBox 14"/>
-          <p:cNvSpPr txBox="1"/>
-          <p:nvPr/>
-        </p:nvSpPr>
-        <p:spPr>
-          <a:xfrm>
-            <a:off x="533400" y="6413500"/>
-            <a:ext cx="10033000" cy="181610"/>
-          </a:xfrm>
-          <a:prstGeom prst="rect">
-            <a:avLst/>
-          </a:prstGeom>
-          <a:noFill/>
-        </p:spPr>
-        <p:txBody>
-          <a:bodyPr wrap="none" lIns="0" rIns="0" tIns="0" bIns="0">
-            <a:spAutoFit/>
-          </a:bodyPr>
-          <a:lstStyle/>
-          <a:p>
-            <a:pPr>
-              <a:lnSpc>
-                <a:spcPts val="930"/>
-              </a:lnSpc>
-              <a:spcAft>
-                <a:spcPts val="0"/>
-              </a:spcAft>
-              <a:defRPr sz="750" b="0">
-                <a:solidFill>
-                  <a:srgbClr val="F4F0E7"/>
-                </a:solidFill>
-                <a:latin typeface="Arial"/>
-              </a:defRPr>
-            </a:pPr>
-            <a:r>
-              <a:t>DODATEČNĚ PŘIPRAVENÝ PODKLAD K MILNÍKU</a:t>
-            </a:r>
-          </a:p>
-        </p:txBody>
-      </p:sp>
-      <p:sp>
-        <p:nvSpPr>
-          <p:cNvPr id="16" name="TextBox 15"/>
-          <p:cNvSpPr txBox="1"/>
-          <p:nvPr/>
-        </p:nvSpPr>
-        <p:spPr>
-          <a:xfrm>
-            <a:off x="10947400" y="6350000"/>
-            <a:ext cx="825500" cy="220979"/>
-          </a:xfrm>
-          <a:prstGeom prst="rect">
-            <a:avLst/>
-          </a:prstGeom>
-          <a:noFill/>
-        </p:spPr>
-        <p:txBody>
-          <a:bodyPr wrap="none" lIns="0" rIns="0" tIns="0" bIns="0">
-            <a:spAutoFit/>
-          </a:bodyPr>
-          <a:lstStyle/>
-          <a:p>
-            <a:pPr>
-              <a:lnSpc>
-                <a:spcPts val="1240"/>
-              </a:lnSpc>
-              <a:spcAft>
-                <a:spcPts val="0"/>
-              </a:spcAft>
-              <a:defRPr sz="1000" b="1">
-                <a:solidFill>
-                  <a:srgbClr val="F4F0E7"/>
-                </a:solidFill>
-                <a:latin typeface="Arial"/>
-              </a:defRPr>
-            </a:pPr>
-            <a:r>
-              <a:t>05 / 01</a:t>
+              <a:t>1 / 6</a:t>
             </a:r>
           </a:p>
         </p:txBody>
@@ -4604,7 +4338,7 @@
             <a:avLst/>
           </a:prstGeom>
           <a:solidFill>
-            <a:srgbClr val="F4F0E7"/>
+            <a:srgbClr val="FFFFFF"/>
           </a:solidFill>
           <a:ln>
             <a:noFill/>
@@ -4640,8 +4374,8 @@
         </p:nvSpPr>
         <p:spPr>
           <a:xfrm>
-            <a:off x="533400" y="304800"/>
-            <a:ext cx="1905000" cy="283972"/>
+            <a:off x="711200" y="457200"/>
+            <a:ext cx="10769600" cy="228600"/>
           </a:xfrm>
           <a:prstGeom prst="rect">
             <a:avLst/>
@@ -4650,172 +4384,46 @@
         </p:spPr>
         <p:txBody>
           <a:bodyPr wrap="none" lIns="0" rIns="0" tIns="0" bIns="0">
-            <a:spAutoFit/>
+            <a:noAutofit/>
           </a:bodyPr>
           <a:lstStyle/>
           <a:p>
             <a:pPr>
               <a:lnSpc>
-                <a:spcPts val="1736"/>
+                <a:spcPts val="1534"/>
               </a:lnSpc>
               <a:spcAft>
                 <a:spcPts val="0"/>
               </a:spcAft>
-              <a:defRPr sz="1400" b="1">
+              <a:defRPr sz="1300" b="1">
                 <a:solidFill>
-                  <a:srgbClr val="181817"/>
+                  <a:srgbClr val="626773"/>
                 </a:solidFill>
                 <a:latin typeface="Arial"/>
               </a:defRPr>
             </a:pPr>
             <a:r>
-              <a:t>PRAGUE</a:t>
-            </a:r>
-          </a:p>
-        </p:txBody>
-      </p:sp>
-      <p:sp>
-        <p:nvSpPr>
-          <p:cNvPr id="4" name="TextBox 3"/>
-          <p:cNvSpPr txBox="1"/>
-          <p:nvPr/>
-        </p:nvSpPr>
-        <p:spPr>
-          <a:xfrm>
-            <a:off x="533400" y="495300"/>
-            <a:ext cx="1905000" cy="409956"/>
-          </a:xfrm>
-          <a:prstGeom prst="rect">
-            <a:avLst/>
-          </a:prstGeom>
-          <a:noFill/>
-        </p:spPr>
-        <p:txBody>
-          <a:bodyPr wrap="none" lIns="0" rIns="0" tIns="0" bIns="0">
-            <a:spAutoFit/>
-          </a:bodyPr>
-          <a:lstStyle/>
-          <a:p>
-            <a:pPr>
-              <a:lnSpc>
-                <a:spcPts val="2728"/>
-              </a:lnSpc>
-              <a:spcAft>
-                <a:spcPts val="0"/>
-              </a:spcAft>
-              <a:defRPr sz="2200" b="1">
-                <a:solidFill>
-                  <a:srgbClr val="181817"/>
-                </a:solidFill>
-                <a:latin typeface="Arial"/>
-              </a:defRPr>
-            </a:pPr>
-            <a:r>
-              <a:t>PULSE</a:t>
-            </a:r>
-          </a:p>
-        </p:txBody>
-      </p:sp>
-      <p:sp>
-        <p:nvSpPr>
-          <p:cNvPr id="5" name="TextBox 4"/>
-          <p:cNvSpPr txBox="1"/>
-          <p:nvPr/>
-        </p:nvSpPr>
-        <p:spPr>
-          <a:xfrm>
-            <a:off x="533400" y="812800"/>
-            <a:ext cx="2032000" cy="165862"/>
-          </a:xfrm>
-          <a:prstGeom prst="rect">
-            <a:avLst/>
-          </a:prstGeom>
-          <a:noFill/>
-        </p:spPr>
-        <p:txBody>
-          <a:bodyPr wrap="none" lIns="0" rIns="0" tIns="0" bIns="0">
-            <a:spAutoFit/>
-          </a:bodyPr>
-          <a:lstStyle/>
-          <a:p>
-            <a:pPr>
-              <a:lnSpc>
-                <a:spcPts val="806"/>
-              </a:lnSpc>
-              <a:spcAft>
-                <a:spcPts val="0"/>
-              </a:spcAft>
-              <a:defRPr sz="650" b="1">
-                <a:solidFill>
-                  <a:srgbClr val="181817"/>
-                </a:solidFill>
-                <a:latin typeface="Arial"/>
-              </a:defRPr>
-            </a:pPr>
-            <a:r>
-              <a:t>FEST / 2027</a:t>
-            </a:r>
-          </a:p>
-        </p:txBody>
-      </p:sp>
-      <p:sp>
-        <p:nvSpPr>
-          <p:cNvPr id="6" name="TextBox 5"/>
-          <p:cNvSpPr txBox="1"/>
-          <p:nvPr/>
-        </p:nvSpPr>
-        <p:spPr>
-          <a:xfrm>
-            <a:off x="5588000" y="533400"/>
-            <a:ext cx="6070600" cy="220979"/>
-          </a:xfrm>
-          <a:prstGeom prst="rect">
-            <a:avLst/>
-          </a:prstGeom>
-          <a:noFill/>
-        </p:spPr>
-        <p:txBody>
-          <a:bodyPr wrap="none" lIns="0" rIns="0" tIns="0" bIns="0">
-            <a:spAutoFit/>
-          </a:bodyPr>
-          <a:lstStyle/>
-          <a:p>
-            <a:pPr>
-              <a:lnSpc>
-                <a:spcPts val="1240"/>
-              </a:lnSpc>
-              <a:spcAft>
-                <a:spcPts val="0"/>
-              </a:spcAft>
-              <a:defRPr sz="1000" b="1">
-                <a:solidFill>
-                  <a:srgbClr val="68635B"/>
-                </a:solidFill>
-                <a:latin typeface="Arial"/>
-              </a:defRPr>
-            </a:pPr>
-            <a:r>
-              <a:t>ROZSAH PŘEDÁNÍ</a:t>
-            </a:r>
-          </a:p>
-        </p:txBody>
-      </p:sp>
-      <p:sp>
-        <p:nvSpPr>
-          <p:cNvPr id="7" name="Rectangle 6"/>
+              <a:t>ROZSAH REVIEW-READY VERZE</a:t>
+            </a:r>
+          </a:p>
+        </p:txBody>
+      </p:sp>
+      <p:sp>
+        <p:nvSpPr>
+          <p:cNvPr id="4" name="Rectangle 3"/>
           <p:cNvSpPr/>
           <p:nvPr/>
         </p:nvSpPr>
         <p:spPr>
           <a:xfrm>
-            <a:off x="533400" y="1155700"/>
-            <a:ext cx="11125200" cy="25400"/>
+            <a:off x="711200" y="876300"/>
+            <a:ext cx="622300" cy="50800"/>
           </a:xfrm>
           <a:prstGeom prst="rect">
             <a:avLst/>
           </a:prstGeom>
           <a:solidFill>
-            <a:srgbClr val="181817"/>
+            <a:srgbClr val="E55024"/>
           </a:solidFill>
           <a:ln>
             <a:noFill/>
@@ -4845,14 +4453,14 @@
       </p:sp>
       <p:sp>
         <p:nvSpPr>
-          <p:cNvPr id="8" name="TextBox 7"/>
+          <p:cNvPr id="5" name="TextBox 4"/>
           <p:cNvSpPr txBox="1"/>
           <p:nvPr/>
         </p:nvSpPr>
         <p:spPr>
           <a:xfrm>
-            <a:off x="508000" y="1422400"/>
-            <a:ext cx="11176000" cy="1079500"/>
+            <a:off x="685800" y="1257300"/>
+            <a:ext cx="10795000" cy="1168400"/>
           </a:xfrm>
           <a:prstGeom prst="rect">
             <a:avLst/>
@@ -4861,46 +4469,46 @@
         </p:spPr>
         <p:txBody>
           <a:bodyPr wrap="none" lIns="0" rIns="0" tIns="0" bIns="0">
-            <a:spAutoFit/>
+            <a:noAutofit/>
           </a:bodyPr>
           <a:lstStyle/>
           <a:p>
             <a:pPr>
               <a:lnSpc>
-                <a:spcPts val="3740"/>
+                <a:spcPts val="4032"/>
               </a:lnSpc>
               <a:spcAft>
                 <a:spcPts val="0"/>
               </a:spcAft>
-              <a:defRPr sz="3400" b="1">
+              <a:defRPr sz="3600" b="1">
                 <a:solidFill>
-                  <a:srgbClr val="181817"/>
+                  <a:srgbClr val="191B20"/>
                 </a:solidFill>
                 <a:latin typeface="Arial"/>
               </a:defRPr>
             </a:pPr>
             <a:r>
-              <a:t>Obsah pro skutečný průchod.</a:t>
-            </a:r>
-          </a:p>
-        </p:txBody>
-      </p:sp>
-      <p:sp>
-        <p:nvSpPr>
-          <p:cNvPr id="9" name="Rectangle 8"/>
+              <a:t>Co je připravené pro review</a:t>
+            </a:r>
+          </a:p>
+        </p:txBody>
+      </p:sp>
+      <p:sp>
+        <p:nvSpPr>
+          <p:cNvPr id="6" name="Rectangle 5"/>
           <p:cNvSpPr/>
           <p:nvPr/>
         </p:nvSpPr>
         <p:spPr>
           <a:xfrm>
-            <a:off x="533400" y="2794000"/>
-            <a:ext cx="2552700" cy="2095500"/>
+            <a:off x="723900" y="2273300"/>
+            <a:ext cx="101600" cy="101600"/>
           </a:xfrm>
           <a:prstGeom prst="rect">
             <a:avLst/>
           </a:prstGeom>
           <a:solidFill>
-            <a:srgbClr val="F45E2B"/>
+            <a:srgbClr val="E55024"/>
           </a:solidFill>
           <a:ln>
             <a:noFill/>
@@ -4930,14 +4538,14 @@
       </p:sp>
       <p:sp>
         <p:nvSpPr>
-          <p:cNvPr id="10" name="TextBox 9"/>
+          <p:cNvPr id="7" name="TextBox 6"/>
           <p:cNvSpPr txBox="1"/>
           <p:nvPr/>
         </p:nvSpPr>
         <p:spPr>
           <a:xfrm>
-            <a:off x="762000" y="2921000"/>
-            <a:ext cx="2133600" cy="1102868"/>
+            <a:off x="1066800" y="2146300"/>
+            <a:ext cx="10160000" cy="419100"/>
           </a:xfrm>
           <a:prstGeom prst="rect">
             <a:avLst/>
@@ -4946,88 +4554,46 @@
         </p:spPr>
         <p:txBody>
           <a:bodyPr wrap="none" lIns="0" rIns="0" tIns="0" bIns="0">
-            <a:spAutoFit/>
+            <a:noAutofit/>
           </a:bodyPr>
           <a:lstStyle/>
           <a:p>
             <a:pPr>
               <a:lnSpc>
-                <a:spcPts val="8184"/>
+                <a:spcPts val="3360"/>
               </a:lnSpc>
               <a:spcAft>
                 <a:spcPts val="0"/>
               </a:spcAft>
-              <a:defRPr sz="6600" b="1">
+              <a:defRPr sz="2800" b="0">
                 <a:solidFill>
-                  <a:srgbClr val="181817"/>
+                  <a:srgbClr val="191B20"/>
                 </a:solidFill>
                 <a:latin typeface="Arial"/>
               </a:defRPr>
             </a:pPr>
             <a:r>
-              <a:t>3</a:t>
-            </a:r>
-          </a:p>
-        </p:txBody>
-      </p:sp>
-      <p:sp>
-        <p:nvSpPr>
-          <p:cNvPr id="11" name="TextBox 10"/>
-          <p:cNvSpPr txBox="1"/>
-          <p:nvPr/>
-        </p:nvSpPr>
-        <p:spPr>
-          <a:xfrm>
-            <a:off x="762000" y="4165600"/>
-            <a:ext cx="2133600" cy="252476"/>
-          </a:xfrm>
-          <a:prstGeom prst="rect">
-            <a:avLst/>
-          </a:prstGeom>
-          <a:noFill/>
-        </p:spPr>
-        <p:txBody>
-          <a:bodyPr wrap="none" lIns="0" rIns="0" tIns="0" bIns="0">
-            <a:spAutoFit/>
-          </a:bodyPr>
-          <a:lstStyle/>
-          <a:p>
-            <a:pPr>
-              <a:lnSpc>
-                <a:spcPts val="1488"/>
-              </a:lnSpc>
-              <a:spcAft>
-                <a:spcPts val="0"/>
-              </a:spcAft>
-              <a:defRPr sz="1200" b="1">
-                <a:solidFill>
-                  <a:srgbClr val="181817"/>
-                </a:solidFill>
-                <a:latin typeface="Arial"/>
-              </a:defRPr>
-            </a:pPr>
-            <a:r>
-              <a:t>dny programu</a:t>
-            </a:r>
-          </a:p>
-        </p:txBody>
-      </p:sp>
-      <p:sp>
-        <p:nvSpPr>
-          <p:cNvPr id="12" name="Rectangle 11"/>
+              <a:t>Z návrhu vznikly všechny hlavní stránky a dva průchody.</a:t>
+            </a:r>
+          </a:p>
+        </p:txBody>
+      </p:sp>
+      <p:sp>
+        <p:nvSpPr>
+          <p:cNvPr id="8" name="Rectangle 7"/>
           <p:cNvSpPr/>
           <p:nvPr/>
         </p:nvSpPr>
         <p:spPr>
           <a:xfrm>
-            <a:off x="3390900" y="2794000"/>
-            <a:ext cx="2552700" cy="2095500"/>
+            <a:off x="723900" y="2971800"/>
+            <a:ext cx="101600" cy="101600"/>
           </a:xfrm>
           <a:prstGeom prst="rect">
             <a:avLst/>
           </a:prstGeom>
           <a:solidFill>
-            <a:srgbClr val="E7E0D5"/>
+            <a:srgbClr val="E55024"/>
           </a:solidFill>
           <a:ln>
             <a:noFill/>
@@ -5057,14 +4623,14 @@
       </p:sp>
       <p:sp>
         <p:nvSpPr>
-          <p:cNvPr id="13" name="TextBox 12"/>
+          <p:cNvPr id="9" name="TextBox 8"/>
           <p:cNvSpPr txBox="1"/>
           <p:nvPr/>
         </p:nvSpPr>
         <p:spPr>
           <a:xfrm>
-            <a:off x="3619500" y="2921000"/>
-            <a:ext cx="2133600" cy="1102868"/>
+            <a:off x="1066800" y="2844800"/>
+            <a:ext cx="10160000" cy="419100"/>
           </a:xfrm>
           <a:prstGeom prst="rect">
             <a:avLst/>
@@ -5073,88 +4639,46 @@
         </p:spPr>
         <p:txBody>
           <a:bodyPr wrap="none" lIns="0" rIns="0" tIns="0" bIns="0">
-            <a:spAutoFit/>
+            <a:noAutofit/>
           </a:bodyPr>
           <a:lstStyle/>
           <a:p>
             <a:pPr>
               <a:lnSpc>
-                <a:spcPts val="8184"/>
+                <a:spcPts val="3360"/>
               </a:lnSpc>
               <a:spcAft>
                 <a:spcPts val="0"/>
               </a:spcAft>
-              <a:defRPr sz="6600" b="1">
+              <a:defRPr sz="2800" b="0">
                 <a:solidFill>
-                  <a:srgbClr val="181817"/>
+                  <a:srgbClr val="191B20"/>
                 </a:solidFill>
                 <a:latin typeface="Arial"/>
               </a:defRPr>
             </a:pPr>
             <a:r>
-              <a:t>3</a:t>
-            </a:r>
-          </a:p>
-        </p:txBody>
-      </p:sp>
-      <p:sp>
-        <p:nvSpPr>
-          <p:cNvPr id="14" name="TextBox 13"/>
-          <p:cNvSpPr txBox="1"/>
-          <p:nvPr/>
-        </p:nvSpPr>
-        <p:spPr>
-          <a:xfrm>
-            <a:off x="3619500" y="4165600"/>
-            <a:ext cx="2133600" cy="252476"/>
-          </a:xfrm>
-          <a:prstGeom prst="rect">
-            <a:avLst/>
-          </a:prstGeom>
-          <a:noFill/>
-        </p:spPr>
-        <p:txBody>
-          <a:bodyPr wrap="none" lIns="0" rIns="0" tIns="0" bIns="0">
-            <a:spAutoFit/>
-          </a:bodyPr>
-          <a:lstStyle/>
-          <a:p>
-            <a:pPr>
-              <a:lnSpc>
-                <a:spcPts val="1488"/>
-              </a:lnSpc>
-              <a:spcAft>
-                <a:spcPts val="0"/>
-              </a:spcAft>
-              <a:defRPr sz="1200" b="1">
-                <a:solidFill>
-                  <a:srgbClr val="181817"/>
-                </a:solidFill>
-                <a:latin typeface="Arial"/>
-              </a:defRPr>
-            </a:pPr>
-            <a:r>
-              <a:t>scény</a:t>
-            </a:r>
-          </a:p>
-        </p:txBody>
-      </p:sp>
-      <p:sp>
-        <p:nvSpPr>
-          <p:cNvPr id="15" name="Rectangle 14"/>
+              <a:t>Předáváme úplný web/, specifikaci a postupy scénářů.</a:t>
+            </a:r>
+          </a:p>
+        </p:txBody>
+      </p:sp>
+      <p:sp>
+        <p:nvSpPr>
+          <p:cNvPr id="10" name="Rectangle 9"/>
           <p:cNvSpPr/>
           <p:nvPr/>
         </p:nvSpPr>
         <p:spPr>
           <a:xfrm>
-            <a:off x="6248400" y="2794000"/>
-            <a:ext cx="2552700" cy="2095500"/>
+            <a:off x="723900" y="3670300"/>
+            <a:ext cx="101600" cy="101600"/>
           </a:xfrm>
           <a:prstGeom prst="rect">
             <a:avLst/>
           </a:prstGeom>
           <a:solidFill>
-            <a:srgbClr val="E7E0D5"/>
+            <a:srgbClr val="E55024"/>
           </a:solidFill>
           <a:ln>
             <a:noFill/>
@@ -5184,14 +4708,14 @@
       </p:sp>
       <p:sp>
         <p:nvSpPr>
-          <p:cNvPr id="16" name="TextBox 15"/>
+          <p:cNvPr id="11" name="TextBox 10"/>
           <p:cNvSpPr txBox="1"/>
           <p:nvPr/>
         </p:nvSpPr>
         <p:spPr>
           <a:xfrm>
-            <a:off x="6477000" y="2921000"/>
-            <a:ext cx="2133600" cy="1102868"/>
+            <a:off x="1066800" y="3543300"/>
+            <a:ext cx="10160000" cy="419100"/>
           </a:xfrm>
           <a:prstGeom prst="rect">
             <a:avLst/>
@@ -5200,88 +4724,46 @@
         </p:spPr>
         <p:txBody>
           <a:bodyPr wrap="none" lIns="0" rIns="0" tIns="0" bIns="0">
-            <a:spAutoFit/>
+            <a:noAutofit/>
           </a:bodyPr>
           <a:lstStyle/>
           <a:p>
             <a:pPr>
               <a:lnSpc>
-                <a:spcPts val="8184"/>
+                <a:spcPts val="3360"/>
               </a:lnSpc>
               <a:spcAft>
                 <a:spcPts val="0"/>
               </a:spcAft>
-              <a:defRPr sz="6600" b="1">
+              <a:defRPr sz="2800" b="0">
                 <a:solidFill>
-                  <a:srgbClr val="181817"/>
+                  <a:srgbClr val="191B20"/>
                 </a:solidFill>
                 <a:latin typeface="Arial"/>
               </a:defRPr>
             </a:pPr>
             <a:r>
-              <a:t>60</a:t>
-            </a:r>
-          </a:p>
-        </p:txBody>
-      </p:sp>
-      <p:sp>
-        <p:nvSpPr>
-          <p:cNvPr id="17" name="TextBox 16"/>
-          <p:cNvSpPr txBox="1"/>
-          <p:nvPr/>
-        </p:nvSpPr>
-        <p:spPr>
-          <a:xfrm>
-            <a:off x="6477000" y="4165600"/>
-            <a:ext cx="2133600" cy="252476"/>
-          </a:xfrm>
-          <a:prstGeom prst="rect">
-            <a:avLst/>
-          </a:prstGeom>
-          <a:noFill/>
-        </p:spPr>
-        <p:txBody>
-          <a:bodyPr wrap="none" lIns="0" rIns="0" tIns="0" bIns="0">
-            <a:spAutoFit/>
-          </a:bodyPr>
-          <a:lstStyle/>
-          <a:p>
-            <a:pPr>
-              <a:lnSpc>
-                <a:spcPts val="1488"/>
-              </a:lnSpc>
-              <a:spcAft>
-                <a:spcPts val="0"/>
-              </a:spcAft>
-              <a:defRPr sz="1200" b="1">
-                <a:solidFill>
-                  <a:srgbClr val="181817"/>
-                </a:solidFill>
-                <a:latin typeface="Arial"/>
-              </a:defRPr>
-            </a:pPr>
-            <a:r>
-              <a:t>detailů interpretů</a:t>
-            </a:r>
-          </a:p>
-        </p:txBody>
-      </p:sp>
-      <p:sp>
-        <p:nvSpPr>
-          <p:cNvPr id="18" name="Rectangle 17"/>
+              <a:t>Tři dny, tři scény, 60 interpretů a 60 vystoupení.</a:t>
+            </a:r>
+          </a:p>
+        </p:txBody>
+      </p:sp>
+      <p:sp>
+        <p:nvSpPr>
+          <p:cNvPr id="12" name="Rectangle 11"/>
           <p:cNvSpPr/>
           <p:nvPr/>
         </p:nvSpPr>
         <p:spPr>
           <a:xfrm>
-            <a:off x="9105900" y="2794000"/>
-            <a:ext cx="2552700" cy="2095500"/>
+            <a:off x="723900" y="4368800"/>
+            <a:ext cx="101600" cy="101600"/>
           </a:xfrm>
           <a:prstGeom prst="rect">
             <a:avLst/>
           </a:prstGeom>
           <a:solidFill>
-            <a:srgbClr val="E7E0D5"/>
+            <a:srgbClr val="E55024"/>
           </a:solidFill>
           <a:ln>
             <a:noFill/>
@@ -5311,14 +4793,14 @@
       </p:sp>
       <p:sp>
         <p:nvSpPr>
-          <p:cNvPr id="19" name="TextBox 18"/>
+          <p:cNvPr id="13" name="TextBox 12"/>
           <p:cNvSpPr txBox="1"/>
           <p:nvPr/>
         </p:nvSpPr>
         <p:spPr>
           <a:xfrm>
-            <a:off x="9334500" y="2921000"/>
-            <a:ext cx="2133600" cy="1102868"/>
+            <a:off x="1066800" y="4241800"/>
+            <a:ext cx="10160000" cy="419100"/>
           </a:xfrm>
           <a:prstGeom prst="rect">
             <a:avLst/>
@@ -5327,40 +4809,83 @@
         </p:spPr>
         <p:txBody>
           <a:bodyPr wrap="none" lIns="0" rIns="0" tIns="0" bIns="0">
-            <a:spAutoFit/>
+            <a:noAutofit/>
           </a:bodyPr>
           <a:lstStyle/>
           <a:p>
             <a:pPr>
               <a:lnSpc>
-                <a:spcPts val="8184"/>
+                <a:spcPts val="3360"/>
               </a:lnSpc>
               <a:spcAft>
                 <a:spcPts val="0"/>
               </a:spcAft>
-              <a:defRPr sz="6600" b="1">
+              <a:defRPr sz="2800" b="0">
                 <a:solidFill>
-                  <a:srgbClr val="181817"/>
+                  <a:srgbClr val="191B20"/>
                 </a:solidFill>
                 <a:latin typeface="Arial"/>
               </a:defRPr>
             </a:pPr>
             <a:r>
-              <a:t>60</a:t>
-            </a:r>
-          </a:p>
-        </p:txBody>
-      </p:sp>
-      <p:sp>
-        <p:nvSpPr>
-          <p:cNvPr id="20" name="TextBox 19"/>
+              <a:t>Košík, účet a PDF jako doplňkový scénář.</a:t>
+            </a:r>
+          </a:p>
+        </p:txBody>
+      </p:sp>
+      <p:sp>
+        <p:nvSpPr>
+          <p:cNvPr id="14" name="Rectangle 13"/>
+          <p:cNvSpPr/>
+          <p:nvPr/>
+        </p:nvSpPr>
+        <p:spPr>
+          <a:xfrm>
+            <a:off x="711200" y="6248400"/>
+            <a:ext cx="10769600" cy="12700"/>
+          </a:xfrm>
+          <a:prstGeom prst="rect">
+            <a:avLst/>
+          </a:prstGeom>
+          <a:solidFill>
+            <a:srgbClr val="DFE2E7"/>
+          </a:solidFill>
+          <a:ln>
+            <a:noFill/>
+          </a:ln>
+        </p:spPr>
+        <p:style>
+          <a:lnRef idx="1">
+            <a:schemeClr val="accent1"/>
+          </a:lnRef>
+          <a:fillRef idx="3">
+            <a:schemeClr val="accent1"/>
+          </a:fillRef>
+          <a:effectRef idx="2">
+            <a:schemeClr val="accent1"/>
+          </a:effectRef>
+          <a:fontRef idx="minor">
+            <a:schemeClr val="lt1"/>
+          </a:fontRef>
+        </p:style>
+        <p:txBody>
+          <a:bodyPr rtlCol="0" anchor="ctr"/>
+          <a:lstStyle/>
+          <a:p>
+            <a:pPr algn="ctr"/>
+          </a:p>
+        </p:txBody>
+      </p:sp>
+      <p:sp>
+        <p:nvSpPr>
+          <p:cNvPr id="15" name="TextBox 14"/>
           <p:cNvSpPr txBox="1"/>
           <p:nvPr/>
         </p:nvSpPr>
         <p:spPr>
           <a:xfrm>
-            <a:off x="9334500" y="4165600"/>
-            <a:ext cx="2133600" cy="252476"/>
+            <a:off x="711200" y="6438900"/>
+            <a:ext cx="9652000" cy="203200"/>
           </a:xfrm>
           <a:prstGeom prst="rect">
             <a:avLst/>
@@ -5369,40 +4894,40 @@
         </p:spPr>
         <p:txBody>
           <a:bodyPr wrap="none" lIns="0" rIns="0" tIns="0" bIns="0">
-            <a:spAutoFit/>
+            <a:noAutofit/>
           </a:bodyPr>
           <a:lstStyle/>
           <a:p>
             <a:pPr>
               <a:lnSpc>
-                <a:spcPts val="1488"/>
+                <a:spcPts val="1297"/>
               </a:lnSpc>
               <a:spcAft>
                 <a:spcPts val="0"/>
               </a:spcAft>
-              <a:defRPr sz="1200" b="1">
+              <a:defRPr sz="1100" b="0">
                 <a:solidFill>
-                  <a:srgbClr val="181817"/>
+                  <a:srgbClr val="626773"/>
                 </a:solidFill>
                 <a:latin typeface="Arial"/>
               </a:defRPr>
             </a:pPr>
             <a:r>
-              <a:t>programových položek</a:t>
-            </a:r>
-          </a:p>
-        </p:txBody>
-      </p:sp>
-      <p:sp>
-        <p:nvSpPr>
-          <p:cNvPr id="21" name="TextBox 20"/>
+              <a:t>Prague Pulse Fest · Výstaviště Praha · 2027</a:t>
+            </a:r>
+          </a:p>
+        </p:txBody>
+      </p:sp>
+      <p:sp>
+        <p:nvSpPr>
+          <p:cNvPr id="16" name="TextBox 15"/>
           <p:cNvSpPr txBox="1"/>
           <p:nvPr/>
         </p:nvSpPr>
         <p:spPr>
           <a:xfrm>
-            <a:off x="533400" y="5295900"/>
-            <a:ext cx="11125200" cy="939800"/>
+            <a:off x="10807700" y="6413500"/>
+            <a:ext cx="673100" cy="215900"/>
           </a:xfrm>
           <a:prstGeom prst="rect">
             <a:avLst/>
@@ -5411,129 +4936,26 @@
         </p:spPr>
         <p:txBody>
           <a:bodyPr wrap="none" lIns="0" rIns="0" tIns="0" bIns="0">
-            <a:spAutoFit/>
+            <a:noAutofit/>
           </a:bodyPr>
           <a:lstStyle/>
           <a:p>
             <a:pPr>
               <a:lnSpc>
-                <a:spcPts val="2232"/>
+                <a:spcPts val="1416"/>
               </a:lnSpc>
               <a:spcAft>
                 <a:spcPts val="0"/>
               </a:spcAft>
-              <a:defRPr sz="1800" b="0">
+              <a:defRPr sz="1200" b="0">
                 <a:solidFill>
-                  <a:srgbClr val="181817"/>
+                  <a:srgbClr val="626773"/>
                 </a:solidFill>
                 <a:latin typeface="Arial"/>
               </a:defRPr>
             </a:pPr>
             <a:r>
-              <a:t>Filtry · osobní program · CZ / EN · offline plánek</a:t>
-            </a:r>
-          </a:p>
-          <a:p>
-            <a:pPr>
-              <a:lnSpc>
-                <a:spcPts val="2232"/>
-              </a:lnSpc>
-              <a:spcAft>
-                <a:spcPts val="0"/>
-              </a:spcAft>
-              <a:defRPr sz="1800" b="0">
-                <a:solidFill>
-                  <a:srgbClr val="181817"/>
-                </a:solidFill>
-                <a:latin typeface="Arial"/>
-              </a:defRPr>
-            </a:pPr>
-            <a:r>
-              <a:t>1/2/3 dny · sedadla / stání · kemp · profil · PDF</a:t>
-            </a:r>
-          </a:p>
-        </p:txBody>
-      </p:sp>
-      <p:sp>
-        <p:nvSpPr>
-          <p:cNvPr id="22" name="TextBox 21"/>
-          <p:cNvSpPr txBox="1"/>
-          <p:nvPr/>
-        </p:nvSpPr>
-        <p:spPr>
-          <a:xfrm>
-            <a:off x="533400" y="6413500"/>
-            <a:ext cx="10033000" cy="181610"/>
-          </a:xfrm>
-          <a:prstGeom prst="rect">
-            <a:avLst/>
-          </a:prstGeom>
-          <a:noFill/>
-        </p:spPr>
-        <p:txBody>
-          <a:bodyPr wrap="none" lIns="0" rIns="0" tIns="0" bIns="0">
-            <a:spAutoFit/>
-          </a:bodyPr>
-          <a:lstStyle/>
-          <a:p>
-            <a:pPr>
-              <a:lnSpc>
-                <a:spcPts val="930"/>
-              </a:lnSpc>
-              <a:spcAft>
-                <a:spcPts val="0"/>
-              </a:spcAft>
-              <a:defRPr sz="750" b="0">
-                <a:solidFill>
-                  <a:srgbClr val="68635B"/>
-                </a:solidFill>
-                <a:latin typeface="Arial"/>
-              </a:defRPr>
-            </a:pPr>
-            <a:r>
-              <a:t>DODATEČNĚ PŘIPRAVENÝ PODKLAD K MILNÍKU</a:t>
-            </a:r>
-          </a:p>
-        </p:txBody>
-      </p:sp>
-      <p:sp>
-        <p:nvSpPr>
-          <p:cNvPr id="23" name="TextBox 22"/>
-          <p:cNvSpPr txBox="1"/>
-          <p:nvPr/>
-        </p:nvSpPr>
-        <p:spPr>
-          <a:xfrm>
-            <a:off x="10947400" y="6350000"/>
-            <a:ext cx="825500" cy="220979"/>
-          </a:xfrm>
-          <a:prstGeom prst="rect">
-            <a:avLst/>
-          </a:prstGeom>
-          <a:noFill/>
-        </p:spPr>
-        <p:txBody>
-          <a:bodyPr wrap="none" lIns="0" rIns="0" tIns="0" bIns="0">
-            <a:spAutoFit/>
-          </a:bodyPr>
-          <a:lstStyle/>
-          <a:p>
-            <a:pPr>
-              <a:lnSpc>
-                <a:spcPts val="1240"/>
-              </a:lnSpc>
-              <a:spcAft>
-                <a:spcPts val="0"/>
-              </a:spcAft>
-              <a:defRPr sz="1000" b="1">
-                <a:solidFill>
-                  <a:srgbClr val="68635B"/>
-                </a:solidFill>
-                <a:latin typeface="Arial"/>
-              </a:defRPr>
-            </a:pPr>
-            <a:r>
-              <a:t>05 / 02</a:t>
+              <a:t>2 / 6</a:t>
             </a:r>
           </a:p>
         </p:txBody>
@@ -5571,7 +4993,7 @@
             <a:avLst/>
           </a:prstGeom>
           <a:solidFill>
-            <a:srgbClr val="F4F0E7"/>
+            <a:srgbClr val="FFFFFF"/>
           </a:solidFill>
           <a:ln>
             <a:noFill/>
@@ -5607,8 +5029,8 @@
         </p:nvSpPr>
         <p:spPr>
           <a:xfrm>
-            <a:off x="533400" y="304800"/>
-            <a:ext cx="1905000" cy="283972"/>
+            <a:off x="711200" y="457200"/>
+            <a:ext cx="10769600" cy="228600"/>
           </a:xfrm>
           <a:prstGeom prst="rect">
             <a:avLst/>
@@ -5617,172 +5039,46 @@
         </p:spPr>
         <p:txBody>
           <a:bodyPr wrap="none" lIns="0" rIns="0" tIns="0" bIns="0">
-            <a:spAutoFit/>
+            <a:noAutofit/>
           </a:bodyPr>
           <a:lstStyle/>
           <a:p>
             <a:pPr>
               <a:lnSpc>
-                <a:spcPts val="1736"/>
+                <a:spcPts val="1534"/>
               </a:lnSpc>
               <a:spcAft>
                 <a:spcPts val="0"/>
               </a:spcAft>
-              <a:defRPr sz="1400" b="1">
+              <a:defRPr sz="1300" b="1">
                 <a:solidFill>
-                  <a:srgbClr val="181817"/>
+                  <a:srgbClr val="626773"/>
                 </a:solidFill>
                 <a:latin typeface="Arial"/>
               </a:defRPr>
             </a:pPr>
             <a:r>
-              <a:t>PRAGUE</a:t>
-            </a:r>
-          </a:p>
-        </p:txBody>
-      </p:sp>
-      <p:sp>
-        <p:nvSpPr>
-          <p:cNvPr id="4" name="TextBox 3"/>
-          <p:cNvSpPr txBox="1"/>
-          <p:nvPr/>
-        </p:nvSpPr>
-        <p:spPr>
-          <a:xfrm>
-            <a:off x="533400" y="495300"/>
-            <a:ext cx="1905000" cy="409956"/>
-          </a:xfrm>
-          <a:prstGeom prst="rect">
-            <a:avLst/>
-          </a:prstGeom>
-          <a:noFill/>
-        </p:spPr>
-        <p:txBody>
-          <a:bodyPr wrap="none" lIns="0" rIns="0" tIns="0" bIns="0">
-            <a:spAutoFit/>
-          </a:bodyPr>
-          <a:lstStyle/>
-          <a:p>
-            <a:pPr>
-              <a:lnSpc>
-                <a:spcPts val="2728"/>
-              </a:lnSpc>
-              <a:spcAft>
-                <a:spcPts val="0"/>
-              </a:spcAft>
-              <a:defRPr sz="2200" b="1">
-                <a:solidFill>
-                  <a:srgbClr val="181817"/>
-                </a:solidFill>
-                <a:latin typeface="Arial"/>
-              </a:defRPr>
-            </a:pPr>
-            <a:r>
-              <a:t>PULSE</a:t>
-            </a:r>
-          </a:p>
-        </p:txBody>
-      </p:sp>
-      <p:sp>
-        <p:nvSpPr>
-          <p:cNvPr id="5" name="TextBox 4"/>
-          <p:cNvSpPr txBox="1"/>
-          <p:nvPr/>
-        </p:nvSpPr>
-        <p:spPr>
-          <a:xfrm>
-            <a:off x="533400" y="812800"/>
-            <a:ext cx="2032000" cy="165862"/>
-          </a:xfrm>
-          <a:prstGeom prst="rect">
-            <a:avLst/>
-          </a:prstGeom>
-          <a:noFill/>
-        </p:spPr>
-        <p:txBody>
-          <a:bodyPr wrap="none" lIns="0" rIns="0" tIns="0" bIns="0">
-            <a:spAutoFit/>
-          </a:bodyPr>
-          <a:lstStyle/>
-          <a:p>
-            <a:pPr>
-              <a:lnSpc>
-                <a:spcPts val="806"/>
-              </a:lnSpc>
-              <a:spcAft>
-                <a:spcPts val="0"/>
-              </a:spcAft>
-              <a:defRPr sz="650" b="1">
-                <a:solidFill>
-                  <a:srgbClr val="181817"/>
-                </a:solidFill>
-                <a:latin typeface="Arial"/>
-              </a:defRPr>
-            </a:pPr>
-            <a:r>
-              <a:t>FEST / 2027</a:t>
-            </a:r>
-          </a:p>
-        </p:txBody>
-      </p:sp>
-      <p:sp>
-        <p:nvSpPr>
-          <p:cNvPr id="6" name="TextBox 5"/>
-          <p:cNvSpPr txBox="1"/>
-          <p:nvPr/>
-        </p:nvSpPr>
-        <p:spPr>
-          <a:xfrm>
-            <a:off x="5588000" y="533400"/>
-            <a:ext cx="6070600" cy="220979"/>
-          </a:xfrm>
-          <a:prstGeom prst="rect">
-            <a:avLst/>
-          </a:prstGeom>
-          <a:noFill/>
-        </p:spPr>
-        <p:txBody>
-          <a:bodyPr wrap="none" lIns="0" rIns="0" tIns="0" bIns="0">
-            <a:spAutoFit/>
-          </a:bodyPr>
-          <a:lstStyle/>
-          <a:p>
-            <a:pPr>
-              <a:lnSpc>
-                <a:spcPts val="1240"/>
-              </a:lnSpc>
-              <a:spcAft>
-                <a:spcPts val="0"/>
-              </a:spcAft>
-              <a:defRPr sz="1000" b="1">
-                <a:solidFill>
-                  <a:srgbClr val="68635B"/>
-                </a:solidFill>
-                <a:latin typeface="Arial"/>
-              </a:defRPr>
-            </a:pPr>
-            <a:r>
-              <a:t>PROSÍME PROJÍT A ZAZNAMENAT</a:t>
-            </a:r>
-          </a:p>
-        </p:txBody>
-      </p:sp>
-      <p:sp>
-        <p:nvSpPr>
-          <p:cNvPr id="7" name="Rectangle 6"/>
+              <a:t>POSTUP PRO NEZÁVISLÉHO HODNOTITELE</a:t>
+            </a:r>
+          </a:p>
+        </p:txBody>
+      </p:sp>
+      <p:sp>
+        <p:nvSpPr>
+          <p:cNvPr id="4" name="Rectangle 3"/>
           <p:cNvSpPr/>
           <p:nvPr/>
         </p:nvSpPr>
         <p:spPr>
           <a:xfrm>
-            <a:off x="533400" y="1155700"/>
-            <a:ext cx="11125200" cy="25400"/>
+            <a:off x="711200" y="876300"/>
+            <a:ext cx="622300" cy="50800"/>
           </a:xfrm>
           <a:prstGeom prst="rect">
             <a:avLst/>
           </a:prstGeom>
           <a:solidFill>
-            <a:srgbClr val="181817"/>
+            <a:srgbClr val="E55024"/>
           </a:solidFill>
           <a:ln>
             <a:noFill/>
@@ -5812,14 +5108,14 @@
       </p:sp>
       <p:sp>
         <p:nvSpPr>
-          <p:cNvPr id="8" name="TextBox 7"/>
+          <p:cNvPr id="5" name="TextBox 4"/>
           <p:cNvSpPr txBox="1"/>
           <p:nvPr/>
         </p:nvSpPr>
         <p:spPr>
           <a:xfrm>
-            <a:off x="508000" y="1422400"/>
-            <a:ext cx="11176000" cy="1079500"/>
+            <a:off x="685800" y="1257300"/>
+            <a:ext cx="10795000" cy="1168400"/>
           </a:xfrm>
           <a:prstGeom prst="rect">
             <a:avLst/>
@@ -5828,46 +5124,592 @@
         </p:spPr>
         <p:txBody>
           <a:bodyPr wrap="none" lIns="0" rIns="0" tIns="0" bIns="0">
-            <a:spAutoFit/>
+            <a:noAutofit/>
           </a:bodyPr>
           <a:lstStyle/>
           <a:p>
             <a:pPr>
               <a:lnSpc>
-                <a:spcPts val="3740"/>
+                <a:spcPts val="4032"/>
               </a:lnSpc>
               <a:spcAft>
                 <a:spcPts val="0"/>
               </a:spcAft>
-              <a:defRPr sz="3400" b="1">
+              <a:defRPr sz="3600" b="1">
                 <a:solidFill>
-                  <a:srgbClr val="181817"/>
+                  <a:srgbClr val="191B20"/>
                 </a:solidFill>
                 <a:latin typeface="Arial"/>
               </a:defRPr>
             </a:pPr>
             <a:r>
-              <a:t>Tři úkoly pro hodnotící tým.</a:t>
-            </a:r>
-          </a:p>
-        </p:txBody>
-      </p:sp>
-      <p:sp>
-        <p:nvSpPr>
-          <p:cNvPr id="9" name="Rectangle 8"/>
+              <a:t>S1: filtr a osobní program</a:t>
+            </a:r>
+          </a:p>
+        </p:txBody>
+      </p:sp>
+      <p:sp>
+        <p:nvSpPr>
+          <p:cNvPr id="6" name="TextBox 5"/>
+          <p:cNvSpPr txBox="1"/>
+          <p:nvPr/>
+        </p:nvSpPr>
+        <p:spPr>
+          <a:xfrm>
+            <a:off x="711200" y="2146300"/>
+            <a:ext cx="482600" cy="355600"/>
+          </a:xfrm>
+          <a:prstGeom prst="rect">
+            <a:avLst/>
+          </a:prstGeom>
+          <a:noFill/>
+        </p:spPr>
+        <p:txBody>
+          <a:bodyPr wrap="none" lIns="0" rIns="0" tIns="0" bIns="0">
+            <a:noAutofit/>
+          </a:bodyPr>
+          <a:lstStyle/>
+          <a:p>
+            <a:pPr>
+              <a:lnSpc>
+                <a:spcPts val="2713"/>
+              </a:lnSpc>
+              <a:spcAft>
+                <a:spcPts val="0"/>
+              </a:spcAft>
+              <a:defRPr sz="2300" b="1">
+                <a:solidFill>
+                  <a:srgbClr val="E55024"/>
+                </a:solidFill>
+                <a:latin typeface="Arial"/>
+              </a:defRPr>
+            </a:pPr>
+            <a:r>
+              <a:t>01</a:t>
+            </a:r>
+          </a:p>
+        </p:txBody>
+      </p:sp>
+      <p:sp>
+        <p:nvSpPr>
+          <p:cNvPr id="7" name="TextBox 6"/>
+          <p:cNvSpPr txBox="1"/>
+          <p:nvPr/>
+        </p:nvSpPr>
+        <p:spPr>
+          <a:xfrm>
+            <a:off x="1346200" y="2146300"/>
+            <a:ext cx="3479800" cy="685800"/>
+          </a:xfrm>
+          <a:prstGeom prst="rect">
+            <a:avLst/>
+          </a:prstGeom>
+          <a:noFill/>
+        </p:spPr>
+        <p:txBody>
+          <a:bodyPr wrap="none" lIns="0" rIns="0" tIns="0" bIns="0">
+            <a:noAutofit/>
+          </a:bodyPr>
+          <a:lstStyle/>
+          <a:p>
+            <a:pPr>
+              <a:lnSpc>
+                <a:spcPts val="2832"/>
+              </a:lnSpc>
+              <a:spcAft>
+                <a:spcPts val="0"/>
+              </a:spcAft>
+              <a:defRPr sz="2400" b="1">
+                <a:solidFill>
+                  <a:srgbClr val="191B20"/>
+                </a:solidFill>
+                <a:latin typeface="Arial"/>
+              </a:defRPr>
+            </a:pPr>
+            <a:r>
+              <a:t>Program</a:t>
+            </a:r>
+          </a:p>
+        </p:txBody>
+      </p:sp>
+      <p:sp>
+        <p:nvSpPr>
+          <p:cNvPr id="8" name="TextBox 7"/>
+          <p:cNvSpPr txBox="1"/>
+          <p:nvPr/>
+        </p:nvSpPr>
+        <p:spPr>
+          <a:xfrm>
+            <a:off x="4965700" y="2171700"/>
+            <a:ext cx="6515100" cy="698500"/>
+          </a:xfrm>
+          <a:prstGeom prst="rect">
+            <a:avLst/>
+          </a:prstGeom>
+          <a:noFill/>
+        </p:spPr>
+        <p:txBody>
+          <a:bodyPr wrap="none" lIns="0" rIns="0" tIns="0" bIns="0">
+            <a:noAutofit/>
+          </a:bodyPr>
+          <a:lstStyle/>
+          <a:p>
+            <a:pPr>
+              <a:lnSpc>
+                <a:spcPts val="2713"/>
+              </a:lnSpc>
+              <a:spcAft>
+                <a:spcPts val="0"/>
+              </a:spcAft>
+              <a:defRPr sz="2300" b="0">
+                <a:solidFill>
+                  <a:srgbClr val="626773"/>
+                </a:solidFill>
+                <a:latin typeface="Arial"/>
+              </a:defRPr>
+            </a:pPr>
+            <a:r>
+              <a:t>Vybrat 1. srpen</a:t>
+            </a:r>
+          </a:p>
+        </p:txBody>
+      </p:sp>
+      <p:sp>
+        <p:nvSpPr>
+          <p:cNvPr id="9" name="TextBox 8"/>
+          <p:cNvSpPr txBox="1"/>
+          <p:nvPr/>
+        </p:nvSpPr>
+        <p:spPr>
+          <a:xfrm>
+            <a:off x="711200" y="2971800"/>
+            <a:ext cx="482600" cy="355600"/>
+          </a:xfrm>
+          <a:prstGeom prst="rect">
+            <a:avLst/>
+          </a:prstGeom>
+          <a:noFill/>
+        </p:spPr>
+        <p:txBody>
+          <a:bodyPr wrap="none" lIns="0" rIns="0" tIns="0" bIns="0">
+            <a:noAutofit/>
+          </a:bodyPr>
+          <a:lstStyle/>
+          <a:p>
+            <a:pPr>
+              <a:lnSpc>
+                <a:spcPts val="2713"/>
+              </a:lnSpc>
+              <a:spcAft>
+                <a:spcPts val="0"/>
+              </a:spcAft>
+              <a:defRPr sz="2300" b="1">
+                <a:solidFill>
+                  <a:srgbClr val="E55024"/>
+                </a:solidFill>
+                <a:latin typeface="Arial"/>
+              </a:defRPr>
+            </a:pPr>
+            <a:r>
+              <a:t>02</a:t>
+            </a:r>
+          </a:p>
+        </p:txBody>
+      </p:sp>
+      <p:sp>
+        <p:nvSpPr>
+          <p:cNvPr id="10" name="TextBox 9"/>
+          <p:cNvSpPr txBox="1"/>
+          <p:nvPr/>
+        </p:nvSpPr>
+        <p:spPr>
+          <a:xfrm>
+            <a:off x="1346200" y="2971800"/>
+            <a:ext cx="3479800" cy="685800"/>
+          </a:xfrm>
+          <a:prstGeom prst="rect">
+            <a:avLst/>
+          </a:prstGeom>
+          <a:noFill/>
+        </p:spPr>
+        <p:txBody>
+          <a:bodyPr wrap="none" lIns="0" rIns="0" tIns="0" bIns="0">
+            <a:noAutofit/>
+          </a:bodyPr>
+          <a:lstStyle/>
+          <a:p>
+            <a:pPr>
+              <a:lnSpc>
+                <a:spcPts val="2832"/>
+              </a:lnSpc>
+              <a:spcAft>
+                <a:spcPts val="0"/>
+              </a:spcAft>
+              <a:defRPr sz="2400" b="1">
+                <a:solidFill>
+                  <a:srgbClr val="191B20"/>
+                </a:solidFill>
+                <a:latin typeface="Arial"/>
+              </a:defRPr>
+            </a:pPr>
+            <a:r>
+              <a:t>River Stage</a:t>
+            </a:r>
+          </a:p>
+        </p:txBody>
+      </p:sp>
+      <p:sp>
+        <p:nvSpPr>
+          <p:cNvPr id="11" name="TextBox 10"/>
+          <p:cNvSpPr txBox="1"/>
+          <p:nvPr/>
+        </p:nvSpPr>
+        <p:spPr>
+          <a:xfrm>
+            <a:off x="4965700" y="2997200"/>
+            <a:ext cx="6515100" cy="698500"/>
+          </a:xfrm>
+          <a:prstGeom prst="rect">
+            <a:avLst/>
+          </a:prstGeom>
+          <a:noFill/>
+        </p:spPr>
+        <p:txBody>
+          <a:bodyPr wrap="none" lIns="0" rIns="0" tIns="0" bIns="0">
+            <a:noAutofit/>
+          </a:bodyPr>
+          <a:lstStyle/>
+          <a:p>
+            <a:pPr>
+              <a:lnSpc>
+                <a:spcPts val="2713"/>
+              </a:lnSpc>
+              <a:spcAft>
+                <a:spcPts val="0"/>
+              </a:spcAft>
+              <a:defRPr sz="2300" b="0">
+                <a:solidFill>
+                  <a:srgbClr val="626773"/>
+                </a:solidFill>
+                <a:latin typeface="Arial"/>
+              </a:defRPr>
+            </a:pPr>
+            <a:r>
+              <a:t>Zúžit výsledky</a:t>
+            </a:r>
+          </a:p>
+        </p:txBody>
+      </p:sp>
+      <p:sp>
+        <p:nvSpPr>
+          <p:cNvPr id="12" name="TextBox 11"/>
+          <p:cNvSpPr txBox="1"/>
+          <p:nvPr/>
+        </p:nvSpPr>
+        <p:spPr>
+          <a:xfrm>
+            <a:off x="711200" y="3797300"/>
+            <a:ext cx="482600" cy="355600"/>
+          </a:xfrm>
+          <a:prstGeom prst="rect">
+            <a:avLst/>
+          </a:prstGeom>
+          <a:noFill/>
+        </p:spPr>
+        <p:txBody>
+          <a:bodyPr wrap="none" lIns="0" rIns="0" tIns="0" bIns="0">
+            <a:noAutofit/>
+          </a:bodyPr>
+          <a:lstStyle/>
+          <a:p>
+            <a:pPr>
+              <a:lnSpc>
+                <a:spcPts val="2713"/>
+              </a:lnSpc>
+              <a:spcAft>
+                <a:spcPts val="0"/>
+              </a:spcAft>
+              <a:defRPr sz="2300" b="1">
+                <a:solidFill>
+                  <a:srgbClr val="E55024"/>
+                </a:solidFill>
+                <a:latin typeface="Arial"/>
+              </a:defRPr>
+            </a:pPr>
+            <a:r>
+              <a:t>03</a:t>
+            </a:r>
+          </a:p>
+        </p:txBody>
+      </p:sp>
+      <p:sp>
+        <p:nvSpPr>
+          <p:cNvPr id="13" name="TextBox 12"/>
+          <p:cNvSpPr txBox="1"/>
+          <p:nvPr/>
+        </p:nvSpPr>
+        <p:spPr>
+          <a:xfrm>
+            <a:off x="1346200" y="3797300"/>
+            <a:ext cx="3479800" cy="685800"/>
+          </a:xfrm>
+          <a:prstGeom prst="rect">
+            <a:avLst/>
+          </a:prstGeom>
+          <a:noFill/>
+        </p:spPr>
+        <p:txBody>
+          <a:bodyPr wrap="none" lIns="0" rIns="0" tIns="0" bIns="0">
+            <a:noAutofit/>
+          </a:bodyPr>
+          <a:lstStyle/>
+          <a:p>
+            <a:pPr>
+              <a:lnSpc>
+                <a:spcPts val="2832"/>
+              </a:lnSpc>
+              <a:spcAft>
+                <a:spcPts val="0"/>
+              </a:spcAft>
+              <a:defRPr sz="2400" b="1">
+                <a:solidFill>
+                  <a:srgbClr val="191B20"/>
+                </a:solidFill>
+                <a:latin typeface="Arial"/>
+              </a:defRPr>
+            </a:pPr>
+            <a:r>
+              <a:t>Uložit</a:t>
+            </a:r>
+          </a:p>
+        </p:txBody>
+      </p:sp>
+      <p:sp>
+        <p:nvSpPr>
+          <p:cNvPr id="14" name="TextBox 13"/>
+          <p:cNvSpPr txBox="1"/>
+          <p:nvPr/>
+        </p:nvSpPr>
+        <p:spPr>
+          <a:xfrm>
+            <a:off x="4965700" y="3822700"/>
+            <a:ext cx="6515100" cy="698500"/>
+          </a:xfrm>
+          <a:prstGeom prst="rect">
+            <a:avLst/>
+          </a:prstGeom>
+          <a:noFill/>
+        </p:spPr>
+        <p:txBody>
+          <a:bodyPr wrap="none" lIns="0" rIns="0" tIns="0" bIns="0">
+            <a:noAutofit/>
+          </a:bodyPr>
+          <a:lstStyle/>
+          <a:p>
+            <a:pPr>
+              <a:lnSpc>
+                <a:spcPts val="2713"/>
+              </a:lnSpc>
+              <a:spcAft>
+                <a:spcPts val="0"/>
+              </a:spcAft>
+              <a:defRPr sz="2300" b="0">
+                <a:solidFill>
+                  <a:srgbClr val="626773"/>
+                </a:solidFill>
+                <a:latin typeface="Arial"/>
+              </a:defRPr>
+            </a:pPr>
+            <a:r>
+              <a:t>Vybrat koncert</a:t>
+            </a:r>
+          </a:p>
+        </p:txBody>
+      </p:sp>
+      <p:sp>
+        <p:nvSpPr>
+          <p:cNvPr id="15" name="TextBox 14"/>
+          <p:cNvSpPr txBox="1"/>
+          <p:nvPr/>
+        </p:nvSpPr>
+        <p:spPr>
+          <a:xfrm>
+            <a:off x="711200" y="4622800"/>
+            <a:ext cx="482600" cy="355600"/>
+          </a:xfrm>
+          <a:prstGeom prst="rect">
+            <a:avLst/>
+          </a:prstGeom>
+          <a:noFill/>
+        </p:spPr>
+        <p:txBody>
+          <a:bodyPr wrap="none" lIns="0" rIns="0" tIns="0" bIns="0">
+            <a:noAutofit/>
+          </a:bodyPr>
+          <a:lstStyle/>
+          <a:p>
+            <a:pPr>
+              <a:lnSpc>
+                <a:spcPts val="2713"/>
+              </a:lnSpc>
+              <a:spcAft>
+                <a:spcPts val="0"/>
+              </a:spcAft>
+              <a:defRPr sz="2300" b="1">
+                <a:solidFill>
+                  <a:srgbClr val="E55024"/>
+                </a:solidFill>
+                <a:latin typeface="Arial"/>
+              </a:defRPr>
+            </a:pPr>
+            <a:r>
+              <a:t>04</a:t>
+            </a:r>
+          </a:p>
+        </p:txBody>
+      </p:sp>
+      <p:sp>
+        <p:nvSpPr>
+          <p:cNvPr id="16" name="TextBox 15"/>
+          <p:cNvSpPr txBox="1"/>
+          <p:nvPr/>
+        </p:nvSpPr>
+        <p:spPr>
+          <a:xfrm>
+            <a:off x="1346200" y="4622800"/>
+            <a:ext cx="3479800" cy="685800"/>
+          </a:xfrm>
+          <a:prstGeom prst="rect">
+            <a:avLst/>
+          </a:prstGeom>
+          <a:noFill/>
+        </p:spPr>
+        <p:txBody>
+          <a:bodyPr wrap="none" lIns="0" rIns="0" tIns="0" bIns="0">
+            <a:noAutofit/>
+          </a:bodyPr>
+          <a:lstStyle/>
+          <a:p>
+            <a:pPr>
+              <a:lnSpc>
+                <a:spcPts val="2832"/>
+              </a:lnSpc>
+              <a:spcAft>
+                <a:spcPts val="0"/>
+              </a:spcAft>
+              <a:defRPr sz="2400" b="1">
+                <a:solidFill>
+                  <a:srgbClr val="191B20"/>
+                </a:solidFill>
+                <a:latin typeface="Arial"/>
+              </a:defRPr>
+            </a:pPr>
+            <a:r>
+              <a:t>Obnovit</a:t>
+            </a:r>
+          </a:p>
+        </p:txBody>
+      </p:sp>
+      <p:sp>
+        <p:nvSpPr>
+          <p:cNvPr id="17" name="TextBox 16"/>
+          <p:cNvSpPr txBox="1"/>
+          <p:nvPr/>
+        </p:nvSpPr>
+        <p:spPr>
+          <a:xfrm>
+            <a:off x="4965700" y="4648200"/>
+            <a:ext cx="6515100" cy="698500"/>
+          </a:xfrm>
+          <a:prstGeom prst="rect">
+            <a:avLst/>
+          </a:prstGeom>
+          <a:noFill/>
+        </p:spPr>
+        <p:txBody>
+          <a:bodyPr wrap="none" lIns="0" rIns="0" tIns="0" bIns="0">
+            <a:noAutofit/>
+          </a:bodyPr>
+          <a:lstStyle/>
+          <a:p>
+            <a:pPr>
+              <a:lnSpc>
+                <a:spcPts val="2713"/>
+              </a:lnSpc>
+              <a:spcAft>
+                <a:spcPts val="0"/>
+              </a:spcAft>
+              <a:defRPr sz="2300" b="0">
+                <a:solidFill>
+                  <a:srgbClr val="626773"/>
+                </a:solidFill>
+                <a:latin typeface="Arial"/>
+              </a:defRPr>
+            </a:pPr>
+            <a:r>
+              <a:t>Otevřít můj program</a:t>
+            </a:r>
+          </a:p>
+        </p:txBody>
+      </p:sp>
+      <p:sp>
+        <p:nvSpPr>
+          <p:cNvPr id="18" name="TextBox 17"/>
+          <p:cNvSpPr txBox="1"/>
+          <p:nvPr/>
+        </p:nvSpPr>
+        <p:spPr>
+          <a:xfrm>
+            <a:off x="711200" y="5473700"/>
+            <a:ext cx="10769600" cy="596900"/>
+          </a:xfrm>
+          <a:prstGeom prst="rect">
+            <a:avLst/>
+          </a:prstGeom>
+          <a:noFill/>
+        </p:spPr>
+        <p:txBody>
+          <a:bodyPr wrap="none" lIns="0" rIns="0" tIns="0" bIns="0">
+            <a:noAutofit/>
+          </a:bodyPr>
+          <a:lstStyle/>
+          <a:p>
+            <a:pPr>
+              <a:lnSpc>
+                <a:spcPts val="2124"/>
+              </a:lnSpc>
+              <a:spcAft>
+                <a:spcPts val="0"/>
+              </a:spcAft>
+              <a:defRPr sz="1800" b="0">
+                <a:solidFill>
+                  <a:srgbClr val="626773"/>
+                </a:solidFill>
+                <a:latin typeface="Arial"/>
+              </a:defRPr>
+            </a:pPr>
+            <a:r>
+              <a:t>Kontrola: správný den a scéna, zachování uložené akce.</a:t>
+            </a:r>
+          </a:p>
+        </p:txBody>
+      </p:sp>
+      <p:sp>
+        <p:nvSpPr>
+          <p:cNvPr id="19" name="Rectangle 18"/>
           <p:cNvSpPr/>
           <p:nvPr/>
         </p:nvSpPr>
         <p:spPr>
           <a:xfrm>
-            <a:off x="533400" y="2768600"/>
-            <a:ext cx="3556000" cy="2603500"/>
+            <a:off x="711200" y="6248400"/>
+            <a:ext cx="10769600" cy="12700"/>
           </a:xfrm>
           <a:prstGeom prst="rect">
             <a:avLst/>
           </a:prstGeom>
           <a:solidFill>
-            <a:srgbClr val="181817"/>
+            <a:srgbClr val="DFE2E7"/>
           </a:solidFill>
           <a:ln>
             <a:noFill/>
@@ -5897,57 +5739,14 @@
       </p:sp>
       <p:sp>
         <p:nvSpPr>
-          <p:cNvPr id="10" name="Rectangle 9"/>
-          <p:cNvSpPr/>
-          <p:nvPr/>
-        </p:nvSpPr>
-        <p:spPr>
-          <a:xfrm>
-            <a:off x="533400" y="2768600"/>
-            <a:ext cx="3556000" cy="76200"/>
-          </a:xfrm>
-          <a:prstGeom prst="rect">
-            <a:avLst/>
-          </a:prstGeom>
-          <a:solidFill>
-            <a:srgbClr val="F45E2B"/>
-          </a:solidFill>
-          <a:ln>
-            <a:noFill/>
-          </a:ln>
-        </p:spPr>
-        <p:style>
-          <a:lnRef idx="1">
-            <a:schemeClr val="accent1"/>
-          </a:lnRef>
-          <a:fillRef idx="3">
-            <a:schemeClr val="accent1"/>
-          </a:fillRef>
-          <a:effectRef idx="2">
-            <a:schemeClr val="accent1"/>
-          </a:effectRef>
-          <a:fontRef idx="minor">
-            <a:schemeClr val="lt1"/>
-          </a:fontRef>
-        </p:style>
-        <p:txBody>
-          <a:bodyPr rtlCol="0" anchor="ctr"/>
-          <a:lstStyle/>
-          <a:p>
-            <a:pPr algn="ctr"/>
-          </a:p>
-        </p:txBody>
-      </p:sp>
-      <p:sp>
-        <p:nvSpPr>
-          <p:cNvPr id="11" name="TextBox 10"/>
+          <p:cNvPr id="20" name="TextBox 19"/>
           <p:cNvSpPr txBox="1"/>
           <p:nvPr/>
         </p:nvSpPr>
         <p:spPr>
           <a:xfrm>
-            <a:off x="749300" y="3035300"/>
-            <a:ext cx="3124200" cy="685800"/>
+            <a:off x="711200" y="6438900"/>
+            <a:ext cx="9652000" cy="203200"/>
           </a:xfrm>
           <a:prstGeom prst="rect">
             <a:avLst/>
@@ -5956,40 +5755,40 @@
         </p:spPr>
         <p:txBody>
           <a:bodyPr wrap="none" lIns="0" rIns="0" tIns="0" bIns="0">
-            <a:spAutoFit/>
+            <a:noAutofit/>
           </a:bodyPr>
           <a:lstStyle/>
           <a:p>
             <a:pPr>
               <a:lnSpc>
-                <a:spcPts val="2200"/>
+                <a:spcPts val="1297"/>
               </a:lnSpc>
               <a:spcAft>
                 <a:spcPts val="0"/>
               </a:spcAft>
-              <a:defRPr sz="2000" b="1">
+              <a:defRPr sz="1100" b="0">
                 <a:solidFill>
-                  <a:srgbClr val="F4F0E7"/>
+                  <a:srgbClr val="626773"/>
                 </a:solidFill>
                 <a:latin typeface="Arial"/>
               </a:defRPr>
             </a:pPr>
             <a:r>
-              <a:t>S1 / Program</a:t>
-            </a:r>
-          </a:p>
-        </p:txBody>
-      </p:sp>
-      <p:sp>
-        <p:nvSpPr>
-          <p:cNvPr id="12" name="TextBox 11"/>
+              <a:t>Prague Pulse Fest · Výstaviště Praha · 2027</a:t>
+            </a:r>
+          </a:p>
+        </p:txBody>
+      </p:sp>
+      <p:sp>
+        <p:nvSpPr>
+          <p:cNvPr id="21" name="TextBox 20"/>
           <p:cNvSpPr txBox="1"/>
           <p:nvPr/>
         </p:nvSpPr>
         <p:spPr>
           <a:xfrm>
-            <a:off x="749300" y="3733800"/>
-            <a:ext cx="3124200" cy="1511300"/>
+            <a:off x="10807700" y="6413500"/>
+            <a:ext cx="673100" cy="215900"/>
           </a:xfrm>
           <a:prstGeom prst="rect">
             <a:avLst/>
@@ -5998,631 +5797,26 @@
         </p:spPr>
         <p:txBody>
           <a:bodyPr wrap="none" lIns="0" rIns="0" tIns="0" bIns="0">
-            <a:spAutoFit/>
+            <a:noAutofit/>
           </a:bodyPr>
           <a:lstStyle/>
           <a:p>
             <a:pPr>
               <a:lnSpc>
-                <a:spcPts val="1689"/>
+                <a:spcPts val="1416"/>
               </a:lnSpc>
               <a:spcAft>
                 <a:spcPts val="0"/>
               </a:spcAft>
-              <a:defRPr sz="1420" b="0">
+              <a:defRPr sz="1200" b="0">
                 <a:solidFill>
-                  <a:srgbClr val="F4F0E7"/>
+                  <a:srgbClr val="626773"/>
                 </a:solidFill>
                 <a:latin typeface="Arial"/>
               </a:defRPr>
             </a:pPr>
             <a:r>
-              <a:t>Den 1 + River Stage → uložit</a:t>
-            </a:r>
-          </a:p>
-          <a:p>
-            <a:pPr>
-              <a:lnSpc>
-                <a:spcPts val="1689"/>
-              </a:lnSpc>
-              <a:spcAft>
-                <a:spcPts val="0"/>
-              </a:spcAft>
-              <a:defRPr sz="1420" b="0">
-                <a:solidFill>
-                  <a:srgbClr val="F4F0E7"/>
-                </a:solidFill>
-                <a:latin typeface="Arial"/>
-              </a:defRPr>
-            </a:pPr>
-            <a:r>
-              <a:t>koncert → osobní program →</a:t>
-            </a:r>
-          </a:p>
-          <a:p>
-            <a:pPr>
-              <a:lnSpc>
-                <a:spcPts val="1689"/>
-              </a:lnSpc>
-              <a:spcAft>
-                <a:spcPts val="0"/>
-              </a:spcAft>
-              <a:defRPr sz="1420" b="0">
-                <a:solidFill>
-                  <a:srgbClr val="F4F0E7"/>
-                </a:solidFill>
-                <a:latin typeface="Arial"/>
-              </a:defRPr>
-            </a:pPr>
-            <a:r>
-              <a:t>obnovit.</a:t>
-            </a:r>
-          </a:p>
-          <a:p>
-            <a:pPr>
-              <a:lnSpc>
-                <a:spcPts val="1689"/>
-              </a:lnSpc>
-              <a:spcAft>
-                <a:spcPts val="0"/>
-              </a:spcAft>
-              <a:defRPr sz="1420" b="0">
-                <a:solidFill>
-                  <a:srgbClr val="F4F0E7"/>
-                </a:solidFill>
-                <a:latin typeface="Arial"/>
-              </a:defRPr>
-            </a:pPr>
-          </a:p>
-          <a:p>
-            <a:pPr>
-              <a:lnSpc>
-                <a:spcPts val="1689"/>
-              </a:lnSpc>
-              <a:spcAft>
-                <a:spcPts val="0"/>
-              </a:spcAft>
-              <a:defRPr sz="1420" b="0">
-                <a:solidFill>
-                  <a:srgbClr val="F4F0E7"/>
-                </a:solidFill>
-                <a:latin typeface="Arial"/>
-              </a:defRPr>
-            </a:pPr>
-            <a:r>
-              <a:t>Sedí filtr a zůstal výběr?</a:t>
-            </a:r>
-          </a:p>
-        </p:txBody>
-      </p:sp>
-      <p:sp>
-        <p:nvSpPr>
-          <p:cNvPr id="13" name="Rectangle 12"/>
-          <p:cNvSpPr/>
-          <p:nvPr/>
-        </p:nvSpPr>
-        <p:spPr>
-          <a:xfrm>
-            <a:off x="4318000" y="2768600"/>
-            <a:ext cx="3556000" cy="2603500"/>
-          </a:xfrm>
-          <a:prstGeom prst="rect">
-            <a:avLst/>
-          </a:prstGeom>
-          <a:solidFill>
-            <a:srgbClr val="E7E0D5"/>
-          </a:solidFill>
-          <a:ln>
-            <a:noFill/>
-          </a:ln>
-        </p:spPr>
-        <p:style>
-          <a:lnRef idx="1">
-            <a:schemeClr val="accent1"/>
-          </a:lnRef>
-          <a:fillRef idx="3">
-            <a:schemeClr val="accent1"/>
-          </a:fillRef>
-          <a:effectRef idx="2">
-            <a:schemeClr val="accent1"/>
-          </a:effectRef>
-          <a:fontRef idx="minor">
-            <a:schemeClr val="lt1"/>
-          </a:fontRef>
-        </p:style>
-        <p:txBody>
-          <a:bodyPr rtlCol="0" anchor="ctr"/>
-          <a:lstStyle/>
-          <a:p>
-            <a:pPr algn="ctr"/>
-          </a:p>
-        </p:txBody>
-      </p:sp>
-      <p:sp>
-        <p:nvSpPr>
-          <p:cNvPr id="14" name="Rectangle 13"/>
-          <p:cNvSpPr/>
-          <p:nvPr/>
-        </p:nvSpPr>
-        <p:spPr>
-          <a:xfrm>
-            <a:off x="4318000" y="2768600"/>
-            <a:ext cx="3556000" cy="76200"/>
-          </a:xfrm>
-          <a:prstGeom prst="rect">
-            <a:avLst/>
-          </a:prstGeom>
-          <a:solidFill>
-            <a:srgbClr val="F45E2B"/>
-          </a:solidFill>
-          <a:ln>
-            <a:noFill/>
-          </a:ln>
-        </p:spPr>
-        <p:style>
-          <a:lnRef idx="1">
-            <a:schemeClr val="accent1"/>
-          </a:lnRef>
-          <a:fillRef idx="3">
-            <a:schemeClr val="accent1"/>
-          </a:fillRef>
-          <a:effectRef idx="2">
-            <a:schemeClr val="accent1"/>
-          </a:effectRef>
-          <a:fontRef idx="minor">
-            <a:schemeClr val="lt1"/>
-          </a:fontRef>
-        </p:style>
-        <p:txBody>
-          <a:bodyPr rtlCol="0" anchor="ctr"/>
-          <a:lstStyle/>
-          <a:p>
-            <a:pPr algn="ctr"/>
-          </a:p>
-        </p:txBody>
-      </p:sp>
-      <p:sp>
-        <p:nvSpPr>
-          <p:cNvPr id="15" name="TextBox 14"/>
-          <p:cNvSpPr txBox="1"/>
-          <p:nvPr/>
-        </p:nvSpPr>
-        <p:spPr>
-          <a:xfrm>
-            <a:off x="4533900" y="3035300"/>
-            <a:ext cx="3124200" cy="685800"/>
-          </a:xfrm>
-          <a:prstGeom prst="rect">
-            <a:avLst/>
-          </a:prstGeom>
-          <a:noFill/>
-        </p:spPr>
-        <p:txBody>
-          <a:bodyPr wrap="none" lIns="0" rIns="0" tIns="0" bIns="0">
-            <a:spAutoFit/>
-          </a:bodyPr>
-          <a:lstStyle/>
-          <a:p>
-            <a:pPr>
-              <a:lnSpc>
-                <a:spcPts val="2200"/>
-              </a:lnSpc>
-              <a:spcAft>
-                <a:spcPts val="0"/>
-              </a:spcAft>
-              <a:defRPr sz="2000" b="1">
-                <a:solidFill>
-                  <a:srgbClr val="181817"/>
-                </a:solidFill>
-                <a:latin typeface="Arial"/>
-              </a:defRPr>
-            </a:pPr>
-            <a:r>
-              <a:t>S2 / Interpret</a:t>
-            </a:r>
-          </a:p>
-        </p:txBody>
-      </p:sp>
-      <p:sp>
-        <p:nvSpPr>
-          <p:cNvPr id="16" name="TextBox 15"/>
-          <p:cNvSpPr txBox="1"/>
-          <p:nvPr/>
-        </p:nvSpPr>
-        <p:spPr>
-          <a:xfrm>
-            <a:off x="4533900" y="3733800"/>
-            <a:ext cx="3124200" cy="1511300"/>
-          </a:xfrm>
-          <a:prstGeom prst="rect">
-            <a:avLst/>
-          </a:prstGeom>
-          <a:noFill/>
-        </p:spPr>
-        <p:txBody>
-          <a:bodyPr wrap="none" lIns="0" rIns="0" tIns="0" bIns="0">
-            <a:spAutoFit/>
-          </a:bodyPr>
-          <a:lstStyle/>
-          <a:p>
-            <a:pPr>
-              <a:lnSpc>
-                <a:spcPts val="1689"/>
-              </a:lnSpc>
-              <a:spcAft>
-                <a:spcPts val="0"/>
-              </a:spcAft>
-              <a:defRPr sz="1420" b="0">
-                <a:solidFill>
-                  <a:srgbClr val="181817"/>
-                </a:solidFill>
-                <a:latin typeface="Arial"/>
-              </a:defRPr>
-            </a:pPr>
-            <a:r>
-              <a:t>DARKZY → DARKZY → detail →</a:t>
-            </a:r>
-          </a:p>
-          <a:p>
-            <a:pPr>
-              <a:lnSpc>
-                <a:spcPts val="1689"/>
-              </a:lnSpc>
-              <a:spcAft>
-                <a:spcPts val="0"/>
-              </a:spcAft>
-              <a:defRPr sz="1420" b="0">
-                <a:solidFill>
-                  <a:srgbClr val="181817"/>
-                </a:solidFill>
-                <a:latin typeface="Arial"/>
-              </a:defRPr>
-            </a:pPr>
-            <a:r>
-              <a:t>související koncert.</a:t>
-            </a:r>
-          </a:p>
-          <a:p>
-            <a:pPr>
-              <a:lnSpc>
-                <a:spcPts val="1689"/>
-              </a:lnSpc>
-              <a:spcAft>
-                <a:spcPts val="0"/>
-              </a:spcAft>
-              <a:defRPr sz="1420" b="0">
-                <a:solidFill>
-                  <a:srgbClr val="181817"/>
-                </a:solidFill>
-                <a:latin typeface="Arial"/>
-              </a:defRPr>
-            </a:pPr>
-          </a:p>
-          <a:p>
-            <a:pPr>
-              <a:lnSpc>
-                <a:spcPts val="1689"/>
-              </a:lnSpc>
-              <a:spcAft>
-                <a:spcPts val="0"/>
-              </a:spcAft>
-              <a:defRPr sz="1420" b="0">
-                <a:solidFill>
-                  <a:srgbClr val="181817"/>
-                </a:solidFill>
-                <a:latin typeface="Arial"/>
-              </a:defRPr>
-            </a:pPr>
-            <a:r>
-              <a:t>Je jasný datum, čas a scéna?</a:t>
-            </a:r>
-          </a:p>
-        </p:txBody>
-      </p:sp>
-      <p:sp>
-        <p:nvSpPr>
-          <p:cNvPr id="17" name="Rectangle 16"/>
-          <p:cNvSpPr/>
-          <p:nvPr/>
-        </p:nvSpPr>
-        <p:spPr>
-          <a:xfrm>
-            <a:off x="8102600" y="2768600"/>
-            <a:ext cx="3556000" cy="2603500"/>
-          </a:xfrm>
-          <a:prstGeom prst="rect">
-            <a:avLst/>
-          </a:prstGeom>
-          <a:solidFill>
-            <a:srgbClr val="E7E0D5"/>
-          </a:solidFill>
-          <a:ln>
-            <a:noFill/>
-          </a:ln>
-        </p:spPr>
-        <p:style>
-          <a:lnRef idx="1">
-            <a:schemeClr val="accent1"/>
-          </a:lnRef>
-          <a:fillRef idx="3">
-            <a:schemeClr val="accent1"/>
-          </a:fillRef>
-          <a:effectRef idx="2">
-            <a:schemeClr val="accent1"/>
-          </a:effectRef>
-          <a:fontRef idx="minor">
-            <a:schemeClr val="lt1"/>
-          </a:fontRef>
-        </p:style>
-        <p:txBody>
-          <a:bodyPr rtlCol="0" anchor="ctr"/>
-          <a:lstStyle/>
-          <a:p>
-            <a:pPr algn="ctr"/>
-          </a:p>
-        </p:txBody>
-      </p:sp>
-      <p:sp>
-        <p:nvSpPr>
-          <p:cNvPr id="18" name="Rectangle 17"/>
-          <p:cNvSpPr/>
-          <p:nvPr/>
-        </p:nvSpPr>
-        <p:spPr>
-          <a:xfrm>
-            <a:off x="8102600" y="2768600"/>
-            <a:ext cx="3556000" cy="76200"/>
-          </a:xfrm>
-          <a:prstGeom prst="rect">
-            <a:avLst/>
-          </a:prstGeom>
-          <a:solidFill>
-            <a:srgbClr val="F45E2B"/>
-          </a:solidFill>
-          <a:ln>
-            <a:noFill/>
-          </a:ln>
-        </p:spPr>
-        <p:style>
-          <a:lnRef idx="1">
-            <a:schemeClr val="accent1"/>
-          </a:lnRef>
-          <a:fillRef idx="3">
-            <a:schemeClr val="accent1"/>
-          </a:fillRef>
-          <a:effectRef idx="2">
-            <a:schemeClr val="accent1"/>
-          </a:effectRef>
-          <a:fontRef idx="minor">
-            <a:schemeClr val="lt1"/>
-          </a:fontRef>
-        </p:style>
-        <p:txBody>
-          <a:bodyPr rtlCol="0" anchor="ctr"/>
-          <a:lstStyle/>
-          <a:p>
-            <a:pPr algn="ctr"/>
-          </a:p>
-        </p:txBody>
-      </p:sp>
-      <p:sp>
-        <p:nvSpPr>
-          <p:cNvPr id="19" name="TextBox 18"/>
-          <p:cNvSpPr txBox="1"/>
-          <p:nvPr/>
-        </p:nvSpPr>
-        <p:spPr>
-          <a:xfrm>
-            <a:off x="8318500" y="3035300"/>
-            <a:ext cx="3124200" cy="685800"/>
-          </a:xfrm>
-          <a:prstGeom prst="rect">
-            <a:avLst/>
-          </a:prstGeom>
-          <a:noFill/>
-        </p:spPr>
-        <p:txBody>
-          <a:bodyPr wrap="none" lIns="0" rIns="0" tIns="0" bIns="0">
-            <a:spAutoFit/>
-          </a:bodyPr>
-          <a:lstStyle/>
-          <a:p>
-            <a:pPr>
-              <a:lnSpc>
-                <a:spcPts val="2200"/>
-              </a:lnSpc>
-              <a:spcAft>
-                <a:spcPts val="0"/>
-              </a:spcAft>
-              <a:defRPr sz="2000" b="1">
-                <a:solidFill>
-                  <a:srgbClr val="181817"/>
-                </a:solidFill>
-                <a:latin typeface="Arial"/>
-              </a:defRPr>
-            </a:pPr>
-            <a:r>
-              <a:t>S3 / 1. + 3. srpna</a:t>
-            </a:r>
-          </a:p>
-        </p:txBody>
-      </p:sp>
-      <p:sp>
-        <p:nvSpPr>
-          <p:cNvPr id="20" name="TextBox 19"/>
-          <p:cNvSpPr txBox="1"/>
-          <p:nvPr/>
-        </p:nvSpPr>
-        <p:spPr>
-          <a:xfrm>
-            <a:off x="8318500" y="3733800"/>
-            <a:ext cx="3124200" cy="1511300"/>
-          </a:xfrm>
-          <a:prstGeom prst="rect">
-            <a:avLst/>
-          </a:prstGeom>
-          <a:noFill/>
-        </p:spPr>
-        <p:txBody>
-          <a:bodyPr wrap="none" lIns="0" rIns="0" tIns="0" bIns="0">
-            <a:spAutoFit/>
-          </a:bodyPr>
-          <a:lstStyle/>
-          <a:p>
-            <a:pPr>
-              <a:lnSpc>
-                <a:spcPts val="1689"/>
-              </a:lnSpc>
-              <a:spcAft>
-                <a:spcPts val="0"/>
-              </a:spcAft>
-              <a:defRPr sz="1420" b="0">
-                <a:solidFill>
-                  <a:srgbClr val="181817"/>
-                </a:solidFill>
-                <a:latin typeface="Arial"/>
-              </a:defRPr>
-            </a:pPr>
-            <a:r>
-              <a:t>Dva dny → vlastní VIP sedadlo →</a:t>
-            </a:r>
-          </a:p>
-          <a:p>
-            <a:pPr>
-              <a:lnSpc>
-                <a:spcPts val="1689"/>
-              </a:lnSpc>
-              <a:spcAft>
-                <a:spcPts val="0"/>
-              </a:spcAft>
-              <a:defRPr sz="1420" b="0">
-                <a:solidFill>
-                  <a:srgbClr val="181817"/>
-                </a:solidFill>
-                <a:latin typeface="Arial"/>
-              </a:defRPr>
-            </a:pPr>
-            <a:r>
-              <a:t>stan pro 2 → PULSE10 → PDF.</a:t>
-            </a:r>
-          </a:p>
-          <a:p>
-            <a:pPr>
-              <a:lnSpc>
-                <a:spcPts val="1689"/>
-              </a:lnSpc>
-              <a:spcAft>
-                <a:spcPts val="0"/>
-              </a:spcAft>
-              <a:defRPr sz="1420" b="0">
-                <a:solidFill>
-                  <a:srgbClr val="181817"/>
-                </a:solidFill>
-                <a:latin typeface="Arial"/>
-              </a:defRPr>
-            </a:pPr>
-          </a:p>
-          <a:p>
-            <a:pPr>
-              <a:lnSpc>
-                <a:spcPts val="1689"/>
-              </a:lnSpc>
-              <a:spcAft>
-                <a:spcPts val="0"/>
-              </a:spcAft>
-              <a:defRPr sz="1420" b="0">
-                <a:solidFill>
-                  <a:srgbClr val="181817"/>
-                </a:solidFill>
-                <a:latin typeface="Arial"/>
-              </a:defRPr>
-            </a:pPr>
-            <a:r>
-              <a:t>Sedí dny, sleva, kemp i DPH?</a:t>
-            </a:r>
-          </a:p>
-        </p:txBody>
-      </p:sp>
-      <p:sp>
-        <p:nvSpPr>
-          <p:cNvPr id="21" name="TextBox 20"/>
-          <p:cNvSpPr txBox="1"/>
-          <p:nvPr/>
-        </p:nvSpPr>
-        <p:spPr>
-          <a:xfrm>
-            <a:off x="533400" y="6413500"/>
-            <a:ext cx="10033000" cy="181610"/>
-          </a:xfrm>
-          <a:prstGeom prst="rect">
-            <a:avLst/>
-          </a:prstGeom>
-          <a:noFill/>
-        </p:spPr>
-        <p:txBody>
-          <a:bodyPr wrap="none" lIns="0" rIns="0" tIns="0" bIns="0">
-            <a:spAutoFit/>
-          </a:bodyPr>
-          <a:lstStyle/>
-          <a:p>
-            <a:pPr>
-              <a:lnSpc>
-                <a:spcPts val="930"/>
-              </a:lnSpc>
-              <a:spcAft>
-                <a:spcPts val="0"/>
-              </a:spcAft>
-              <a:defRPr sz="750" b="0">
-                <a:solidFill>
-                  <a:srgbClr val="68635B"/>
-                </a:solidFill>
-                <a:latin typeface="Arial"/>
-              </a:defRPr>
-            </a:pPr>
-            <a:r>
-              <a:t>DODATEČNĚ PŘIPRAVENÝ PODKLAD K MILNÍKU</a:t>
-            </a:r>
-          </a:p>
-        </p:txBody>
-      </p:sp>
-      <p:sp>
-        <p:nvSpPr>
-          <p:cNvPr id="22" name="TextBox 21"/>
-          <p:cNvSpPr txBox="1"/>
-          <p:nvPr/>
-        </p:nvSpPr>
-        <p:spPr>
-          <a:xfrm>
-            <a:off x="10947400" y="6350000"/>
-            <a:ext cx="825500" cy="220979"/>
-          </a:xfrm>
-          <a:prstGeom prst="rect">
-            <a:avLst/>
-          </a:prstGeom>
-          <a:noFill/>
-        </p:spPr>
-        <p:txBody>
-          <a:bodyPr wrap="none" lIns="0" rIns="0" tIns="0" bIns="0">
-            <a:spAutoFit/>
-          </a:bodyPr>
-          <a:lstStyle/>
-          <a:p>
-            <a:pPr>
-              <a:lnSpc>
-                <a:spcPts val="1240"/>
-              </a:lnSpc>
-              <a:spcAft>
-                <a:spcPts val="0"/>
-              </a:spcAft>
-              <a:defRPr sz="1000" b="1">
-                <a:solidFill>
-                  <a:srgbClr val="68635B"/>
-                </a:solidFill>
-                <a:latin typeface="Arial"/>
-              </a:defRPr>
-            </a:pPr>
-            <a:r>
-              <a:t>05 / 03</a:t>
+              <a:t>3 / 6</a:t>
             </a:r>
           </a:p>
         </p:txBody>
@@ -6660,7 +5854,7 @@
             <a:avLst/>
           </a:prstGeom>
           <a:solidFill>
-            <a:srgbClr val="F4F0E7"/>
+            <a:srgbClr val="FFFFFF"/>
           </a:solidFill>
           <a:ln>
             <a:noFill/>
@@ -6696,8 +5890,8 @@
         </p:nvSpPr>
         <p:spPr>
           <a:xfrm>
-            <a:off x="533400" y="304800"/>
-            <a:ext cx="1905000" cy="283972"/>
+            <a:off x="711200" y="457200"/>
+            <a:ext cx="10769600" cy="228600"/>
           </a:xfrm>
           <a:prstGeom prst="rect">
             <a:avLst/>
@@ -6706,172 +5900,46 @@
         </p:spPr>
         <p:txBody>
           <a:bodyPr wrap="none" lIns="0" rIns="0" tIns="0" bIns="0">
-            <a:spAutoFit/>
+            <a:noAutofit/>
           </a:bodyPr>
           <a:lstStyle/>
           <a:p>
             <a:pPr>
               <a:lnSpc>
-                <a:spcPts val="1736"/>
+                <a:spcPts val="1534"/>
               </a:lnSpc>
               <a:spcAft>
                 <a:spcPts val="0"/>
               </a:spcAft>
-              <a:defRPr sz="1400" b="1">
+              <a:defRPr sz="1300" b="1">
                 <a:solidFill>
-                  <a:srgbClr val="181817"/>
+                  <a:srgbClr val="626773"/>
                 </a:solidFill>
                 <a:latin typeface="Arial"/>
               </a:defRPr>
             </a:pPr>
             <a:r>
-              <a:t>PRAGUE</a:t>
-            </a:r>
-          </a:p>
-        </p:txBody>
-      </p:sp>
-      <p:sp>
-        <p:nvSpPr>
-          <p:cNvPr id="4" name="TextBox 3"/>
-          <p:cNvSpPr txBox="1"/>
-          <p:nvPr/>
-        </p:nvSpPr>
-        <p:spPr>
-          <a:xfrm>
-            <a:off x="533400" y="495300"/>
-            <a:ext cx="1905000" cy="409956"/>
-          </a:xfrm>
-          <a:prstGeom prst="rect">
-            <a:avLst/>
-          </a:prstGeom>
-          <a:noFill/>
-        </p:spPr>
-        <p:txBody>
-          <a:bodyPr wrap="none" lIns="0" rIns="0" tIns="0" bIns="0">
-            <a:spAutoFit/>
-          </a:bodyPr>
-          <a:lstStyle/>
-          <a:p>
-            <a:pPr>
-              <a:lnSpc>
-                <a:spcPts val="2728"/>
-              </a:lnSpc>
-              <a:spcAft>
-                <a:spcPts val="0"/>
-              </a:spcAft>
-              <a:defRPr sz="2200" b="1">
-                <a:solidFill>
-                  <a:srgbClr val="181817"/>
-                </a:solidFill>
-                <a:latin typeface="Arial"/>
-              </a:defRPr>
-            </a:pPr>
-            <a:r>
-              <a:t>PULSE</a:t>
-            </a:r>
-          </a:p>
-        </p:txBody>
-      </p:sp>
-      <p:sp>
-        <p:nvSpPr>
-          <p:cNvPr id="5" name="TextBox 4"/>
-          <p:cNvSpPr txBox="1"/>
-          <p:nvPr/>
-        </p:nvSpPr>
-        <p:spPr>
-          <a:xfrm>
-            <a:off x="533400" y="812800"/>
-            <a:ext cx="2032000" cy="165862"/>
-          </a:xfrm>
-          <a:prstGeom prst="rect">
-            <a:avLst/>
-          </a:prstGeom>
-          <a:noFill/>
-        </p:spPr>
-        <p:txBody>
-          <a:bodyPr wrap="none" lIns="0" rIns="0" tIns="0" bIns="0">
-            <a:spAutoFit/>
-          </a:bodyPr>
-          <a:lstStyle/>
-          <a:p>
-            <a:pPr>
-              <a:lnSpc>
-                <a:spcPts val="806"/>
-              </a:lnSpc>
-              <a:spcAft>
-                <a:spcPts val="0"/>
-              </a:spcAft>
-              <a:defRPr sz="650" b="1">
-                <a:solidFill>
-                  <a:srgbClr val="181817"/>
-                </a:solidFill>
-                <a:latin typeface="Arial"/>
-              </a:defRPr>
-            </a:pPr>
-            <a:r>
-              <a:t>FEST / 2027</a:t>
-            </a:r>
-          </a:p>
-        </p:txBody>
-      </p:sp>
-      <p:sp>
-        <p:nvSpPr>
-          <p:cNvPr id="6" name="TextBox 5"/>
-          <p:cNvSpPr txBox="1"/>
-          <p:nvPr/>
-        </p:nvSpPr>
-        <p:spPr>
-          <a:xfrm>
-            <a:off x="5588000" y="533400"/>
-            <a:ext cx="6070600" cy="220979"/>
-          </a:xfrm>
-          <a:prstGeom prst="rect">
-            <a:avLst/>
-          </a:prstGeom>
-          <a:noFill/>
-        </p:spPr>
-        <p:txBody>
-          <a:bodyPr wrap="none" lIns="0" rIns="0" tIns="0" bIns="0">
-            <a:spAutoFit/>
-          </a:bodyPr>
-          <a:lstStyle/>
-          <a:p>
-            <a:pPr>
-              <a:lnSpc>
-                <a:spcPts val="1240"/>
-              </a:lnSpc>
-              <a:spcAft>
-                <a:spcPts val="0"/>
-              </a:spcAft>
-              <a:defRPr sz="1000" b="1">
-                <a:solidFill>
-                  <a:srgbClr val="68635B"/>
-                </a:solidFill>
-                <a:latin typeface="Arial"/>
-              </a:defRPr>
-            </a:pPr>
-            <a:r>
-              <a:t>DŮKAZY PŘILOŽENÉ K WEBU</a:t>
-            </a:r>
-          </a:p>
-        </p:txBody>
-      </p:sp>
-      <p:sp>
-        <p:nvSpPr>
-          <p:cNvPr id="7" name="Rectangle 6"/>
+              <a:t>POSTUP PRO NEZÁVISLÉHO HODNOTITELE</a:t>
+            </a:r>
+          </a:p>
+        </p:txBody>
+      </p:sp>
+      <p:sp>
+        <p:nvSpPr>
+          <p:cNvPr id="4" name="Rectangle 3"/>
           <p:cNvSpPr/>
           <p:nvPr/>
         </p:nvSpPr>
         <p:spPr>
           <a:xfrm>
-            <a:off x="533400" y="1155700"/>
-            <a:ext cx="11125200" cy="25400"/>
+            <a:off x="711200" y="876300"/>
+            <a:ext cx="622300" cy="50800"/>
           </a:xfrm>
           <a:prstGeom prst="rect">
             <a:avLst/>
           </a:prstGeom>
           <a:solidFill>
-            <a:srgbClr val="181817"/>
+            <a:srgbClr val="E55024"/>
           </a:solidFill>
           <a:ln>
             <a:noFill/>
@@ -6901,14 +5969,14 @@
       </p:sp>
       <p:sp>
         <p:nvSpPr>
-          <p:cNvPr id="8" name="TextBox 7"/>
+          <p:cNvPr id="5" name="TextBox 4"/>
           <p:cNvSpPr txBox="1"/>
           <p:nvPr/>
         </p:nvSpPr>
         <p:spPr>
           <a:xfrm>
-            <a:off x="508000" y="1422400"/>
-            <a:ext cx="11176000" cy="1079500"/>
+            <a:off x="685800" y="1257300"/>
+            <a:ext cx="10795000" cy="1168400"/>
           </a:xfrm>
           <a:prstGeom prst="rect">
             <a:avLst/>
@@ -6917,46 +5985,592 @@
         </p:spPr>
         <p:txBody>
           <a:bodyPr wrap="none" lIns="0" rIns="0" tIns="0" bIns="0">
-            <a:spAutoFit/>
+            <a:noAutofit/>
           </a:bodyPr>
           <a:lstStyle/>
           <a:p>
             <a:pPr>
               <a:lnSpc>
-                <a:spcPts val="3740"/>
+                <a:spcPts val="4032"/>
               </a:lnSpc>
               <a:spcAft>
                 <a:spcPts val="0"/>
               </a:spcAft>
-              <a:defRPr sz="3400" b="1">
+              <a:defRPr sz="3600" b="1">
                 <a:solidFill>
-                  <a:srgbClr val="181817"/>
+                  <a:srgbClr val="191B20"/>
                 </a:solidFill>
                 <a:latin typeface="Arial"/>
               </a:defRPr>
             </a:pPr>
             <a:r>
-              <a:t>Co už kontrolujeme sami?</a:t>
-            </a:r>
-          </a:p>
-        </p:txBody>
-      </p:sp>
-      <p:sp>
-        <p:nvSpPr>
-          <p:cNvPr id="9" name="Rectangle 8"/>
+              <a:t>S2: hledání a detail interpreta</a:t>
+            </a:r>
+          </a:p>
+        </p:txBody>
+      </p:sp>
+      <p:sp>
+        <p:nvSpPr>
+          <p:cNvPr id="6" name="TextBox 5"/>
+          <p:cNvSpPr txBox="1"/>
+          <p:nvPr/>
+        </p:nvSpPr>
+        <p:spPr>
+          <a:xfrm>
+            <a:off x="711200" y="2146300"/>
+            <a:ext cx="482600" cy="355600"/>
+          </a:xfrm>
+          <a:prstGeom prst="rect">
+            <a:avLst/>
+          </a:prstGeom>
+          <a:noFill/>
+        </p:spPr>
+        <p:txBody>
+          <a:bodyPr wrap="none" lIns="0" rIns="0" tIns="0" bIns="0">
+            <a:noAutofit/>
+          </a:bodyPr>
+          <a:lstStyle/>
+          <a:p>
+            <a:pPr>
+              <a:lnSpc>
+                <a:spcPts val="2713"/>
+              </a:lnSpc>
+              <a:spcAft>
+                <a:spcPts val="0"/>
+              </a:spcAft>
+              <a:defRPr sz="2300" b="1">
+                <a:solidFill>
+                  <a:srgbClr val="E55024"/>
+                </a:solidFill>
+                <a:latin typeface="Arial"/>
+              </a:defRPr>
+            </a:pPr>
+            <a:r>
+              <a:t>01</a:t>
+            </a:r>
+          </a:p>
+        </p:txBody>
+      </p:sp>
+      <p:sp>
+        <p:nvSpPr>
+          <p:cNvPr id="7" name="TextBox 6"/>
+          <p:cNvSpPr txBox="1"/>
+          <p:nvPr/>
+        </p:nvSpPr>
+        <p:spPr>
+          <a:xfrm>
+            <a:off x="1346200" y="2146300"/>
+            <a:ext cx="3479800" cy="685800"/>
+          </a:xfrm>
+          <a:prstGeom prst="rect">
+            <a:avLst/>
+          </a:prstGeom>
+          <a:noFill/>
+        </p:spPr>
+        <p:txBody>
+          <a:bodyPr wrap="none" lIns="0" rIns="0" tIns="0" bIns="0">
+            <a:noAutofit/>
+          </a:bodyPr>
+          <a:lstStyle/>
+          <a:p>
+            <a:pPr>
+              <a:lnSpc>
+                <a:spcPts val="2832"/>
+              </a:lnSpc>
+              <a:spcAft>
+                <a:spcPts val="0"/>
+              </a:spcAft>
+              <a:defRPr sz="2400" b="1">
+                <a:solidFill>
+                  <a:srgbClr val="191B20"/>
+                </a:solidFill>
+                <a:latin typeface="Arial"/>
+              </a:defRPr>
+            </a:pPr>
+            <a:r>
+              <a:t>Hledání</a:t>
+            </a:r>
+          </a:p>
+        </p:txBody>
+      </p:sp>
+      <p:sp>
+        <p:nvSpPr>
+          <p:cNvPr id="8" name="TextBox 7"/>
+          <p:cNvSpPr txBox="1"/>
+          <p:nvPr/>
+        </p:nvSpPr>
+        <p:spPr>
+          <a:xfrm>
+            <a:off x="4965700" y="2171700"/>
+            <a:ext cx="6515100" cy="698500"/>
+          </a:xfrm>
+          <a:prstGeom prst="rect">
+            <a:avLst/>
+          </a:prstGeom>
+          <a:noFill/>
+        </p:spPr>
+        <p:txBody>
+          <a:bodyPr wrap="none" lIns="0" rIns="0" tIns="0" bIns="0">
+            <a:noAutofit/>
+          </a:bodyPr>
+          <a:lstStyle/>
+          <a:p>
+            <a:pPr>
+              <a:lnSpc>
+                <a:spcPts val="2713"/>
+              </a:lnSpc>
+              <a:spcAft>
+                <a:spcPts val="0"/>
+              </a:spcAft>
+              <a:defRPr sz="2300" b="0">
+                <a:solidFill>
+                  <a:srgbClr val="626773"/>
+                </a:solidFill>
+                <a:latin typeface="Arial"/>
+              </a:defRPr>
+            </a:pPr>
+            <a:r>
+              <a:t>Zadat DARKZY</a:t>
+            </a:r>
+          </a:p>
+        </p:txBody>
+      </p:sp>
+      <p:sp>
+        <p:nvSpPr>
+          <p:cNvPr id="9" name="TextBox 8"/>
+          <p:cNvSpPr txBox="1"/>
+          <p:nvPr/>
+        </p:nvSpPr>
+        <p:spPr>
+          <a:xfrm>
+            <a:off x="711200" y="2971800"/>
+            <a:ext cx="482600" cy="355600"/>
+          </a:xfrm>
+          <a:prstGeom prst="rect">
+            <a:avLst/>
+          </a:prstGeom>
+          <a:noFill/>
+        </p:spPr>
+        <p:txBody>
+          <a:bodyPr wrap="none" lIns="0" rIns="0" tIns="0" bIns="0">
+            <a:noAutofit/>
+          </a:bodyPr>
+          <a:lstStyle/>
+          <a:p>
+            <a:pPr>
+              <a:lnSpc>
+                <a:spcPts val="2713"/>
+              </a:lnSpc>
+              <a:spcAft>
+                <a:spcPts val="0"/>
+              </a:spcAft>
+              <a:defRPr sz="2300" b="1">
+                <a:solidFill>
+                  <a:srgbClr val="E55024"/>
+                </a:solidFill>
+                <a:latin typeface="Arial"/>
+              </a:defRPr>
+            </a:pPr>
+            <a:r>
+              <a:t>02</a:t>
+            </a:r>
+          </a:p>
+        </p:txBody>
+      </p:sp>
+      <p:sp>
+        <p:nvSpPr>
+          <p:cNvPr id="10" name="TextBox 9"/>
+          <p:cNvSpPr txBox="1"/>
+          <p:nvPr/>
+        </p:nvSpPr>
+        <p:spPr>
+          <a:xfrm>
+            <a:off x="1346200" y="2971800"/>
+            <a:ext cx="3479800" cy="685800"/>
+          </a:xfrm>
+          <a:prstGeom prst="rect">
+            <a:avLst/>
+          </a:prstGeom>
+          <a:noFill/>
+        </p:spPr>
+        <p:txBody>
+          <a:bodyPr wrap="none" lIns="0" rIns="0" tIns="0" bIns="0">
+            <a:noAutofit/>
+          </a:bodyPr>
+          <a:lstStyle/>
+          <a:p>
+            <a:pPr>
+              <a:lnSpc>
+                <a:spcPts val="2832"/>
+              </a:lnSpc>
+              <a:spcAft>
+                <a:spcPts val="0"/>
+              </a:spcAft>
+              <a:defRPr sz="2400" b="1">
+                <a:solidFill>
+                  <a:srgbClr val="191B20"/>
+                </a:solidFill>
+                <a:latin typeface="Arial"/>
+              </a:defRPr>
+            </a:pPr>
+            <a:r>
+              <a:t>Výsledky</a:t>
+            </a:r>
+          </a:p>
+        </p:txBody>
+      </p:sp>
+      <p:sp>
+        <p:nvSpPr>
+          <p:cNvPr id="11" name="TextBox 10"/>
+          <p:cNvSpPr txBox="1"/>
+          <p:nvPr/>
+        </p:nvSpPr>
+        <p:spPr>
+          <a:xfrm>
+            <a:off x="4965700" y="2997200"/>
+            <a:ext cx="6515100" cy="698500"/>
+          </a:xfrm>
+          <a:prstGeom prst="rect">
+            <a:avLst/>
+          </a:prstGeom>
+          <a:noFill/>
+        </p:spPr>
+        <p:txBody>
+          <a:bodyPr wrap="none" lIns="0" rIns="0" tIns="0" bIns="0">
+            <a:noAutofit/>
+          </a:bodyPr>
+          <a:lstStyle/>
+          <a:p>
+            <a:pPr>
+              <a:lnSpc>
+                <a:spcPts val="2713"/>
+              </a:lnSpc>
+              <a:spcAft>
+                <a:spcPts val="0"/>
+              </a:spcAft>
+              <a:defRPr sz="2300" b="0">
+                <a:solidFill>
+                  <a:srgbClr val="626773"/>
+                </a:solidFill>
+                <a:latin typeface="Arial"/>
+              </a:defRPr>
+            </a:pPr>
+            <a:r>
+              <a:t>Otevřít interpreta</a:t>
+            </a:r>
+          </a:p>
+        </p:txBody>
+      </p:sp>
+      <p:sp>
+        <p:nvSpPr>
+          <p:cNvPr id="12" name="TextBox 11"/>
+          <p:cNvSpPr txBox="1"/>
+          <p:nvPr/>
+        </p:nvSpPr>
+        <p:spPr>
+          <a:xfrm>
+            <a:off x="711200" y="3797300"/>
+            <a:ext cx="482600" cy="355600"/>
+          </a:xfrm>
+          <a:prstGeom prst="rect">
+            <a:avLst/>
+          </a:prstGeom>
+          <a:noFill/>
+        </p:spPr>
+        <p:txBody>
+          <a:bodyPr wrap="none" lIns="0" rIns="0" tIns="0" bIns="0">
+            <a:noAutofit/>
+          </a:bodyPr>
+          <a:lstStyle/>
+          <a:p>
+            <a:pPr>
+              <a:lnSpc>
+                <a:spcPts val="2713"/>
+              </a:lnSpc>
+              <a:spcAft>
+                <a:spcPts val="0"/>
+              </a:spcAft>
+              <a:defRPr sz="2300" b="1">
+                <a:solidFill>
+                  <a:srgbClr val="E55024"/>
+                </a:solidFill>
+                <a:latin typeface="Arial"/>
+              </a:defRPr>
+            </a:pPr>
+            <a:r>
+              <a:t>03</a:t>
+            </a:r>
+          </a:p>
+        </p:txBody>
+      </p:sp>
+      <p:sp>
+        <p:nvSpPr>
+          <p:cNvPr id="13" name="TextBox 12"/>
+          <p:cNvSpPr txBox="1"/>
+          <p:nvPr/>
+        </p:nvSpPr>
+        <p:spPr>
+          <a:xfrm>
+            <a:off x="1346200" y="3797300"/>
+            <a:ext cx="3479800" cy="685800"/>
+          </a:xfrm>
+          <a:prstGeom prst="rect">
+            <a:avLst/>
+          </a:prstGeom>
+          <a:noFill/>
+        </p:spPr>
+        <p:txBody>
+          <a:bodyPr wrap="none" lIns="0" rIns="0" tIns="0" bIns="0">
+            <a:noAutofit/>
+          </a:bodyPr>
+          <a:lstStyle/>
+          <a:p>
+            <a:pPr>
+              <a:lnSpc>
+                <a:spcPts val="2832"/>
+              </a:lnSpc>
+              <a:spcAft>
+                <a:spcPts val="0"/>
+              </a:spcAft>
+              <a:defRPr sz="2400" b="1">
+                <a:solidFill>
+                  <a:srgbClr val="191B20"/>
+                </a:solidFill>
+                <a:latin typeface="Arial"/>
+              </a:defRPr>
+            </a:pPr>
+            <a:r>
+              <a:t>Detail</a:t>
+            </a:r>
+          </a:p>
+        </p:txBody>
+      </p:sp>
+      <p:sp>
+        <p:nvSpPr>
+          <p:cNvPr id="14" name="TextBox 13"/>
+          <p:cNvSpPr txBox="1"/>
+          <p:nvPr/>
+        </p:nvSpPr>
+        <p:spPr>
+          <a:xfrm>
+            <a:off x="4965700" y="3822700"/>
+            <a:ext cx="6515100" cy="698500"/>
+          </a:xfrm>
+          <a:prstGeom prst="rect">
+            <a:avLst/>
+          </a:prstGeom>
+          <a:noFill/>
+        </p:spPr>
+        <p:txBody>
+          <a:bodyPr wrap="none" lIns="0" rIns="0" tIns="0" bIns="0">
+            <a:noAutofit/>
+          </a:bodyPr>
+          <a:lstStyle/>
+          <a:p>
+            <a:pPr>
+              <a:lnSpc>
+                <a:spcPts val="2713"/>
+              </a:lnSpc>
+              <a:spcAft>
+                <a:spcPts val="0"/>
+              </a:spcAft>
+              <a:defRPr sz="2300" b="0">
+                <a:solidFill>
+                  <a:srgbClr val="626773"/>
+                </a:solidFill>
+                <a:latin typeface="Arial"/>
+              </a:defRPr>
+            </a:pPr>
+            <a:r>
+              <a:t>Najít jeho koncert</a:t>
+            </a:r>
+          </a:p>
+        </p:txBody>
+      </p:sp>
+      <p:sp>
+        <p:nvSpPr>
+          <p:cNvPr id="15" name="TextBox 14"/>
+          <p:cNvSpPr txBox="1"/>
+          <p:nvPr/>
+        </p:nvSpPr>
+        <p:spPr>
+          <a:xfrm>
+            <a:off x="711200" y="4622800"/>
+            <a:ext cx="482600" cy="355600"/>
+          </a:xfrm>
+          <a:prstGeom prst="rect">
+            <a:avLst/>
+          </a:prstGeom>
+          <a:noFill/>
+        </p:spPr>
+        <p:txBody>
+          <a:bodyPr wrap="none" lIns="0" rIns="0" tIns="0" bIns="0">
+            <a:noAutofit/>
+          </a:bodyPr>
+          <a:lstStyle/>
+          <a:p>
+            <a:pPr>
+              <a:lnSpc>
+                <a:spcPts val="2713"/>
+              </a:lnSpc>
+              <a:spcAft>
+                <a:spcPts val="0"/>
+              </a:spcAft>
+              <a:defRPr sz="2300" b="1">
+                <a:solidFill>
+                  <a:srgbClr val="E55024"/>
+                </a:solidFill>
+                <a:latin typeface="Arial"/>
+              </a:defRPr>
+            </a:pPr>
+            <a:r>
+              <a:t>04</a:t>
+            </a:r>
+          </a:p>
+        </p:txBody>
+      </p:sp>
+      <p:sp>
+        <p:nvSpPr>
+          <p:cNvPr id="16" name="TextBox 15"/>
+          <p:cNvSpPr txBox="1"/>
+          <p:nvPr/>
+        </p:nvSpPr>
+        <p:spPr>
+          <a:xfrm>
+            <a:off x="1346200" y="4622800"/>
+            <a:ext cx="3479800" cy="685800"/>
+          </a:xfrm>
+          <a:prstGeom prst="rect">
+            <a:avLst/>
+          </a:prstGeom>
+          <a:noFill/>
+        </p:spPr>
+        <p:txBody>
+          <a:bodyPr wrap="none" lIns="0" rIns="0" tIns="0" bIns="0">
+            <a:noAutofit/>
+          </a:bodyPr>
+          <a:lstStyle/>
+          <a:p>
+            <a:pPr>
+              <a:lnSpc>
+                <a:spcPts val="2832"/>
+              </a:lnSpc>
+              <a:spcAft>
+                <a:spcPts val="0"/>
+              </a:spcAft>
+              <a:defRPr sz="2400" b="1">
+                <a:solidFill>
+                  <a:srgbClr val="191B20"/>
+                </a:solidFill>
+                <a:latin typeface="Arial"/>
+              </a:defRPr>
+            </a:pPr>
+            <a:r>
+              <a:t>Program</a:t>
+            </a:r>
+          </a:p>
+        </p:txBody>
+      </p:sp>
+      <p:sp>
+        <p:nvSpPr>
+          <p:cNvPr id="17" name="TextBox 16"/>
+          <p:cNvSpPr txBox="1"/>
+          <p:nvPr/>
+        </p:nvSpPr>
+        <p:spPr>
+          <a:xfrm>
+            <a:off x="4965700" y="4648200"/>
+            <a:ext cx="6515100" cy="698500"/>
+          </a:xfrm>
+          <a:prstGeom prst="rect">
+            <a:avLst/>
+          </a:prstGeom>
+          <a:noFill/>
+        </p:spPr>
+        <p:txBody>
+          <a:bodyPr wrap="none" lIns="0" rIns="0" tIns="0" bIns="0">
+            <a:noAutofit/>
+          </a:bodyPr>
+          <a:lstStyle/>
+          <a:p>
+            <a:pPr>
+              <a:lnSpc>
+                <a:spcPts val="2713"/>
+              </a:lnSpc>
+              <a:spcAft>
+                <a:spcPts val="0"/>
+              </a:spcAft>
+              <a:defRPr sz="2300" b="0">
+                <a:solidFill>
+                  <a:srgbClr val="626773"/>
+                </a:solidFill>
+                <a:latin typeface="Arial"/>
+              </a:defRPr>
+            </a:pPr>
+            <a:r>
+              <a:t>Ověřit čas a scénu</a:t>
+            </a:r>
+          </a:p>
+        </p:txBody>
+      </p:sp>
+      <p:sp>
+        <p:nvSpPr>
+          <p:cNvPr id="18" name="TextBox 17"/>
+          <p:cNvSpPr txBox="1"/>
+          <p:nvPr/>
+        </p:nvSpPr>
+        <p:spPr>
+          <a:xfrm>
+            <a:off x="711200" y="5473700"/>
+            <a:ext cx="10769600" cy="596900"/>
+          </a:xfrm>
+          <a:prstGeom prst="rect">
+            <a:avLst/>
+          </a:prstGeom>
+          <a:noFill/>
+        </p:spPr>
+        <p:txBody>
+          <a:bodyPr wrap="none" lIns="0" rIns="0" tIns="0" bIns="0">
+            <a:noAutofit/>
+          </a:bodyPr>
+          <a:lstStyle/>
+          <a:p>
+            <a:pPr>
+              <a:lnSpc>
+                <a:spcPts val="2124"/>
+              </a:lnSpc>
+              <a:spcAft>
+                <a:spcPts val="0"/>
+              </a:spcAft>
+              <a:defRPr sz="1800" b="0">
+                <a:solidFill>
+                  <a:srgbClr val="626773"/>
+                </a:solidFill>
+                <a:latin typeface="Arial"/>
+              </a:defRPr>
+            </a:pPr>
+            <a:r>
+              <a:t>Kontrola: správné propojení, prázdný výsledek a zavření dialogu.</a:t>
+            </a:r>
+          </a:p>
+        </p:txBody>
+      </p:sp>
+      <p:sp>
+        <p:nvSpPr>
+          <p:cNvPr id="19" name="Rectangle 18"/>
           <p:cNvSpPr/>
           <p:nvPr/>
         </p:nvSpPr>
         <p:spPr>
           <a:xfrm>
-            <a:off x="533400" y="2768600"/>
-            <a:ext cx="5448300" cy="2603500"/>
+            <a:off x="711200" y="6248400"/>
+            <a:ext cx="10769600" cy="12700"/>
           </a:xfrm>
           <a:prstGeom prst="rect">
             <a:avLst/>
           </a:prstGeom>
           <a:solidFill>
-            <a:srgbClr val="181817"/>
+            <a:srgbClr val="DFE2E7"/>
           </a:solidFill>
           <a:ln>
             <a:noFill/>
@@ -6986,57 +6600,14 @@
       </p:sp>
       <p:sp>
         <p:nvSpPr>
-          <p:cNvPr id="10" name="Rectangle 9"/>
-          <p:cNvSpPr/>
-          <p:nvPr/>
-        </p:nvSpPr>
-        <p:spPr>
-          <a:xfrm>
-            <a:off x="533400" y="2768600"/>
-            <a:ext cx="5448300" cy="76200"/>
-          </a:xfrm>
-          <a:prstGeom prst="rect">
-            <a:avLst/>
-          </a:prstGeom>
-          <a:solidFill>
-            <a:srgbClr val="F45E2B"/>
-          </a:solidFill>
-          <a:ln>
-            <a:noFill/>
-          </a:ln>
-        </p:spPr>
-        <p:style>
-          <a:lnRef idx="1">
-            <a:schemeClr val="accent1"/>
-          </a:lnRef>
-          <a:fillRef idx="3">
-            <a:schemeClr val="accent1"/>
-          </a:fillRef>
-          <a:effectRef idx="2">
-            <a:schemeClr val="accent1"/>
-          </a:effectRef>
-          <a:fontRef idx="minor">
-            <a:schemeClr val="lt1"/>
-          </a:fontRef>
-        </p:style>
-        <p:txBody>
-          <a:bodyPr rtlCol="0" anchor="ctr"/>
-          <a:lstStyle/>
-          <a:p>
-            <a:pPr algn="ctr"/>
-          </a:p>
-        </p:txBody>
-      </p:sp>
-      <p:sp>
-        <p:nvSpPr>
-          <p:cNvPr id="11" name="TextBox 10"/>
+          <p:cNvPr id="20" name="TextBox 19"/>
           <p:cNvSpPr txBox="1"/>
           <p:nvPr/>
         </p:nvSpPr>
         <p:spPr>
           <a:xfrm>
-            <a:off x="749300" y="3035300"/>
-            <a:ext cx="5016500" cy="685800"/>
+            <a:off x="711200" y="6438900"/>
+            <a:ext cx="9652000" cy="203200"/>
           </a:xfrm>
           <a:prstGeom prst="rect">
             <a:avLst/>
@@ -7045,40 +6616,40 @@
         </p:spPr>
         <p:txBody>
           <a:bodyPr wrap="none" lIns="0" rIns="0" tIns="0" bIns="0">
-            <a:spAutoFit/>
+            <a:noAutofit/>
           </a:bodyPr>
           <a:lstStyle/>
           <a:p>
             <a:pPr>
               <a:lnSpc>
-                <a:spcPts val="2200"/>
+                <a:spcPts val="1297"/>
               </a:lnSpc>
               <a:spcAft>
                 <a:spcPts val="0"/>
               </a:spcAft>
-              <a:defRPr sz="2000" b="1">
+              <a:defRPr sz="1100" b="0">
                 <a:solidFill>
-                  <a:srgbClr val="F4F0E7"/>
+                  <a:srgbClr val="626773"/>
                 </a:solidFill>
                 <a:latin typeface="Arial"/>
               </a:defRPr>
             </a:pPr>
             <a:r>
-              <a:t>Data a chování</a:t>
-            </a:r>
-          </a:p>
-        </p:txBody>
-      </p:sp>
-      <p:sp>
-        <p:nvSpPr>
-          <p:cNvPr id="12" name="TextBox 11"/>
+              <a:t>Prague Pulse Fest · Výstaviště Praha · 2027</a:t>
+            </a:r>
+          </a:p>
+        </p:txBody>
+      </p:sp>
+      <p:sp>
+        <p:nvSpPr>
+          <p:cNvPr id="21" name="TextBox 20"/>
           <p:cNvSpPr txBox="1"/>
           <p:nvPr/>
         </p:nvSpPr>
         <p:spPr>
           <a:xfrm>
-            <a:off x="749300" y="3733800"/>
-            <a:ext cx="5016500" cy="1511300"/>
+            <a:off x="10807700" y="6413500"/>
+            <a:ext cx="673100" cy="215900"/>
           </a:xfrm>
           <a:prstGeom prst="rect">
             <a:avLst/>
@@ -7087,430 +6658,26 @@
         </p:spPr>
         <p:txBody>
           <a:bodyPr wrap="none" lIns="0" rIns="0" tIns="0" bIns="0">
-            <a:spAutoFit/>
+            <a:noAutofit/>
           </a:bodyPr>
           <a:lstStyle/>
           <a:p>
             <a:pPr>
               <a:lnSpc>
-                <a:spcPts val="1689"/>
+                <a:spcPts val="1416"/>
               </a:lnSpc>
               <a:spcAft>
                 <a:spcPts val="0"/>
               </a:spcAft>
-              <a:defRPr sz="1420" b="0">
+              <a:defRPr sz="1200" b="0">
                 <a:solidFill>
-                  <a:srgbClr val="F4F0E7"/>
+                  <a:srgbClr val="626773"/>
                 </a:solidFill>
                 <a:latin typeface="Arial"/>
               </a:defRPr>
             </a:pPr>
             <a:r>
-              <a:t>XML reference a shoda exportu. Hledání, program,</a:t>
-            </a:r>
-          </a:p>
-          <a:p>
-            <a:pPr>
-              <a:lnSpc>
-                <a:spcPts val="1689"/>
-              </a:lnSpc>
-              <a:spcAft>
-                <a:spcPts val="0"/>
-              </a:spcAft>
-              <a:defRPr sz="1420" b="0">
-                <a:solidFill>
-                  <a:srgbClr val="F4F0E7"/>
-                </a:solidFill>
-                <a:latin typeface="Arial"/>
-              </a:defRPr>
-            </a:pPr>
-            <a:r>
-              <a:t>úložiště, košík a PDF.</a:t>
-            </a:r>
-          </a:p>
-          <a:p>
-            <a:pPr>
-              <a:lnSpc>
-                <a:spcPts val="1689"/>
-              </a:lnSpc>
-              <a:spcAft>
-                <a:spcPts val="0"/>
-              </a:spcAft>
-              <a:defRPr sz="1420" b="0">
-                <a:solidFill>
-                  <a:srgbClr val="F4F0E7"/>
-                </a:solidFill>
-                <a:latin typeface="Arial"/>
-              </a:defRPr>
-            </a:pPr>
-          </a:p>
-          <a:p>
-            <a:pPr>
-              <a:lnSpc>
-                <a:spcPts val="1689"/>
-              </a:lnSpc>
-              <a:spcAft>
-                <a:spcPts val="0"/>
-              </a:spcAft>
-              <a:defRPr sz="1420" b="0">
-                <a:solidFill>
-                  <a:srgbClr val="F4F0E7"/>
-                </a:solidFill>
-                <a:latin typeface="Arial"/>
-              </a:defRPr>
-            </a:pPr>
-            <a:r>
-              <a:t>Výsledek v validation_report.md.</a:t>
-            </a:r>
-          </a:p>
-        </p:txBody>
-      </p:sp>
-      <p:sp>
-        <p:nvSpPr>
-          <p:cNvPr id="13" name="Rectangle 12"/>
-          <p:cNvSpPr/>
-          <p:nvPr/>
-        </p:nvSpPr>
-        <p:spPr>
-          <a:xfrm>
-            <a:off x="6210300" y="2768600"/>
-            <a:ext cx="5448300" cy="2603500"/>
-          </a:xfrm>
-          <a:prstGeom prst="rect">
-            <a:avLst/>
-          </a:prstGeom>
-          <a:solidFill>
-            <a:srgbClr val="E7E0D5"/>
-          </a:solidFill>
-          <a:ln>
-            <a:noFill/>
-          </a:ln>
-        </p:spPr>
-        <p:style>
-          <a:lnRef idx="1">
-            <a:schemeClr val="accent1"/>
-          </a:lnRef>
-          <a:fillRef idx="3">
-            <a:schemeClr val="accent1"/>
-          </a:fillRef>
-          <a:effectRef idx="2">
-            <a:schemeClr val="accent1"/>
-          </a:effectRef>
-          <a:fontRef idx="minor">
-            <a:schemeClr val="lt1"/>
-          </a:fontRef>
-        </p:style>
-        <p:txBody>
-          <a:bodyPr rtlCol="0" anchor="ctr"/>
-          <a:lstStyle/>
-          <a:p>
-            <a:pPr algn="ctr"/>
-          </a:p>
-        </p:txBody>
-      </p:sp>
-      <p:sp>
-        <p:nvSpPr>
-          <p:cNvPr id="14" name="Rectangle 13"/>
-          <p:cNvSpPr/>
-          <p:nvPr/>
-        </p:nvSpPr>
-        <p:spPr>
-          <a:xfrm>
-            <a:off x="6210300" y="2768600"/>
-            <a:ext cx="5448300" cy="76200"/>
-          </a:xfrm>
-          <a:prstGeom prst="rect">
-            <a:avLst/>
-          </a:prstGeom>
-          <a:solidFill>
-            <a:srgbClr val="F45E2B"/>
-          </a:solidFill>
-          <a:ln>
-            <a:noFill/>
-          </a:ln>
-        </p:spPr>
-        <p:style>
-          <a:lnRef idx="1">
-            <a:schemeClr val="accent1"/>
-          </a:lnRef>
-          <a:fillRef idx="3">
-            <a:schemeClr val="accent1"/>
-          </a:fillRef>
-          <a:effectRef idx="2">
-            <a:schemeClr val="accent1"/>
-          </a:effectRef>
-          <a:fontRef idx="minor">
-            <a:schemeClr val="lt1"/>
-          </a:fontRef>
-        </p:style>
-        <p:txBody>
-          <a:bodyPr rtlCol="0" anchor="ctr"/>
-          <a:lstStyle/>
-          <a:p>
-            <a:pPr algn="ctr"/>
-          </a:p>
-        </p:txBody>
-      </p:sp>
-      <p:sp>
-        <p:nvSpPr>
-          <p:cNvPr id="15" name="TextBox 14"/>
-          <p:cNvSpPr txBox="1"/>
-          <p:nvPr/>
-        </p:nvSpPr>
-        <p:spPr>
-          <a:xfrm>
-            <a:off x="6426200" y="3035300"/>
-            <a:ext cx="5016500" cy="685800"/>
-          </a:xfrm>
-          <a:prstGeom prst="rect">
-            <a:avLst/>
-          </a:prstGeom>
-          <a:noFill/>
-        </p:spPr>
-        <p:txBody>
-          <a:bodyPr wrap="none" lIns="0" rIns="0" tIns="0" bIns="0">
-            <a:spAutoFit/>
-          </a:bodyPr>
-          <a:lstStyle/>
-          <a:p>
-            <a:pPr>
-              <a:lnSpc>
-                <a:spcPts val="2200"/>
-              </a:lnSpc>
-              <a:spcAft>
-                <a:spcPts val="0"/>
-              </a:spcAft>
-              <a:defRPr sz="2000" b="1">
-                <a:solidFill>
-                  <a:srgbClr val="181817"/>
-                </a:solidFill>
-                <a:latin typeface="Arial"/>
-              </a:defRPr>
-            </a:pPr>
-            <a:r>
-              <a:t>Mobil i desktop</a:t>
-            </a:r>
-          </a:p>
-        </p:txBody>
-      </p:sp>
-      <p:sp>
-        <p:nvSpPr>
-          <p:cNvPr id="16" name="TextBox 15"/>
-          <p:cNvSpPr txBox="1"/>
-          <p:nvPr/>
-        </p:nvSpPr>
-        <p:spPr>
-          <a:xfrm>
-            <a:off x="6426200" y="3733800"/>
-            <a:ext cx="5016500" cy="1511300"/>
-          </a:xfrm>
-          <a:prstGeom prst="rect">
-            <a:avLst/>
-          </a:prstGeom>
-          <a:noFill/>
-        </p:spPr>
-        <p:txBody>
-          <a:bodyPr wrap="none" lIns="0" rIns="0" tIns="0" bIns="0">
-            <a:spAutoFit/>
-          </a:bodyPr>
-          <a:lstStyle/>
-          <a:p>
-            <a:pPr>
-              <a:lnSpc>
-                <a:spcPts val="1689"/>
-              </a:lnSpc>
-              <a:spcAft>
-                <a:spcPts val="0"/>
-              </a:spcAft>
-              <a:defRPr sz="1420" b="0">
-                <a:solidFill>
-                  <a:srgbClr val="181817"/>
-                </a:solidFill>
-                <a:latin typeface="Arial"/>
-              </a:defRPr>
-            </a:pPr>
-            <a:r>
-              <a:t>Přetékání, navigace, dlouhé názvy a vyplněné</a:t>
-            </a:r>
-          </a:p>
-          <a:p>
-            <a:pPr>
-              <a:lnSpc>
-                <a:spcPts val="1689"/>
-              </a:lnSpc>
-              <a:spcAft>
-                <a:spcPts val="0"/>
-              </a:spcAft>
-              <a:defRPr sz="1420" b="0">
-                <a:solidFill>
-                  <a:srgbClr val="181817"/>
-                </a:solidFill>
-                <a:latin typeface="Arial"/>
-              </a:defRPr>
-            </a:pPr>
-            <a:r>
-              <a:t>formuláře.</a:t>
-            </a:r>
-          </a:p>
-          <a:p>
-            <a:pPr>
-              <a:lnSpc>
-                <a:spcPts val="1689"/>
-              </a:lnSpc>
-              <a:spcAft>
-                <a:spcPts val="0"/>
-              </a:spcAft>
-              <a:defRPr sz="1420" b="0">
-                <a:solidFill>
-                  <a:srgbClr val="181817"/>
-                </a:solidFill>
-                <a:latin typeface="Arial"/>
-              </a:defRPr>
-            </a:pPr>
-          </a:p>
-          <a:p>
-            <a:pPr>
-              <a:lnSpc>
-                <a:spcPts val="1689"/>
-              </a:lnSpc>
-              <a:spcAft>
-                <a:spcPts val="0"/>
-              </a:spcAft>
-              <a:defRPr sz="1420" b="0">
-                <a:solidFill>
-                  <a:srgbClr val="181817"/>
-                </a:solidFill>
-                <a:latin typeface="Arial"/>
-              </a:defRPr>
-            </a:pPr>
-            <a:r>
-              <a:t>Klávesnice a stavové změny.</a:t>
-            </a:r>
-          </a:p>
-        </p:txBody>
-      </p:sp>
-      <p:sp>
-        <p:nvSpPr>
-          <p:cNvPr id="17" name="TextBox 16"/>
-          <p:cNvSpPr txBox="1"/>
-          <p:nvPr/>
-        </p:nvSpPr>
-        <p:spPr>
-          <a:xfrm>
-            <a:off x="533400" y="5676900"/>
-            <a:ext cx="11125200" cy="546100"/>
-          </a:xfrm>
-          <a:prstGeom prst="rect">
-            <a:avLst/>
-          </a:prstGeom>
-          <a:noFill/>
-        </p:spPr>
-        <p:txBody>
-          <a:bodyPr wrap="none" lIns="0" rIns="0" tIns="0" bIns="0">
-            <a:spAutoFit/>
-          </a:bodyPr>
-          <a:lstStyle/>
-          <a:p>
-            <a:pPr>
-              <a:lnSpc>
-                <a:spcPts val="1583"/>
-              </a:lnSpc>
-              <a:spcAft>
-                <a:spcPts val="0"/>
-              </a:spcAft>
-              <a:defRPr sz="1320" b="0">
-                <a:solidFill>
-                  <a:srgbClr val="68635B"/>
-                </a:solidFill>
-                <a:latin typeface="Arial"/>
-              </a:defRPr>
-            </a:pPr>
-            <a:r>
-              <a:t>Automatické testy nenahrazují nezávislé expertní hodnocení použitelnosti.</a:t>
-            </a:r>
-          </a:p>
-        </p:txBody>
-      </p:sp>
-      <p:sp>
-        <p:nvSpPr>
-          <p:cNvPr id="18" name="TextBox 17"/>
-          <p:cNvSpPr txBox="1"/>
-          <p:nvPr/>
-        </p:nvSpPr>
-        <p:spPr>
-          <a:xfrm>
-            <a:off x="533400" y="6413500"/>
-            <a:ext cx="10033000" cy="181610"/>
-          </a:xfrm>
-          <a:prstGeom prst="rect">
-            <a:avLst/>
-          </a:prstGeom>
-          <a:noFill/>
-        </p:spPr>
-        <p:txBody>
-          <a:bodyPr wrap="none" lIns="0" rIns="0" tIns="0" bIns="0">
-            <a:spAutoFit/>
-          </a:bodyPr>
-          <a:lstStyle/>
-          <a:p>
-            <a:pPr>
-              <a:lnSpc>
-                <a:spcPts val="930"/>
-              </a:lnSpc>
-              <a:spcAft>
-                <a:spcPts val="0"/>
-              </a:spcAft>
-              <a:defRPr sz="750" b="0">
-                <a:solidFill>
-                  <a:srgbClr val="68635B"/>
-                </a:solidFill>
-                <a:latin typeface="Arial"/>
-              </a:defRPr>
-            </a:pPr>
-            <a:r>
-              <a:t>DODATEČNĚ PŘIPRAVENÝ PODKLAD K MILNÍKU</a:t>
-            </a:r>
-          </a:p>
-        </p:txBody>
-      </p:sp>
-      <p:sp>
-        <p:nvSpPr>
-          <p:cNvPr id="19" name="TextBox 18"/>
-          <p:cNvSpPr txBox="1"/>
-          <p:nvPr/>
-        </p:nvSpPr>
-        <p:spPr>
-          <a:xfrm>
-            <a:off x="10947400" y="6350000"/>
-            <a:ext cx="825500" cy="220979"/>
-          </a:xfrm>
-          <a:prstGeom prst="rect">
-            <a:avLst/>
-          </a:prstGeom>
-          <a:noFill/>
-        </p:spPr>
-        <p:txBody>
-          <a:bodyPr wrap="none" lIns="0" rIns="0" tIns="0" bIns="0">
-            <a:spAutoFit/>
-          </a:bodyPr>
-          <a:lstStyle/>
-          <a:p>
-            <a:pPr>
-              <a:lnSpc>
-                <a:spcPts val="1240"/>
-              </a:lnSpc>
-              <a:spcAft>
-                <a:spcPts val="0"/>
-              </a:spcAft>
-              <a:defRPr sz="1000" b="1">
-                <a:solidFill>
-                  <a:srgbClr val="68635B"/>
-                </a:solidFill>
-                <a:latin typeface="Arial"/>
-              </a:defRPr>
-            </a:pPr>
-            <a:r>
-              <a:t>05 / 04</a:t>
+              <a:t>4 / 6</a:t>
             </a:r>
           </a:p>
         </p:txBody>
@@ -7548,7 +6715,7 @@
             <a:avLst/>
           </a:prstGeom>
           <a:solidFill>
-            <a:srgbClr val="F4F0E7"/>
+            <a:srgbClr val="FFFFFF"/>
           </a:solidFill>
           <a:ln>
             <a:noFill/>
@@ -7584,8 +6751,8 @@
         </p:nvSpPr>
         <p:spPr>
           <a:xfrm>
-            <a:off x="533400" y="304800"/>
-            <a:ext cx="1905000" cy="283972"/>
+            <a:off x="711200" y="457200"/>
+            <a:ext cx="10769600" cy="228600"/>
           </a:xfrm>
           <a:prstGeom prst="rect">
             <a:avLst/>
@@ -7594,172 +6761,46 @@
         </p:spPr>
         <p:txBody>
           <a:bodyPr wrap="none" lIns="0" rIns="0" tIns="0" bIns="0">
-            <a:spAutoFit/>
+            <a:noAutofit/>
           </a:bodyPr>
           <a:lstStyle/>
           <a:p>
             <a:pPr>
               <a:lnSpc>
-                <a:spcPts val="1736"/>
+                <a:spcPts val="1534"/>
               </a:lnSpc>
               <a:spcAft>
                 <a:spcPts val="0"/>
               </a:spcAft>
-              <a:defRPr sz="1400" b="1">
+              <a:defRPr sz="1300" b="1">
                 <a:solidFill>
-                  <a:srgbClr val="181817"/>
+                  <a:srgbClr val="626773"/>
                 </a:solidFill>
                 <a:latin typeface="Arial"/>
               </a:defRPr>
             </a:pPr>
             <a:r>
-              <a:t>PRAGUE</a:t>
-            </a:r>
-          </a:p>
-        </p:txBody>
-      </p:sp>
-      <p:sp>
-        <p:nvSpPr>
-          <p:cNvPr id="4" name="TextBox 3"/>
-          <p:cNvSpPr txBox="1"/>
-          <p:nvPr/>
-        </p:nvSpPr>
-        <p:spPr>
-          <a:xfrm>
-            <a:off x="533400" y="495300"/>
-            <a:ext cx="1905000" cy="409956"/>
-          </a:xfrm>
-          <a:prstGeom prst="rect">
-            <a:avLst/>
-          </a:prstGeom>
-          <a:noFill/>
-        </p:spPr>
-        <p:txBody>
-          <a:bodyPr wrap="none" lIns="0" rIns="0" tIns="0" bIns="0">
-            <a:spAutoFit/>
-          </a:bodyPr>
-          <a:lstStyle/>
-          <a:p>
-            <a:pPr>
-              <a:lnSpc>
-                <a:spcPts val="2728"/>
-              </a:lnSpc>
-              <a:spcAft>
-                <a:spcPts val="0"/>
-              </a:spcAft>
-              <a:defRPr sz="2200" b="1">
-                <a:solidFill>
-                  <a:srgbClr val="181817"/>
-                </a:solidFill>
-                <a:latin typeface="Arial"/>
-              </a:defRPr>
-            </a:pPr>
-            <a:r>
-              <a:t>PULSE</a:t>
-            </a:r>
-          </a:p>
-        </p:txBody>
-      </p:sp>
-      <p:sp>
-        <p:nvSpPr>
-          <p:cNvPr id="5" name="TextBox 4"/>
-          <p:cNvSpPr txBox="1"/>
-          <p:nvPr/>
-        </p:nvSpPr>
-        <p:spPr>
-          <a:xfrm>
-            <a:off x="533400" y="812800"/>
-            <a:ext cx="2032000" cy="165862"/>
-          </a:xfrm>
-          <a:prstGeom prst="rect">
-            <a:avLst/>
-          </a:prstGeom>
-          <a:noFill/>
-        </p:spPr>
-        <p:txBody>
-          <a:bodyPr wrap="none" lIns="0" rIns="0" tIns="0" bIns="0">
-            <a:spAutoFit/>
-          </a:bodyPr>
-          <a:lstStyle/>
-          <a:p>
-            <a:pPr>
-              <a:lnSpc>
-                <a:spcPts val="806"/>
-              </a:lnSpc>
-              <a:spcAft>
-                <a:spcPts val="0"/>
-              </a:spcAft>
-              <a:defRPr sz="650" b="1">
-                <a:solidFill>
-                  <a:srgbClr val="181817"/>
-                </a:solidFill>
-                <a:latin typeface="Arial"/>
-              </a:defRPr>
-            </a:pPr>
-            <a:r>
-              <a:t>FEST / 2027</a:t>
-            </a:r>
-          </a:p>
-        </p:txBody>
-      </p:sp>
-      <p:sp>
-        <p:nvSpPr>
-          <p:cNvPr id="6" name="TextBox 5"/>
-          <p:cNvSpPr txBox="1"/>
-          <p:nvPr/>
-        </p:nvSpPr>
-        <p:spPr>
-          <a:xfrm>
-            <a:off x="5588000" y="533400"/>
-            <a:ext cx="6070600" cy="220979"/>
-          </a:xfrm>
-          <a:prstGeom prst="rect">
-            <a:avLst/>
-          </a:prstGeom>
-          <a:noFill/>
-        </p:spPr>
-        <p:txBody>
-          <a:bodyPr wrap="none" lIns="0" rIns="0" tIns="0" bIns="0">
-            <a:spAutoFit/>
-          </a:bodyPr>
-          <a:lstStyle/>
-          <a:p>
-            <a:pPr>
-              <a:lnSpc>
-                <a:spcPts val="1240"/>
-              </a:lnSpc>
-              <a:spcAft>
-                <a:spcPts val="0"/>
-              </a:spcAft>
-              <a:defRPr sz="1000" b="1">
-                <a:solidFill>
-                  <a:srgbClr val="68635B"/>
-                </a:solidFill>
-                <a:latin typeface="Arial"/>
-              </a:defRPr>
-            </a:pPr>
-            <a:r>
-              <a:t>CO REVIEWER POTŘEBUJE VĚDĚT</a:t>
-            </a:r>
-          </a:p>
-        </p:txBody>
-      </p:sp>
-      <p:sp>
-        <p:nvSpPr>
-          <p:cNvPr id="7" name="Rectangle 6"/>
+              <a:t>CO JE A NENÍ OVĚŘENÉ</a:t>
+            </a:r>
+          </a:p>
+        </p:txBody>
+      </p:sp>
+      <p:sp>
+        <p:nvSpPr>
+          <p:cNvPr id="4" name="Rectangle 3"/>
           <p:cNvSpPr/>
           <p:nvPr/>
         </p:nvSpPr>
         <p:spPr>
           <a:xfrm>
-            <a:off x="533400" y="1155700"/>
-            <a:ext cx="11125200" cy="25400"/>
+            <a:off x="711200" y="876300"/>
+            <a:ext cx="622300" cy="50800"/>
           </a:xfrm>
           <a:prstGeom prst="rect">
             <a:avLst/>
           </a:prstGeom>
           <a:solidFill>
-            <a:srgbClr val="181817"/>
+            <a:srgbClr val="E55024"/>
           </a:solidFill>
           <a:ln>
             <a:noFill/>
@@ -7789,14 +6830,14 @@
       </p:sp>
       <p:sp>
         <p:nvSpPr>
-          <p:cNvPr id="8" name="TextBox 7"/>
+          <p:cNvPr id="5" name="TextBox 4"/>
           <p:cNvSpPr txBox="1"/>
           <p:nvPr/>
         </p:nvSpPr>
         <p:spPr>
           <a:xfrm>
-            <a:off x="508000" y="1422400"/>
-            <a:ext cx="11176000" cy="1079500"/>
+            <a:off x="685800" y="1257300"/>
+            <a:ext cx="10795000" cy="1168400"/>
           </a:xfrm>
           <a:prstGeom prst="rect">
             <a:avLst/>
@@ -7805,46 +6846,46 @@
         </p:spPr>
         <p:txBody>
           <a:bodyPr wrap="none" lIns="0" rIns="0" tIns="0" bIns="0">
-            <a:spAutoFit/>
+            <a:noAutofit/>
           </a:bodyPr>
           <a:lstStyle/>
           <a:p>
             <a:pPr>
               <a:lnSpc>
-                <a:spcPts val="3740"/>
+                <a:spcPts val="4032"/>
               </a:lnSpc>
               <a:spcAft>
                 <a:spcPts val="0"/>
               </a:spcAft>
-              <a:defRPr sz="3400" b="1">
+              <a:defRPr sz="3600" b="1">
                 <a:solidFill>
-                  <a:srgbClr val="181817"/>
+                  <a:srgbClr val="191B20"/>
                 </a:solidFill>
                 <a:latin typeface="Arial"/>
               </a:defRPr>
             </a:pPr>
             <a:r>
-              <a:t>Známé hranice jsou součást předání.</a:t>
-            </a:r>
-          </a:p>
-        </p:txBody>
-      </p:sp>
-      <p:sp>
-        <p:nvSpPr>
-          <p:cNvPr id="9" name="Rectangle 8"/>
+              <a:t>Testy a známé limity</a:t>
+            </a:r>
+          </a:p>
+        </p:txBody>
+      </p:sp>
+      <p:sp>
+        <p:nvSpPr>
+          <p:cNvPr id="6" name="Rectangle 5"/>
           <p:cNvSpPr/>
           <p:nvPr/>
         </p:nvSpPr>
         <p:spPr>
           <a:xfrm>
-            <a:off x="533400" y="2768600"/>
-            <a:ext cx="5448300" cy="2603500"/>
+            <a:off x="723900" y="2273300"/>
+            <a:ext cx="101600" cy="101600"/>
           </a:xfrm>
           <a:prstGeom prst="rect">
             <a:avLst/>
           </a:prstGeom>
           <a:solidFill>
-            <a:srgbClr val="181817"/>
+            <a:srgbClr val="E55024"/>
           </a:solidFill>
           <a:ln>
             <a:noFill/>
@@ -7874,20 +6915,62 @@
       </p:sp>
       <p:sp>
         <p:nvSpPr>
-          <p:cNvPr id="10" name="Rectangle 9"/>
+          <p:cNvPr id="7" name="TextBox 6"/>
+          <p:cNvSpPr txBox="1"/>
+          <p:nvPr/>
+        </p:nvSpPr>
+        <p:spPr>
+          <a:xfrm>
+            <a:off x="1066800" y="2146300"/>
+            <a:ext cx="10160000" cy="419100"/>
+          </a:xfrm>
+          <a:prstGeom prst="rect">
+            <a:avLst/>
+          </a:prstGeom>
+          <a:noFill/>
+        </p:spPr>
+        <p:txBody>
+          <a:bodyPr wrap="none" lIns="0" rIns="0" tIns="0" bIns="0">
+            <a:noAutofit/>
+          </a:bodyPr>
+          <a:lstStyle/>
+          <a:p>
+            <a:pPr>
+              <a:lnSpc>
+                <a:spcPts val="3360"/>
+              </a:lnSpc>
+              <a:spcAft>
+                <a:spcPts val="0"/>
+              </a:spcAft>
+              <a:defRPr sz="2800" b="0">
+                <a:solidFill>
+                  <a:srgbClr val="191B20"/>
+                </a:solidFill>
+                <a:latin typeface="Arial"/>
+              </a:defRPr>
+            </a:pPr>
+            <a:r>
+              <a:t>Datový validátor, browserové průchody a kontrola PDF.</a:t>
+            </a:r>
+          </a:p>
+        </p:txBody>
+      </p:sp>
+      <p:sp>
+        <p:nvSpPr>
+          <p:cNvPr id="8" name="Rectangle 7"/>
           <p:cNvSpPr/>
           <p:nvPr/>
         </p:nvSpPr>
         <p:spPr>
           <a:xfrm>
-            <a:off x="533400" y="2768600"/>
-            <a:ext cx="5448300" cy="76200"/>
+            <a:off x="723900" y="2971800"/>
+            <a:ext cx="101600" cy="101600"/>
           </a:xfrm>
           <a:prstGeom prst="rect">
             <a:avLst/>
           </a:prstGeom>
           <a:solidFill>
-            <a:srgbClr val="F45E2B"/>
+            <a:srgbClr val="E55024"/>
           </a:solidFill>
           <a:ln>
             <a:noFill/>
@@ -7917,14 +7000,14 @@
       </p:sp>
       <p:sp>
         <p:nvSpPr>
-          <p:cNvPr id="11" name="TextBox 10"/>
+          <p:cNvPr id="9" name="TextBox 8"/>
           <p:cNvSpPr txBox="1"/>
           <p:nvPr/>
         </p:nvSpPr>
         <p:spPr>
           <a:xfrm>
-            <a:off x="749300" y="3035300"/>
-            <a:ext cx="5016500" cy="685800"/>
+            <a:off x="1066800" y="2844800"/>
+            <a:ext cx="10160000" cy="419100"/>
           </a:xfrm>
           <a:prstGeom prst="rect">
             <a:avLst/>
@@ -7933,142 +7016,46 @@
         </p:spPr>
         <p:txBody>
           <a:bodyPr wrap="none" lIns="0" rIns="0" tIns="0" bIns="0">
-            <a:spAutoFit/>
+            <a:noAutofit/>
           </a:bodyPr>
           <a:lstStyle/>
           <a:p>
             <a:pPr>
               <a:lnSpc>
-                <a:spcPts val="2200"/>
+                <a:spcPts val="3360"/>
               </a:lnSpc>
               <a:spcAft>
                 <a:spcPts val="0"/>
               </a:spcAft>
-              <a:defRPr sz="2000" b="1">
+              <a:defRPr sz="2800" b="0">
                 <a:solidFill>
-                  <a:srgbClr val="F4F0E7"/>
+                  <a:srgbClr val="191B20"/>
                 </a:solidFill>
                 <a:latin typeface="Arial"/>
               </a:defRPr>
             </a:pPr>
             <a:r>
-              <a:t>Klientské řešení</a:t>
-            </a:r>
-          </a:p>
-        </p:txBody>
-      </p:sp>
-      <p:sp>
-        <p:nvSpPr>
-          <p:cNvPr id="12" name="TextBox 11"/>
-          <p:cNvSpPr txBox="1"/>
-          <p:nvPr/>
-        </p:nvSpPr>
-        <p:spPr>
-          <a:xfrm>
-            <a:off x="749300" y="3733800"/>
-            <a:ext cx="5016500" cy="1511300"/>
-          </a:xfrm>
-          <a:prstGeom prst="rect">
-            <a:avLst/>
-          </a:prstGeom>
-          <a:noFill/>
-        </p:spPr>
-        <p:txBody>
-          <a:bodyPr wrap="none" lIns="0" rIns="0" tIns="0" bIns="0">
-            <a:spAutoFit/>
-          </a:bodyPr>
-          <a:lstStyle/>
-          <a:p>
-            <a:pPr>
-              <a:lnSpc>
-                <a:spcPts val="1689"/>
-              </a:lnSpc>
-              <a:spcAft>
-                <a:spcPts val="0"/>
-              </a:spcAft>
-              <a:defRPr sz="1420" b="0">
-                <a:solidFill>
-                  <a:srgbClr val="F4F0E7"/>
-                </a:solidFill>
-                <a:latin typeface="Arial"/>
-              </a:defRPr>
-            </a:pPr>
-            <a:r>
-              <a:t>Účty, výběr i obsazenost jsou v jednom prohlížeči.</a:t>
-            </a:r>
-          </a:p>
-          <a:p>
-            <a:pPr>
-              <a:lnSpc>
-                <a:spcPts val="1689"/>
-              </a:lnSpc>
-              <a:spcAft>
-                <a:spcPts val="0"/>
-              </a:spcAft>
-              <a:defRPr sz="1420" b="0">
-                <a:solidFill>
-                  <a:srgbClr val="F4F0E7"/>
-                </a:solidFill>
-                <a:latin typeface="Arial"/>
-              </a:defRPr>
-            </a:pPr>
-          </a:p>
-          <a:p>
-            <a:pPr>
-              <a:lnSpc>
-                <a:spcPts val="1689"/>
-              </a:lnSpc>
-              <a:spcAft>
-                <a:spcPts val="0"/>
-              </a:spcAft>
-              <a:defRPr sz="1420" b="0">
-                <a:solidFill>
-                  <a:srgbClr val="F4F0E7"/>
-                </a:solidFill>
-                <a:latin typeface="Arial"/>
-              </a:defRPr>
-            </a:pPr>
-            <a:r>
-              <a:t>Není sdílený backend, skutečná platba ani automatický</a:t>
-            </a:r>
-          </a:p>
-          <a:p>
-            <a:pPr>
-              <a:lnSpc>
-                <a:spcPts val="1689"/>
-              </a:lnSpc>
-              <a:spcAft>
-                <a:spcPts val="0"/>
-              </a:spcAft>
-              <a:defRPr sz="1420" b="0">
-                <a:solidFill>
-                  <a:srgbClr val="F4F0E7"/>
-                </a:solidFill>
-                <a:latin typeface="Arial"/>
-              </a:defRPr>
-            </a:pPr>
-            <a:r>
-              <a:t>e-mail.</a:t>
-            </a:r>
-          </a:p>
-        </p:txBody>
-      </p:sp>
-      <p:sp>
-        <p:nvSpPr>
-          <p:cNvPr id="13" name="Rectangle 12"/>
+              <a:t>Účty a obsazenost jsou místní; platba ani e-mail nejsou reálné.</a:t>
+            </a:r>
+          </a:p>
+        </p:txBody>
+      </p:sp>
+      <p:sp>
+        <p:nvSpPr>
+          <p:cNvPr id="10" name="Rectangle 9"/>
           <p:cNvSpPr/>
           <p:nvPr/>
         </p:nvSpPr>
         <p:spPr>
           <a:xfrm>
-            <a:off x="6210300" y="2768600"/>
-            <a:ext cx="5448300" cy="2603500"/>
+            <a:off x="723900" y="3670300"/>
+            <a:ext cx="101600" cy="101600"/>
           </a:xfrm>
           <a:prstGeom prst="rect">
             <a:avLst/>
           </a:prstGeom>
           <a:solidFill>
-            <a:srgbClr val="E7E0D5"/>
+            <a:srgbClr val="E55024"/>
           </a:solidFill>
           <a:ln>
             <a:noFill/>
@@ -8098,20 +7085,62 @@
       </p:sp>
       <p:sp>
         <p:nvSpPr>
-          <p:cNvPr id="14" name="Rectangle 13"/>
+          <p:cNvPr id="11" name="TextBox 10"/>
+          <p:cNvSpPr txBox="1"/>
+          <p:nvPr/>
+        </p:nvSpPr>
+        <p:spPr>
+          <a:xfrm>
+            <a:off x="1066800" y="3543300"/>
+            <a:ext cx="10160000" cy="419100"/>
+          </a:xfrm>
+          <a:prstGeom prst="rect">
+            <a:avLst/>
+          </a:prstGeom>
+          <a:noFill/>
+        </p:spPr>
+        <p:txBody>
+          <a:bodyPr wrap="none" lIns="0" rIns="0" tIns="0" bIns="0">
+            <a:noAutofit/>
+          </a:bodyPr>
+          <a:lstStyle/>
+          <a:p>
+            <a:pPr>
+              <a:lnSpc>
+                <a:spcPts val="3360"/>
+              </a:lnSpc>
+              <a:spcAft>
+                <a:spcPts val="0"/>
+              </a:spcAft>
+              <a:defRPr sz="2800" b="0">
+                <a:solidFill>
+                  <a:srgbClr val="191B20"/>
+                </a:solidFill>
+                <a:latin typeface="Arial"/>
+              </a:defRPr>
+            </a:pPr>
+            <a:r>
+              <a:t>Externí mapa potřebuje souhlas a připojení.</a:t>
+            </a:r>
+          </a:p>
+        </p:txBody>
+      </p:sp>
+      <p:sp>
+        <p:nvSpPr>
+          <p:cNvPr id="12" name="Rectangle 11"/>
           <p:cNvSpPr/>
           <p:nvPr/>
         </p:nvSpPr>
         <p:spPr>
           <a:xfrm>
-            <a:off x="6210300" y="2768600"/>
-            <a:ext cx="5448300" cy="76200"/>
+            <a:off x="723900" y="4368800"/>
+            <a:ext cx="101600" cy="101600"/>
           </a:xfrm>
           <a:prstGeom prst="rect">
             <a:avLst/>
           </a:prstGeom>
           <a:solidFill>
-            <a:srgbClr val="F45E2B"/>
+            <a:srgbClr val="E55024"/>
           </a:solidFill>
           <a:ln>
             <a:noFill/>
@@ -8141,14 +7170,14 @@
       </p:sp>
       <p:sp>
         <p:nvSpPr>
-          <p:cNvPr id="15" name="TextBox 14"/>
+          <p:cNvPr id="13" name="TextBox 12"/>
           <p:cNvSpPr txBox="1"/>
           <p:nvPr/>
         </p:nvSpPr>
         <p:spPr>
           <a:xfrm>
-            <a:off x="6426200" y="3035300"/>
-            <a:ext cx="5016500" cy="685800"/>
+            <a:off x="1066800" y="4241800"/>
+            <a:ext cx="10160000" cy="419100"/>
           </a:xfrm>
           <a:prstGeom prst="rect">
             <a:avLst/>
@@ -8157,40 +7186,83 @@
         </p:spPr>
         <p:txBody>
           <a:bodyPr wrap="none" lIns="0" rIns="0" tIns="0" bIns="0">
-            <a:spAutoFit/>
+            <a:noAutofit/>
           </a:bodyPr>
           <a:lstStyle/>
           <a:p>
             <a:pPr>
               <a:lnSpc>
-                <a:spcPts val="2200"/>
+                <a:spcPts val="3360"/>
               </a:lnSpc>
               <a:spcAft>
                 <a:spcPts val="0"/>
               </a:spcAft>
-              <a:defRPr sz="2000" b="1">
+              <a:defRPr sz="2800" b="0">
                 <a:solidFill>
-                  <a:srgbClr val="181817"/>
+                  <a:srgbClr val="191B20"/>
                 </a:solidFill>
                 <a:latin typeface="Arial"/>
               </a:defRPr>
             </a:pPr>
             <a:r>
-              <a:t>Fotografie a ověření</a:t>
-            </a:r>
-          </a:p>
-        </p:txBody>
-      </p:sp>
-      <p:sp>
-        <p:nvSpPr>
-          <p:cNvPr id="16" name="TextBox 15"/>
+              <a:t>Bez úplného auditu WCAG a testu všech zařízení.</a:t>
+            </a:r>
+          </a:p>
+        </p:txBody>
+      </p:sp>
+      <p:sp>
+        <p:nvSpPr>
+          <p:cNvPr id="14" name="Rectangle 13"/>
+          <p:cNvSpPr/>
+          <p:nvPr/>
+        </p:nvSpPr>
+        <p:spPr>
+          <a:xfrm>
+            <a:off x="711200" y="6248400"/>
+            <a:ext cx="10769600" cy="12700"/>
+          </a:xfrm>
+          <a:prstGeom prst="rect">
+            <a:avLst/>
+          </a:prstGeom>
+          <a:solidFill>
+            <a:srgbClr val="DFE2E7"/>
+          </a:solidFill>
+          <a:ln>
+            <a:noFill/>
+          </a:ln>
+        </p:spPr>
+        <p:style>
+          <a:lnRef idx="1">
+            <a:schemeClr val="accent1"/>
+          </a:lnRef>
+          <a:fillRef idx="3">
+            <a:schemeClr val="accent1"/>
+          </a:fillRef>
+          <a:effectRef idx="2">
+            <a:schemeClr val="accent1"/>
+          </a:effectRef>
+          <a:fontRef idx="minor">
+            <a:schemeClr val="lt1"/>
+          </a:fontRef>
+        </p:style>
+        <p:txBody>
+          <a:bodyPr rtlCol="0" anchor="ctr"/>
+          <a:lstStyle/>
+          <a:p>
+            <a:pPr algn="ctr"/>
+          </a:p>
+        </p:txBody>
+      </p:sp>
+      <p:sp>
+        <p:nvSpPr>
+          <p:cNvPr id="15" name="TextBox 14"/>
           <p:cNvSpPr txBox="1"/>
           <p:nvPr/>
         </p:nvSpPr>
         <p:spPr>
           <a:xfrm>
-            <a:off x="6426200" y="3733800"/>
-            <a:ext cx="5016500" cy="1511300"/>
+            <a:off x="711200" y="6438900"/>
+            <a:ext cx="9652000" cy="203200"/>
           </a:xfrm>
           <a:prstGeom prst="rect">
             <a:avLst/>
@@ -8199,225 +7271,68 @@
         </p:spPr>
         <p:txBody>
           <a:bodyPr wrap="none" lIns="0" rIns="0" tIns="0" bIns="0">
-            <a:spAutoFit/>
+            <a:noAutofit/>
           </a:bodyPr>
           <a:lstStyle/>
           <a:p>
             <a:pPr>
               <a:lnSpc>
-                <a:spcPts val="1689"/>
+                <a:spcPts val="1297"/>
               </a:lnSpc>
               <a:spcAft>
                 <a:spcPts val="0"/>
               </a:spcAft>
-              <a:defRPr sz="1420" b="0">
+              <a:defRPr sz="1100" b="0">
                 <a:solidFill>
-                  <a:srgbClr val="181817"/>
+                  <a:srgbClr val="626773"/>
                 </a:solidFill>
                 <a:latin typeface="Arial"/>
               </a:defRPr>
             </a:pPr>
             <a:r>
-              <a:t>42 fotografií + 18 vlastních plakátů; kredity na vlastní</a:t>
-            </a:r>
-          </a:p>
+              <a:t>Prague Pulse Fest · Výstaviště Praha · 2027</a:t>
+            </a:r>
+          </a:p>
+        </p:txBody>
+      </p:sp>
+      <p:sp>
+        <p:nvSpPr>
+          <p:cNvPr id="16" name="TextBox 15"/>
+          <p:cNvSpPr txBox="1"/>
+          <p:nvPr/>
+        </p:nvSpPr>
+        <p:spPr>
+          <a:xfrm>
+            <a:off x="10807700" y="6413500"/>
+            <a:ext cx="673100" cy="215900"/>
+          </a:xfrm>
+          <a:prstGeom prst="rect">
+            <a:avLst/>
+          </a:prstGeom>
+          <a:noFill/>
+        </p:spPr>
+        <p:txBody>
+          <a:bodyPr wrap="none" lIns="0" rIns="0" tIns="0" bIns="0">
+            <a:noAutofit/>
+          </a:bodyPr>
+          <a:lstStyle/>
           <a:p>
             <a:pPr>
               <a:lnSpc>
-                <a:spcPts val="1689"/>
+                <a:spcPts val="1416"/>
               </a:lnSpc>
               <a:spcAft>
                 <a:spcPts val="0"/>
               </a:spcAft>
-              <a:defRPr sz="1420" b="0">
+              <a:defRPr sz="1200" b="0">
                 <a:solidFill>
-                  <a:srgbClr val="181817"/>
+                  <a:srgbClr val="626773"/>
                 </a:solidFill>
                 <a:latin typeface="Arial"/>
               </a:defRPr>
             </a:pPr>
             <a:r>
-              <a:t>stránce.</a:t>
-            </a:r>
-          </a:p>
-          <a:p>
-            <a:pPr>
-              <a:lnSpc>
-                <a:spcPts val="1689"/>
-              </a:lnSpc>
-              <a:spcAft>
-                <a:spcPts val="0"/>
-              </a:spcAft>
-              <a:defRPr sz="1420" b="0">
-                <a:solidFill>
-                  <a:srgbClr val="181817"/>
-                </a:solidFill>
-                <a:latin typeface="Arial"/>
-              </a:defRPr>
-            </a:pPr>
-          </a:p>
-          <a:p>
-            <a:pPr>
-              <a:lnSpc>
-                <a:spcPts val="1689"/>
-              </a:lnSpc>
-              <a:spcAft>
-                <a:spcPts val="0"/>
-              </a:spcAft>
-              <a:defRPr sz="1420" b="0">
-                <a:solidFill>
-                  <a:srgbClr val="181817"/>
-                </a:solidFill>
-                <a:latin typeface="Arial"/>
-              </a:defRPr>
-            </a:pPr>
-            <a:r>
-              <a:t>Dvě NC-SA fotografie jen pro nekomerční školní</a:t>
-            </a:r>
-          </a:p>
-          <a:p>
-            <a:pPr>
-              <a:lnSpc>
-                <a:spcPts val="1689"/>
-              </a:lnSpc>
-              <a:spcAft>
-                <a:spcPts val="0"/>
-              </a:spcAft>
-              <a:defRPr sz="1420" b="0">
-                <a:solidFill>
-                  <a:srgbClr val="181817"/>
-                </a:solidFill>
-                <a:latin typeface="Arial"/>
-              </a:defRPr>
-            </a:pPr>
-            <a:r>
-              <a:t>použití.</a:t>
-            </a:r>
-          </a:p>
-        </p:txBody>
-      </p:sp>
-      <p:sp>
-        <p:nvSpPr>
-          <p:cNvPr id="17" name="TextBox 16"/>
-          <p:cNvSpPr txBox="1"/>
-          <p:nvPr/>
-        </p:nvSpPr>
-        <p:spPr>
-          <a:xfrm>
-            <a:off x="533400" y="5676900"/>
-            <a:ext cx="11125200" cy="546100"/>
-          </a:xfrm>
-          <a:prstGeom prst="rect">
-            <a:avLst/>
-          </a:prstGeom>
-          <a:noFill/>
-        </p:spPr>
-        <p:txBody>
-          <a:bodyPr wrap="none" lIns="0" rIns="0" tIns="0" bIns="0">
-            <a:spAutoFit/>
-          </a:bodyPr>
-          <a:lstStyle/>
-          <a:p>
-            <a:pPr>
-              <a:lnSpc>
-                <a:spcPts val="1583"/>
-              </a:lnSpc>
-              <a:spcAft>
-                <a:spcPts val="0"/>
-              </a:spcAft>
-              <a:defRPr sz="1320" b="0">
-                <a:solidFill>
-                  <a:srgbClr val="68635B"/>
-                </a:solidFill>
-                <a:latin typeface="Arial"/>
-              </a:defRPr>
-            </a:pPr>
-            <a:r>
-              <a:t>Fiktivní festival není ověřený skutečný pořadatel nebo reálný prodej.</a:t>
-            </a:r>
-          </a:p>
-        </p:txBody>
-      </p:sp>
-      <p:sp>
-        <p:nvSpPr>
-          <p:cNvPr id="18" name="TextBox 17"/>
-          <p:cNvSpPr txBox="1"/>
-          <p:nvPr/>
-        </p:nvSpPr>
-        <p:spPr>
-          <a:xfrm>
-            <a:off x="533400" y="6413500"/>
-            <a:ext cx="10033000" cy="181610"/>
-          </a:xfrm>
-          <a:prstGeom prst="rect">
-            <a:avLst/>
-          </a:prstGeom>
-          <a:noFill/>
-        </p:spPr>
-        <p:txBody>
-          <a:bodyPr wrap="none" lIns="0" rIns="0" tIns="0" bIns="0">
-            <a:spAutoFit/>
-          </a:bodyPr>
-          <a:lstStyle/>
-          <a:p>
-            <a:pPr>
-              <a:lnSpc>
-                <a:spcPts val="930"/>
-              </a:lnSpc>
-              <a:spcAft>
-                <a:spcPts val="0"/>
-              </a:spcAft>
-              <a:defRPr sz="750" b="0">
-                <a:solidFill>
-                  <a:srgbClr val="68635B"/>
-                </a:solidFill>
-                <a:latin typeface="Arial"/>
-              </a:defRPr>
-            </a:pPr>
-            <a:r>
-              <a:t>DODATEČNĚ PŘIPRAVENÝ PODKLAD K MILNÍKU</a:t>
-            </a:r>
-          </a:p>
-        </p:txBody>
-      </p:sp>
-      <p:sp>
-        <p:nvSpPr>
-          <p:cNvPr id="19" name="TextBox 18"/>
-          <p:cNvSpPr txBox="1"/>
-          <p:nvPr/>
-        </p:nvSpPr>
-        <p:spPr>
-          <a:xfrm>
-            <a:off x="10947400" y="6350000"/>
-            <a:ext cx="825500" cy="220979"/>
-          </a:xfrm>
-          <a:prstGeom prst="rect">
-            <a:avLst/>
-          </a:prstGeom>
-          <a:noFill/>
-        </p:spPr>
-        <p:txBody>
-          <a:bodyPr wrap="none" lIns="0" rIns="0" tIns="0" bIns="0">
-            <a:spAutoFit/>
-          </a:bodyPr>
-          <a:lstStyle/>
-          <a:p>
-            <a:pPr>
-              <a:lnSpc>
-                <a:spcPts val="1240"/>
-              </a:lnSpc>
-              <a:spcAft>
-                <a:spcPts val="0"/>
-              </a:spcAft>
-              <a:defRPr sz="1000" b="1">
-                <a:solidFill>
-                  <a:srgbClr val="68635B"/>
-                </a:solidFill>
-                <a:latin typeface="Arial"/>
-              </a:defRPr>
-            </a:pPr>
-            <a:r>
-              <a:t>05 / 05</a:t>
+              <a:t>5 / 6</a:t>
             </a:r>
           </a:p>
         </p:txBody>
@@ -8455,7 +7370,7 @@
             <a:avLst/>
           </a:prstGeom>
           <a:solidFill>
-            <a:srgbClr val="F4F0E7"/>
+            <a:srgbClr val="FFFFFF"/>
           </a:solidFill>
           <a:ln>
             <a:noFill/>
@@ -8491,8 +7406,8 @@
         </p:nvSpPr>
         <p:spPr>
           <a:xfrm>
-            <a:off x="533400" y="304800"/>
-            <a:ext cx="1905000" cy="283972"/>
+            <a:off x="711200" y="457200"/>
+            <a:ext cx="10769600" cy="228600"/>
           </a:xfrm>
           <a:prstGeom prst="rect">
             <a:avLst/>
@@ -8501,172 +7416,46 @@
         </p:spPr>
         <p:txBody>
           <a:bodyPr wrap="none" lIns="0" rIns="0" tIns="0" bIns="0">
-            <a:spAutoFit/>
+            <a:noAutofit/>
           </a:bodyPr>
           <a:lstStyle/>
           <a:p>
             <a:pPr>
               <a:lnSpc>
-                <a:spcPts val="1736"/>
+                <a:spcPts val="1534"/>
               </a:lnSpc>
               <a:spcAft>
                 <a:spcPts val="0"/>
               </a:spcAft>
-              <a:defRPr sz="1400" b="1">
+              <a:defRPr sz="1300" b="1">
                 <a:solidFill>
-                  <a:srgbClr val="181817"/>
+                  <a:srgbClr val="626773"/>
                 </a:solidFill>
                 <a:latin typeface="Arial"/>
               </a:defRPr>
             </a:pPr>
             <a:r>
-              <a:t>PRAGUE</a:t>
-            </a:r>
-          </a:p>
-        </p:txBody>
-      </p:sp>
-      <p:sp>
-        <p:nvSpPr>
-          <p:cNvPr id="4" name="TextBox 3"/>
-          <p:cNvSpPr txBox="1"/>
-          <p:nvPr/>
-        </p:nvSpPr>
-        <p:spPr>
-          <a:xfrm>
-            <a:off x="533400" y="495300"/>
-            <a:ext cx="1905000" cy="409956"/>
-          </a:xfrm>
-          <a:prstGeom prst="rect">
-            <a:avLst/>
-          </a:prstGeom>
-          <a:noFill/>
-        </p:spPr>
-        <p:txBody>
-          <a:bodyPr wrap="none" lIns="0" rIns="0" tIns="0" bIns="0">
-            <a:spAutoFit/>
-          </a:bodyPr>
-          <a:lstStyle/>
-          <a:p>
-            <a:pPr>
-              <a:lnSpc>
-                <a:spcPts val="2728"/>
-              </a:lnSpc>
-              <a:spcAft>
-                <a:spcPts val="0"/>
-              </a:spcAft>
-              <a:defRPr sz="2200" b="1">
-                <a:solidFill>
-                  <a:srgbClr val="181817"/>
-                </a:solidFill>
-                <a:latin typeface="Arial"/>
-              </a:defRPr>
-            </a:pPr>
-            <a:r>
-              <a:t>PULSE</a:t>
-            </a:r>
-          </a:p>
-        </p:txBody>
-      </p:sp>
-      <p:sp>
-        <p:nvSpPr>
-          <p:cNvPr id="5" name="TextBox 4"/>
-          <p:cNvSpPr txBox="1"/>
-          <p:nvPr/>
-        </p:nvSpPr>
-        <p:spPr>
-          <a:xfrm>
-            <a:off x="533400" y="812800"/>
-            <a:ext cx="2032000" cy="165862"/>
-          </a:xfrm>
-          <a:prstGeom prst="rect">
-            <a:avLst/>
-          </a:prstGeom>
-          <a:noFill/>
-        </p:spPr>
-        <p:txBody>
-          <a:bodyPr wrap="none" lIns="0" rIns="0" tIns="0" bIns="0">
-            <a:spAutoFit/>
-          </a:bodyPr>
-          <a:lstStyle/>
-          <a:p>
-            <a:pPr>
-              <a:lnSpc>
-                <a:spcPts val="806"/>
-              </a:lnSpc>
-              <a:spcAft>
-                <a:spcPts val="0"/>
-              </a:spcAft>
-              <a:defRPr sz="650" b="1">
-                <a:solidFill>
-                  <a:srgbClr val="181817"/>
-                </a:solidFill>
-                <a:latin typeface="Arial"/>
-              </a:defRPr>
-            </a:pPr>
-            <a:r>
-              <a:t>FEST / 2027</a:t>
-            </a:r>
-          </a:p>
-        </p:txBody>
-      </p:sp>
-      <p:sp>
-        <p:nvSpPr>
-          <p:cNvPr id="6" name="TextBox 5"/>
-          <p:cNvSpPr txBox="1"/>
-          <p:nvPr/>
-        </p:nvSpPr>
-        <p:spPr>
-          <a:xfrm>
-            <a:off x="5588000" y="533400"/>
-            <a:ext cx="6070600" cy="220979"/>
-          </a:xfrm>
-          <a:prstGeom prst="rect">
-            <a:avLst/>
-          </a:prstGeom>
-          <a:noFill/>
-        </p:spPr>
-        <p:txBody>
-          <a:bodyPr wrap="none" lIns="0" rIns="0" tIns="0" bIns="0">
-            <a:spAutoFit/>
-          </a:bodyPr>
-          <a:lstStyle/>
-          <a:p>
-            <a:pPr>
-              <a:lnSpc>
-                <a:spcPts val="1240"/>
-              </a:lnSpc>
-              <a:spcAft>
-                <a:spcPts val="0"/>
-              </a:spcAft>
-              <a:defRPr sz="1000" b="1">
-                <a:solidFill>
-                  <a:srgbClr val="68635B"/>
-                </a:solidFill>
-                <a:latin typeface="Arial"/>
-              </a:defRPr>
-            </a:pPr>
-            <a:r>
-              <a:t>CROSS-REVIEW A POUŽITÍ AI</a:t>
-            </a:r>
-          </a:p>
-        </p:txBody>
-      </p:sp>
-      <p:sp>
-        <p:nvSpPr>
-          <p:cNvPr id="7" name="Rectangle 6"/>
+              <a:t>CO MAJÍ HODNOTITELÉ ZOPAKOVAT</a:t>
+            </a:r>
+          </a:p>
+        </p:txBody>
+      </p:sp>
+      <p:sp>
+        <p:nvSpPr>
+          <p:cNvPr id="4" name="Rectangle 3"/>
           <p:cNvSpPr/>
           <p:nvPr/>
         </p:nvSpPr>
         <p:spPr>
           <a:xfrm>
-            <a:off x="533400" y="1155700"/>
-            <a:ext cx="11125200" cy="25400"/>
+            <a:off x="711200" y="876300"/>
+            <a:ext cx="622300" cy="50800"/>
           </a:xfrm>
           <a:prstGeom prst="rect">
             <a:avLst/>
           </a:prstGeom>
           <a:solidFill>
-            <a:srgbClr val="181817"/>
+            <a:srgbClr val="E55024"/>
           </a:solidFill>
           <a:ln>
             <a:noFill/>
@@ -8696,14 +7485,14 @@
       </p:sp>
       <p:sp>
         <p:nvSpPr>
-          <p:cNvPr id="8" name="TextBox 7"/>
+          <p:cNvPr id="5" name="TextBox 4"/>
           <p:cNvSpPr txBox="1"/>
           <p:nvPr/>
         </p:nvSpPr>
         <p:spPr>
           <a:xfrm>
-            <a:off x="508000" y="1422400"/>
-            <a:ext cx="11176000" cy="1079500"/>
+            <a:off x="685800" y="1257300"/>
+            <a:ext cx="10795000" cy="1168400"/>
           </a:xfrm>
           <a:prstGeom prst="rect">
             <a:avLst/>
@@ -8712,46 +7501,46 @@
         </p:spPr>
         <p:txBody>
           <a:bodyPr wrap="none" lIns="0" rIns="0" tIns="0" bIns="0">
-            <a:spAutoFit/>
+            <a:noAutofit/>
           </a:bodyPr>
           <a:lstStyle/>
           <a:p>
             <a:pPr>
               <a:lnSpc>
-                <a:spcPts val="3740"/>
+                <a:spcPts val="4032"/>
               </a:lnSpc>
               <a:spcAft>
                 <a:spcPts val="0"/>
               </a:spcAft>
-              <a:defRPr sz="3400" b="1">
+              <a:defRPr sz="3600" b="1">
                 <a:solidFill>
-                  <a:srgbClr val="181817"/>
+                  <a:srgbClr val="191B20"/>
                 </a:solidFill>
                 <a:latin typeface="Arial"/>
               </a:defRPr>
             </a:pPr>
             <a:r>
-              <a:t>Nález musí jít zopakovat.</a:t>
-            </a:r>
-          </a:p>
-        </p:txBody>
-      </p:sp>
-      <p:sp>
-        <p:nvSpPr>
-          <p:cNvPr id="9" name="Rectangle 8"/>
+              <a:t>AI, odpovědnost a zadání review</a:t>
+            </a:r>
+          </a:p>
+        </p:txBody>
+      </p:sp>
+      <p:sp>
+        <p:nvSpPr>
+          <p:cNvPr id="6" name="Rectangle 5"/>
           <p:cNvSpPr/>
           <p:nvPr/>
         </p:nvSpPr>
         <p:spPr>
           <a:xfrm>
-            <a:off x="533400" y="2768600"/>
-            <a:ext cx="5448300" cy="2603500"/>
+            <a:off x="723900" y="2273300"/>
+            <a:ext cx="101600" cy="101600"/>
           </a:xfrm>
           <a:prstGeom prst="rect">
             <a:avLst/>
           </a:prstGeom>
           <a:solidFill>
-            <a:srgbClr val="181817"/>
+            <a:srgbClr val="E55024"/>
           </a:solidFill>
           <a:ln>
             <a:noFill/>
@@ -8781,20 +7570,62 @@
       </p:sp>
       <p:sp>
         <p:nvSpPr>
-          <p:cNvPr id="10" name="Rectangle 9"/>
+          <p:cNvPr id="7" name="TextBox 6"/>
+          <p:cNvSpPr txBox="1"/>
+          <p:nvPr/>
+        </p:nvSpPr>
+        <p:spPr>
+          <a:xfrm>
+            <a:off x="1066800" y="2146300"/>
+            <a:ext cx="10160000" cy="419100"/>
+          </a:xfrm>
+          <a:prstGeom prst="rect">
+            <a:avLst/>
+          </a:prstGeom>
+          <a:noFill/>
+        </p:spPr>
+        <p:txBody>
+          <a:bodyPr wrap="none" lIns="0" rIns="0" tIns="0" bIns="0">
+            <a:noAutofit/>
+          </a:bodyPr>
+          <a:lstStyle/>
+          <a:p>
+            <a:pPr>
+              <a:lnSpc>
+                <a:spcPts val="3360"/>
+              </a:lnSpc>
+              <a:spcAft>
+                <a:spcPts val="0"/>
+              </a:spcAft>
+              <a:defRPr sz="2800" b="0">
+                <a:solidFill>
+                  <a:srgbClr val="191B20"/>
+                </a:solidFill>
+                <a:latin typeface="Arial"/>
+              </a:defRPr>
+            </a:pPr>
+            <a:r>
+              <a:t>AI pomohla s obsahem, rozhraním, kódem a testy.</a:t>
+            </a:r>
+          </a:p>
+        </p:txBody>
+      </p:sp>
+      <p:sp>
+        <p:nvSpPr>
+          <p:cNvPr id="8" name="Rectangle 7"/>
           <p:cNvSpPr/>
           <p:nvPr/>
         </p:nvSpPr>
         <p:spPr>
           <a:xfrm>
-            <a:off x="533400" y="2768600"/>
-            <a:ext cx="5448300" cy="76200"/>
+            <a:off x="723900" y="2971800"/>
+            <a:ext cx="101600" cy="101600"/>
           </a:xfrm>
           <a:prstGeom prst="rect">
             <a:avLst/>
           </a:prstGeom>
           <a:solidFill>
-            <a:srgbClr val="F45E2B"/>
+            <a:srgbClr val="E55024"/>
           </a:solidFill>
           <a:ln>
             <a:noFill/>
@@ -8824,14 +7655,14 @@
       </p:sp>
       <p:sp>
         <p:nvSpPr>
-          <p:cNvPr id="11" name="TextBox 10"/>
+          <p:cNvPr id="9" name="TextBox 8"/>
           <p:cNvSpPr txBox="1"/>
           <p:nvPr/>
         </p:nvSpPr>
         <p:spPr>
           <a:xfrm>
-            <a:off x="749300" y="3035300"/>
-            <a:ext cx="5016500" cy="685800"/>
+            <a:off x="1066800" y="2844800"/>
+            <a:ext cx="10160000" cy="419100"/>
           </a:xfrm>
           <a:prstGeom prst="rect">
             <a:avLst/>
@@ -8840,123 +7671,46 @@
         </p:spPr>
         <p:txBody>
           <a:bodyPr wrap="none" lIns="0" rIns="0" tIns="0" bIns="0">
-            <a:spAutoFit/>
+            <a:noAutofit/>
           </a:bodyPr>
           <a:lstStyle/>
           <a:p>
             <a:pPr>
               <a:lnSpc>
-                <a:spcPts val="2200"/>
+                <a:spcPts val="3360"/>
               </a:lnSpc>
               <a:spcAft>
                 <a:spcPts val="0"/>
               </a:spcAft>
-              <a:defRPr sz="2000" b="1">
+              <a:defRPr sz="2800" b="0">
                 <a:solidFill>
-                  <a:srgbClr val="F4F0E7"/>
+                  <a:srgbClr val="191B20"/>
                 </a:solidFill>
                 <a:latin typeface="Arial"/>
               </a:defRPr>
             </a:pPr>
             <a:r>
-              <a:t>Od reviewerů</a:t>
-            </a:r>
-          </a:p>
-        </p:txBody>
-      </p:sp>
-      <p:sp>
-        <p:nvSpPr>
-          <p:cNvPr id="12" name="TextBox 11"/>
-          <p:cNvSpPr txBox="1"/>
-          <p:nvPr/>
-        </p:nvSpPr>
-        <p:spPr>
-          <a:xfrm>
-            <a:off x="749300" y="3733800"/>
-            <a:ext cx="5016500" cy="1511300"/>
-          </a:xfrm>
-          <a:prstGeom prst="rect">
-            <a:avLst/>
-          </a:prstGeom>
-          <a:noFill/>
-        </p:spPr>
-        <p:txBody>
-          <a:bodyPr wrap="none" lIns="0" rIns="0" tIns="0" bIns="0">
-            <a:spAutoFit/>
-          </a:bodyPr>
-          <a:lstStyle/>
-          <a:p>
-            <a:pPr>
-              <a:lnSpc>
-                <a:spcPts val="1689"/>
-              </a:lnSpc>
-              <a:spcAft>
-                <a:spcPts val="0"/>
-              </a:spcAft>
-              <a:defRPr sz="1420" b="0">
-                <a:solidFill>
-                  <a:srgbClr val="F4F0E7"/>
-                </a:solidFill>
-                <a:latin typeface="Arial"/>
-              </a:defRPr>
-            </a:pPr>
-            <a:r>
-              <a:t>Stránka + kroky + očekávání + skutečnost + důkaz.</a:t>
-            </a:r>
-          </a:p>
-          <a:p>
-            <a:pPr>
-              <a:lnSpc>
-                <a:spcPts val="1689"/>
-              </a:lnSpc>
-              <a:spcAft>
-                <a:spcPts val="0"/>
-              </a:spcAft>
-              <a:defRPr sz="1420" b="0">
-                <a:solidFill>
-                  <a:srgbClr val="F4F0E7"/>
-                </a:solidFill>
-                <a:latin typeface="Arial"/>
-              </a:defRPr>
-            </a:pPr>
-          </a:p>
-          <a:p>
-            <a:pPr>
-              <a:lnSpc>
-                <a:spcPts val="1689"/>
-              </a:lnSpc>
-              <a:spcAft>
-                <a:spcPts val="0"/>
-              </a:spcAft>
-              <a:defRPr sz="1420" b="0">
-                <a:solidFill>
-                  <a:srgbClr val="F4F0E7"/>
-                </a:solidFill>
-                <a:latin typeface="Arial"/>
-              </a:defRPr>
-            </a:pPr>
-            <a:r>
-              <a:t>Metoda, závažnost, dopad a konkrétní doporučení.</a:t>
-            </a:r>
-          </a:p>
-        </p:txBody>
-      </p:sp>
-      <p:sp>
-        <p:nvSpPr>
-          <p:cNvPr id="13" name="Rectangle 12"/>
+              <a:t>Přijato: datové vazby; opraveno: součty a mobilní stavy.</a:t>
+            </a:r>
+          </a:p>
+        </p:txBody>
+      </p:sp>
+      <p:sp>
+        <p:nvSpPr>
+          <p:cNvPr id="10" name="Rectangle 9"/>
           <p:cNvSpPr/>
           <p:nvPr/>
         </p:nvSpPr>
         <p:spPr>
           <a:xfrm>
-            <a:off x="6210300" y="2768600"/>
-            <a:ext cx="5448300" cy="2603500"/>
+            <a:off x="723900" y="3670300"/>
+            <a:ext cx="101600" cy="101600"/>
           </a:xfrm>
           <a:prstGeom prst="rect">
             <a:avLst/>
           </a:prstGeom>
           <a:solidFill>
-            <a:srgbClr val="E7E0D5"/>
+            <a:srgbClr val="E55024"/>
           </a:solidFill>
           <a:ln>
             <a:noFill/>
@@ -8986,20 +7740,62 @@
       </p:sp>
       <p:sp>
         <p:nvSpPr>
-          <p:cNvPr id="14" name="Rectangle 13"/>
+          <p:cNvPr id="11" name="TextBox 10"/>
+          <p:cNvSpPr txBox="1"/>
+          <p:nvPr/>
+        </p:nvSpPr>
+        <p:spPr>
+          <a:xfrm>
+            <a:off x="1066800" y="3543300"/>
+            <a:ext cx="10160000" cy="419100"/>
+          </a:xfrm>
+          <a:prstGeom prst="rect">
+            <a:avLst/>
+          </a:prstGeom>
+          <a:noFill/>
+        </p:spPr>
+        <p:txBody>
+          <a:bodyPr wrap="none" lIns="0" rIns="0" tIns="0" bIns="0">
+            <a:noAutofit/>
+          </a:bodyPr>
+          <a:lstStyle/>
+          <a:p>
+            <a:pPr>
+              <a:lnSpc>
+                <a:spcPts val="3360"/>
+              </a:lnSpc>
+              <a:spcAft>
+                <a:spcPts val="0"/>
+              </a:spcAft>
+              <a:defRPr sz="2800" b="0">
+                <a:solidFill>
+                  <a:srgbClr val="191B20"/>
+                </a:solidFill>
+                <a:latin typeface="Arial"/>
+              </a:defRPr>
+            </a:pPr>
+            <a:r>
+              <a:t>Žádáme dvě metody, přesné kroky, důvod a návrh opravy.</a:t>
+            </a:r>
+          </a:p>
+        </p:txBody>
+      </p:sp>
+      <p:sp>
+        <p:nvSpPr>
+          <p:cNvPr id="12" name="Rectangle 11"/>
           <p:cNvSpPr/>
           <p:nvPr/>
         </p:nvSpPr>
         <p:spPr>
           <a:xfrm>
-            <a:off x="6210300" y="2768600"/>
-            <a:ext cx="5448300" cy="76200"/>
+            <a:off x="723900" y="4368800"/>
+            <a:ext cx="101600" cy="101600"/>
           </a:xfrm>
           <a:prstGeom prst="rect">
             <a:avLst/>
           </a:prstGeom>
           <a:solidFill>
-            <a:srgbClr val="F45E2B"/>
+            <a:srgbClr val="E55024"/>
           </a:solidFill>
           <a:ln>
             <a:noFill/>
@@ -9029,14 +7825,14 @@
       </p:sp>
       <p:sp>
         <p:nvSpPr>
-          <p:cNvPr id="15" name="TextBox 14"/>
+          <p:cNvPr id="13" name="TextBox 12"/>
           <p:cNvSpPr txBox="1"/>
           <p:nvPr/>
         </p:nvSpPr>
         <p:spPr>
           <a:xfrm>
-            <a:off x="6426200" y="3035300"/>
-            <a:ext cx="5016500" cy="685800"/>
+            <a:off x="1066800" y="4241800"/>
+            <a:ext cx="10160000" cy="419100"/>
           </a:xfrm>
           <a:prstGeom prst="rect">
             <a:avLst/>
@@ -9045,40 +7841,83 @@
         </p:spPr>
         <p:txBody>
           <a:bodyPr wrap="none" lIns="0" rIns="0" tIns="0" bIns="0">
-            <a:spAutoFit/>
+            <a:noAutofit/>
           </a:bodyPr>
           <a:lstStyle/>
           <a:p>
             <a:pPr>
               <a:lnSpc>
-                <a:spcPts val="2200"/>
+                <a:spcPts val="3360"/>
               </a:lnSpc>
               <a:spcAft>
                 <a:spcPts val="0"/>
               </a:spcAft>
-              <a:defRPr sz="2000" b="1">
+              <a:defRPr sz="2800" b="0">
                 <a:solidFill>
-                  <a:srgbClr val="181817"/>
+                  <a:srgbClr val="191B20"/>
                 </a:solidFill>
                 <a:latin typeface="Arial"/>
               </a:defRPr>
             </a:pPr>
             <a:r>
-              <a:t>Naše odpovědnost</a:t>
-            </a:r>
-          </a:p>
-        </p:txBody>
-      </p:sp>
-      <p:sp>
-        <p:nvSpPr>
-          <p:cNvPr id="16" name="TextBox 15"/>
+              <a:t>Přijaté externí review zatím není doložené.</a:t>
+            </a:r>
+          </a:p>
+        </p:txBody>
+      </p:sp>
+      <p:sp>
+        <p:nvSpPr>
+          <p:cNvPr id="14" name="Rectangle 13"/>
+          <p:cNvSpPr/>
+          <p:nvPr/>
+        </p:nvSpPr>
+        <p:spPr>
+          <a:xfrm>
+            <a:off x="711200" y="6248400"/>
+            <a:ext cx="10769600" cy="12700"/>
+          </a:xfrm>
+          <a:prstGeom prst="rect">
+            <a:avLst/>
+          </a:prstGeom>
+          <a:solidFill>
+            <a:srgbClr val="DFE2E7"/>
+          </a:solidFill>
+          <a:ln>
+            <a:noFill/>
+          </a:ln>
+        </p:spPr>
+        <p:style>
+          <a:lnRef idx="1">
+            <a:schemeClr val="accent1"/>
+          </a:lnRef>
+          <a:fillRef idx="3">
+            <a:schemeClr val="accent1"/>
+          </a:fillRef>
+          <a:effectRef idx="2">
+            <a:schemeClr val="accent1"/>
+          </a:effectRef>
+          <a:fontRef idx="minor">
+            <a:schemeClr val="lt1"/>
+          </a:fontRef>
+        </p:style>
+        <p:txBody>
+          <a:bodyPr rtlCol="0" anchor="ctr"/>
+          <a:lstStyle/>
+          <a:p>
+            <a:pPr algn="ctr"/>
+          </a:p>
+        </p:txBody>
+      </p:sp>
+      <p:sp>
+        <p:nvSpPr>
+          <p:cNvPr id="15" name="TextBox 14"/>
           <p:cNvSpPr txBox="1"/>
           <p:nvPr/>
         </p:nvSpPr>
         <p:spPr>
           <a:xfrm>
-            <a:off x="6426200" y="3733800"/>
-            <a:ext cx="5016500" cy="1511300"/>
+            <a:off x="711200" y="6438900"/>
+            <a:ext cx="9652000" cy="203200"/>
           </a:xfrm>
           <a:prstGeom prst="rect">
             <a:avLst/>
@@ -9087,187 +7926,68 @@
         </p:spPr>
         <p:txBody>
           <a:bodyPr wrap="none" lIns="0" rIns="0" tIns="0" bIns="0">
-            <a:spAutoFit/>
+            <a:noAutofit/>
           </a:bodyPr>
           <a:lstStyle/>
           <a:p>
             <a:pPr>
               <a:lnSpc>
-                <a:spcPts val="1689"/>
+                <a:spcPts val="1297"/>
               </a:lnSpc>
               <a:spcAft>
                 <a:spcPts val="0"/>
               </a:spcAft>
-              <a:defRPr sz="1420" b="0">
+              <a:defRPr sz="1100" b="0">
                 <a:solidFill>
-                  <a:srgbClr val="181817"/>
+                  <a:srgbClr val="626773"/>
                 </a:solidFill>
                 <a:latin typeface="Arial"/>
               </a:defRPr>
             </a:pPr>
             <a:r>
-              <a:t>AI pomohla připravit web i kontroly.</a:t>
-            </a:r>
-          </a:p>
+              <a:t>Prague Pulse Fest · Výstaviště Praha · 2027</a:t>
+            </a:r>
+          </a:p>
+        </p:txBody>
+      </p:sp>
+      <p:sp>
+        <p:nvSpPr>
+          <p:cNvPr id="16" name="TextBox 15"/>
+          <p:cNvSpPr txBox="1"/>
+          <p:nvPr/>
+        </p:nvSpPr>
+        <p:spPr>
+          <a:xfrm>
+            <a:off x="10807700" y="6413500"/>
+            <a:ext cx="673100" cy="215900"/>
+          </a:xfrm>
+          <a:prstGeom prst="rect">
+            <a:avLst/>
+          </a:prstGeom>
+          <a:noFill/>
+        </p:spPr>
+        <p:txBody>
+          <a:bodyPr wrap="none" lIns="0" rIns="0" tIns="0" bIns="0">
+            <a:noAutofit/>
+          </a:bodyPr>
+          <a:lstStyle/>
           <a:p>
             <a:pPr>
               <a:lnSpc>
-                <a:spcPts val="1689"/>
+                <a:spcPts val="1416"/>
               </a:lnSpc>
               <a:spcAft>
                 <a:spcPts val="0"/>
               </a:spcAft>
-              <a:defRPr sz="1420" b="0">
+              <a:defRPr sz="1200" b="0">
                 <a:solidFill>
-                  <a:srgbClr val="181817"/>
+                  <a:srgbClr val="626773"/>
                 </a:solidFill>
                 <a:latin typeface="Arial"/>
               </a:defRPr>
             </a:pPr>
-          </a:p>
-          <a:p>
-            <a:pPr>
-              <a:lnSpc>
-                <a:spcPts val="1689"/>
-              </a:lnSpc>
-              <a:spcAft>
-                <a:spcPts val="0"/>
-              </a:spcAft>
-              <a:defRPr sz="1420" b="0">
-                <a:solidFill>
-                  <a:srgbClr val="181817"/>
-                </a:solidFill>
-                <a:latin typeface="Arial"/>
-              </a:defRPr>
-            </a:pPr>
-            <a:r>
-              <a:t>Každý přijatý nález tým ověří; změnu a důvod zapíše.</a:t>
-            </a:r>
-          </a:p>
-        </p:txBody>
-      </p:sp>
-      <p:sp>
-        <p:nvSpPr>
-          <p:cNvPr id="17" name="TextBox 16"/>
-          <p:cNvSpPr txBox="1"/>
-          <p:nvPr/>
-        </p:nvSpPr>
-        <p:spPr>
-          <a:xfrm>
-            <a:off x="533400" y="5676900"/>
-            <a:ext cx="11125200" cy="546100"/>
-          </a:xfrm>
-          <a:prstGeom prst="rect">
-            <a:avLst/>
-          </a:prstGeom>
-          <a:noFill/>
-        </p:spPr>
-        <p:txBody>
-          <a:bodyPr wrap="none" lIns="0" rIns="0" tIns="0" bIns="0">
-            <a:spAutoFit/>
-          </a:bodyPr>
-          <a:lstStyle/>
-          <a:p>
-            <a:pPr>
-              <a:lnSpc>
-                <a:spcPts val="1583"/>
-              </a:lnSpc>
-              <a:spcAft>
-                <a:spcPts val="0"/>
-              </a:spcAft>
-              <a:defRPr sz="1320" b="0">
-                <a:solidFill>
-                  <a:srgbClr val="68635B"/>
-                </a:solidFill>
-                <a:latin typeface="Arial"/>
-              </a:defRPr>
-            </a:pPr>
-            <a:r>
-              <a:t>Skutečné přijaté review zatím chybí; není nahrazeno vymyšlenými nálezy.</a:t>
-            </a:r>
-          </a:p>
-        </p:txBody>
-      </p:sp>
-      <p:sp>
-        <p:nvSpPr>
-          <p:cNvPr id="18" name="TextBox 17"/>
-          <p:cNvSpPr txBox="1"/>
-          <p:nvPr/>
-        </p:nvSpPr>
-        <p:spPr>
-          <a:xfrm>
-            <a:off x="533400" y="6413500"/>
-            <a:ext cx="10033000" cy="181610"/>
-          </a:xfrm>
-          <a:prstGeom prst="rect">
-            <a:avLst/>
-          </a:prstGeom>
-          <a:noFill/>
-        </p:spPr>
-        <p:txBody>
-          <a:bodyPr wrap="none" lIns="0" rIns="0" tIns="0" bIns="0">
-            <a:spAutoFit/>
-          </a:bodyPr>
-          <a:lstStyle/>
-          <a:p>
-            <a:pPr>
-              <a:lnSpc>
-                <a:spcPts val="930"/>
-              </a:lnSpc>
-              <a:spcAft>
-                <a:spcPts val="0"/>
-              </a:spcAft>
-              <a:defRPr sz="750" b="0">
-                <a:solidFill>
-                  <a:srgbClr val="68635B"/>
-                </a:solidFill>
-                <a:latin typeface="Arial"/>
-              </a:defRPr>
-            </a:pPr>
-            <a:r>
-              <a:t>DODATEČNĚ PŘIPRAVENÝ PODKLAD K MILNÍKU</a:t>
-            </a:r>
-          </a:p>
-        </p:txBody>
-      </p:sp>
-      <p:sp>
-        <p:nvSpPr>
-          <p:cNvPr id="19" name="TextBox 18"/>
-          <p:cNvSpPr txBox="1"/>
-          <p:nvPr/>
-        </p:nvSpPr>
-        <p:spPr>
-          <a:xfrm>
-            <a:off x="10947400" y="6350000"/>
-            <a:ext cx="825500" cy="220979"/>
-          </a:xfrm>
-          <a:prstGeom prst="rect">
-            <a:avLst/>
-          </a:prstGeom>
-          <a:noFill/>
-        </p:spPr>
-        <p:txBody>
-          <a:bodyPr wrap="none" lIns="0" rIns="0" tIns="0" bIns="0">
-            <a:spAutoFit/>
-          </a:bodyPr>
-          <a:lstStyle/>
-          <a:p>
-            <a:pPr>
-              <a:lnSpc>
-                <a:spcPts val="1240"/>
-              </a:lnSpc>
-              <a:spcAft>
-                <a:spcPts val="0"/>
-              </a:spcAft>
-              <a:defRPr sz="1000" b="1">
-                <a:solidFill>
-                  <a:srgbClr val="68635B"/>
-                </a:solidFill>
-                <a:latin typeface="Arial"/>
-              </a:defRPr>
-            </a:pPr>
-            <a:r>
-              <a:t>05 / 06</a:t>
+            <a:r>
+              <a:t>6 / 6</a:t>
             </a:r>
           </a:p>
         </p:txBody>

--- a/odevzdani/cviceni-05-review-ready/prezentace.pptx
+++ b/odevzdani/cviceni-05-review-ready/prezentace.pptx
@@ -787,7 +787,7 @@
           <a:lstStyle/>
           <a:p>
             <a:r>
-              <a:t>[40 s] Aktuální provedené kontroly jsou v validation_report.md. Rozlišujeme datovou správnost, automatizovaný průchod a uživatelskou srozumitelnost. Lokální stav není sdílená databáze a není přenosný mezi zařízeními. Přímé file otevření blokuje politika zdejšího testovacího prostředí; zdejší testy proto používají vývojový statický server. To není runtime požadavek odevzdaného webu. Skutečnou účast interpretů ani oficiální areál netvrdíme. Nebyl proveden úplný audit WCAG, test všech prohlížečů ani výzkum s návštěvníky.</a:t>
+              <a:t>[40 s] Aktuální provedené kontroly jsou v validation_report.md. Rozlišujeme datovou správnost, automatizovaný průchod a uživatelskou srozumitelnost. Lokální stav není sdílená databáze a není přenosný mezi zařízeními. Přímé file otevření blokuje politika zdejšího testovacího prostředí; zdejší testy proto používají vývojový statický server. To není runtime požadavek odevzdaného webu. Skutečnou účast interpretů ani oficiální areál netvrdíme. Nebyl proveden úplný audit WCAG, test všech prohlížečů ani výzkum s návštěvníky. Ověřují se také společné a samostatné vstupy: místo v Main Hall nelze prodat dvakrát a vyprodaný Club omezuje společný vstup, nikoli volnou River Stage.</a:t>
             </a:r>
           </a:p>
         </p:txBody>
@@ -3878,7 +3878,7 @@
             <a:avLst/>
           </a:prstGeom>
           <a:solidFill>
-            <a:srgbClr val="FFFFFF"/>
+            <a:srgbClr val="101217"/>
           </a:solidFill>
           <a:ln>
             <a:noFill/>
@@ -3914,14 +3914,14 @@
         </p:nvSpPr>
         <p:spPr>
           <a:xfrm>
-            <a:off x="711200" y="609600"/>
-            <a:ext cx="76200" cy="381000"/>
+            <a:off x="0" y="0"/>
+            <a:ext cx="152400" cy="6858000"/>
           </a:xfrm>
           <a:prstGeom prst="rect">
             <a:avLst/>
           </a:prstGeom>
           <a:solidFill>
-            <a:srgbClr val="E55024"/>
+            <a:srgbClr val="FF885D"/>
           </a:solidFill>
           <a:ln>
             <a:noFill/>
@@ -3951,56 +3951,100 @@
       </p:sp>
       <p:sp>
         <p:nvSpPr>
-          <p:cNvPr id="4" name="TextBox 3"/>
+          <p:cNvPr id="4" name="Rectangle 3"/>
+          <p:cNvSpPr/>
+          <p:nvPr/>
+        </p:nvSpPr>
+        <p:spPr>
+          <a:xfrm>
+            <a:off x="8255000" y="0"/>
+            <a:ext cx="3937000" cy="6858000"/>
+          </a:xfrm>
+          <a:prstGeom prst="rect">
+            <a:avLst/>
+          </a:prstGeom>
+          <a:solidFill>
+            <a:srgbClr val="1D222C"/>
+          </a:solidFill>
+          <a:ln>
+            <a:noFill/>
+          </a:ln>
+        </p:spPr>
+        <p:style>
+          <a:lnRef idx="1">
+            <a:schemeClr val="accent1"/>
+          </a:lnRef>
+          <a:fillRef idx="3">
+            <a:schemeClr val="accent1"/>
+          </a:fillRef>
+          <a:effectRef idx="2">
+            <a:schemeClr val="accent1"/>
+          </a:effectRef>
+          <a:fontRef idx="minor">
+            <a:schemeClr val="lt1"/>
+          </a:fontRef>
+        </p:style>
+        <p:txBody>
+          <a:bodyPr rtlCol="0" anchor="ctr"/>
+          <a:lstStyle/>
+          <a:p>
+            <a:pPr algn="ctr"/>
+          </a:p>
+        </p:txBody>
+      </p:sp>
+      <p:sp>
+        <p:nvSpPr>
+          <p:cNvPr id="5" name="Rectangle 4"/>
+          <p:cNvSpPr/>
+          <p:nvPr/>
+        </p:nvSpPr>
+        <p:spPr>
+          <a:xfrm>
+            <a:off x="8255000" y="0"/>
+            <a:ext cx="3937000" cy="101600"/>
+          </a:xfrm>
+          <a:prstGeom prst="rect">
+            <a:avLst/>
+          </a:prstGeom>
+          <a:solidFill>
+            <a:srgbClr val="FF885D"/>
+          </a:solidFill>
+          <a:ln>
+            <a:noFill/>
+          </a:ln>
+        </p:spPr>
+        <p:style>
+          <a:lnRef idx="1">
+            <a:schemeClr val="accent1"/>
+          </a:lnRef>
+          <a:fillRef idx="3">
+            <a:schemeClr val="accent1"/>
+          </a:fillRef>
+          <a:effectRef idx="2">
+            <a:schemeClr val="accent1"/>
+          </a:effectRef>
+          <a:fontRef idx="minor">
+            <a:schemeClr val="lt1"/>
+          </a:fontRef>
+        </p:style>
+        <p:txBody>
+          <a:bodyPr rtlCol="0" anchor="ctr"/>
+          <a:lstStyle/>
+          <a:p>
+            <a:pPr algn="ctr"/>
+          </a:p>
+        </p:txBody>
+      </p:sp>
+      <p:sp>
+        <p:nvSpPr>
+          <p:cNvPr id="6" name="TextBox 5"/>
           <p:cNvSpPr txBox="1"/>
           <p:nvPr/>
         </p:nvSpPr>
         <p:spPr>
           <a:xfrm>
-            <a:off x="977900" y="647700"/>
-            <a:ext cx="10502900" cy="317500"/>
-          </a:xfrm>
-          <a:prstGeom prst="rect">
-            <a:avLst/>
-          </a:prstGeom>
-          <a:noFill/>
-        </p:spPr>
-        <p:txBody>
-          <a:bodyPr wrap="none" lIns="0" rIns="0" tIns="0" bIns="0">
-            <a:noAutofit/>
-          </a:bodyPr>
-          <a:lstStyle/>
-          <a:p>
-            <a:pPr>
-              <a:lnSpc>
-                <a:spcPts val="2360"/>
-              </a:lnSpc>
-              <a:spcAft>
-                <a:spcPts val="0"/>
-              </a:spcAft>
-              <a:defRPr sz="2000" b="1">
-                <a:solidFill>
-                  <a:srgbClr val="191B20"/>
-                </a:solidFill>
-                <a:latin typeface="Arial"/>
-              </a:defRPr>
-            </a:pPr>
-            <a:r>
-              <a:t>PRAGUE PULSE FEST</a:t>
-            </a:r>
-          </a:p>
-        </p:txBody>
-      </p:sp>
-      <p:sp>
-        <p:nvSpPr>
-          <p:cNvPr id="5" name="TextBox 4"/>
-          <p:cNvSpPr txBox="1"/>
-          <p:nvPr/>
-        </p:nvSpPr>
-        <p:spPr>
-          <a:xfrm>
-            <a:off x="711200" y="1600200"/>
-            <a:ext cx="10769600" cy="241300"/>
+            <a:off x="609600" y="546100"/>
+            <a:ext cx="10972800" cy="304800"/>
           </a:xfrm>
           <a:prstGeom prst="rect">
             <a:avLst/>
@@ -4022,7 +4066,7 @@
               </a:spcAft>
               <a:defRPr sz="1400" b="1">
                 <a:solidFill>
-                  <a:srgbClr val="E55024"/>
+                  <a:srgbClr val="FF885D"/>
                 </a:solidFill>
                 <a:latin typeface="Arial"/>
               </a:defRPr>
@@ -4035,14 +4079,14 @@
       </p:sp>
       <p:sp>
         <p:nvSpPr>
-          <p:cNvPr id="6" name="TextBox 5"/>
+          <p:cNvPr id="7" name="TextBox 6"/>
           <p:cNvSpPr txBox="1"/>
           <p:nvPr/>
         </p:nvSpPr>
         <p:spPr>
           <a:xfrm>
-            <a:off x="685800" y="2146300"/>
-            <a:ext cx="10795000" cy="1816100"/>
+            <a:off x="571500" y="1193800"/>
+            <a:ext cx="10985500" cy="1879600"/>
           </a:xfrm>
           <a:prstGeom prst="rect">
             <a:avLst/>
@@ -4057,19 +4101,80 @@
           <a:p>
             <a:pPr>
               <a:lnSpc>
-                <a:spcPts val="5376"/>
+                <a:spcPts val="6467"/>
               </a:lnSpc>
               <a:spcAft>
                 <a:spcPts val="0"/>
               </a:spcAft>
-              <a:defRPr sz="4800" b="1">
+              <a:defRPr sz="6600" b="1">
                 <a:solidFill>
-                  <a:srgbClr val="191B20"/>
+                  <a:srgbClr val="F5F6FA"/>
                 </a:solidFill>
                 <a:latin typeface="Arial"/>
               </a:defRPr>
             </a:pPr>
             <a:r>
+              <a:t>PRAGUE</a:t>
+            </a:r>
+          </a:p>
+          <a:p>
+            <a:pPr>
+              <a:lnSpc>
+                <a:spcPts val="6467"/>
+              </a:lnSpc>
+              <a:spcAft>
+                <a:spcPts val="0"/>
+              </a:spcAft>
+              <a:defRPr sz="6600" b="1">
+                <a:solidFill>
+                  <a:srgbClr val="F5F6FA"/>
+                </a:solidFill>
+                <a:latin typeface="Arial"/>
+              </a:defRPr>
+            </a:pPr>
+            <a:r>
+              <a:t>PULSE FEST</a:t>
+            </a:r>
+          </a:p>
+        </p:txBody>
+      </p:sp>
+      <p:sp>
+        <p:nvSpPr>
+          <p:cNvPr id="8" name="TextBox 7"/>
+          <p:cNvSpPr txBox="1"/>
+          <p:nvPr/>
+        </p:nvSpPr>
+        <p:spPr>
+          <a:xfrm>
+            <a:off x="609600" y="3492500"/>
+            <a:ext cx="10858500" cy="1092200"/>
+          </a:xfrm>
+          <a:prstGeom prst="rect">
+            <a:avLst/>
+          </a:prstGeom>
+          <a:noFill/>
+        </p:spPr>
+        <p:txBody>
+          <a:bodyPr wrap="none" lIns="0" rIns="0" tIns="0" bIns="0">
+            <a:noAutofit/>
+          </a:bodyPr>
+          <a:lstStyle/>
+          <a:p>
+            <a:pPr>
+              <a:lnSpc>
+                <a:spcPts val="4028"/>
+              </a:lnSpc>
+              <a:spcAft>
+                <a:spcPts val="0"/>
+              </a:spcAft>
+              <a:defRPr sz="3800" b="1">
+                <a:solidFill>
+                  <a:srgbClr val="FF885D"/>
+                </a:solidFill>
+                <a:latin typeface="Arial"/>
+              </a:defRPr>
+            </a:pPr>
+            <a:r>
               <a:t>Web připravený pro review</a:t>
             </a:r>
           </a:p>
@@ -4077,14 +4182,14 @@
       </p:sp>
       <p:sp>
         <p:nvSpPr>
-          <p:cNvPr id="7" name="TextBox 6"/>
+          <p:cNvPr id="9" name="TextBox 8"/>
           <p:cNvSpPr txBox="1"/>
           <p:nvPr/>
         </p:nvSpPr>
         <p:spPr>
           <a:xfrm>
-            <a:off x="711200" y="4191000"/>
-            <a:ext cx="10769600" cy="1016000"/>
+            <a:off x="609600" y="4889500"/>
+            <a:ext cx="10858500" cy="825500"/>
           </a:xfrm>
           <a:prstGeom prst="rect">
             <a:avLst/>
@@ -4106,7 +4211,7 @@
               </a:spcAft>
               <a:defRPr sz="2300" b="0">
                 <a:solidFill>
-                  <a:srgbClr val="626773"/>
+                  <a:srgbClr val="B7BFCC"/>
                 </a:solidFill>
                 <a:latin typeface="Arial"/>
               </a:defRPr>
@@ -4125,7 +4230,7 @@
               </a:spcAft>
               <a:defRPr sz="2300" b="0">
                 <a:solidFill>
-                  <a:srgbClr val="626773"/>
+                  <a:srgbClr val="B7BFCC"/>
                 </a:solidFill>
                 <a:latin typeface="Arial"/>
               </a:defRPr>
@@ -4138,14 +4243,14 @@
       </p:sp>
       <p:sp>
         <p:nvSpPr>
-          <p:cNvPr id="8" name="TextBox 7"/>
+          <p:cNvPr id="10" name="TextBox 9"/>
           <p:cNvSpPr txBox="1"/>
           <p:nvPr/>
         </p:nvSpPr>
         <p:spPr>
           <a:xfrm>
-            <a:off x="711200" y="5600700"/>
-            <a:ext cx="10769600" cy="304800"/>
+            <a:off x="609600" y="5880100"/>
+            <a:ext cx="10972800" cy="330200"/>
           </a:xfrm>
           <a:prstGeom prst="rect">
             <a:avLst/>
@@ -4160,14 +4265,14 @@
           <a:p>
             <a:pPr>
               <a:lnSpc>
-                <a:spcPts val="2242"/>
+                <a:spcPts val="2124"/>
               </a:lnSpc>
               <a:spcAft>
                 <a:spcPts val="0"/>
               </a:spcAft>
-              <a:defRPr sz="1900" b="0">
+              <a:defRPr sz="1800" b="0">
                 <a:solidFill>
-                  <a:srgbClr val="191B20"/>
+                  <a:srgbClr val="F5F6FA"/>
                 </a:solidFill>
                 <a:latin typeface="Arial"/>
               </a:defRPr>
@@ -4180,20 +4285,20 @@
       </p:sp>
       <p:sp>
         <p:nvSpPr>
-          <p:cNvPr id="9" name="Rectangle 8"/>
+          <p:cNvPr id="11" name="Rectangle 10"/>
           <p:cNvSpPr/>
           <p:nvPr/>
         </p:nvSpPr>
         <p:spPr>
           <a:xfrm>
-            <a:off x="711200" y="6248400"/>
-            <a:ext cx="10769600" cy="12700"/>
+            <a:off x="609600" y="6273800"/>
+            <a:ext cx="10972800" cy="12700"/>
           </a:xfrm>
           <a:prstGeom prst="rect">
             <a:avLst/>
           </a:prstGeom>
           <a:solidFill>
-            <a:srgbClr val="DFE2E7"/>
+            <a:srgbClr val="3D4552"/>
           </a:solidFill>
           <a:ln>
             <a:noFill/>
@@ -4223,14 +4328,14 @@
       </p:sp>
       <p:sp>
         <p:nvSpPr>
-          <p:cNvPr id="10" name="TextBox 9"/>
+          <p:cNvPr id="12" name="TextBox 11"/>
           <p:cNvSpPr txBox="1"/>
           <p:nvPr/>
         </p:nvSpPr>
         <p:spPr>
           <a:xfrm>
-            <a:off x="711200" y="6438900"/>
-            <a:ext cx="9652000" cy="203200"/>
+            <a:off x="609600" y="6464300"/>
+            <a:ext cx="9906000" cy="203200"/>
           </a:xfrm>
           <a:prstGeom prst="rect">
             <a:avLst/>
@@ -4252,7 +4357,7 @@
               </a:spcAft>
               <a:defRPr sz="1100" b="0">
                 <a:solidFill>
-                  <a:srgbClr val="626773"/>
+                  <a:srgbClr val="B7BFCC"/>
                 </a:solidFill>
                 <a:latin typeface="Arial"/>
               </a:defRPr>
@@ -4265,14 +4370,14 @@
       </p:sp>
       <p:sp>
         <p:nvSpPr>
-          <p:cNvPr id="11" name="TextBox 10"/>
+          <p:cNvPr id="13" name="TextBox 12"/>
           <p:cNvSpPr txBox="1"/>
           <p:nvPr/>
         </p:nvSpPr>
         <p:spPr>
           <a:xfrm>
-            <a:off x="10807700" y="6413500"/>
-            <a:ext cx="673100" cy="215900"/>
+            <a:off x="10972800" y="6438900"/>
+            <a:ext cx="609600" cy="215900"/>
           </a:xfrm>
           <a:prstGeom prst="rect">
             <a:avLst/>
@@ -4294,7 +4399,7 @@
               </a:spcAft>
               <a:defRPr sz="1200" b="0">
                 <a:solidFill>
-                  <a:srgbClr val="626773"/>
+                  <a:srgbClr val="B7BFCC"/>
                 </a:solidFill>
                 <a:latin typeface="Arial"/>
               </a:defRPr>
@@ -4338,7 +4443,7 @@
             <a:avLst/>
           </a:prstGeom>
           <a:solidFill>
-            <a:srgbClr val="FFFFFF"/>
+            <a:srgbClr val="101217"/>
           </a:solidFill>
           <a:ln>
             <a:noFill/>
@@ -4368,14 +4473,57 @@
       </p:sp>
       <p:sp>
         <p:nvSpPr>
-          <p:cNvPr id="3" name="TextBox 2"/>
+          <p:cNvPr id="3" name="Rectangle 2"/>
+          <p:cNvSpPr/>
+          <p:nvPr/>
+        </p:nvSpPr>
+        <p:spPr>
+          <a:xfrm>
+            <a:off x="0" y="0"/>
+            <a:ext cx="101600" cy="6858000"/>
+          </a:xfrm>
+          <a:prstGeom prst="rect">
+            <a:avLst/>
+          </a:prstGeom>
+          <a:solidFill>
+            <a:srgbClr val="FF885D"/>
+          </a:solidFill>
+          <a:ln>
+            <a:noFill/>
+          </a:ln>
+        </p:spPr>
+        <p:style>
+          <a:lnRef idx="1">
+            <a:schemeClr val="accent1"/>
+          </a:lnRef>
+          <a:fillRef idx="3">
+            <a:schemeClr val="accent1"/>
+          </a:fillRef>
+          <a:effectRef idx="2">
+            <a:schemeClr val="accent1"/>
+          </a:effectRef>
+          <a:fontRef idx="minor">
+            <a:schemeClr val="lt1"/>
+          </a:fontRef>
+        </p:style>
+        <p:txBody>
+          <a:bodyPr rtlCol="0" anchor="ctr"/>
+          <a:lstStyle/>
+          <a:p>
+            <a:pPr algn="ctr"/>
+          </a:p>
+        </p:txBody>
+      </p:sp>
+      <p:sp>
+        <p:nvSpPr>
+          <p:cNvPr id="4" name="TextBox 3"/>
           <p:cNvSpPr txBox="1"/>
           <p:nvPr/>
         </p:nvSpPr>
         <p:spPr>
           <a:xfrm>
-            <a:off x="711200" y="457200"/>
-            <a:ext cx="10769600" cy="228600"/>
+            <a:off x="609600" y="444500"/>
+            <a:ext cx="10972800" cy="279400"/>
           </a:xfrm>
           <a:prstGeom prst="rect">
             <a:avLst/>
@@ -4397,7 +4545,7 @@
               </a:spcAft>
               <a:defRPr sz="1300" b="1">
                 <a:solidFill>
-                  <a:srgbClr val="626773"/>
+                  <a:srgbClr val="B7BFCC"/>
                 </a:solidFill>
                 <a:latin typeface="Arial"/>
               </a:defRPr>
@@ -4410,20 +4558,20 @@
       </p:sp>
       <p:sp>
         <p:nvSpPr>
-          <p:cNvPr id="4" name="Rectangle 3"/>
+          <p:cNvPr id="5" name="Rectangle 4"/>
           <p:cNvSpPr/>
           <p:nvPr/>
         </p:nvSpPr>
         <p:spPr>
           <a:xfrm>
-            <a:off x="711200" y="876300"/>
-            <a:ext cx="622300" cy="50800"/>
+            <a:off x="609600" y="876300"/>
+            <a:ext cx="685800" cy="50800"/>
           </a:xfrm>
           <a:prstGeom prst="rect">
             <a:avLst/>
           </a:prstGeom>
           <a:solidFill>
-            <a:srgbClr val="E55024"/>
+            <a:srgbClr val="FF885D"/>
           </a:solidFill>
           <a:ln>
             <a:noFill/>
@@ -4453,14 +4601,14 @@
       </p:sp>
       <p:sp>
         <p:nvSpPr>
-          <p:cNvPr id="5" name="TextBox 4"/>
+          <p:cNvPr id="6" name="TextBox 5"/>
           <p:cNvSpPr txBox="1"/>
           <p:nvPr/>
         </p:nvSpPr>
         <p:spPr>
           <a:xfrm>
-            <a:off x="685800" y="1257300"/>
-            <a:ext cx="10795000" cy="1168400"/>
+            <a:off x="584200" y="1206500"/>
+            <a:ext cx="10998200" cy="1130300"/>
           </a:xfrm>
           <a:prstGeom prst="rect">
             <a:avLst/>
@@ -4482,7 +4630,7 @@
               </a:spcAft>
               <a:defRPr sz="3600" b="1">
                 <a:solidFill>
-                  <a:srgbClr val="191B20"/>
+                  <a:srgbClr val="F5F6FA"/>
                 </a:solidFill>
                 <a:latin typeface="Arial"/>
               </a:defRPr>
@@ -4495,20 +4643,20 @@
       </p:sp>
       <p:sp>
         <p:nvSpPr>
-          <p:cNvPr id="6" name="Rectangle 5"/>
+          <p:cNvPr id="7" name="Rectangle 6"/>
           <p:cNvSpPr/>
           <p:nvPr/>
         </p:nvSpPr>
         <p:spPr>
           <a:xfrm>
-            <a:off x="723900" y="2273300"/>
+            <a:off x="711200" y="2336800"/>
             <a:ext cx="101600" cy="101600"/>
           </a:xfrm>
           <a:prstGeom prst="rect">
             <a:avLst/>
           </a:prstGeom>
           <a:solidFill>
-            <a:srgbClr val="E55024"/>
+            <a:srgbClr val="FF885D"/>
           </a:solidFill>
           <a:ln>
             <a:noFill/>
@@ -4538,13 +4686,13 @@
       </p:sp>
       <p:sp>
         <p:nvSpPr>
-          <p:cNvPr id="7" name="TextBox 6"/>
+          <p:cNvPr id="8" name="TextBox 7"/>
           <p:cNvSpPr txBox="1"/>
           <p:nvPr/>
         </p:nvSpPr>
         <p:spPr>
           <a:xfrm>
-            <a:off x="1066800" y="2146300"/>
+            <a:off x="1066800" y="2209800"/>
             <a:ext cx="10160000" cy="419100"/>
           </a:xfrm>
           <a:prstGeom prst="rect">
@@ -4567,7 +4715,7 @@
               </a:spcAft>
               <a:defRPr sz="2800" b="0">
                 <a:solidFill>
-                  <a:srgbClr val="191B20"/>
+                  <a:srgbClr val="F5F6FA"/>
                 </a:solidFill>
                 <a:latin typeface="Arial"/>
               </a:defRPr>
@@ -4580,20 +4728,20 @@
       </p:sp>
       <p:sp>
         <p:nvSpPr>
-          <p:cNvPr id="8" name="Rectangle 7"/>
+          <p:cNvPr id="9" name="Rectangle 8"/>
           <p:cNvSpPr/>
           <p:nvPr/>
         </p:nvSpPr>
         <p:spPr>
           <a:xfrm>
-            <a:off x="723900" y="2971800"/>
+            <a:off x="711200" y="3009900"/>
             <a:ext cx="101600" cy="101600"/>
           </a:xfrm>
           <a:prstGeom prst="rect">
             <a:avLst/>
           </a:prstGeom>
           <a:solidFill>
-            <a:srgbClr val="E55024"/>
+            <a:srgbClr val="FF885D"/>
           </a:solidFill>
           <a:ln>
             <a:noFill/>
@@ -4623,13 +4771,13 @@
       </p:sp>
       <p:sp>
         <p:nvSpPr>
-          <p:cNvPr id="9" name="TextBox 8"/>
+          <p:cNvPr id="10" name="TextBox 9"/>
           <p:cNvSpPr txBox="1"/>
           <p:nvPr/>
         </p:nvSpPr>
         <p:spPr>
           <a:xfrm>
-            <a:off x="1066800" y="2844800"/>
+            <a:off x="1066800" y="2882900"/>
             <a:ext cx="10160000" cy="419100"/>
           </a:xfrm>
           <a:prstGeom prst="rect">
@@ -4652,7 +4800,7 @@
               </a:spcAft>
               <a:defRPr sz="2800" b="0">
                 <a:solidFill>
-                  <a:srgbClr val="191B20"/>
+                  <a:srgbClr val="F5F6FA"/>
                 </a:solidFill>
                 <a:latin typeface="Arial"/>
               </a:defRPr>
@@ -4665,20 +4813,20 @@
       </p:sp>
       <p:sp>
         <p:nvSpPr>
-          <p:cNvPr id="10" name="Rectangle 9"/>
+          <p:cNvPr id="11" name="Rectangle 10"/>
           <p:cNvSpPr/>
           <p:nvPr/>
         </p:nvSpPr>
         <p:spPr>
           <a:xfrm>
-            <a:off x="723900" y="3670300"/>
+            <a:off x="711200" y="3683000"/>
             <a:ext cx="101600" cy="101600"/>
           </a:xfrm>
           <a:prstGeom prst="rect">
             <a:avLst/>
           </a:prstGeom>
           <a:solidFill>
-            <a:srgbClr val="E55024"/>
+            <a:srgbClr val="FF885D"/>
           </a:solidFill>
           <a:ln>
             <a:noFill/>
@@ -4708,13 +4856,13 @@
       </p:sp>
       <p:sp>
         <p:nvSpPr>
-          <p:cNvPr id="11" name="TextBox 10"/>
+          <p:cNvPr id="12" name="TextBox 11"/>
           <p:cNvSpPr txBox="1"/>
           <p:nvPr/>
         </p:nvSpPr>
         <p:spPr>
           <a:xfrm>
-            <a:off x="1066800" y="3543300"/>
+            <a:off x="1066800" y="3556000"/>
             <a:ext cx="10160000" cy="419100"/>
           </a:xfrm>
           <a:prstGeom prst="rect">
@@ -4737,7 +4885,7 @@
               </a:spcAft>
               <a:defRPr sz="2800" b="0">
                 <a:solidFill>
-                  <a:srgbClr val="191B20"/>
+                  <a:srgbClr val="F5F6FA"/>
                 </a:solidFill>
                 <a:latin typeface="Arial"/>
               </a:defRPr>
@@ -4750,20 +4898,20 @@
       </p:sp>
       <p:sp>
         <p:nvSpPr>
-          <p:cNvPr id="12" name="Rectangle 11"/>
+          <p:cNvPr id="13" name="Rectangle 12"/>
           <p:cNvSpPr/>
           <p:nvPr/>
         </p:nvSpPr>
         <p:spPr>
           <a:xfrm>
-            <a:off x="723900" y="4368800"/>
+            <a:off x="711200" y="4356100"/>
             <a:ext cx="101600" cy="101600"/>
           </a:xfrm>
           <a:prstGeom prst="rect">
             <a:avLst/>
           </a:prstGeom>
           <a:solidFill>
-            <a:srgbClr val="E55024"/>
+            <a:srgbClr val="FF885D"/>
           </a:solidFill>
           <a:ln>
             <a:noFill/>
@@ -4793,13 +4941,13 @@
       </p:sp>
       <p:sp>
         <p:nvSpPr>
-          <p:cNvPr id="13" name="TextBox 12"/>
+          <p:cNvPr id="14" name="TextBox 13"/>
           <p:cNvSpPr txBox="1"/>
           <p:nvPr/>
         </p:nvSpPr>
         <p:spPr>
           <a:xfrm>
-            <a:off x="1066800" y="4241800"/>
+            <a:off x="1066800" y="4229100"/>
             <a:ext cx="10160000" cy="419100"/>
           </a:xfrm>
           <a:prstGeom prst="rect">
@@ -4822,7 +4970,7 @@
               </a:spcAft>
               <a:defRPr sz="2800" b="0">
                 <a:solidFill>
-                  <a:srgbClr val="191B20"/>
+                  <a:srgbClr val="F5F6FA"/>
                 </a:solidFill>
                 <a:latin typeface="Arial"/>
               </a:defRPr>
@@ -4835,20 +4983,20 @@
       </p:sp>
       <p:sp>
         <p:nvSpPr>
-          <p:cNvPr id="14" name="Rectangle 13"/>
+          <p:cNvPr id="15" name="Rectangle 14"/>
           <p:cNvSpPr/>
           <p:nvPr/>
         </p:nvSpPr>
         <p:spPr>
           <a:xfrm>
-            <a:off x="711200" y="6248400"/>
-            <a:ext cx="10769600" cy="12700"/>
+            <a:off x="609600" y="6273800"/>
+            <a:ext cx="10972800" cy="12700"/>
           </a:xfrm>
           <a:prstGeom prst="rect">
             <a:avLst/>
           </a:prstGeom>
           <a:solidFill>
-            <a:srgbClr val="DFE2E7"/>
+            <a:srgbClr val="3D4552"/>
           </a:solidFill>
           <a:ln>
             <a:noFill/>
@@ -4878,14 +5026,14 @@
       </p:sp>
       <p:sp>
         <p:nvSpPr>
-          <p:cNvPr id="15" name="TextBox 14"/>
+          <p:cNvPr id="16" name="TextBox 15"/>
           <p:cNvSpPr txBox="1"/>
           <p:nvPr/>
         </p:nvSpPr>
         <p:spPr>
           <a:xfrm>
-            <a:off x="711200" y="6438900"/>
-            <a:ext cx="9652000" cy="203200"/>
+            <a:off x="609600" y="6464300"/>
+            <a:ext cx="9906000" cy="203200"/>
           </a:xfrm>
           <a:prstGeom prst="rect">
             <a:avLst/>
@@ -4907,7 +5055,7 @@
               </a:spcAft>
               <a:defRPr sz="1100" b="0">
                 <a:solidFill>
-                  <a:srgbClr val="626773"/>
+                  <a:srgbClr val="B7BFCC"/>
                 </a:solidFill>
                 <a:latin typeface="Arial"/>
               </a:defRPr>
@@ -4920,14 +5068,14 @@
       </p:sp>
       <p:sp>
         <p:nvSpPr>
-          <p:cNvPr id="16" name="TextBox 15"/>
+          <p:cNvPr id="17" name="TextBox 16"/>
           <p:cNvSpPr txBox="1"/>
           <p:nvPr/>
         </p:nvSpPr>
         <p:spPr>
           <a:xfrm>
-            <a:off x="10807700" y="6413500"/>
-            <a:ext cx="673100" cy="215900"/>
+            <a:off x="10972800" y="6438900"/>
+            <a:ext cx="609600" cy="215900"/>
           </a:xfrm>
           <a:prstGeom prst="rect">
             <a:avLst/>
@@ -4949,7 +5097,7 @@
               </a:spcAft>
               <a:defRPr sz="1200" b="0">
                 <a:solidFill>
-                  <a:srgbClr val="626773"/>
+                  <a:srgbClr val="B7BFCC"/>
                 </a:solidFill>
                 <a:latin typeface="Arial"/>
               </a:defRPr>
@@ -4993,7 +5141,7 @@
             <a:avLst/>
           </a:prstGeom>
           <a:solidFill>
-            <a:srgbClr val="FFFFFF"/>
+            <a:srgbClr val="101217"/>
           </a:solidFill>
           <a:ln>
             <a:noFill/>
@@ -5023,14 +5171,57 @@
       </p:sp>
       <p:sp>
         <p:nvSpPr>
-          <p:cNvPr id="3" name="TextBox 2"/>
+          <p:cNvPr id="3" name="Rectangle 2"/>
+          <p:cNvSpPr/>
+          <p:nvPr/>
+        </p:nvSpPr>
+        <p:spPr>
+          <a:xfrm>
+            <a:off x="0" y="0"/>
+            <a:ext cx="101600" cy="6858000"/>
+          </a:xfrm>
+          <a:prstGeom prst="rect">
+            <a:avLst/>
+          </a:prstGeom>
+          <a:solidFill>
+            <a:srgbClr val="FF885D"/>
+          </a:solidFill>
+          <a:ln>
+            <a:noFill/>
+          </a:ln>
+        </p:spPr>
+        <p:style>
+          <a:lnRef idx="1">
+            <a:schemeClr val="accent1"/>
+          </a:lnRef>
+          <a:fillRef idx="3">
+            <a:schemeClr val="accent1"/>
+          </a:fillRef>
+          <a:effectRef idx="2">
+            <a:schemeClr val="accent1"/>
+          </a:effectRef>
+          <a:fontRef idx="minor">
+            <a:schemeClr val="lt1"/>
+          </a:fontRef>
+        </p:style>
+        <p:txBody>
+          <a:bodyPr rtlCol="0" anchor="ctr"/>
+          <a:lstStyle/>
+          <a:p>
+            <a:pPr algn="ctr"/>
+          </a:p>
+        </p:txBody>
+      </p:sp>
+      <p:sp>
+        <p:nvSpPr>
+          <p:cNvPr id="4" name="TextBox 3"/>
           <p:cNvSpPr txBox="1"/>
           <p:nvPr/>
         </p:nvSpPr>
         <p:spPr>
           <a:xfrm>
-            <a:off x="711200" y="457200"/>
-            <a:ext cx="10769600" cy="228600"/>
+            <a:off x="609600" y="444500"/>
+            <a:ext cx="10972800" cy="279400"/>
           </a:xfrm>
           <a:prstGeom prst="rect">
             <a:avLst/>
@@ -5052,7 +5243,7 @@
               </a:spcAft>
               <a:defRPr sz="1300" b="1">
                 <a:solidFill>
-                  <a:srgbClr val="626773"/>
+                  <a:srgbClr val="B7BFCC"/>
                 </a:solidFill>
                 <a:latin typeface="Arial"/>
               </a:defRPr>
@@ -5065,20 +5256,20 @@
       </p:sp>
       <p:sp>
         <p:nvSpPr>
-          <p:cNvPr id="4" name="Rectangle 3"/>
+          <p:cNvPr id="5" name="Rectangle 4"/>
           <p:cNvSpPr/>
           <p:nvPr/>
         </p:nvSpPr>
         <p:spPr>
           <a:xfrm>
-            <a:off x="711200" y="876300"/>
-            <a:ext cx="622300" cy="50800"/>
+            <a:off x="609600" y="876300"/>
+            <a:ext cx="685800" cy="50800"/>
           </a:xfrm>
           <a:prstGeom prst="rect">
             <a:avLst/>
           </a:prstGeom>
           <a:solidFill>
-            <a:srgbClr val="E55024"/>
+            <a:srgbClr val="FF885D"/>
           </a:solidFill>
           <a:ln>
             <a:noFill/>
@@ -5108,14 +5299,14 @@
       </p:sp>
       <p:sp>
         <p:nvSpPr>
-          <p:cNvPr id="5" name="TextBox 4"/>
+          <p:cNvPr id="6" name="TextBox 5"/>
           <p:cNvSpPr txBox="1"/>
           <p:nvPr/>
         </p:nvSpPr>
         <p:spPr>
           <a:xfrm>
-            <a:off x="685800" y="1257300"/>
-            <a:ext cx="10795000" cy="1168400"/>
+            <a:off x="584200" y="1206500"/>
+            <a:ext cx="10998200" cy="1130300"/>
           </a:xfrm>
           <a:prstGeom prst="rect">
             <a:avLst/>
@@ -5137,7 +5328,7 @@
               </a:spcAft>
               <a:defRPr sz="3600" b="1">
                 <a:solidFill>
-                  <a:srgbClr val="191B20"/>
+                  <a:srgbClr val="F5F6FA"/>
                 </a:solidFill>
                 <a:latin typeface="Arial"/>
               </a:defRPr>
@@ -5150,14 +5341,57 @@
       </p:sp>
       <p:sp>
         <p:nvSpPr>
-          <p:cNvPr id="6" name="TextBox 5"/>
+          <p:cNvPr id="7" name="Rectangle 6"/>
+          <p:cNvSpPr/>
+          <p:nvPr/>
+        </p:nvSpPr>
+        <p:spPr>
+          <a:xfrm>
+            <a:off x="609600" y="2209800"/>
+            <a:ext cx="609600" cy="482600"/>
+          </a:xfrm>
+          <a:prstGeom prst="rect">
+            <a:avLst/>
+          </a:prstGeom>
+          <a:solidFill>
+            <a:srgbClr val="1D222C"/>
+          </a:solidFill>
+          <a:ln>
+            <a:noFill/>
+          </a:ln>
+        </p:spPr>
+        <p:style>
+          <a:lnRef idx="1">
+            <a:schemeClr val="accent1"/>
+          </a:lnRef>
+          <a:fillRef idx="3">
+            <a:schemeClr val="accent1"/>
+          </a:fillRef>
+          <a:effectRef idx="2">
+            <a:schemeClr val="accent1"/>
+          </a:effectRef>
+          <a:fontRef idx="minor">
+            <a:schemeClr val="lt1"/>
+          </a:fontRef>
+        </p:style>
+        <p:txBody>
+          <a:bodyPr rtlCol="0" anchor="ctr"/>
+          <a:lstStyle/>
+          <a:p>
+            <a:pPr algn="ctr"/>
+          </a:p>
+        </p:txBody>
+      </p:sp>
+      <p:sp>
+        <p:nvSpPr>
+          <p:cNvPr id="8" name="TextBox 7"/>
           <p:cNvSpPr txBox="1"/>
           <p:nvPr/>
         </p:nvSpPr>
         <p:spPr>
           <a:xfrm>
-            <a:off x="711200" y="2146300"/>
-            <a:ext cx="482600" cy="355600"/>
+            <a:off x="736600" y="2286000"/>
+            <a:ext cx="482600" cy="368300"/>
           </a:xfrm>
           <a:prstGeom prst="rect">
             <a:avLst/>
@@ -5172,14 +5406,14 @@
           <a:p>
             <a:pPr>
               <a:lnSpc>
-                <a:spcPts val="2713"/>
+                <a:spcPts val="2477"/>
               </a:lnSpc>
               <a:spcAft>
                 <a:spcPts val="0"/>
               </a:spcAft>
-              <a:defRPr sz="2300" b="1">
+              <a:defRPr sz="2100" b="1">
                 <a:solidFill>
-                  <a:srgbClr val="E55024"/>
+                  <a:srgbClr val="FF885D"/>
                 </a:solidFill>
                 <a:latin typeface="Arial"/>
               </a:defRPr>
@@ -5192,14 +5426,14 @@
       </p:sp>
       <p:sp>
         <p:nvSpPr>
-          <p:cNvPr id="7" name="TextBox 6"/>
+          <p:cNvPr id="9" name="TextBox 8"/>
           <p:cNvSpPr txBox="1"/>
           <p:nvPr/>
         </p:nvSpPr>
         <p:spPr>
           <a:xfrm>
-            <a:off x="1346200" y="2146300"/>
-            <a:ext cx="3479800" cy="685800"/>
+            <a:off x="1422400" y="2247900"/>
+            <a:ext cx="3403600" cy="685800"/>
           </a:xfrm>
           <a:prstGeom prst="rect">
             <a:avLst/>
@@ -5221,7 +5455,7 @@
               </a:spcAft>
               <a:defRPr sz="2400" b="1">
                 <a:solidFill>
-                  <a:srgbClr val="191B20"/>
+                  <a:srgbClr val="F5F6FA"/>
                 </a:solidFill>
                 <a:latin typeface="Arial"/>
               </a:defRPr>
@@ -5234,13 +5468,13 @@
       </p:sp>
       <p:sp>
         <p:nvSpPr>
-          <p:cNvPr id="8" name="TextBox 7"/>
+          <p:cNvPr id="10" name="TextBox 9"/>
           <p:cNvSpPr txBox="1"/>
           <p:nvPr/>
         </p:nvSpPr>
         <p:spPr>
           <a:xfrm>
-            <a:off x="4965700" y="2171700"/>
+            <a:off x="4965700" y="2273300"/>
             <a:ext cx="6515100" cy="698500"/>
           </a:xfrm>
           <a:prstGeom prst="rect">
@@ -5263,7 +5497,7 @@
               </a:spcAft>
               <a:defRPr sz="2300" b="0">
                 <a:solidFill>
-                  <a:srgbClr val="626773"/>
+                  <a:srgbClr val="B7BFCC"/>
                 </a:solidFill>
                 <a:latin typeface="Arial"/>
               </a:defRPr>
@@ -5276,14 +5510,57 @@
       </p:sp>
       <p:sp>
         <p:nvSpPr>
-          <p:cNvPr id="9" name="TextBox 8"/>
+          <p:cNvPr id="11" name="Rectangle 10"/>
+          <p:cNvSpPr/>
+          <p:nvPr/>
+        </p:nvSpPr>
+        <p:spPr>
+          <a:xfrm>
+            <a:off x="609600" y="3035300"/>
+            <a:ext cx="609600" cy="482600"/>
+          </a:xfrm>
+          <a:prstGeom prst="rect">
+            <a:avLst/>
+          </a:prstGeom>
+          <a:solidFill>
+            <a:srgbClr val="1D222C"/>
+          </a:solidFill>
+          <a:ln>
+            <a:noFill/>
+          </a:ln>
+        </p:spPr>
+        <p:style>
+          <a:lnRef idx="1">
+            <a:schemeClr val="accent1"/>
+          </a:lnRef>
+          <a:fillRef idx="3">
+            <a:schemeClr val="accent1"/>
+          </a:fillRef>
+          <a:effectRef idx="2">
+            <a:schemeClr val="accent1"/>
+          </a:effectRef>
+          <a:fontRef idx="minor">
+            <a:schemeClr val="lt1"/>
+          </a:fontRef>
+        </p:style>
+        <p:txBody>
+          <a:bodyPr rtlCol="0" anchor="ctr"/>
+          <a:lstStyle/>
+          <a:p>
+            <a:pPr algn="ctr"/>
+          </a:p>
+        </p:txBody>
+      </p:sp>
+      <p:sp>
+        <p:nvSpPr>
+          <p:cNvPr id="12" name="TextBox 11"/>
           <p:cNvSpPr txBox="1"/>
           <p:nvPr/>
         </p:nvSpPr>
         <p:spPr>
           <a:xfrm>
-            <a:off x="711200" y="2971800"/>
-            <a:ext cx="482600" cy="355600"/>
+            <a:off x="736600" y="3111500"/>
+            <a:ext cx="482600" cy="368300"/>
           </a:xfrm>
           <a:prstGeom prst="rect">
             <a:avLst/>
@@ -5298,14 +5575,14 @@
           <a:p>
             <a:pPr>
               <a:lnSpc>
-                <a:spcPts val="2713"/>
+                <a:spcPts val="2477"/>
               </a:lnSpc>
               <a:spcAft>
                 <a:spcPts val="0"/>
               </a:spcAft>
-              <a:defRPr sz="2300" b="1">
+              <a:defRPr sz="2100" b="1">
                 <a:solidFill>
-                  <a:srgbClr val="E55024"/>
+                  <a:srgbClr val="FF885D"/>
                 </a:solidFill>
                 <a:latin typeface="Arial"/>
               </a:defRPr>
@@ -5318,14 +5595,14 @@
       </p:sp>
       <p:sp>
         <p:nvSpPr>
-          <p:cNvPr id="10" name="TextBox 9"/>
+          <p:cNvPr id="13" name="TextBox 12"/>
           <p:cNvSpPr txBox="1"/>
           <p:nvPr/>
         </p:nvSpPr>
         <p:spPr>
           <a:xfrm>
-            <a:off x="1346200" y="2971800"/>
-            <a:ext cx="3479800" cy="685800"/>
+            <a:off x="1422400" y="3073400"/>
+            <a:ext cx="3403600" cy="685800"/>
           </a:xfrm>
           <a:prstGeom prst="rect">
             <a:avLst/>
@@ -5347,7 +5624,7 @@
               </a:spcAft>
               <a:defRPr sz="2400" b="1">
                 <a:solidFill>
-                  <a:srgbClr val="191B20"/>
+                  <a:srgbClr val="F5F6FA"/>
                 </a:solidFill>
                 <a:latin typeface="Arial"/>
               </a:defRPr>
@@ -5360,13 +5637,13 @@
       </p:sp>
       <p:sp>
         <p:nvSpPr>
-          <p:cNvPr id="11" name="TextBox 10"/>
+          <p:cNvPr id="14" name="TextBox 13"/>
           <p:cNvSpPr txBox="1"/>
           <p:nvPr/>
         </p:nvSpPr>
         <p:spPr>
           <a:xfrm>
-            <a:off x="4965700" y="2997200"/>
+            <a:off x="4965700" y="3098800"/>
             <a:ext cx="6515100" cy="698500"/>
           </a:xfrm>
           <a:prstGeom prst="rect">
@@ -5389,7 +5666,7 @@
               </a:spcAft>
               <a:defRPr sz="2300" b="0">
                 <a:solidFill>
-                  <a:srgbClr val="626773"/>
+                  <a:srgbClr val="B7BFCC"/>
                 </a:solidFill>
                 <a:latin typeface="Arial"/>
               </a:defRPr>
@@ -5402,14 +5679,57 @@
       </p:sp>
       <p:sp>
         <p:nvSpPr>
-          <p:cNvPr id="12" name="TextBox 11"/>
+          <p:cNvPr id="15" name="Rectangle 14"/>
+          <p:cNvSpPr/>
+          <p:nvPr/>
+        </p:nvSpPr>
+        <p:spPr>
+          <a:xfrm>
+            <a:off x="609600" y="3860800"/>
+            <a:ext cx="609600" cy="482600"/>
+          </a:xfrm>
+          <a:prstGeom prst="rect">
+            <a:avLst/>
+          </a:prstGeom>
+          <a:solidFill>
+            <a:srgbClr val="1D222C"/>
+          </a:solidFill>
+          <a:ln>
+            <a:noFill/>
+          </a:ln>
+        </p:spPr>
+        <p:style>
+          <a:lnRef idx="1">
+            <a:schemeClr val="accent1"/>
+          </a:lnRef>
+          <a:fillRef idx="3">
+            <a:schemeClr val="accent1"/>
+          </a:fillRef>
+          <a:effectRef idx="2">
+            <a:schemeClr val="accent1"/>
+          </a:effectRef>
+          <a:fontRef idx="minor">
+            <a:schemeClr val="lt1"/>
+          </a:fontRef>
+        </p:style>
+        <p:txBody>
+          <a:bodyPr rtlCol="0" anchor="ctr"/>
+          <a:lstStyle/>
+          <a:p>
+            <a:pPr algn="ctr"/>
+          </a:p>
+        </p:txBody>
+      </p:sp>
+      <p:sp>
+        <p:nvSpPr>
+          <p:cNvPr id="16" name="TextBox 15"/>
           <p:cNvSpPr txBox="1"/>
           <p:nvPr/>
         </p:nvSpPr>
         <p:spPr>
           <a:xfrm>
-            <a:off x="711200" y="3797300"/>
-            <a:ext cx="482600" cy="355600"/>
+            <a:off x="736600" y="3937000"/>
+            <a:ext cx="482600" cy="368300"/>
           </a:xfrm>
           <a:prstGeom prst="rect">
             <a:avLst/>
@@ -5424,14 +5744,14 @@
           <a:p>
             <a:pPr>
               <a:lnSpc>
-                <a:spcPts val="2713"/>
+                <a:spcPts val="2477"/>
               </a:lnSpc>
               <a:spcAft>
                 <a:spcPts val="0"/>
               </a:spcAft>
-              <a:defRPr sz="2300" b="1">
+              <a:defRPr sz="2100" b="1">
                 <a:solidFill>
-                  <a:srgbClr val="E55024"/>
+                  <a:srgbClr val="FF885D"/>
                 </a:solidFill>
                 <a:latin typeface="Arial"/>
               </a:defRPr>
@@ -5444,14 +5764,14 @@
       </p:sp>
       <p:sp>
         <p:nvSpPr>
-          <p:cNvPr id="13" name="TextBox 12"/>
+          <p:cNvPr id="17" name="TextBox 16"/>
           <p:cNvSpPr txBox="1"/>
           <p:nvPr/>
         </p:nvSpPr>
         <p:spPr>
           <a:xfrm>
-            <a:off x="1346200" y="3797300"/>
-            <a:ext cx="3479800" cy="685800"/>
+            <a:off x="1422400" y="3898900"/>
+            <a:ext cx="3403600" cy="685800"/>
           </a:xfrm>
           <a:prstGeom prst="rect">
             <a:avLst/>
@@ -5473,7 +5793,7 @@
               </a:spcAft>
               <a:defRPr sz="2400" b="1">
                 <a:solidFill>
-                  <a:srgbClr val="191B20"/>
+                  <a:srgbClr val="F5F6FA"/>
                 </a:solidFill>
                 <a:latin typeface="Arial"/>
               </a:defRPr>
@@ -5486,13 +5806,13 @@
       </p:sp>
       <p:sp>
         <p:nvSpPr>
-          <p:cNvPr id="14" name="TextBox 13"/>
+          <p:cNvPr id="18" name="TextBox 17"/>
           <p:cNvSpPr txBox="1"/>
           <p:nvPr/>
         </p:nvSpPr>
         <p:spPr>
           <a:xfrm>
-            <a:off x="4965700" y="3822700"/>
+            <a:off x="4965700" y="3924300"/>
             <a:ext cx="6515100" cy="698500"/>
           </a:xfrm>
           <a:prstGeom prst="rect">
@@ -5515,7 +5835,7 @@
               </a:spcAft>
               <a:defRPr sz="2300" b="0">
                 <a:solidFill>
-                  <a:srgbClr val="626773"/>
+                  <a:srgbClr val="B7BFCC"/>
                 </a:solidFill>
                 <a:latin typeface="Arial"/>
               </a:defRPr>
@@ -5528,14 +5848,57 @@
       </p:sp>
       <p:sp>
         <p:nvSpPr>
-          <p:cNvPr id="15" name="TextBox 14"/>
+          <p:cNvPr id="19" name="Rectangle 18"/>
+          <p:cNvSpPr/>
+          <p:nvPr/>
+        </p:nvSpPr>
+        <p:spPr>
+          <a:xfrm>
+            <a:off x="609600" y="4686300"/>
+            <a:ext cx="609600" cy="482600"/>
+          </a:xfrm>
+          <a:prstGeom prst="rect">
+            <a:avLst/>
+          </a:prstGeom>
+          <a:solidFill>
+            <a:srgbClr val="1D222C"/>
+          </a:solidFill>
+          <a:ln>
+            <a:noFill/>
+          </a:ln>
+        </p:spPr>
+        <p:style>
+          <a:lnRef idx="1">
+            <a:schemeClr val="accent1"/>
+          </a:lnRef>
+          <a:fillRef idx="3">
+            <a:schemeClr val="accent1"/>
+          </a:fillRef>
+          <a:effectRef idx="2">
+            <a:schemeClr val="accent1"/>
+          </a:effectRef>
+          <a:fontRef idx="minor">
+            <a:schemeClr val="lt1"/>
+          </a:fontRef>
+        </p:style>
+        <p:txBody>
+          <a:bodyPr rtlCol="0" anchor="ctr"/>
+          <a:lstStyle/>
+          <a:p>
+            <a:pPr algn="ctr"/>
+          </a:p>
+        </p:txBody>
+      </p:sp>
+      <p:sp>
+        <p:nvSpPr>
+          <p:cNvPr id="20" name="TextBox 19"/>
           <p:cNvSpPr txBox="1"/>
           <p:nvPr/>
         </p:nvSpPr>
         <p:spPr>
           <a:xfrm>
-            <a:off x="711200" y="4622800"/>
-            <a:ext cx="482600" cy="355600"/>
+            <a:off x="736600" y="4762500"/>
+            <a:ext cx="482600" cy="368300"/>
           </a:xfrm>
           <a:prstGeom prst="rect">
             <a:avLst/>
@@ -5550,14 +5913,14 @@
           <a:p>
             <a:pPr>
               <a:lnSpc>
-                <a:spcPts val="2713"/>
+                <a:spcPts val="2477"/>
               </a:lnSpc>
               <a:spcAft>
                 <a:spcPts val="0"/>
               </a:spcAft>
-              <a:defRPr sz="2300" b="1">
+              <a:defRPr sz="2100" b="1">
                 <a:solidFill>
-                  <a:srgbClr val="E55024"/>
+                  <a:srgbClr val="FF885D"/>
                 </a:solidFill>
                 <a:latin typeface="Arial"/>
               </a:defRPr>
@@ -5570,14 +5933,14 @@
       </p:sp>
       <p:sp>
         <p:nvSpPr>
-          <p:cNvPr id="16" name="TextBox 15"/>
+          <p:cNvPr id="21" name="TextBox 20"/>
           <p:cNvSpPr txBox="1"/>
           <p:nvPr/>
         </p:nvSpPr>
         <p:spPr>
           <a:xfrm>
-            <a:off x="1346200" y="4622800"/>
-            <a:ext cx="3479800" cy="685800"/>
+            <a:off x="1422400" y="4724400"/>
+            <a:ext cx="3403600" cy="685800"/>
           </a:xfrm>
           <a:prstGeom prst="rect">
             <a:avLst/>
@@ -5599,7 +5962,7 @@
               </a:spcAft>
               <a:defRPr sz="2400" b="1">
                 <a:solidFill>
-                  <a:srgbClr val="191B20"/>
+                  <a:srgbClr val="F5F6FA"/>
                 </a:solidFill>
                 <a:latin typeface="Arial"/>
               </a:defRPr>
@@ -5612,13 +5975,13 @@
       </p:sp>
       <p:sp>
         <p:nvSpPr>
-          <p:cNvPr id="17" name="TextBox 16"/>
+          <p:cNvPr id="22" name="TextBox 21"/>
           <p:cNvSpPr txBox="1"/>
           <p:nvPr/>
         </p:nvSpPr>
         <p:spPr>
           <a:xfrm>
-            <a:off x="4965700" y="4648200"/>
+            <a:off x="4965700" y="4749800"/>
             <a:ext cx="6515100" cy="698500"/>
           </a:xfrm>
           <a:prstGeom prst="rect">
@@ -5641,7 +6004,7 @@
               </a:spcAft>
               <a:defRPr sz="2300" b="0">
                 <a:solidFill>
-                  <a:srgbClr val="626773"/>
+                  <a:srgbClr val="B7BFCC"/>
                 </a:solidFill>
                 <a:latin typeface="Arial"/>
               </a:defRPr>
@@ -5654,14 +6017,14 @@
       </p:sp>
       <p:sp>
         <p:nvSpPr>
-          <p:cNvPr id="18" name="TextBox 17"/>
+          <p:cNvPr id="23" name="TextBox 22"/>
           <p:cNvSpPr txBox="1"/>
           <p:nvPr/>
         </p:nvSpPr>
         <p:spPr>
           <a:xfrm>
-            <a:off x="711200" y="5473700"/>
-            <a:ext cx="10769600" cy="596900"/>
+            <a:off x="609600" y="5651500"/>
+            <a:ext cx="10972800" cy="508000"/>
           </a:xfrm>
           <a:prstGeom prst="rect">
             <a:avLst/>
@@ -5683,7 +6046,7 @@
               </a:spcAft>
               <a:defRPr sz="1800" b="0">
                 <a:solidFill>
-                  <a:srgbClr val="626773"/>
+                  <a:srgbClr val="B7BFCC"/>
                 </a:solidFill>
                 <a:latin typeface="Arial"/>
               </a:defRPr>
@@ -5696,20 +6059,20 @@
       </p:sp>
       <p:sp>
         <p:nvSpPr>
-          <p:cNvPr id="19" name="Rectangle 18"/>
+          <p:cNvPr id="24" name="Rectangle 23"/>
           <p:cNvSpPr/>
           <p:nvPr/>
         </p:nvSpPr>
         <p:spPr>
           <a:xfrm>
-            <a:off x="711200" y="6248400"/>
-            <a:ext cx="10769600" cy="12700"/>
+            <a:off x="609600" y="6273800"/>
+            <a:ext cx="10972800" cy="12700"/>
           </a:xfrm>
           <a:prstGeom prst="rect">
             <a:avLst/>
           </a:prstGeom>
           <a:solidFill>
-            <a:srgbClr val="DFE2E7"/>
+            <a:srgbClr val="3D4552"/>
           </a:solidFill>
           <a:ln>
             <a:noFill/>
@@ -5739,14 +6102,14 @@
       </p:sp>
       <p:sp>
         <p:nvSpPr>
-          <p:cNvPr id="20" name="TextBox 19"/>
+          <p:cNvPr id="25" name="TextBox 24"/>
           <p:cNvSpPr txBox="1"/>
           <p:nvPr/>
         </p:nvSpPr>
         <p:spPr>
           <a:xfrm>
-            <a:off x="711200" y="6438900"/>
-            <a:ext cx="9652000" cy="203200"/>
+            <a:off x="609600" y="6464300"/>
+            <a:ext cx="9906000" cy="203200"/>
           </a:xfrm>
           <a:prstGeom prst="rect">
             <a:avLst/>
@@ -5768,7 +6131,7 @@
               </a:spcAft>
               <a:defRPr sz="1100" b="0">
                 <a:solidFill>
-                  <a:srgbClr val="626773"/>
+                  <a:srgbClr val="B7BFCC"/>
                 </a:solidFill>
                 <a:latin typeface="Arial"/>
               </a:defRPr>
@@ -5781,14 +6144,14 @@
       </p:sp>
       <p:sp>
         <p:nvSpPr>
-          <p:cNvPr id="21" name="TextBox 20"/>
+          <p:cNvPr id="26" name="TextBox 25"/>
           <p:cNvSpPr txBox="1"/>
           <p:nvPr/>
         </p:nvSpPr>
         <p:spPr>
           <a:xfrm>
-            <a:off x="10807700" y="6413500"/>
-            <a:ext cx="673100" cy="215900"/>
+            <a:off x="10972800" y="6438900"/>
+            <a:ext cx="609600" cy="215900"/>
           </a:xfrm>
           <a:prstGeom prst="rect">
             <a:avLst/>
@@ -5810,7 +6173,7 @@
               </a:spcAft>
               <a:defRPr sz="1200" b="0">
                 <a:solidFill>
-                  <a:srgbClr val="626773"/>
+                  <a:srgbClr val="B7BFCC"/>
                 </a:solidFill>
                 <a:latin typeface="Arial"/>
               </a:defRPr>
@@ -5854,7 +6217,7 @@
             <a:avLst/>
           </a:prstGeom>
           <a:solidFill>
-            <a:srgbClr val="FFFFFF"/>
+            <a:srgbClr val="101217"/>
           </a:solidFill>
           <a:ln>
             <a:noFill/>
@@ -5884,14 +6247,57 @@
       </p:sp>
       <p:sp>
         <p:nvSpPr>
-          <p:cNvPr id="3" name="TextBox 2"/>
+          <p:cNvPr id="3" name="Rectangle 2"/>
+          <p:cNvSpPr/>
+          <p:nvPr/>
+        </p:nvSpPr>
+        <p:spPr>
+          <a:xfrm>
+            <a:off x="0" y="0"/>
+            <a:ext cx="101600" cy="6858000"/>
+          </a:xfrm>
+          <a:prstGeom prst="rect">
+            <a:avLst/>
+          </a:prstGeom>
+          <a:solidFill>
+            <a:srgbClr val="FF885D"/>
+          </a:solidFill>
+          <a:ln>
+            <a:noFill/>
+          </a:ln>
+        </p:spPr>
+        <p:style>
+          <a:lnRef idx="1">
+            <a:schemeClr val="accent1"/>
+          </a:lnRef>
+          <a:fillRef idx="3">
+            <a:schemeClr val="accent1"/>
+          </a:fillRef>
+          <a:effectRef idx="2">
+            <a:schemeClr val="accent1"/>
+          </a:effectRef>
+          <a:fontRef idx="minor">
+            <a:schemeClr val="lt1"/>
+          </a:fontRef>
+        </p:style>
+        <p:txBody>
+          <a:bodyPr rtlCol="0" anchor="ctr"/>
+          <a:lstStyle/>
+          <a:p>
+            <a:pPr algn="ctr"/>
+          </a:p>
+        </p:txBody>
+      </p:sp>
+      <p:sp>
+        <p:nvSpPr>
+          <p:cNvPr id="4" name="TextBox 3"/>
           <p:cNvSpPr txBox="1"/>
           <p:nvPr/>
         </p:nvSpPr>
         <p:spPr>
           <a:xfrm>
-            <a:off x="711200" y="457200"/>
-            <a:ext cx="10769600" cy="228600"/>
+            <a:off x="609600" y="444500"/>
+            <a:ext cx="10972800" cy="279400"/>
           </a:xfrm>
           <a:prstGeom prst="rect">
             <a:avLst/>
@@ -5913,7 +6319,7 @@
               </a:spcAft>
               <a:defRPr sz="1300" b="1">
                 <a:solidFill>
-                  <a:srgbClr val="626773"/>
+                  <a:srgbClr val="B7BFCC"/>
                 </a:solidFill>
                 <a:latin typeface="Arial"/>
               </a:defRPr>
@@ -5926,20 +6332,20 @@
       </p:sp>
       <p:sp>
         <p:nvSpPr>
-          <p:cNvPr id="4" name="Rectangle 3"/>
+          <p:cNvPr id="5" name="Rectangle 4"/>
           <p:cNvSpPr/>
           <p:nvPr/>
         </p:nvSpPr>
         <p:spPr>
           <a:xfrm>
-            <a:off x="711200" y="876300"/>
-            <a:ext cx="622300" cy="50800"/>
+            <a:off x="609600" y="876300"/>
+            <a:ext cx="685800" cy="50800"/>
           </a:xfrm>
           <a:prstGeom prst="rect">
             <a:avLst/>
           </a:prstGeom>
           <a:solidFill>
-            <a:srgbClr val="E55024"/>
+            <a:srgbClr val="FF885D"/>
           </a:solidFill>
           <a:ln>
             <a:noFill/>
@@ -5969,14 +6375,14 @@
       </p:sp>
       <p:sp>
         <p:nvSpPr>
-          <p:cNvPr id="5" name="TextBox 4"/>
+          <p:cNvPr id="6" name="TextBox 5"/>
           <p:cNvSpPr txBox="1"/>
           <p:nvPr/>
         </p:nvSpPr>
         <p:spPr>
           <a:xfrm>
-            <a:off x="685800" y="1257300"/>
-            <a:ext cx="10795000" cy="1168400"/>
+            <a:off x="584200" y="1206500"/>
+            <a:ext cx="10998200" cy="1130300"/>
           </a:xfrm>
           <a:prstGeom prst="rect">
             <a:avLst/>
@@ -5998,7 +6404,7 @@
               </a:spcAft>
               <a:defRPr sz="3600" b="1">
                 <a:solidFill>
-                  <a:srgbClr val="191B20"/>
+                  <a:srgbClr val="F5F6FA"/>
                 </a:solidFill>
                 <a:latin typeface="Arial"/>
               </a:defRPr>
@@ -6011,14 +6417,57 @@
       </p:sp>
       <p:sp>
         <p:nvSpPr>
-          <p:cNvPr id="6" name="TextBox 5"/>
+          <p:cNvPr id="7" name="Rectangle 6"/>
+          <p:cNvSpPr/>
+          <p:nvPr/>
+        </p:nvSpPr>
+        <p:spPr>
+          <a:xfrm>
+            <a:off x="609600" y="2209800"/>
+            <a:ext cx="609600" cy="482600"/>
+          </a:xfrm>
+          <a:prstGeom prst="rect">
+            <a:avLst/>
+          </a:prstGeom>
+          <a:solidFill>
+            <a:srgbClr val="1D222C"/>
+          </a:solidFill>
+          <a:ln>
+            <a:noFill/>
+          </a:ln>
+        </p:spPr>
+        <p:style>
+          <a:lnRef idx="1">
+            <a:schemeClr val="accent1"/>
+          </a:lnRef>
+          <a:fillRef idx="3">
+            <a:schemeClr val="accent1"/>
+          </a:fillRef>
+          <a:effectRef idx="2">
+            <a:schemeClr val="accent1"/>
+          </a:effectRef>
+          <a:fontRef idx="minor">
+            <a:schemeClr val="lt1"/>
+          </a:fontRef>
+        </p:style>
+        <p:txBody>
+          <a:bodyPr rtlCol="0" anchor="ctr"/>
+          <a:lstStyle/>
+          <a:p>
+            <a:pPr algn="ctr"/>
+          </a:p>
+        </p:txBody>
+      </p:sp>
+      <p:sp>
+        <p:nvSpPr>
+          <p:cNvPr id="8" name="TextBox 7"/>
           <p:cNvSpPr txBox="1"/>
           <p:nvPr/>
         </p:nvSpPr>
         <p:spPr>
           <a:xfrm>
-            <a:off x="711200" y="2146300"/>
-            <a:ext cx="482600" cy="355600"/>
+            <a:off x="736600" y="2286000"/>
+            <a:ext cx="482600" cy="368300"/>
           </a:xfrm>
           <a:prstGeom prst="rect">
             <a:avLst/>
@@ -6033,14 +6482,14 @@
           <a:p>
             <a:pPr>
               <a:lnSpc>
-                <a:spcPts val="2713"/>
+                <a:spcPts val="2477"/>
               </a:lnSpc>
               <a:spcAft>
                 <a:spcPts val="0"/>
               </a:spcAft>
-              <a:defRPr sz="2300" b="1">
+              <a:defRPr sz="2100" b="1">
                 <a:solidFill>
-                  <a:srgbClr val="E55024"/>
+                  <a:srgbClr val="FF885D"/>
                 </a:solidFill>
                 <a:latin typeface="Arial"/>
               </a:defRPr>
@@ -6053,14 +6502,14 @@
       </p:sp>
       <p:sp>
         <p:nvSpPr>
-          <p:cNvPr id="7" name="TextBox 6"/>
+          <p:cNvPr id="9" name="TextBox 8"/>
           <p:cNvSpPr txBox="1"/>
           <p:nvPr/>
         </p:nvSpPr>
         <p:spPr>
           <a:xfrm>
-            <a:off x="1346200" y="2146300"/>
-            <a:ext cx="3479800" cy="685800"/>
+            <a:off x="1422400" y="2247900"/>
+            <a:ext cx="3403600" cy="685800"/>
           </a:xfrm>
           <a:prstGeom prst="rect">
             <a:avLst/>
@@ -6082,7 +6531,7 @@
               </a:spcAft>
               <a:defRPr sz="2400" b="1">
                 <a:solidFill>
-                  <a:srgbClr val="191B20"/>
+                  <a:srgbClr val="F5F6FA"/>
                 </a:solidFill>
                 <a:latin typeface="Arial"/>
               </a:defRPr>
@@ -6095,13 +6544,13 @@
       </p:sp>
       <p:sp>
         <p:nvSpPr>
-          <p:cNvPr id="8" name="TextBox 7"/>
+          <p:cNvPr id="10" name="TextBox 9"/>
           <p:cNvSpPr txBox="1"/>
           <p:nvPr/>
         </p:nvSpPr>
         <p:spPr>
           <a:xfrm>
-            <a:off x="4965700" y="2171700"/>
+            <a:off x="4965700" y="2273300"/>
             <a:ext cx="6515100" cy="698500"/>
           </a:xfrm>
           <a:prstGeom prst="rect">
@@ -6124,7 +6573,7 @@
               </a:spcAft>
               <a:defRPr sz="2300" b="0">
                 <a:solidFill>
-                  <a:srgbClr val="626773"/>
+                  <a:srgbClr val="B7BFCC"/>
                 </a:solidFill>
                 <a:latin typeface="Arial"/>
               </a:defRPr>
@@ -6137,14 +6586,57 @@
       </p:sp>
       <p:sp>
         <p:nvSpPr>
-          <p:cNvPr id="9" name="TextBox 8"/>
+          <p:cNvPr id="11" name="Rectangle 10"/>
+          <p:cNvSpPr/>
+          <p:nvPr/>
+        </p:nvSpPr>
+        <p:spPr>
+          <a:xfrm>
+            <a:off x="609600" y="3035300"/>
+            <a:ext cx="609600" cy="482600"/>
+          </a:xfrm>
+          <a:prstGeom prst="rect">
+            <a:avLst/>
+          </a:prstGeom>
+          <a:solidFill>
+            <a:srgbClr val="1D222C"/>
+          </a:solidFill>
+          <a:ln>
+            <a:noFill/>
+          </a:ln>
+        </p:spPr>
+        <p:style>
+          <a:lnRef idx="1">
+            <a:schemeClr val="accent1"/>
+          </a:lnRef>
+          <a:fillRef idx="3">
+            <a:schemeClr val="accent1"/>
+          </a:fillRef>
+          <a:effectRef idx="2">
+            <a:schemeClr val="accent1"/>
+          </a:effectRef>
+          <a:fontRef idx="minor">
+            <a:schemeClr val="lt1"/>
+          </a:fontRef>
+        </p:style>
+        <p:txBody>
+          <a:bodyPr rtlCol="0" anchor="ctr"/>
+          <a:lstStyle/>
+          <a:p>
+            <a:pPr algn="ctr"/>
+          </a:p>
+        </p:txBody>
+      </p:sp>
+      <p:sp>
+        <p:nvSpPr>
+          <p:cNvPr id="12" name="TextBox 11"/>
           <p:cNvSpPr txBox="1"/>
           <p:nvPr/>
         </p:nvSpPr>
         <p:spPr>
           <a:xfrm>
-            <a:off x="711200" y="2971800"/>
-            <a:ext cx="482600" cy="355600"/>
+            <a:off x="736600" y="3111500"/>
+            <a:ext cx="482600" cy="368300"/>
           </a:xfrm>
           <a:prstGeom prst="rect">
             <a:avLst/>
@@ -6159,14 +6651,14 @@
           <a:p>
             <a:pPr>
               <a:lnSpc>
-                <a:spcPts val="2713"/>
+                <a:spcPts val="2477"/>
               </a:lnSpc>
               <a:spcAft>
                 <a:spcPts val="0"/>
               </a:spcAft>
-              <a:defRPr sz="2300" b="1">
+              <a:defRPr sz="2100" b="1">
                 <a:solidFill>
-                  <a:srgbClr val="E55024"/>
+                  <a:srgbClr val="FF885D"/>
                 </a:solidFill>
                 <a:latin typeface="Arial"/>
               </a:defRPr>
@@ -6179,14 +6671,14 @@
       </p:sp>
       <p:sp>
         <p:nvSpPr>
-          <p:cNvPr id="10" name="TextBox 9"/>
+          <p:cNvPr id="13" name="TextBox 12"/>
           <p:cNvSpPr txBox="1"/>
           <p:nvPr/>
         </p:nvSpPr>
         <p:spPr>
           <a:xfrm>
-            <a:off x="1346200" y="2971800"/>
-            <a:ext cx="3479800" cy="685800"/>
+            <a:off x="1422400" y="3073400"/>
+            <a:ext cx="3403600" cy="685800"/>
           </a:xfrm>
           <a:prstGeom prst="rect">
             <a:avLst/>
@@ -6208,7 +6700,7 @@
               </a:spcAft>
               <a:defRPr sz="2400" b="1">
                 <a:solidFill>
-                  <a:srgbClr val="191B20"/>
+                  <a:srgbClr val="F5F6FA"/>
                 </a:solidFill>
                 <a:latin typeface="Arial"/>
               </a:defRPr>
@@ -6221,13 +6713,13 @@
       </p:sp>
       <p:sp>
         <p:nvSpPr>
-          <p:cNvPr id="11" name="TextBox 10"/>
+          <p:cNvPr id="14" name="TextBox 13"/>
           <p:cNvSpPr txBox="1"/>
           <p:nvPr/>
         </p:nvSpPr>
         <p:spPr>
           <a:xfrm>
-            <a:off x="4965700" y="2997200"/>
+            <a:off x="4965700" y="3098800"/>
             <a:ext cx="6515100" cy="698500"/>
           </a:xfrm>
           <a:prstGeom prst="rect">
@@ -6250,7 +6742,7 @@
               </a:spcAft>
               <a:defRPr sz="2300" b="0">
                 <a:solidFill>
-                  <a:srgbClr val="626773"/>
+                  <a:srgbClr val="B7BFCC"/>
                 </a:solidFill>
                 <a:latin typeface="Arial"/>
               </a:defRPr>
@@ -6263,14 +6755,57 @@
       </p:sp>
       <p:sp>
         <p:nvSpPr>
-          <p:cNvPr id="12" name="TextBox 11"/>
+          <p:cNvPr id="15" name="Rectangle 14"/>
+          <p:cNvSpPr/>
+          <p:nvPr/>
+        </p:nvSpPr>
+        <p:spPr>
+          <a:xfrm>
+            <a:off x="609600" y="3860800"/>
+            <a:ext cx="609600" cy="482600"/>
+          </a:xfrm>
+          <a:prstGeom prst="rect">
+            <a:avLst/>
+          </a:prstGeom>
+          <a:solidFill>
+            <a:srgbClr val="1D222C"/>
+          </a:solidFill>
+          <a:ln>
+            <a:noFill/>
+          </a:ln>
+        </p:spPr>
+        <p:style>
+          <a:lnRef idx="1">
+            <a:schemeClr val="accent1"/>
+          </a:lnRef>
+          <a:fillRef idx="3">
+            <a:schemeClr val="accent1"/>
+          </a:fillRef>
+          <a:effectRef idx="2">
+            <a:schemeClr val="accent1"/>
+          </a:effectRef>
+          <a:fontRef idx="minor">
+            <a:schemeClr val="lt1"/>
+          </a:fontRef>
+        </p:style>
+        <p:txBody>
+          <a:bodyPr rtlCol="0" anchor="ctr"/>
+          <a:lstStyle/>
+          <a:p>
+            <a:pPr algn="ctr"/>
+          </a:p>
+        </p:txBody>
+      </p:sp>
+      <p:sp>
+        <p:nvSpPr>
+          <p:cNvPr id="16" name="TextBox 15"/>
           <p:cNvSpPr txBox="1"/>
           <p:nvPr/>
         </p:nvSpPr>
         <p:spPr>
           <a:xfrm>
-            <a:off x="711200" y="3797300"/>
-            <a:ext cx="482600" cy="355600"/>
+            <a:off x="736600" y="3937000"/>
+            <a:ext cx="482600" cy="368300"/>
           </a:xfrm>
           <a:prstGeom prst="rect">
             <a:avLst/>
@@ -6285,14 +6820,14 @@
           <a:p>
             <a:pPr>
               <a:lnSpc>
-                <a:spcPts val="2713"/>
+                <a:spcPts val="2477"/>
               </a:lnSpc>
               <a:spcAft>
                 <a:spcPts val="0"/>
               </a:spcAft>
-              <a:defRPr sz="2300" b="1">
+              <a:defRPr sz="2100" b="1">
                 <a:solidFill>
-                  <a:srgbClr val="E55024"/>
+                  <a:srgbClr val="FF885D"/>
                 </a:solidFill>
                 <a:latin typeface="Arial"/>
               </a:defRPr>
@@ -6305,14 +6840,14 @@
       </p:sp>
       <p:sp>
         <p:nvSpPr>
-          <p:cNvPr id="13" name="TextBox 12"/>
+          <p:cNvPr id="17" name="TextBox 16"/>
           <p:cNvSpPr txBox="1"/>
           <p:nvPr/>
         </p:nvSpPr>
         <p:spPr>
           <a:xfrm>
-            <a:off x="1346200" y="3797300"/>
-            <a:ext cx="3479800" cy="685800"/>
+            <a:off x="1422400" y="3898900"/>
+            <a:ext cx="3403600" cy="685800"/>
           </a:xfrm>
           <a:prstGeom prst="rect">
             <a:avLst/>
@@ -6334,7 +6869,7 @@
               </a:spcAft>
               <a:defRPr sz="2400" b="1">
                 <a:solidFill>
-                  <a:srgbClr val="191B20"/>
+                  <a:srgbClr val="F5F6FA"/>
                 </a:solidFill>
                 <a:latin typeface="Arial"/>
               </a:defRPr>
@@ -6347,13 +6882,13 @@
       </p:sp>
       <p:sp>
         <p:nvSpPr>
-          <p:cNvPr id="14" name="TextBox 13"/>
+          <p:cNvPr id="18" name="TextBox 17"/>
           <p:cNvSpPr txBox="1"/>
           <p:nvPr/>
         </p:nvSpPr>
         <p:spPr>
           <a:xfrm>
-            <a:off x="4965700" y="3822700"/>
+            <a:off x="4965700" y="3924300"/>
             <a:ext cx="6515100" cy="698500"/>
           </a:xfrm>
           <a:prstGeom prst="rect">
@@ -6376,7 +6911,7 @@
               </a:spcAft>
               <a:defRPr sz="2300" b="0">
                 <a:solidFill>
-                  <a:srgbClr val="626773"/>
+                  <a:srgbClr val="B7BFCC"/>
                 </a:solidFill>
                 <a:latin typeface="Arial"/>
               </a:defRPr>
@@ -6389,14 +6924,57 @@
       </p:sp>
       <p:sp>
         <p:nvSpPr>
-          <p:cNvPr id="15" name="TextBox 14"/>
+          <p:cNvPr id="19" name="Rectangle 18"/>
+          <p:cNvSpPr/>
+          <p:nvPr/>
+        </p:nvSpPr>
+        <p:spPr>
+          <a:xfrm>
+            <a:off x="609600" y="4686300"/>
+            <a:ext cx="609600" cy="482600"/>
+          </a:xfrm>
+          <a:prstGeom prst="rect">
+            <a:avLst/>
+          </a:prstGeom>
+          <a:solidFill>
+            <a:srgbClr val="1D222C"/>
+          </a:solidFill>
+          <a:ln>
+            <a:noFill/>
+          </a:ln>
+        </p:spPr>
+        <p:style>
+          <a:lnRef idx="1">
+            <a:schemeClr val="accent1"/>
+          </a:lnRef>
+          <a:fillRef idx="3">
+            <a:schemeClr val="accent1"/>
+          </a:fillRef>
+          <a:effectRef idx="2">
+            <a:schemeClr val="accent1"/>
+          </a:effectRef>
+          <a:fontRef idx="minor">
+            <a:schemeClr val="lt1"/>
+          </a:fontRef>
+        </p:style>
+        <p:txBody>
+          <a:bodyPr rtlCol="0" anchor="ctr"/>
+          <a:lstStyle/>
+          <a:p>
+            <a:pPr algn="ctr"/>
+          </a:p>
+        </p:txBody>
+      </p:sp>
+      <p:sp>
+        <p:nvSpPr>
+          <p:cNvPr id="20" name="TextBox 19"/>
           <p:cNvSpPr txBox="1"/>
           <p:nvPr/>
         </p:nvSpPr>
         <p:spPr>
           <a:xfrm>
-            <a:off x="711200" y="4622800"/>
-            <a:ext cx="482600" cy="355600"/>
+            <a:off x="736600" y="4762500"/>
+            <a:ext cx="482600" cy="368300"/>
           </a:xfrm>
           <a:prstGeom prst="rect">
             <a:avLst/>
@@ -6411,14 +6989,14 @@
           <a:p>
             <a:pPr>
               <a:lnSpc>
-                <a:spcPts val="2713"/>
+                <a:spcPts val="2477"/>
               </a:lnSpc>
               <a:spcAft>
                 <a:spcPts val="0"/>
               </a:spcAft>
-              <a:defRPr sz="2300" b="1">
+              <a:defRPr sz="2100" b="1">
                 <a:solidFill>
-                  <a:srgbClr val="E55024"/>
+                  <a:srgbClr val="FF885D"/>
                 </a:solidFill>
                 <a:latin typeface="Arial"/>
               </a:defRPr>
@@ -6431,14 +7009,14 @@
       </p:sp>
       <p:sp>
         <p:nvSpPr>
-          <p:cNvPr id="16" name="TextBox 15"/>
+          <p:cNvPr id="21" name="TextBox 20"/>
           <p:cNvSpPr txBox="1"/>
           <p:nvPr/>
         </p:nvSpPr>
         <p:spPr>
           <a:xfrm>
-            <a:off x="1346200" y="4622800"/>
-            <a:ext cx="3479800" cy="685800"/>
+            <a:off x="1422400" y="4724400"/>
+            <a:ext cx="3403600" cy="685800"/>
           </a:xfrm>
           <a:prstGeom prst="rect">
             <a:avLst/>
@@ -6460,7 +7038,7 @@
               </a:spcAft>
               <a:defRPr sz="2400" b="1">
                 <a:solidFill>
-                  <a:srgbClr val="191B20"/>
+                  <a:srgbClr val="F5F6FA"/>
                 </a:solidFill>
                 <a:latin typeface="Arial"/>
               </a:defRPr>
@@ -6473,13 +7051,13 @@
       </p:sp>
       <p:sp>
         <p:nvSpPr>
-          <p:cNvPr id="17" name="TextBox 16"/>
+          <p:cNvPr id="22" name="TextBox 21"/>
           <p:cNvSpPr txBox="1"/>
           <p:nvPr/>
         </p:nvSpPr>
         <p:spPr>
           <a:xfrm>
-            <a:off x="4965700" y="4648200"/>
+            <a:off x="4965700" y="4749800"/>
             <a:ext cx="6515100" cy="698500"/>
           </a:xfrm>
           <a:prstGeom prst="rect">
@@ -6502,7 +7080,7 @@
               </a:spcAft>
               <a:defRPr sz="2300" b="0">
                 <a:solidFill>
-                  <a:srgbClr val="626773"/>
+                  <a:srgbClr val="B7BFCC"/>
                 </a:solidFill>
                 <a:latin typeface="Arial"/>
               </a:defRPr>
@@ -6515,14 +7093,14 @@
       </p:sp>
       <p:sp>
         <p:nvSpPr>
-          <p:cNvPr id="18" name="TextBox 17"/>
+          <p:cNvPr id="23" name="TextBox 22"/>
           <p:cNvSpPr txBox="1"/>
           <p:nvPr/>
         </p:nvSpPr>
         <p:spPr>
           <a:xfrm>
-            <a:off x="711200" y="5473700"/>
-            <a:ext cx="10769600" cy="596900"/>
+            <a:off x="609600" y="5651500"/>
+            <a:ext cx="10972800" cy="508000"/>
           </a:xfrm>
           <a:prstGeom prst="rect">
             <a:avLst/>
@@ -6544,7 +7122,7 @@
               </a:spcAft>
               <a:defRPr sz="1800" b="0">
                 <a:solidFill>
-                  <a:srgbClr val="626773"/>
+                  <a:srgbClr val="B7BFCC"/>
                 </a:solidFill>
                 <a:latin typeface="Arial"/>
               </a:defRPr>
@@ -6557,20 +7135,20 @@
       </p:sp>
       <p:sp>
         <p:nvSpPr>
-          <p:cNvPr id="19" name="Rectangle 18"/>
+          <p:cNvPr id="24" name="Rectangle 23"/>
           <p:cNvSpPr/>
           <p:nvPr/>
         </p:nvSpPr>
         <p:spPr>
           <a:xfrm>
-            <a:off x="711200" y="6248400"/>
-            <a:ext cx="10769600" cy="12700"/>
+            <a:off x="609600" y="6273800"/>
+            <a:ext cx="10972800" cy="12700"/>
           </a:xfrm>
           <a:prstGeom prst="rect">
             <a:avLst/>
           </a:prstGeom>
           <a:solidFill>
-            <a:srgbClr val="DFE2E7"/>
+            <a:srgbClr val="3D4552"/>
           </a:solidFill>
           <a:ln>
             <a:noFill/>
@@ -6600,14 +7178,14 @@
       </p:sp>
       <p:sp>
         <p:nvSpPr>
-          <p:cNvPr id="20" name="TextBox 19"/>
+          <p:cNvPr id="25" name="TextBox 24"/>
           <p:cNvSpPr txBox="1"/>
           <p:nvPr/>
         </p:nvSpPr>
         <p:spPr>
           <a:xfrm>
-            <a:off x="711200" y="6438900"/>
-            <a:ext cx="9652000" cy="203200"/>
+            <a:off x="609600" y="6464300"/>
+            <a:ext cx="9906000" cy="203200"/>
           </a:xfrm>
           <a:prstGeom prst="rect">
             <a:avLst/>
@@ -6629,7 +7207,7 @@
               </a:spcAft>
               <a:defRPr sz="1100" b="0">
                 <a:solidFill>
-                  <a:srgbClr val="626773"/>
+                  <a:srgbClr val="B7BFCC"/>
                 </a:solidFill>
                 <a:latin typeface="Arial"/>
               </a:defRPr>
@@ -6642,14 +7220,14 @@
       </p:sp>
       <p:sp>
         <p:nvSpPr>
-          <p:cNvPr id="21" name="TextBox 20"/>
+          <p:cNvPr id="26" name="TextBox 25"/>
           <p:cNvSpPr txBox="1"/>
           <p:nvPr/>
         </p:nvSpPr>
         <p:spPr>
           <a:xfrm>
-            <a:off x="10807700" y="6413500"/>
-            <a:ext cx="673100" cy="215900"/>
+            <a:off x="10972800" y="6438900"/>
+            <a:ext cx="609600" cy="215900"/>
           </a:xfrm>
           <a:prstGeom prst="rect">
             <a:avLst/>
@@ -6671,7 +7249,7 @@
               </a:spcAft>
               <a:defRPr sz="1200" b="0">
                 <a:solidFill>
-                  <a:srgbClr val="626773"/>
+                  <a:srgbClr val="B7BFCC"/>
                 </a:solidFill>
                 <a:latin typeface="Arial"/>
               </a:defRPr>
@@ -6715,7 +7293,7 @@
             <a:avLst/>
           </a:prstGeom>
           <a:solidFill>
-            <a:srgbClr val="FFFFFF"/>
+            <a:srgbClr val="101217"/>
           </a:solidFill>
           <a:ln>
             <a:noFill/>
@@ -6745,14 +7323,57 @@
       </p:sp>
       <p:sp>
         <p:nvSpPr>
-          <p:cNvPr id="3" name="TextBox 2"/>
+          <p:cNvPr id="3" name="Rectangle 2"/>
+          <p:cNvSpPr/>
+          <p:nvPr/>
+        </p:nvSpPr>
+        <p:spPr>
+          <a:xfrm>
+            <a:off x="0" y="0"/>
+            <a:ext cx="101600" cy="6858000"/>
+          </a:xfrm>
+          <a:prstGeom prst="rect">
+            <a:avLst/>
+          </a:prstGeom>
+          <a:solidFill>
+            <a:srgbClr val="FF885D"/>
+          </a:solidFill>
+          <a:ln>
+            <a:noFill/>
+          </a:ln>
+        </p:spPr>
+        <p:style>
+          <a:lnRef idx="1">
+            <a:schemeClr val="accent1"/>
+          </a:lnRef>
+          <a:fillRef idx="3">
+            <a:schemeClr val="accent1"/>
+          </a:fillRef>
+          <a:effectRef idx="2">
+            <a:schemeClr val="accent1"/>
+          </a:effectRef>
+          <a:fontRef idx="minor">
+            <a:schemeClr val="lt1"/>
+          </a:fontRef>
+        </p:style>
+        <p:txBody>
+          <a:bodyPr rtlCol="0" anchor="ctr"/>
+          <a:lstStyle/>
+          <a:p>
+            <a:pPr algn="ctr"/>
+          </a:p>
+        </p:txBody>
+      </p:sp>
+      <p:sp>
+        <p:nvSpPr>
+          <p:cNvPr id="4" name="TextBox 3"/>
           <p:cNvSpPr txBox="1"/>
           <p:nvPr/>
         </p:nvSpPr>
         <p:spPr>
           <a:xfrm>
-            <a:off x="711200" y="457200"/>
-            <a:ext cx="10769600" cy="228600"/>
+            <a:off x="609600" y="444500"/>
+            <a:ext cx="10972800" cy="279400"/>
           </a:xfrm>
           <a:prstGeom prst="rect">
             <a:avLst/>
@@ -6774,7 +7395,7 @@
               </a:spcAft>
               <a:defRPr sz="1300" b="1">
                 <a:solidFill>
-                  <a:srgbClr val="626773"/>
+                  <a:srgbClr val="B7BFCC"/>
                 </a:solidFill>
                 <a:latin typeface="Arial"/>
               </a:defRPr>
@@ -6787,20 +7408,20 @@
       </p:sp>
       <p:sp>
         <p:nvSpPr>
-          <p:cNvPr id="4" name="Rectangle 3"/>
+          <p:cNvPr id="5" name="Rectangle 4"/>
           <p:cNvSpPr/>
           <p:nvPr/>
         </p:nvSpPr>
         <p:spPr>
           <a:xfrm>
-            <a:off x="711200" y="876300"/>
-            <a:ext cx="622300" cy="50800"/>
+            <a:off x="609600" y="876300"/>
+            <a:ext cx="685800" cy="50800"/>
           </a:xfrm>
           <a:prstGeom prst="rect">
             <a:avLst/>
           </a:prstGeom>
           <a:solidFill>
-            <a:srgbClr val="E55024"/>
+            <a:srgbClr val="FF885D"/>
           </a:solidFill>
           <a:ln>
             <a:noFill/>
@@ -6830,14 +7451,14 @@
       </p:sp>
       <p:sp>
         <p:nvSpPr>
-          <p:cNvPr id="5" name="TextBox 4"/>
+          <p:cNvPr id="6" name="TextBox 5"/>
           <p:cNvSpPr txBox="1"/>
           <p:nvPr/>
         </p:nvSpPr>
         <p:spPr>
           <a:xfrm>
-            <a:off x="685800" y="1257300"/>
-            <a:ext cx="10795000" cy="1168400"/>
+            <a:off x="584200" y="1206500"/>
+            <a:ext cx="10998200" cy="1130300"/>
           </a:xfrm>
           <a:prstGeom prst="rect">
             <a:avLst/>
@@ -6859,7 +7480,7 @@
               </a:spcAft>
               <a:defRPr sz="3600" b="1">
                 <a:solidFill>
-                  <a:srgbClr val="191B20"/>
+                  <a:srgbClr val="F5F6FA"/>
                 </a:solidFill>
                 <a:latin typeface="Arial"/>
               </a:defRPr>
@@ -6872,20 +7493,20 @@
       </p:sp>
       <p:sp>
         <p:nvSpPr>
-          <p:cNvPr id="6" name="Rectangle 5"/>
+          <p:cNvPr id="7" name="Rectangle 6"/>
           <p:cNvSpPr/>
           <p:nvPr/>
         </p:nvSpPr>
         <p:spPr>
           <a:xfrm>
-            <a:off x="723900" y="2273300"/>
+            <a:off x="711200" y="2336800"/>
             <a:ext cx="101600" cy="101600"/>
           </a:xfrm>
           <a:prstGeom prst="rect">
             <a:avLst/>
           </a:prstGeom>
           <a:solidFill>
-            <a:srgbClr val="E55024"/>
+            <a:srgbClr val="FF885D"/>
           </a:solidFill>
           <a:ln>
             <a:noFill/>
@@ -6915,13 +7536,13 @@
       </p:sp>
       <p:sp>
         <p:nvSpPr>
-          <p:cNvPr id="7" name="TextBox 6"/>
+          <p:cNvPr id="8" name="TextBox 7"/>
           <p:cNvSpPr txBox="1"/>
           <p:nvPr/>
         </p:nvSpPr>
         <p:spPr>
           <a:xfrm>
-            <a:off x="1066800" y="2146300"/>
+            <a:off x="1066800" y="2209800"/>
             <a:ext cx="10160000" cy="419100"/>
           </a:xfrm>
           <a:prstGeom prst="rect">
@@ -6944,7 +7565,7 @@
               </a:spcAft>
               <a:defRPr sz="2800" b="0">
                 <a:solidFill>
-                  <a:srgbClr val="191B20"/>
+                  <a:srgbClr val="F5F6FA"/>
                 </a:solidFill>
                 <a:latin typeface="Arial"/>
               </a:defRPr>
@@ -6957,20 +7578,20 @@
       </p:sp>
       <p:sp>
         <p:nvSpPr>
-          <p:cNvPr id="8" name="Rectangle 7"/>
+          <p:cNvPr id="9" name="Rectangle 8"/>
           <p:cNvSpPr/>
           <p:nvPr/>
         </p:nvSpPr>
         <p:spPr>
           <a:xfrm>
-            <a:off x="723900" y="2971800"/>
+            <a:off x="711200" y="3009900"/>
             <a:ext cx="101600" cy="101600"/>
           </a:xfrm>
           <a:prstGeom prst="rect">
             <a:avLst/>
           </a:prstGeom>
           <a:solidFill>
-            <a:srgbClr val="E55024"/>
+            <a:srgbClr val="FF885D"/>
           </a:solidFill>
           <a:ln>
             <a:noFill/>
@@ -7000,13 +7621,13 @@
       </p:sp>
       <p:sp>
         <p:nvSpPr>
-          <p:cNvPr id="9" name="TextBox 8"/>
+          <p:cNvPr id="10" name="TextBox 9"/>
           <p:cNvSpPr txBox="1"/>
           <p:nvPr/>
         </p:nvSpPr>
         <p:spPr>
           <a:xfrm>
-            <a:off x="1066800" y="2844800"/>
+            <a:off x="1066800" y="2882900"/>
             <a:ext cx="10160000" cy="419100"/>
           </a:xfrm>
           <a:prstGeom prst="rect">
@@ -7029,7 +7650,7 @@
               </a:spcAft>
               <a:defRPr sz="2800" b="0">
                 <a:solidFill>
-                  <a:srgbClr val="191B20"/>
+                  <a:srgbClr val="F5F6FA"/>
                 </a:solidFill>
                 <a:latin typeface="Arial"/>
               </a:defRPr>
@@ -7042,20 +7663,20 @@
       </p:sp>
       <p:sp>
         <p:nvSpPr>
-          <p:cNvPr id="10" name="Rectangle 9"/>
+          <p:cNvPr id="11" name="Rectangle 10"/>
           <p:cNvSpPr/>
           <p:nvPr/>
         </p:nvSpPr>
         <p:spPr>
           <a:xfrm>
-            <a:off x="723900" y="3670300"/>
+            <a:off x="711200" y="3683000"/>
             <a:ext cx="101600" cy="101600"/>
           </a:xfrm>
           <a:prstGeom prst="rect">
             <a:avLst/>
           </a:prstGeom>
           <a:solidFill>
-            <a:srgbClr val="E55024"/>
+            <a:srgbClr val="FF885D"/>
           </a:solidFill>
           <a:ln>
             <a:noFill/>
@@ -7085,13 +7706,13 @@
       </p:sp>
       <p:sp>
         <p:nvSpPr>
-          <p:cNvPr id="11" name="TextBox 10"/>
+          <p:cNvPr id="12" name="TextBox 11"/>
           <p:cNvSpPr txBox="1"/>
           <p:nvPr/>
         </p:nvSpPr>
         <p:spPr>
           <a:xfrm>
-            <a:off x="1066800" y="3543300"/>
+            <a:off x="1066800" y="3556000"/>
             <a:ext cx="10160000" cy="419100"/>
           </a:xfrm>
           <a:prstGeom prst="rect">
@@ -7114,7 +7735,7 @@
               </a:spcAft>
               <a:defRPr sz="2800" b="0">
                 <a:solidFill>
-                  <a:srgbClr val="191B20"/>
+                  <a:srgbClr val="F5F6FA"/>
                 </a:solidFill>
                 <a:latin typeface="Arial"/>
               </a:defRPr>
@@ -7127,20 +7748,20 @@
       </p:sp>
       <p:sp>
         <p:nvSpPr>
-          <p:cNvPr id="12" name="Rectangle 11"/>
+          <p:cNvPr id="13" name="Rectangle 12"/>
           <p:cNvSpPr/>
           <p:nvPr/>
         </p:nvSpPr>
         <p:spPr>
           <a:xfrm>
-            <a:off x="723900" y="4368800"/>
+            <a:off x="711200" y="4356100"/>
             <a:ext cx="101600" cy="101600"/>
           </a:xfrm>
           <a:prstGeom prst="rect">
             <a:avLst/>
           </a:prstGeom>
           <a:solidFill>
-            <a:srgbClr val="E55024"/>
+            <a:srgbClr val="FF885D"/>
           </a:solidFill>
           <a:ln>
             <a:noFill/>
@@ -7170,13 +7791,13 @@
       </p:sp>
       <p:sp>
         <p:nvSpPr>
-          <p:cNvPr id="13" name="TextBox 12"/>
+          <p:cNvPr id="14" name="TextBox 13"/>
           <p:cNvSpPr txBox="1"/>
           <p:nvPr/>
         </p:nvSpPr>
         <p:spPr>
           <a:xfrm>
-            <a:off x="1066800" y="4241800"/>
+            <a:off x="1066800" y="4229100"/>
             <a:ext cx="10160000" cy="419100"/>
           </a:xfrm>
           <a:prstGeom prst="rect">
@@ -7199,7 +7820,7 @@
               </a:spcAft>
               <a:defRPr sz="2800" b="0">
                 <a:solidFill>
-                  <a:srgbClr val="191B20"/>
+                  <a:srgbClr val="F5F6FA"/>
                 </a:solidFill>
                 <a:latin typeface="Arial"/>
               </a:defRPr>
@@ -7212,20 +7833,20 @@
       </p:sp>
       <p:sp>
         <p:nvSpPr>
-          <p:cNvPr id="14" name="Rectangle 13"/>
+          <p:cNvPr id="15" name="Rectangle 14"/>
           <p:cNvSpPr/>
           <p:nvPr/>
         </p:nvSpPr>
         <p:spPr>
           <a:xfrm>
-            <a:off x="711200" y="6248400"/>
-            <a:ext cx="10769600" cy="12700"/>
+            <a:off x="609600" y="6273800"/>
+            <a:ext cx="10972800" cy="12700"/>
           </a:xfrm>
           <a:prstGeom prst="rect">
             <a:avLst/>
           </a:prstGeom>
           <a:solidFill>
-            <a:srgbClr val="DFE2E7"/>
+            <a:srgbClr val="3D4552"/>
           </a:solidFill>
           <a:ln>
             <a:noFill/>
@@ -7255,14 +7876,14 @@
       </p:sp>
       <p:sp>
         <p:nvSpPr>
-          <p:cNvPr id="15" name="TextBox 14"/>
+          <p:cNvPr id="16" name="TextBox 15"/>
           <p:cNvSpPr txBox="1"/>
           <p:nvPr/>
         </p:nvSpPr>
         <p:spPr>
           <a:xfrm>
-            <a:off x="711200" y="6438900"/>
-            <a:ext cx="9652000" cy="203200"/>
+            <a:off x="609600" y="6464300"/>
+            <a:ext cx="9906000" cy="203200"/>
           </a:xfrm>
           <a:prstGeom prst="rect">
             <a:avLst/>
@@ -7284,7 +7905,7 @@
               </a:spcAft>
               <a:defRPr sz="1100" b="0">
                 <a:solidFill>
-                  <a:srgbClr val="626773"/>
+                  <a:srgbClr val="B7BFCC"/>
                 </a:solidFill>
                 <a:latin typeface="Arial"/>
               </a:defRPr>
@@ -7297,14 +7918,14 @@
       </p:sp>
       <p:sp>
         <p:nvSpPr>
-          <p:cNvPr id="16" name="TextBox 15"/>
+          <p:cNvPr id="17" name="TextBox 16"/>
           <p:cNvSpPr txBox="1"/>
           <p:nvPr/>
         </p:nvSpPr>
         <p:spPr>
           <a:xfrm>
-            <a:off x="10807700" y="6413500"/>
-            <a:ext cx="673100" cy="215900"/>
+            <a:off x="10972800" y="6438900"/>
+            <a:ext cx="609600" cy="215900"/>
           </a:xfrm>
           <a:prstGeom prst="rect">
             <a:avLst/>
@@ -7326,7 +7947,7 @@
               </a:spcAft>
               <a:defRPr sz="1200" b="0">
                 <a:solidFill>
-                  <a:srgbClr val="626773"/>
+                  <a:srgbClr val="B7BFCC"/>
                 </a:solidFill>
                 <a:latin typeface="Arial"/>
               </a:defRPr>
@@ -7370,7 +7991,7 @@
             <a:avLst/>
           </a:prstGeom>
           <a:solidFill>
-            <a:srgbClr val="FFFFFF"/>
+            <a:srgbClr val="101217"/>
           </a:solidFill>
           <a:ln>
             <a:noFill/>
@@ -7400,14 +8021,57 @@
       </p:sp>
       <p:sp>
         <p:nvSpPr>
-          <p:cNvPr id="3" name="TextBox 2"/>
+          <p:cNvPr id="3" name="Rectangle 2"/>
+          <p:cNvSpPr/>
+          <p:nvPr/>
+        </p:nvSpPr>
+        <p:spPr>
+          <a:xfrm>
+            <a:off x="0" y="0"/>
+            <a:ext cx="101600" cy="6858000"/>
+          </a:xfrm>
+          <a:prstGeom prst="rect">
+            <a:avLst/>
+          </a:prstGeom>
+          <a:solidFill>
+            <a:srgbClr val="FF885D"/>
+          </a:solidFill>
+          <a:ln>
+            <a:noFill/>
+          </a:ln>
+        </p:spPr>
+        <p:style>
+          <a:lnRef idx="1">
+            <a:schemeClr val="accent1"/>
+          </a:lnRef>
+          <a:fillRef idx="3">
+            <a:schemeClr val="accent1"/>
+          </a:fillRef>
+          <a:effectRef idx="2">
+            <a:schemeClr val="accent1"/>
+          </a:effectRef>
+          <a:fontRef idx="minor">
+            <a:schemeClr val="lt1"/>
+          </a:fontRef>
+        </p:style>
+        <p:txBody>
+          <a:bodyPr rtlCol="0" anchor="ctr"/>
+          <a:lstStyle/>
+          <a:p>
+            <a:pPr algn="ctr"/>
+          </a:p>
+        </p:txBody>
+      </p:sp>
+      <p:sp>
+        <p:nvSpPr>
+          <p:cNvPr id="4" name="TextBox 3"/>
           <p:cNvSpPr txBox="1"/>
           <p:nvPr/>
         </p:nvSpPr>
         <p:spPr>
           <a:xfrm>
-            <a:off x="711200" y="457200"/>
-            <a:ext cx="10769600" cy="228600"/>
+            <a:off x="609600" y="444500"/>
+            <a:ext cx="10972800" cy="279400"/>
           </a:xfrm>
           <a:prstGeom prst="rect">
             <a:avLst/>
@@ -7429,7 +8093,7 @@
               </a:spcAft>
               <a:defRPr sz="1300" b="1">
                 <a:solidFill>
-                  <a:srgbClr val="626773"/>
+                  <a:srgbClr val="B7BFCC"/>
                 </a:solidFill>
                 <a:latin typeface="Arial"/>
               </a:defRPr>
@@ -7442,20 +8106,20 @@
       </p:sp>
       <p:sp>
         <p:nvSpPr>
-          <p:cNvPr id="4" name="Rectangle 3"/>
+          <p:cNvPr id="5" name="Rectangle 4"/>
           <p:cNvSpPr/>
           <p:nvPr/>
         </p:nvSpPr>
         <p:spPr>
           <a:xfrm>
-            <a:off x="711200" y="876300"/>
-            <a:ext cx="622300" cy="50800"/>
+            <a:off x="609600" y="876300"/>
+            <a:ext cx="685800" cy="50800"/>
           </a:xfrm>
           <a:prstGeom prst="rect">
             <a:avLst/>
           </a:prstGeom>
           <a:solidFill>
-            <a:srgbClr val="E55024"/>
+            <a:srgbClr val="FF885D"/>
           </a:solidFill>
           <a:ln>
             <a:noFill/>
@@ -7485,14 +8149,14 @@
       </p:sp>
       <p:sp>
         <p:nvSpPr>
-          <p:cNvPr id="5" name="TextBox 4"/>
+          <p:cNvPr id="6" name="TextBox 5"/>
           <p:cNvSpPr txBox="1"/>
           <p:nvPr/>
         </p:nvSpPr>
         <p:spPr>
           <a:xfrm>
-            <a:off x="685800" y="1257300"/>
-            <a:ext cx="10795000" cy="1168400"/>
+            <a:off x="584200" y="1206500"/>
+            <a:ext cx="10998200" cy="1130300"/>
           </a:xfrm>
           <a:prstGeom prst="rect">
             <a:avLst/>
@@ -7514,7 +8178,7 @@
               </a:spcAft>
               <a:defRPr sz="3600" b="1">
                 <a:solidFill>
-                  <a:srgbClr val="191B20"/>
+                  <a:srgbClr val="F5F6FA"/>
                 </a:solidFill>
                 <a:latin typeface="Arial"/>
               </a:defRPr>
@@ -7527,20 +8191,20 @@
       </p:sp>
       <p:sp>
         <p:nvSpPr>
-          <p:cNvPr id="6" name="Rectangle 5"/>
+          <p:cNvPr id="7" name="Rectangle 6"/>
           <p:cNvSpPr/>
           <p:nvPr/>
         </p:nvSpPr>
         <p:spPr>
           <a:xfrm>
-            <a:off x="723900" y="2273300"/>
+            <a:off x="711200" y="2336800"/>
             <a:ext cx="101600" cy="101600"/>
           </a:xfrm>
           <a:prstGeom prst="rect">
             <a:avLst/>
           </a:prstGeom>
           <a:solidFill>
-            <a:srgbClr val="E55024"/>
+            <a:srgbClr val="FF885D"/>
           </a:solidFill>
           <a:ln>
             <a:noFill/>
@@ -7570,13 +8234,13 @@
       </p:sp>
       <p:sp>
         <p:nvSpPr>
-          <p:cNvPr id="7" name="TextBox 6"/>
+          <p:cNvPr id="8" name="TextBox 7"/>
           <p:cNvSpPr txBox="1"/>
           <p:nvPr/>
         </p:nvSpPr>
         <p:spPr>
           <a:xfrm>
-            <a:off x="1066800" y="2146300"/>
+            <a:off x="1066800" y="2209800"/>
             <a:ext cx="10160000" cy="419100"/>
           </a:xfrm>
           <a:prstGeom prst="rect">
@@ -7599,7 +8263,7 @@
               </a:spcAft>
               <a:defRPr sz="2800" b="0">
                 <a:solidFill>
-                  <a:srgbClr val="191B20"/>
+                  <a:srgbClr val="F5F6FA"/>
                 </a:solidFill>
                 <a:latin typeface="Arial"/>
               </a:defRPr>
@@ -7612,20 +8276,20 @@
       </p:sp>
       <p:sp>
         <p:nvSpPr>
-          <p:cNvPr id="8" name="Rectangle 7"/>
+          <p:cNvPr id="9" name="Rectangle 8"/>
           <p:cNvSpPr/>
           <p:nvPr/>
         </p:nvSpPr>
         <p:spPr>
           <a:xfrm>
-            <a:off x="723900" y="2971800"/>
+            <a:off x="711200" y="3009900"/>
             <a:ext cx="101600" cy="101600"/>
           </a:xfrm>
           <a:prstGeom prst="rect">
             <a:avLst/>
           </a:prstGeom>
           <a:solidFill>
-            <a:srgbClr val="E55024"/>
+            <a:srgbClr val="FF885D"/>
           </a:solidFill>
           <a:ln>
             <a:noFill/>
@@ -7655,13 +8319,13 @@
       </p:sp>
       <p:sp>
         <p:nvSpPr>
-          <p:cNvPr id="9" name="TextBox 8"/>
+          <p:cNvPr id="10" name="TextBox 9"/>
           <p:cNvSpPr txBox="1"/>
           <p:nvPr/>
         </p:nvSpPr>
         <p:spPr>
           <a:xfrm>
-            <a:off x="1066800" y="2844800"/>
+            <a:off x="1066800" y="2882900"/>
             <a:ext cx="10160000" cy="419100"/>
           </a:xfrm>
           <a:prstGeom prst="rect">
@@ -7684,7 +8348,7 @@
               </a:spcAft>
               <a:defRPr sz="2800" b="0">
                 <a:solidFill>
-                  <a:srgbClr val="191B20"/>
+                  <a:srgbClr val="F5F6FA"/>
                 </a:solidFill>
                 <a:latin typeface="Arial"/>
               </a:defRPr>
@@ -7697,20 +8361,20 @@
       </p:sp>
       <p:sp>
         <p:nvSpPr>
-          <p:cNvPr id="10" name="Rectangle 9"/>
+          <p:cNvPr id="11" name="Rectangle 10"/>
           <p:cNvSpPr/>
           <p:nvPr/>
         </p:nvSpPr>
         <p:spPr>
           <a:xfrm>
-            <a:off x="723900" y="3670300"/>
+            <a:off x="711200" y="3683000"/>
             <a:ext cx="101600" cy="101600"/>
           </a:xfrm>
           <a:prstGeom prst="rect">
             <a:avLst/>
           </a:prstGeom>
           <a:solidFill>
-            <a:srgbClr val="E55024"/>
+            <a:srgbClr val="FF885D"/>
           </a:solidFill>
           <a:ln>
             <a:noFill/>
@@ -7740,13 +8404,13 @@
       </p:sp>
       <p:sp>
         <p:nvSpPr>
-          <p:cNvPr id="11" name="TextBox 10"/>
+          <p:cNvPr id="12" name="TextBox 11"/>
           <p:cNvSpPr txBox="1"/>
           <p:nvPr/>
         </p:nvSpPr>
         <p:spPr>
           <a:xfrm>
-            <a:off x="1066800" y="3543300"/>
+            <a:off x="1066800" y="3556000"/>
             <a:ext cx="10160000" cy="419100"/>
           </a:xfrm>
           <a:prstGeom prst="rect">
@@ -7769,7 +8433,7 @@
               </a:spcAft>
               <a:defRPr sz="2800" b="0">
                 <a:solidFill>
-                  <a:srgbClr val="191B20"/>
+                  <a:srgbClr val="F5F6FA"/>
                 </a:solidFill>
                 <a:latin typeface="Arial"/>
               </a:defRPr>
@@ -7782,20 +8446,20 @@
       </p:sp>
       <p:sp>
         <p:nvSpPr>
-          <p:cNvPr id="12" name="Rectangle 11"/>
+          <p:cNvPr id="13" name="Rectangle 12"/>
           <p:cNvSpPr/>
           <p:nvPr/>
         </p:nvSpPr>
         <p:spPr>
           <a:xfrm>
-            <a:off x="723900" y="4368800"/>
+            <a:off x="711200" y="4356100"/>
             <a:ext cx="101600" cy="101600"/>
           </a:xfrm>
           <a:prstGeom prst="rect">
             <a:avLst/>
           </a:prstGeom>
           <a:solidFill>
-            <a:srgbClr val="E55024"/>
+            <a:srgbClr val="FF885D"/>
           </a:solidFill>
           <a:ln>
             <a:noFill/>
@@ -7825,13 +8489,13 @@
       </p:sp>
       <p:sp>
         <p:nvSpPr>
-          <p:cNvPr id="13" name="TextBox 12"/>
+          <p:cNvPr id="14" name="TextBox 13"/>
           <p:cNvSpPr txBox="1"/>
           <p:nvPr/>
         </p:nvSpPr>
         <p:spPr>
           <a:xfrm>
-            <a:off x="1066800" y="4241800"/>
+            <a:off x="1066800" y="4229100"/>
             <a:ext cx="10160000" cy="419100"/>
           </a:xfrm>
           <a:prstGeom prst="rect">
@@ -7854,7 +8518,7 @@
               </a:spcAft>
               <a:defRPr sz="2800" b="0">
                 <a:solidFill>
-                  <a:srgbClr val="191B20"/>
+                  <a:srgbClr val="F5F6FA"/>
                 </a:solidFill>
                 <a:latin typeface="Arial"/>
               </a:defRPr>
@@ -7867,20 +8531,20 @@
       </p:sp>
       <p:sp>
         <p:nvSpPr>
-          <p:cNvPr id="14" name="Rectangle 13"/>
+          <p:cNvPr id="15" name="Rectangle 14"/>
           <p:cNvSpPr/>
           <p:nvPr/>
         </p:nvSpPr>
         <p:spPr>
           <a:xfrm>
-            <a:off x="711200" y="6248400"/>
-            <a:ext cx="10769600" cy="12700"/>
+            <a:off x="609600" y="6273800"/>
+            <a:ext cx="10972800" cy="12700"/>
           </a:xfrm>
           <a:prstGeom prst="rect">
             <a:avLst/>
           </a:prstGeom>
           <a:solidFill>
-            <a:srgbClr val="DFE2E7"/>
+            <a:srgbClr val="3D4552"/>
           </a:solidFill>
           <a:ln>
             <a:noFill/>
@@ -7910,14 +8574,14 @@
       </p:sp>
       <p:sp>
         <p:nvSpPr>
-          <p:cNvPr id="15" name="TextBox 14"/>
+          <p:cNvPr id="16" name="TextBox 15"/>
           <p:cNvSpPr txBox="1"/>
           <p:nvPr/>
         </p:nvSpPr>
         <p:spPr>
           <a:xfrm>
-            <a:off x="711200" y="6438900"/>
-            <a:ext cx="9652000" cy="203200"/>
+            <a:off x="609600" y="6464300"/>
+            <a:ext cx="9906000" cy="203200"/>
           </a:xfrm>
           <a:prstGeom prst="rect">
             <a:avLst/>
@@ -7939,7 +8603,7 @@
               </a:spcAft>
               <a:defRPr sz="1100" b="0">
                 <a:solidFill>
-                  <a:srgbClr val="626773"/>
+                  <a:srgbClr val="B7BFCC"/>
                 </a:solidFill>
                 <a:latin typeface="Arial"/>
               </a:defRPr>
@@ -7952,14 +8616,14 @@
       </p:sp>
       <p:sp>
         <p:nvSpPr>
-          <p:cNvPr id="16" name="TextBox 15"/>
+          <p:cNvPr id="17" name="TextBox 16"/>
           <p:cNvSpPr txBox="1"/>
           <p:nvPr/>
         </p:nvSpPr>
         <p:spPr>
           <a:xfrm>
-            <a:off x="10807700" y="6413500"/>
-            <a:ext cx="673100" cy="215900"/>
+            <a:off x="10972800" y="6438900"/>
+            <a:ext cx="609600" cy="215900"/>
           </a:xfrm>
           <a:prstGeom prst="rect">
             <a:avLst/>
@@ -7981,7 +8645,7 @@
               </a:spcAft>
               <a:defRPr sz="1200" b="0">
                 <a:solidFill>
-                  <a:srgbClr val="626773"/>
+                  <a:srgbClr val="B7BFCC"/>
                 </a:solidFill>
                 <a:latin typeface="Arial"/>
               </a:defRPr>

--- a/odevzdani/cviceni-05-review-ready/prezentace.pptx
+++ b/odevzdani/cviceni-05-review-ready/prezentace.pptx
@@ -507,7 +507,7 @@
           <a:lstStyle/>
           <a:p>
             <a:r>
-              <a:t>[30 s] Předáváme web, specifikaci a popis scénářů tak, aby jiný tým mohl samostatně provést hodnocení. Oproti návrhu už jsou dostupné všechny hlavní části, obě jazykové varianty a lokální objednávka s PDF. Podklady cvičení čtyři a pět vycházejí ze stejné současné verze: skutečné historické snapshoty nebyly poskytnuty. Netvrdíme tedy neexistující časový vývoj. Nyní ukážeme obsah balíčku, dva hlavní průchody a přesně vymezené limity.</a:t>
+              <a:t>[30 s] Předáváme web, specifikaci a popis scénářů tak, aby jiný tým mohl samostatně provést hodnocení. Oproti návrhu už jsou dostupné všechny hlavní části, obě jazykové varianty a lokální objednávka s PDF.  Nyní ukážeme obsah balíčku, dva hlavní průchody a přesně vymezené limity.</a:t>
             </a:r>
           </a:p>
         </p:txBody>
@@ -717,7 +717,7 @@
           <a:lstStyle/>
           <a:p>
             <a:r>
-              <a:t>[45 s včetně ukázky] U druhého scénáře je cílem zjistit termín známého interpreta. Hledáme DARKZY, otevřeme detail a navazující program. Porovnáme údaje se specifikací a daty. Dále zkusíme neexistující dotaz a zavření dialogu klávesou Escape. Hledání v biografiích je záměr: například dotaz David může najít i interpreta uvedeného vlastním jménem v popisu. To není chyba podobnosti jmen. Výsledky mají vysvětlit nalezený objekt a nabídnout smysluplný přechod, nikoli zobrazit pouze bezkontextový seznam.</a:t>
+              <a:t>[45 s včetně ukázky] Druhý scénář končí odpovídající vstupenkou. Známe jméno DARKZY, v hledání otevřeme interpreta a jeho vstup. Porovnáme předvolený den a Club Stage s vystoupením v XML. Zkontrolujeme kapacitu pro tento den, vložíme vstup do košíku a ověříme cenu i rozsah. Rozsah lze změnit podle dalších plánovaných koncertů. Po odstranění položky musí celková cena odpovídat tomu, co skutečně zůstalo v košíku. Na stejné principy navazuje scénář S3 s dvěma dny, kde bez obou vybraných dat nelze pokračovat.</a:t>
             </a:r>
           </a:p>
         </p:txBody>
@@ -6410,7 +6410,7 @@
               </a:defRPr>
             </a:pPr>
             <a:r>
-              <a:t>S2: hledání a detail interpreta</a:t>
+              <a:t>S2: interpret a odpovídající vstup</a:t>
             </a:r>
           </a:p>
         </p:txBody>
@@ -6706,7 +6706,7 @@
               </a:defRPr>
             </a:pPr>
             <a:r>
-              <a:t>Výsledky</a:t>
+              <a:t>Detail</a:t>
             </a:r>
           </a:p>
         </p:txBody>
@@ -6748,7 +6748,7 @@
               </a:defRPr>
             </a:pPr>
             <a:r>
-              <a:t>Otevřít interpreta</a:t>
+              <a:t>Otevřít jeho vystoupení</a:t>
             </a:r>
           </a:p>
         </p:txBody>
@@ -6875,7 +6875,7 @@
               </a:defRPr>
             </a:pPr>
             <a:r>
-              <a:t>Detail</a:t>
+              <a:t>Vstupenka</a:t>
             </a:r>
           </a:p>
         </p:txBody>
@@ -6917,7 +6917,7 @@
               </a:defRPr>
             </a:pPr>
             <a:r>
-              <a:t>Najít jeho koncert</a:t>
+              <a:t>Správný den a Club Stage</a:t>
             </a:r>
           </a:p>
         </p:txBody>
@@ -7044,7 +7044,7 @@
               </a:defRPr>
             </a:pPr>
             <a:r>
-              <a:t>Program</a:t>
+              <a:t>Košík</a:t>
             </a:r>
           </a:p>
         </p:txBody>
@@ -7086,7 +7086,7 @@
               </a:defRPr>
             </a:pPr>
             <a:r>
-              <a:t>Ověřit čas a scénu</a:t>
+              <a:t>Cena a zvolený rozsah</a:t>
             </a:r>
           </a:p>
         </p:txBody>
@@ -7128,7 +7128,7 @@
               </a:defRPr>
             </a:pPr>
             <a:r>
-              <a:t>Kontrola: správné propojení, prázdný výsledek a zavření dialogu.</a:t>
+              <a:t>Kontrola: propojená data, dostupnost a aktuální cena.</a:t>
             </a:r>
           </a:p>
         </p:txBody>
